--- a/docs/ShopPilot_Demo_Slides.pptx
+++ b/docs/ShopPilot_Demo_Slides.pptx
@@ -15,6 +15,7 @@
     <p:sldId id="263" r:id="rId14"/>
     <p:sldId id="264" r:id="rId15"/>
     <p:sldId id="265" r:id="rId16"/>
+    <p:sldId id="266" r:id="rId17"/>
   </p:sldIdLst>
   <p:sldSz cx="12191695" cy="6858000" type="screen4x3"/>
   <p:notesSz cx="6858000" cy="9144000"/>
@@ -4576,7 +4577,7 @@
                 </a:solidFill>
                 <a:latin typeface="Calibri"/>
               </a:rPr>
-              <a:t>1 / 10</a:t>
+              <a:t>1 / 11</a:t>
             </a:r>
           </a:p>
         </p:txBody>
@@ -4609,6 +4610,1193 @@
       <p:grpSpPr/>
       <p:sp>
         <p:nvSpPr>
+          <p:cNvPr id="2" name="Rectangle 1"/>
+          <p:cNvSpPr/>
+          <p:nvPr/>
+        </p:nvSpPr>
+        <p:spPr>
+          <a:xfrm>
+            <a:off x="0" y="0"/>
+            <a:ext cx="109728" cy="6858000"/>
+          </a:xfrm>
+          <a:prstGeom prst="rect">
+            <a:avLst/>
+          </a:prstGeom>
+          <a:solidFill>
+            <a:srgbClr val="00D4FF"/>
+          </a:solidFill>
+          <a:ln>
+            <a:noFill/>
+          </a:ln>
+        </p:spPr>
+        <p:style>
+          <a:lnRef idx="1">
+            <a:schemeClr val="accent1"/>
+          </a:lnRef>
+          <a:fillRef idx="3">
+            <a:schemeClr val="accent1"/>
+          </a:fillRef>
+          <a:effectRef idx="2">
+            <a:schemeClr val="accent1"/>
+          </a:effectRef>
+          <a:fontRef idx="minor">
+            <a:schemeClr val="lt1"/>
+          </a:fontRef>
+        </p:style>
+        <p:txBody>
+          <a:bodyPr rtlCol="0" anchor="ctr"/>
+          <a:lstStyle/>
+          <a:p>
+            <a:pPr algn="ctr"/>
+          </a:p>
+        </p:txBody>
+      </p:sp>
+      <p:sp>
+        <p:nvSpPr>
+          <p:cNvPr id="3" name="Rectangle 2"/>
+          <p:cNvSpPr/>
+          <p:nvPr/>
+        </p:nvSpPr>
+        <p:spPr>
+          <a:xfrm>
+            <a:off x="109728" y="0"/>
+            <a:ext cx="36576" cy="6858000"/>
+          </a:xfrm>
+          <a:prstGeom prst="rect">
+            <a:avLst/>
+          </a:prstGeom>
+          <a:solidFill>
+            <a:srgbClr val="FF2D8F"/>
+          </a:solidFill>
+          <a:ln>
+            <a:noFill/>
+          </a:ln>
+        </p:spPr>
+        <p:style>
+          <a:lnRef idx="1">
+            <a:schemeClr val="accent1"/>
+          </a:lnRef>
+          <a:fillRef idx="3">
+            <a:schemeClr val="accent1"/>
+          </a:fillRef>
+          <a:effectRef idx="2">
+            <a:schemeClr val="accent1"/>
+          </a:effectRef>
+          <a:fontRef idx="minor">
+            <a:schemeClr val="lt1"/>
+          </a:fontRef>
+        </p:style>
+        <p:txBody>
+          <a:bodyPr rtlCol="0" anchor="ctr"/>
+          <a:lstStyle/>
+          <a:p>
+            <a:pPr algn="ctr"/>
+          </a:p>
+        </p:txBody>
+      </p:sp>
+      <p:sp>
+        <p:nvSpPr>
+          <p:cNvPr id="4" name="TextBox 3"/>
+          <p:cNvSpPr txBox="1"/>
+          <p:nvPr/>
+        </p:nvSpPr>
+        <p:spPr>
+          <a:xfrm>
+            <a:off x="502920" y="256032"/>
+            <a:ext cx="3657600" cy="256032"/>
+          </a:xfrm>
+          <a:prstGeom prst="rect">
+            <a:avLst/>
+          </a:prstGeom>
+          <a:noFill/>
+        </p:spPr>
+        <p:txBody>
+          <a:bodyPr wrap="square" anchor="t"/>
+          <a:lstStyle/>
+          <a:p>
+            <a:pPr algn="l">
+              <a:spcBef>
+                <a:spcPts val="0"/>
+              </a:spcBef>
+              <a:spcAft>
+                <a:spcPts val="400"/>
+              </a:spcAft>
+            </a:pPr>
+            <a:r>
+              <a:rPr sz="1100" b="1">
+                <a:solidFill>
+                  <a:srgbClr val="FF2D8F"/>
+                </a:solidFill>
+                <a:latin typeface="Calibri"/>
+              </a:rPr>
+              <a:t>09  ·  IMPACT</a:t>
+            </a:r>
+          </a:p>
+        </p:txBody>
+      </p:sp>
+      <p:sp>
+        <p:nvSpPr>
+          <p:cNvPr id="5" name="TextBox 4"/>
+          <p:cNvSpPr txBox="1"/>
+          <p:nvPr/>
+        </p:nvSpPr>
+        <p:spPr>
+          <a:xfrm>
+            <a:off x="502920" y="438912"/>
+            <a:ext cx="11155680" cy="502920"/>
+          </a:xfrm>
+          <a:prstGeom prst="rect">
+            <a:avLst/>
+          </a:prstGeom>
+          <a:noFill/>
+        </p:spPr>
+        <p:txBody>
+          <a:bodyPr wrap="square" anchor="t"/>
+          <a:lstStyle/>
+          <a:p>
+            <a:pPr algn="l">
+              <a:spcBef>
+                <a:spcPts val="0"/>
+              </a:spcBef>
+              <a:spcAft>
+                <a:spcPts val="400"/>
+              </a:spcAft>
+            </a:pPr>
+            <a:r>
+              <a:rPr sz="3000" b="1">
+                <a:solidFill>
+                  <a:srgbClr val="F8FAFC"/>
+                </a:solidFill>
+                <a:latin typeface="Calibri"/>
+              </a:rPr>
+              <a:t>Kit metrics → merchant outcomes</a:t>
+            </a:r>
+          </a:p>
+        </p:txBody>
+      </p:sp>
+      <p:sp>
+        <p:nvSpPr>
+          <p:cNvPr id="6" name="TextBox 5"/>
+          <p:cNvSpPr txBox="1"/>
+          <p:nvPr/>
+        </p:nvSpPr>
+        <p:spPr>
+          <a:xfrm>
+            <a:off x="502920" y="960120"/>
+            <a:ext cx="11155680" cy="365760"/>
+          </a:xfrm>
+          <a:prstGeom prst="rect">
+            <a:avLst/>
+          </a:prstGeom>
+          <a:noFill/>
+        </p:spPr>
+        <p:txBody>
+          <a:bodyPr wrap="square" anchor="t"/>
+          <a:lstStyle/>
+          <a:p>
+            <a:pPr algn="l">
+              <a:spcBef>
+                <a:spcPts val="0"/>
+              </a:spcBef>
+              <a:spcAft>
+                <a:spcPts val="400"/>
+              </a:spcAft>
+            </a:pPr>
+            <a:r>
+              <a:rPr sz="1500" b="0">
+                <a:solidFill>
+                  <a:srgbClr val="8B9BB4"/>
+                </a:solidFill>
+                <a:latin typeface="Calibri"/>
+              </a:rPr>
+              <a:t>Honest framing: offline simulation ≠ live GMV A/B — same job-to-be-done as conversational commerce.</a:t>
+            </a:r>
+          </a:p>
+        </p:txBody>
+      </p:sp>
+      <p:sp>
+        <p:nvSpPr>
+          <p:cNvPr id="7" name="Rounded Rectangle 6"/>
+          <p:cNvSpPr/>
+          <p:nvPr/>
+        </p:nvSpPr>
+        <p:spPr>
+          <a:xfrm>
+            <a:off x="502920" y="1463040"/>
+            <a:ext cx="11155680" cy="914400"/>
+          </a:xfrm>
+          <a:prstGeom prst="roundRect">
+            <a:avLst>
+              <a:gd name="adj" fmla="val 10000"/>
+            </a:avLst>
+          </a:prstGeom>
+          <a:solidFill>
+            <a:srgbClr val="152033"/>
+          </a:solidFill>
+          <a:ln>
+            <a:noFill/>
+          </a:ln>
+        </p:spPr>
+        <p:style>
+          <a:lnRef idx="1">
+            <a:schemeClr val="accent1"/>
+          </a:lnRef>
+          <a:fillRef idx="3">
+            <a:schemeClr val="accent1"/>
+          </a:fillRef>
+          <a:effectRef idx="2">
+            <a:schemeClr val="accent1"/>
+          </a:effectRef>
+          <a:fontRef idx="minor">
+            <a:schemeClr val="lt1"/>
+          </a:fontRef>
+        </p:style>
+        <p:txBody>
+          <a:bodyPr rtlCol="0" anchor="ctr"/>
+          <a:lstStyle/>
+          <a:p>
+            <a:pPr algn="ctr"/>
+          </a:p>
+        </p:txBody>
+      </p:sp>
+      <p:sp>
+        <p:nvSpPr>
+          <p:cNvPr id="8" name="Rectangle 7"/>
+          <p:cNvSpPr/>
+          <p:nvPr/>
+        </p:nvSpPr>
+        <p:spPr>
+          <a:xfrm>
+            <a:off x="502920" y="1463040"/>
+            <a:ext cx="91440" cy="914400"/>
+          </a:xfrm>
+          <a:prstGeom prst="rect">
+            <a:avLst/>
+          </a:prstGeom>
+          <a:solidFill>
+            <a:srgbClr val="00D4FF"/>
+          </a:solidFill>
+          <a:ln>
+            <a:noFill/>
+          </a:ln>
+        </p:spPr>
+        <p:style>
+          <a:lnRef idx="1">
+            <a:schemeClr val="accent1"/>
+          </a:lnRef>
+          <a:fillRef idx="3">
+            <a:schemeClr val="accent1"/>
+          </a:fillRef>
+          <a:effectRef idx="2">
+            <a:schemeClr val="accent1"/>
+          </a:effectRef>
+          <a:fontRef idx="minor">
+            <a:schemeClr val="lt1"/>
+          </a:fontRef>
+        </p:style>
+        <p:txBody>
+          <a:bodyPr rtlCol="0" anchor="ctr"/>
+          <a:lstStyle/>
+          <a:p>
+            <a:pPr algn="ctr"/>
+          </a:p>
+        </p:txBody>
+      </p:sp>
+      <p:sp>
+        <p:nvSpPr>
+          <p:cNvPr id="9" name="TextBox 8"/>
+          <p:cNvSpPr txBox="1"/>
+          <p:nvPr/>
+        </p:nvSpPr>
+        <p:spPr>
+          <a:xfrm>
+            <a:off x="868680" y="1719072"/>
+            <a:ext cx="1828800" cy="365760"/>
+          </a:xfrm>
+          <a:prstGeom prst="rect">
+            <a:avLst/>
+          </a:prstGeom>
+          <a:noFill/>
+        </p:spPr>
+        <p:txBody>
+          <a:bodyPr wrap="square" anchor="t"/>
+          <a:lstStyle/>
+          <a:p>
+            <a:pPr algn="l">
+              <a:spcBef>
+                <a:spcPts val="0"/>
+              </a:spcBef>
+              <a:spcAft>
+                <a:spcPts val="400"/>
+              </a:spcAft>
+            </a:pPr>
+            <a:r>
+              <a:rPr sz="1600" b="1">
+                <a:solidFill>
+                  <a:srgbClr val="8B9BB4"/>
+                </a:solidFill>
+                <a:latin typeface="Calibri"/>
+              </a:rPr>
+              <a:t>Hit@10</a:t>
+            </a:r>
+          </a:p>
+        </p:txBody>
+      </p:sp>
+      <p:sp>
+        <p:nvSpPr>
+          <p:cNvPr id="10" name="TextBox 9"/>
+          <p:cNvSpPr txBox="1"/>
+          <p:nvPr/>
+        </p:nvSpPr>
+        <p:spPr>
+          <a:xfrm>
+            <a:off x="2926080" y="1664208"/>
+            <a:ext cx="2011680" cy="457200"/>
+          </a:xfrm>
+          <a:prstGeom prst="rect">
+            <a:avLst/>
+          </a:prstGeom>
+          <a:noFill/>
+        </p:spPr>
+        <p:txBody>
+          <a:bodyPr wrap="square" anchor="t"/>
+          <a:lstStyle/>
+          <a:p>
+            <a:pPr algn="l">
+              <a:spcBef>
+                <a:spcPts val="0"/>
+              </a:spcBef>
+              <a:spcAft>
+                <a:spcPts val="400"/>
+              </a:spcAft>
+            </a:pPr>
+            <a:r>
+              <a:rPr sz="2600" b="1">
+                <a:solidFill>
+                  <a:srgbClr val="00D4FF"/>
+                </a:solidFill>
+                <a:latin typeface="Calibri"/>
+              </a:rPr>
+              <a:t>0.975</a:t>
+            </a:r>
+          </a:p>
+        </p:txBody>
+      </p:sp>
+      <p:sp>
+        <p:nvSpPr>
+          <p:cNvPr id="11" name="TextBox 10"/>
+          <p:cNvSpPr txBox="1"/>
+          <p:nvPr/>
+        </p:nvSpPr>
+        <p:spPr>
+          <a:xfrm>
+            <a:off x="5120640" y="1737360"/>
+            <a:ext cx="6217920" cy="411480"/>
+          </a:xfrm>
+          <a:prstGeom prst="rect">
+            <a:avLst/>
+          </a:prstGeom>
+          <a:noFill/>
+        </p:spPr>
+        <p:txBody>
+          <a:bodyPr wrap="square" anchor="t"/>
+          <a:lstStyle/>
+          <a:p>
+            <a:pPr algn="l">
+              <a:spcBef>
+                <a:spcPts val="0"/>
+              </a:spcBef>
+              <a:spcAft>
+                <a:spcPts val="400"/>
+              </a:spcAft>
+            </a:pPr>
+            <a:r>
+              <a:rPr sz="1500" b="0">
+                <a:solidFill>
+                  <a:srgbClr val="F8FAFC"/>
+                </a:solidFill>
+                <a:latin typeface="Calibri"/>
+              </a:rPr>
+              <a:t>Findability — target ASIN in top 10</a:t>
+            </a:r>
+          </a:p>
+        </p:txBody>
+      </p:sp>
+      <p:sp>
+        <p:nvSpPr>
+          <p:cNvPr id="12" name="Rounded Rectangle 11"/>
+          <p:cNvSpPr/>
+          <p:nvPr/>
+        </p:nvSpPr>
+        <p:spPr>
+          <a:xfrm>
+            <a:off x="502920" y="2514600"/>
+            <a:ext cx="11155680" cy="914400"/>
+          </a:xfrm>
+          <a:prstGeom prst="roundRect">
+            <a:avLst>
+              <a:gd name="adj" fmla="val 10000"/>
+            </a:avLst>
+          </a:prstGeom>
+          <a:solidFill>
+            <a:srgbClr val="152033"/>
+          </a:solidFill>
+          <a:ln>
+            <a:noFill/>
+          </a:ln>
+        </p:spPr>
+        <p:style>
+          <a:lnRef idx="1">
+            <a:schemeClr val="accent1"/>
+          </a:lnRef>
+          <a:fillRef idx="3">
+            <a:schemeClr val="accent1"/>
+          </a:fillRef>
+          <a:effectRef idx="2">
+            <a:schemeClr val="accent1"/>
+          </a:effectRef>
+          <a:fontRef idx="minor">
+            <a:schemeClr val="lt1"/>
+          </a:fontRef>
+        </p:style>
+        <p:txBody>
+          <a:bodyPr rtlCol="0" anchor="ctr"/>
+          <a:lstStyle/>
+          <a:p>
+            <a:pPr algn="ctr"/>
+          </a:p>
+        </p:txBody>
+      </p:sp>
+      <p:sp>
+        <p:nvSpPr>
+          <p:cNvPr id="13" name="Rectangle 12"/>
+          <p:cNvSpPr/>
+          <p:nvPr/>
+        </p:nvSpPr>
+        <p:spPr>
+          <a:xfrm>
+            <a:off x="502920" y="2514600"/>
+            <a:ext cx="91440" cy="914400"/>
+          </a:xfrm>
+          <a:prstGeom prst="rect">
+            <a:avLst/>
+          </a:prstGeom>
+          <a:solidFill>
+            <a:srgbClr val="FF2D8F"/>
+          </a:solidFill>
+          <a:ln>
+            <a:noFill/>
+          </a:ln>
+        </p:spPr>
+        <p:style>
+          <a:lnRef idx="1">
+            <a:schemeClr val="accent1"/>
+          </a:lnRef>
+          <a:fillRef idx="3">
+            <a:schemeClr val="accent1"/>
+          </a:fillRef>
+          <a:effectRef idx="2">
+            <a:schemeClr val="accent1"/>
+          </a:effectRef>
+          <a:fontRef idx="minor">
+            <a:schemeClr val="lt1"/>
+          </a:fontRef>
+        </p:style>
+        <p:txBody>
+          <a:bodyPr rtlCol="0" anchor="ctr"/>
+          <a:lstStyle/>
+          <a:p>
+            <a:pPr algn="ctr"/>
+          </a:p>
+        </p:txBody>
+      </p:sp>
+      <p:sp>
+        <p:nvSpPr>
+          <p:cNvPr id="14" name="TextBox 13"/>
+          <p:cNvSpPr txBox="1"/>
+          <p:nvPr/>
+        </p:nvSpPr>
+        <p:spPr>
+          <a:xfrm>
+            <a:off x="868680" y="2770632"/>
+            <a:ext cx="1828800" cy="365760"/>
+          </a:xfrm>
+          <a:prstGeom prst="rect">
+            <a:avLst/>
+          </a:prstGeom>
+          <a:noFill/>
+        </p:spPr>
+        <p:txBody>
+          <a:bodyPr wrap="square" anchor="t"/>
+          <a:lstStyle/>
+          <a:p>
+            <a:pPr algn="l">
+              <a:spcBef>
+                <a:spcPts val="0"/>
+              </a:spcBef>
+              <a:spcAft>
+                <a:spcPts val="400"/>
+              </a:spcAft>
+            </a:pPr>
+            <a:r>
+              <a:rPr sz="1600" b="1">
+                <a:solidFill>
+                  <a:srgbClr val="8B9BB4"/>
+                </a:solidFill>
+                <a:latin typeface="Calibri"/>
+              </a:rPr>
+              <a:t>MRR</a:t>
+            </a:r>
+          </a:p>
+        </p:txBody>
+      </p:sp>
+      <p:sp>
+        <p:nvSpPr>
+          <p:cNvPr id="15" name="TextBox 14"/>
+          <p:cNvSpPr txBox="1"/>
+          <p:nvPr/>
+        </p:nvSpPr>
+        <p:spPr>
+          <a:xfrm>
+            <a:off x="2926080" y="2715768"/>
+            <a:ext cx="2011680" cy="457200"/>
+          </a:xfrm>
+          <a:prstGeom prst="rect">
+            <a:avLst/>
+          </a:prstGeom>
+          <a:noFill/>
+        </p:spPr>
+        <p:txBody>
+          <a:bodyPr wrap="square" anchor="t"/>
+          <a:lstStyle/>
+          <a:p>
+            <a:pPr algn="l">
+              <a:spcBef>
+                <a:spcPts val="0"/>
+              </a:spcBef>
+              <a:spcAft>
+                <a:spcPts val="400"/>
+              </a:spcAft>
+            </a:pPr>
+            <a:r>
+              <a:rPr sz="2600" b="1">
+                <a:solidFill>
+                  <a:srgbClr val="FF2D8F"/>
+                </a:solidFill>
+                <a:latin typeface="Calibri"/>
+              </a:rPr>
+              <a:t>0.858</a:t>
+            </a:r>
+          </a:p>
+        </p:txBody>
+      </p:sp>
+      <p:sp>
+        <p:nvSpPr>
+          <p:cNvPr id="16" name="TextBox 15"/>
+          <p:cNvSpPr txBox="1"/>
+          <p:nvPr/>
+        </p:nvSpPr>
+        <p:spPr>
+          <a:xfrm>
+            <a:off x="5120640" y="2788920"/>
+            <a:ext cx="6217920" cy="411480"/>
+          </a:xfrm>
+          <a:prstGeom prst="rect">
+            <a:avLst/>
+          </a:prstGeom>
+          <a:noFill/>
+        </p:spPr>
+        <p:txBody>
+          <a:bodyPr wrap="square" anchor="t"/>
+          <a:lstStyle/>
+          <a:p>
+            <a:pPr algn="l">
+              <a:spcBef>
+                <a:spcPts val="0"/>
+              </a:spcBef>
+              <a:spcAft>
+                <a:spcPts val="400"/>
+              </a:spcAft>
+            </a:pPr>
+            <a:r>
+              <a:rPr sz="1500" b="0">
+                <a:solidFill>
+                  <a:srgbClr val="F8FAFC"/>
+                </a:solidFill>
+                <a:latin typeface="Calibri"/>
+              </a:rPr>
+              <a:t>Rank quality — earlier positions win</a:t>
+            </a:r>
+          </a:p>
+        </p:txBody>
+      </p:sp>
+      <p:sp>
+        <p:nvSpPr>
+          <p:cNvPr id="17" name="Rounded Rectangle 16"/>
+          <p:cNvSpPr/>
+          <p:nvPr/>
+        </p:nvSpPr>
+        <p:spPr>
+          <a:xfrm>
+            <a:off x="502920" y="3566160"/>
+            <a:ext cx="11155680" cy="914400"/>
+          </a:xfrm>
+          <a:prstGeom prst="roundRect">
+            <a:avLst>
+              <a:gd name="adj" fmla="val 10000"/>
+            </a:avLst>
+          </a:prstGeom>
+          <a:solidFill>
+            <a:srgbClr val="152033"/>
+          </a:solidFill>
+          <a:ln>
+            <a:noFill/>
+          </a:ln>
+        </p:spPr>
+        <p:style>
+          <a:lnRef idx="1">
+            <a:schemeClr val="accent1"/>
+          </a:lnRef>
+          <a:fillRef idx="3">
+            <a:schemeClr val="accent1"/>
+          </a:fillRef>
+          <a:effectRef idx="2">
+            <a:schemeClr val="accent1"/>
+          </a:effectRef>
+          <a:fontRef idx="minor">
+            <a:schemeClr val="lt1"/>
+          </a:fontRef>
+        </p:style>
+        <p:txBody>
+          <a:bodyPr rtlCol="0" anchor="ctr"/>
+          <a:lstStyle/>
+          <a:p>
+            <a:pPr algn="ctr"/>
+          </a:p>
+        </p:txBody>
+      </p:sp>
+      <p:sp>
+        <p:nvSpPr>
+          <p:cNvPr id="18" name="Rectangle 17"/>
+          <p:cNvSpPr/>
+          <p:nvPr/>
+        </p:nvSpPr>
+        <p:spPr>
+          <a:xfrm>
+            <a:off x="502920" y="3566160"/>
+            <a:ext cx="91440" cy="914400"/>
+          </a:xfrm>
+          <a:prstGeom prst="rect">
+            <a:avLst/>
+          </a:prstGeom>
+          <a:solidFill>
+            <a:srgbClr val="A855F7"/>
+          </a:solidFill>
+          <a:ln>
+            <a:noFill/>
+          </a:ln>
+        </p:spPr>
+        <p:style>
+          <a:lnRef idx="1">
+            <a:schemeClr val="accent1"/>
+          </a:lnRef>
+          <a:fillRef idx="3">
+            <a:schemeClr val="accent1"/>
+          </a:fillRef>
+          <a:effectRef idx="2">
+            <a:schemeClr val="accent1"/>
+          </a:effectRef>
+          <a:fontRef idx="minor">
+            <a:schemeClr val="lt1"/>
+          </a:fontRef>
+        </p:style>
+        <p:txBody>
+          <a:bodyPr rtlCol="0" anchor="ctr"/>
+          <a:lstStyle/>
+          <a:p>
+            <a:pPr algn="ctr"/>
+          </a:p>
+        </p:txBody>
+      </p:sp>
+      <p:sp>
+        <p:nvSpPr>
+          <p:cNvPr id="19" name="TextBox 18"/>
+          <p:cNvSpPr txBox="1"/>
+          <p:nvPr/>
+        </p:nvSpPr>
+        <p:spPr>
+          <a:xfrm>
+            <a:off x="868680" y="3822192"/>
+            <a:ext cx="1828800" cy="365760"/>
+          </a:xfrm>
+          <a:prstGeom prst="rect">
+            <a:avLst/>
+          </a:prstGeom>
+          <a:noFill/>
+        </p:spPr>
+        <p:txBody>
+          <a:bodyPr wrap="square" anchor="t"/>
+          <a:lstStyle/>
+          <a:p>
+            <a:pPr algn="l">
+              <a:spcBef>
+                <a:spcPts val="0"/>
+              </a:spcBef>
+              <a:spcAft>
+                <a:spcPts val="400"/>
+              </a:spcAft>
+            </a:pPr>
+            <a:r>
+              <a:rPr sz="1600" b="1">
+                <a:solidFill>
+                  <a:srgbClr val="8B9BB4"/>
+                </a:solidFill>
+                <a:latin typeface="Calibri"/>
+              </a:rPr>
+              <a:t>MTTC</a:t>
+            </a:r>
+          </a:p>
+        </p:txBody>
+      </p:sp>
+      <p:sp>
+        <p:nvSpPr>
+          <p:cNvPr id="20" name="TextBox 19"/>
+          <p:cNvSpPr txBox="1"/>
+          <p:nvPr/>
+        </p:nvSpPr>
+        <p:spPr>
+          <a:xfrm>
+            <a:off x="2926080" y="3767328"/>
+            <a:ext cx="2011680" cy="457200"/>
+          </a:xfrm>
+          <a:prstGeom prst="rect">
+            <a:avLst/>
+          </a:prstGeom>
+          <a:noFill/>
+        </p:spPr>
+        <p:txBody>
+          <a:bodyPr wrap="square" anchor="t"/>
+          <a:lstStyle/>
+          <a:p>
+            <a:pPr algn="l">
+              <a:spcBef>
+                <a:spcPts val="0"/>
+              </a:spcBef>
+              <a:spcAft>
+                <a:spcPts val="400"/>
+              </a:spcAft>
+            </a:pPr>
+            <a:r>
+              <a:rPr sz="2600" b="1">
+                <a:solidFill>
+                  <a:srgbClr val="A855F7"/>
+                </a:solidFill>
+                <a:latin typeface="Calibri"/>
+              </a:rPr>
+              <a:t>2.88</a:t>
+            </a:r>
+          </a:p>
+        </p:txBody>
+      </p:sp>
+      <p:sp>
+        <p:nvSpPr>
+          <p:cNvPr id="21" name="TextBox 20"/>
+          <p:cNvSpPr txBox="1"/>
+          <p:nvPr/>
+        </p:nvSpPr>
+        <p:spPr>
+          <a:xfrm>
+            <a:off x="5120640" y="3840480"/>
+            <a:ext cx="6217920" cy="411480"/>
+          </a:xfrm>
+          <a:prstGeom prst="rect">
+            <a:avLst/>
+          </a:prstGeom>
+          <a:noFill/>
+        </p:spPr>
+        <p:txBody>
+          <a:bodyPr wrap="square" anchor="t"/>
+          <a:lstStyle/>
+          <a:p>
+            <a:pPr algn="l">
+              <a:spcBef>
+                <a:spcPts val="0"/>
+              </a:spcBef>
+              <a:spcAft>
+                <a:spcPts val="400"/>
+              </a:spcAft>
+            </a:pPr>
+            <a:r>
+              <a:rPr sz="1500" b="0">
+                <a:solidFill>
+                  <a:srgbClr val="F8FAFC"/>
+                </a:solidFill>
+                <a:latin typeface="Calibri"/>
+              </a:rPr>
+              <a:t>Cost / cognitive load — fewer refine loops</a:t>
+            </a:r>
+          </a:p>
+        </p:txBody>
+      </p:sp>
+      <p:sp>
+        <p:nvSpPr>
+          <p:cNvPr id="22" name="Rounded Rectangle 21"/>
+          <p:cNvSpPr/>
+          <p:nvPr/>
+        </p:nvSpPr>
+        <p:spPr>
+          <a:xfrm>
+            <a:off x="502920" y="4617720"/>
+            <a:ext cx="11155680" cy="914400"/>
+          </a:xfrm>
+          <a:prstGeom prst="roundRect">
+            <a:avLst>
+              <a:gd name="adj" fmla="val 10000"/>
+            </a:avLst>
+          </a:prstGeom>
+          <a:solidFill>
+            <a:srgbClr val="152033"/>
+          </a:solidFill>
+          <a:ln>
+            <a:noFill/>
+          </a:ln>
+        </p:spPr>
+        <p:style>
+          <a:lnRef idx="1">
+            <a:schemeClr val="accent1"/>
+          </a:lnRef>
+          <a:fillRef idx="3">
+            <a:schemeClr val="accent1"/>
+          </a:fillRef>
+          <a:effectRef idx="2">
+            <a:schemeClr val="accent1"/>
+          </a:effectRef>
+          <a:fontRef idx="minor">
+            <a:schemeClr val="lt1"/>
+          </a:fontRef>
+        </p:style>
+        <p:txBody>
+          <a:bodyPr rtlCol="0" anchor="ctr"/>
+          <a:lstStyle/>
+          <a:p>
+            <a:pPr algn="ctr"/>
+          </a:p>
+        </p:txBody>
+      </p:sp>
+      <p:sp>
+        <p:nvSpPr>
+          <p:cNvPr id="23" name="Rectangle 22"/>
+          <p:cNvSpPr/>
+          <p:nvPr/>
+        </p:nvSpPr>
+        <p:spPr>
+          <a:xfrm>
+            <a:off x="502920" y="4617720"/>
+            <a:ext cx="91440" cy="914400"/>
+          </a:xfrm>
+          <a:prstGeom prst="rect">
+            <a:avLst/>
+          </a:prstGeom>
+          <a:solidFill>
+            <a:srgbClr val="FBBF24"/>
+          </a:solidFill>
+          <a:ln>
+            <a:noFill/>
+          </a:ln>
+        </p:spPr>
+        <p:style>
+          <a:lnRef idx="1">
+            <a:schemeClr val="accent1"/>
+          </a:lnRef>
+          <a:fillRef idx="3">
+            <a:schemeClr val="accent1"/>
+          </a:fillRef>
+          <a:effectRef idx="2">
+            <a:schemeClr val="accent1"/>
+          </a:effectRef>
+          <a:fontRef idx="minor">
+            <a:schemeClr val="lt1"/>
+          </a:fontRef>
+        </p:style>
+        <p:txBody>
+          <a:bodyPr rtlCol="0" anchor="ctr"/>
+          <a:lstStyle/>
+          <a:p>
+            <a:pPr algn="ctr"/>
+          </a:p>
+        </p:txBody>
+      </p:sp>
+      <p:sp>
+        <p:nvSpPr>
+          <p:cNvPr id="24" name="TextBox 23"/>
+          <p:cNvSpPr txBox="1"/>
+          <p:nvPr/>
+        </p:nvSpPr>
+        <p:spPr>
+          <a:xfrm>
+            <a:off x="868680" y="4873752"/>
+            <a:ext cx="1828800" cy="365760"/>
+          </a:xfrm>
+          <a:prstGeom prst="rect">
+            <a:avLst/>
+          </a:prstGeom>
+          <a:noFill/>
+        </p:spPr>
+        <p:txBody>
+          <a:bodyPr wrap="square" anchor="t"/>
+          <a:lstStyle/>
+          <a:p>
+            <a:pPr algn="l">
+              <a:spcBef>
+                <a:spcPts val="0"/>
+              </a:spcBef>
+              <a:spcAft>
+                <a:spcPts val="400"/>
+              </a:spcAft>
+            </a:pPr>
+            <a:r>
+              <a:rPr sz="1600" b="1">
+                <a:solidFill>
+                  <a:srgbClr val="8B9BB4"/>
+                </a:solidFill>
+                <a:latin typeface="Calibri"/>
+              </a:rPr>
+              <a:t>Tokens</a:t>
+            </a:r>
+          </a:p>
+        </p:txBody>
+      </p:sp>
+      <p:sp>
+        <p:nvSpPr>
+          <p:cNvPr id="25" name="TextBox 24"/>
+          <p:cNvSpPr txBox="1"/>
+          <p:nvPr/>
+        </p:nvSpPr>
+        <p:spPr>
+          <a:xfrm>
+            <a:off x="2926080" y="4818888"/>
+            <a:ext cx="2011680" cy="457200"/>
+          </a:xfrm>
+          <a:prstGeom prst="rect">
+            <a:avLst/>
+          </a:prstGeom>
+          <a:noFill/>
+        </p:spPr>
+        <p:txBody>
+          <a:bodyPr wrap="square" anchor="t"/>
+          <a:lstStyle/>
+          <a:p>
+            <a:pPr algn="l">
+              <a:spcBef>
+                <a:spcPts val="0"/>
+              </a:spcBef>
+              <a:spcAft>
+                <a:spcPts val="400"/>
+              </a:spcAft>
+            </a:pPr>
+            <a:r>
+              <a:rPr sz="2600" b="1">
+                <a:solidFill>
+                  <a:srgbClr val="FBBF24"/>
+                </a:solidFill>
+                <a:latin typeface="Calibri"/>
+              </a:rPr>
+              <a:t>0</a:t>
+            </a:r>
+          </a:p>
+        </p:txBody>
+      </p:sp>
+      <p:sp>
+        <p:nvSpPr>
+          <p:cNvPr id="26" name="TextBox 25"/>
+          <p:cNvSpPr txBox="1"/>
+          <p:nvPr/>
+        </p:nvSpPr>
+        <p:spPr>
+          <a:xfrm>
+            <a:off x="5120640" y="4892040"/>
+            <a:ext cx="6217920" cy="411480"/>
+          </a:xfrm>
+          <a:prstGeom prst="rect">
+            <a:avLst/>
+          </a:prstGeom>
+          <a:noFill/>
+        </p:spPr>
+        <p:txBody>
+          <a:bodyPr wrap="square" anchor="t"/>
+          <a:lstStyle/>
+          <a:p>
+            <a:pPr algn="l">
+              <a:spcBef>
+                <a:spcPts val="0"/>
+              </a:spcBef>
+              <a:spcAft>
+                <a:spcPts val="400"/>
+              </a:spcAft>
+            </a:pPr>
+            <a:r>
+              <a:rPr sz="1500" b="0">
+                <a:solidFill>
+                  <a:srgbClr val="F8FAFC"/>
+                </a:solidFill>
+                <a:latin typeface="Calibri"/>
+              </a:rPr>
+              <a:t>Offline default — no paid LLM on score path</a:t>
+            </a:r>
+          </a:p>
+        </p:txBody>
+      </p:sp>
+      <p:sp>
+        <p:nvSpPr>
+          <p:cNvPr id="27" name="Rectangle 26"/>
+          <p:cNvSpPr/>
+          <p:nvPr/>
+        </p:nvSpPr>
+        <p:spPr>
+          <a:xfrm>
+            <a:off x="0" y="6601968"/>
+            <a:ext cx="12191695" cy="36576"/>
+          </a:xfrm>
+          <a:prstGeom prst="rect">
+            <a:avLst/>
+          </a:prstGeom>
+          <a:solidFill>
+            <a:srgbClr val="2A3A55"/>
+          </a:solidFill>
+          <a:ln>
+            <a:noFill/>
+          </a:ln>
+        </p:spPr>
+        <p:style>
+          <a:lnRef idx="1">
+            <a:schemeClr val="accent1"/>
+          </a:lnRef>
+          <a:fillRef idx="3">
+            <a:schemeClr val="accent1"/>
+          </a:fillRef>
+          <a:effectRef idx="2">
+            <a:schemeClr val="accent1"/>
+          </a:effectRef>
+          <a:fontRef idx="minor">
+            <a:schemeClr val="lt1"/>
+          </a:fontRef>
+        </p:style>
+        <p:txBody>
+          <a:bodyPr rtlCol="0" anchor="ctr"/>
+          <a:lstStyle/>
+          <a:p>
+            <a:pPr algn="ctr"/>
+          </a:p>
+        </p:txBody>
+      </p:sp>
+      <p:sp>
+        <p:nvSpPr>
+          <p:cNvPr id="28" name="TextBox 27"/>
+          <p:cNvSpPr txBox="1"/>
+          <p:nvPr/>
+        </p:nvSpPr>
+        <p:spPr>
+          <a:xfrm>
+            <a:off x="502920" y="6656832"/>
+            <a:ext cx="9601200" cy="256032"/>
+          </a:xfrm>
+          <a:prstGeom prst="rect">
+            <a:avLst/>
+          </a:prstGeom>
+          <a:noFill/>
+        </p:spPr>
+        <p:txBody>
+          <a:bodyPr wrap="square" anchor="t"/>
+          <a:lstStyle/>
+          <a:p>
+            <a:pPr algn="l">
+              <a:spcBef>
+                <a:spcPts val="0"/>
+              </a:spcBef>
+              <a:spcAft>
+                <a:spcPts val="400"/>
+              </a:spcAft>
+            </a:pPr>
+            <a:r>
+              <a:rPr sz="1100" b="0">
+                <a:solidFill>
+                  <a:srgbClr val="64748B"/>
+                </a:solidFill>
+                <a:latin typeface="Calibri"/>
+              </a:rPr>
+              <a:t>ShopPilot · TechJam 2026 Track 4</a:t>
+            </a:r>
+          </a:p>
+        </p:txBody>
+      </p:sp>
+      <p:sp>
+        <p:nvSpPr>
+          <p:cNvPr id="29" name="TextBox 28"/>
+          <p:cNvSpPr txBox="1"/>
+          <p:nvPr/>
+        </p:nvSpPr>
+        <p:spPr>
+          <a:xfrm>
+            <a:off x="10424160" y="6656832"/>
+            <a:ext cx="1371600" cy="256032"/>
+          </a:xfrm>
+          <a:prstGeom prst="rect">
+            <a:avLst/>
+          </a:prstGeom>
+          <a:noFill/>
+        </p:spPr>
+        <p:txBody>
+          <a:bodyPr wrap="square" anchor="t"/>
+          <a:lstStyle/>
+          <a:p>
+            <a:pPr algn="r">
+              <a:spcBef>
+                <a:spcPts val="0"/>
+              </a:spcBef>
+              <a:spcAft>
+                <a:spcPts val="400"/>
+              </a:spcAft>
+            </a:pPr>
+            <a:r>
+              <a:rPr sz="1100" b="0">
+                <a:solidFill>
+                  <a:srgbClr val="64748B"/>
+                </a:solidFill>
+                <a:latin typeface="Calibri"/>
+              </a:rPr>
+              <a:t>10 / 11</a:t>
+            </a:r>
+          </a:p>
+        </p:txBody>
+      </p:sp>
+    </p:spTree>
+  </p:cSld>
+  <p:clrMapOvr>
+    <a:masterClrMapping/>
+  </p:clrMapOvr>
+</p:sld>
+</file>
+
+<file path=ppt/slides/slide11.xml><?xml version="1.0" encoding="utf-8"?>
+<p:sld xmlns:a="http://schemas.openxmlformats.org/drawingml/2006/main" xmlns:p="http://schemas.openxmlformats.org/presentationml/2006/main" xmlns:r="http://schemas.openxmlformats.org/officeDocument/2006/relationships">
+  <p:cSld>
+    <p:bg>
+      <p:bgPr>
+        <a:solidFill>
+          <a:srgbClr val="0A121F"/>
+        </a:solidFill>
+        <a:effectLst/>
+      </p:bgPr>
+    </p:bg>
+    <p:spTree>
+      <p:nvGrpSpPr>
+        <p:cNvPr id="1" name=""/>
+        <p:cNvGrpSpPr/>
+        <p:nvPr/>
+      </p:nvGrpSpPr>
+      <p:grpSpPr/>
+      <p:sp>
+        <p:nvSpPr>
           <p:cNvPr id="2" name="Rounded Rectangle 1"/>
           <p:cNvSpPr/>
           <p:nvPr/>
@@ -5342,7 +6530,7 @@
                 </a:solidFill>
                 <a:latin typeface="Calibri"/>
               </a:rPr>
-              <a:t>10 / 10</a:t>
+              <a:t>11 / 11</a:t>
             </a:r>
           </a:p>
         </p:txBody>
@@ -6633,7 +7821,7 @@
                 </a:solidFill>
                 <a:latin typeface="Calibri"/>
               </a:rPr>
-              <a:t>2 / 10</a:t>
+              <a:t>2 / 11</a:t>
             </a:r>
           </a:p>
         </p:txBody>
@@ -8065,7 +9253,7 @@
                 </a:solidFill>
                 <a:latin typeface="Calibri"/>
               </a:rPr>
-              <a:t>3 / 10</a:t>
+              <a:t>3 / 11</a:t>
             </a:r>
           </a:p>
         </p:txBody>
@@ -10387,7 +11575,7 @@
                 </a:solidFill>
                 <a:latin typeface="Calibri"/>
               </a:rPr>
-              <a:t>4 / 10</a:t>
+              <a:t>4 / 11</a:t>
             </a:r>
           </a:p>
         </p:txBody>
@@ -10539,7 +11727,7 @@
                 </a:solidFill>
                 <a:latin typeface="Calibri"/>
               </a:rPr>
-              <a:t>04  ·  ARCHITECTURE DETAIL</a:t>
+              <a:t>04  ·  ARCHITECTURE IN THE LITERATURE</a:t>
             </a:r>
           </a:p>
         </p:txBody>
@@ -10579,14 +11767,54 @@
                 </a:solidFill>
                 <a:latin typeface="Calibri"/>
               </a:rPr>
-              <a:t>End-to-end system diagram</a:t>
+              <a:t>Classical CRS stack → ShopPilot modules</a:t>
+            </a:r>
+          </a:p>
+        </p:txBody>
+      </p:sp>
+      <p:sp>
+        <p:nvSpPr>
+          <p:cNvPr id="6" name="TextBox 5"/>
+          <p:cNvSpPr txBox="1"/>
+          <p:nvPr/>
+        </p:nvSpPr>
+        <p:spPr>
+          <a:xfrm>
+            <a:off x="502920" y="749808"/>
+            <a:ext cx="10972800" cy="274320"/>
+          </a:xfrm>
+          <a:prstGeom prst="rect">
+            <a:avLst/>
+          </a:prstGeom>
+          <a:noFill/>
+        </p:spPr>
+        <p:txBody>
+          <a:bodyPr wrap="square" anchor="t"/>
+          <a:lstStyle/>
+          <a:p>
+            <a:pPr algn="l">
+              <a:spcBef>
+                <a:spcPts val="0"/>
+              </a:spcBef>
+              <a:spcAft>
+                <a:spcPts val="400"/>
+              </a:spcAft>
+            </a:pPr>
+            <a:r>
+              <a:rPr sz="1200" b="0">
+                <a:solidFill>
+                  <a:srgbClr val="8B9BB4"/>
+                </a:solidFill>
+                <a:latin typeface="Calibri"/>
+              </a:rPr>
+              <a:t>Redrawn concepts — not paper screenshots  ·  Qulac · Bayesian CRS · DST · corpus CQs · hybrid IR</a:t>
             </a:r>
           </a:p>
         </p:txBody>
       </p:sp>
       <p:pic>
         <p:nvPicPr>
-          <p:cNvPr id="6" name="Picture 5" descr="architecture_diagram.png"/>
+          <p:cNvPr id="7" name="Picture 6" descr="architecture_literature.png"/>
           <p:cNvPicPr>
             <a:picLocks noChangeAspect="1"/>
           </p:cNvPicPr>
@@ -10600,8 +11828,8 @@
         </p:blipFill>
         <p:spPr>
           <a:xfrm>
-            <a:off x="201168" y="868680"/>
-            <a:ext cx="11795760" cy="5623560"/>
+            <a:off x="201168" y="1051560"/>
+            <a:ext cx="11795760" cy="5349240"/>
           </a:xfrm>
           <a:prstGeom prst="rect">
             <a:avLst/>
@@ -10610,7 +11838,7 @@
       </p:pic>
       <p:sp>
         <p:nvSpPr>
-          <p:cNvPr id="7" name="Rectangle 6"/>
+          <p:cNvPr id="8" name="Rectangle 7"/>
           <p:cNvSpPr/>
           <p:nvPr/>
         </p:nvSpPr>
@@ -10653,7 +11881,7 @@
       </p:sp>
       <p:sp>
         <p:nvSpPr>
-          <p:cNvPr id="8" name="TextBox 7"/>
+          <p:cNvPr id="9" name="TextBox 8"/>
           <p:cNvSpPr txBox="1"/>
           <p:nvPr/>
         </p:nvSpPr>
@@ -10693,7 +11921,7 @@
       </p:sp>
       <p:sp>
         <p:nvSpPr>
-          <p:cNvPr id="9" name="TextBox 8"/>
+          <p:cNvPr id="10" name="TextBox 9"/>
           <p:cNvSpPr txBox="1"/>
           <p:nvPr/>
         </p:nvSpPr>
@@ -10726,7 +11954,7 @@
                 </a:solidFill>
                 <a:latin typeface="Calibri"/>
               </a:rPr>
-              <a:t>5 / 10</a:t>
+              <a:t>5 / 11</a:t>
             </a:r>
           </a:p>
         </p:txBody>
@@ -10878,7 +12106,7 @@
                 </a:solidFill>
                 <a:latin typeface="Calibri"/>
               </a:rPr>
-              <a:t>05  ·  RESULTS</a:t>
+              <a:t>05  ·  ARCHITECTURE DETAIL</a:t>
             </a:r>
           </a:p>
         </p:txBody>
@@ -10892,7 +12120,7 @@
         <p:spPr>
           <a:xfrm>
             <a:off x="502920" y="438912"/>
-            <a:ext cx="11155680" cy="502920"/>
+            <a:ext cx="10972800" cy="320040"/>
           </a:xfrm>
           <a:prstGeom prst="rect">
             <a:avLst/>
@@ -10912,1313 +12140,44 @@
               </a:spcAft>
             </a:pPr>
             <a:r>
-              <a:rPr sz="3000" b="1">
+              <a:rPr sz="2200" b="1">
                 <a:solidFill>
                   <a:srgbClr val="F8FAFC"/>
                 </a:solidFill>
                 <a:latin typeface="Calibri"/>
               </a:rPr>
-              <a:t>Public 200 — weak BM25 vs ShopPilot</a:t>
-            </a:r>
-          </a:p>
-        </p:txBody>
-      </p:sp>
-      <p:sp>
-        <p:nvSpPr>
-          <p:cNvPr id="6" name="TextBox 5"/>
-          <p:cNvSpPr txBox="1"/>
-          <p:nvPr/>
-        </p:nvSpPr>
-        <p:spPr>
-          <a:xfrm>
-            <a:off x="502920" y="960120"/>
-            <a:ext cx="11155680" cy="365760"/>
-          </a:xfrm>
-          <a:prstGeom prst="rect">
-            <a:avLst/>
-          </a:prstGeom>
-          <a:noFill/>
-        </p:spPr>
-        <p:txBody>
-          <a:bodyPr wrap="square" anchor="t"/>
-          <a:lstStyle/>
-          <a:p>
-            <a:pPr algn="l">
-              <a:spcBef>
-                <a:spcPts val="0"/>
-              </a:spcBef>
-              <a:spcAft>
-                <a:spcPts val="400"/>
-              </a:spcAft>
-            </a:pPr>
-            <a:r>
-              <a:rPr sz="1500" b="0">
-                <a:solidFill>
-                  <a:srgbClr val="8B9BB4"/>
-                </a:solidFill>
-                <a:latin typeface="Calibri"/>
-              </a:rPr>
-              <a:t>Official local_evaluator · SHOPPILOT_DENSE=hash · deterministic seeds</a:t>
-            </a:r>
-          </a:p>
-        </p:txBody>
-      </p:sp>
-      <p:sp>
-        <p:nvSpPr>
-          <p:cNvPr id="7" name="Rounded Rectangle 6"/>
-          <p:cNvSpPr/>
-          <p:nvPr/>
-        </p:nvSpPr>
-        <p:spPr>
-          <a:xfrm>
-            <a:off x="502920" y="1417320"/>
-            <a:ext cx="2743200" cy="1554480"/>
-          </a:xfrm>
-          <a:prstGeom prst="roundRect">
-            <a:avLst>
-              <a:gd name="adj" fmla="val 12000"/>
-            </a:avLst>
-          </a:prstGeom>
-          <a:solidFill>
-            <a:srgbClr val="152033"/>
-          </a:solidFill>
-          <a:ln>
-            <a:noFill/>
-          </a:ln>
-        </p:spPr>
-        <p:style>
-          <a:lnRef idx="1">
-            <a:schemeClr val="accent1"/>
-          </a:lnRef>
-          <a:fillRef idx="3">
-            <a:schemeClr val="accent1"/>
-          </a:fillRef>
-          <a:effectRef idx="2">
-            <a:schemeClr val="accent1"/>
-          </a:effectRef>
-          <a:fontRef idx="minor">
-            <a:schemeClr val="lt1"/>
-          </a:fontRef>
-        </p:style>
-        <p:txBody>
-          <a:bodyPr rtlCol="0" anchor="ctr"/>
-          <a:lstStyle/>
-          <a:p>
-            <a:pPr algn="ctr"/>
-          </a:p>
-        </p:txBody>
-      </p:sp>
-      <p:sp>
-        <p:nvSpPr>
-          <p:cNvPr id="8" name="Rectangle 7"/>
-          <p:cNvSpPr/>
-          <p:nvPr/>
-        </p:nvSpPr>
-        <p:spPr>
-          <a:xfrm>
-            <a:off x="502920" y="1417320"/>
-            <a:ext cx="2743200" cy="54864"/>
-          </a:xfrm>
-          <a:prstGeom prst="rect">
-            <a:avLst/>
-          </a:prstGeom>
-          <a:solidFill>
-            <a:srgbClr val="00D4FF"/>
-          </a:solidFill>
-          <a:ln>
-            <a:noFill/>
-          </a:ln>
-        </p:spPr>
-        <p:style>
-          <a:lnRef idx="1">
-            <a:schemeClr val="accent1"/>
-          </a:lnRef>
-          <a:fillRef idx="3">
-            <a:schemeClr val="accent1"/>
-          </a:fillRef>
-          <a:effectRef idx="2">
-            <a:schemeClr val="accent1"/>
-          </a:effectRef>
-          <a:fontRef idx="minor">
-            <a:schemeClr val="lt1"/>
-          </a:fontRef>
-        </p:style>
-        <p:txBody>
-          <a:bodyPr rtlCol="0" anchor="ctr"/>
-          <a:lstStyle/>
-          <a:p>
-            <a:pPr algn="ctr"/>
-          </a:p>
-        </p:txBody>
-      </p:sp>
-      <p:sp>
-        <p:nvSpPr>
-          <p:cNvPr id="9" name="TextBox 8"/>
-          <p:cNvSpPr txBox="1"/>
-          <p:nvPr/>
-        </p:nvSpPr>
-        <p:spPr>
-          <a:xfrm>
-            <a:off x="704088" y="1618488"/>
-            <a:ext cx="2377440" cy="274320"/>
-          </a:xfrm>
-          <a:prstGeom prst="rect">
-            <a:avLst/>
-          </a:prstGeom>
-          <a:noFill/>
-        </p:spPr>
-        <p:txBody>
-          <a:bodyPr wrap="square" anchor="t"/>
-          <a:lstStyle/>
-          <a:p>
-            <a:pPr algn="l">
-              <a:spcBef>
-                <a:spcPts val="0"/>
-              </a:spcBef>
-              <a:spcAft>
-                <a:spcPts val="400"/>
-              </a:spcAft>
-            </a:pPr>
-            <a:r>
-              <a:rPr sz="1200" b="0">
-                <a:solidFill>
-                  <a:srgbClr val="8B9BB4"/>
-                </a:solidFill>
-                <a:latin typeface="Calibri"/>
-              </a:rPr>
-              <a:t>TechnicalScore</a:t>
-            </a:r>
-          </a:p>
-        </p:txBody>
-      </p:sp>
-      <p:sp>
-        <p:nvSpPr>
-          <p:cNvPr id="10" name="TextBox 9"/>
-          <p:cNvSpPr txBox="1"/>
-          <p:nvPr/>
-        </p:nvSpPr>
-        <p:spPr>
-          <a:xfrm>
-            <a:off x="704088" y="1920240"/>
-            <a:ext cx="2377440" cy="502920"/>
-          </a:xfrm>
-          <a:prstGeom prst="rect">
-            <a:avLst/>
-          </a:prstGeom>
-          <a:noFill/>
-        </p:spPr>
-        <p:txBody>
-          <a:bodyPr wrap="square" anchor="t"/>
-          <a:lstStyle/>
-          <a:p>
-            <a:pPr algn="l">
-              <a:spcBef>
-                <a:spcPts val="0"/>
-              </a:spcBef>
-              <a:spcAft>
-                <a:spcPts val="400"/>
-              </a:spcAft>
-            </a:pPr>
-            <a:r>
-              <a:rPr sz="2800" b="1">
-                <a:solidFill>
-                  <a:srgbClr val="F8FAFC"/>
-                </a:solidFill>
-                <a:latin typeface="Calibri"/>
-              </a:rPr>
-              <a:t>0.907</a:t>
-            </a:r>
-          </a:p>
-        </p:txBody>
-      </p:sp>
-      <p:sp>
-        <p:nvSpPr>
-          <p:cNvPr id="11" name="TextBox 10"/>
-          <p:cNvSpPr txBox="1"/>
-          <p:nvPr/>
-        </p:nvSpPr>
-        <p:spPr>
-          <a:xfrm>
-            <a:off x="704088" y="2514600"/>
-            <a:ext cx="2377440" cy="320040"/>
-          </a:xfrm>
-          <a:prstGeom prst="rect">
-            <a:avLst/>
-          </a:prstGeom>
-          <a:noFill/>
-        </p:spPr>
-        <p:txBody>
-          <a:bodyPr wrap="square" anchor="t"/>
-          <a:lstStyle/>
-          <a:p>
-            <a:pPr algn="l">
-              <a:spcBef>
-                <a:spcPts val="0"/>
-              </a:spcBef>
-              <a:spcAft>
-                <a:spcPts val="400"/>
-              </a:spcAft>
-            </a:pPr>
-            <a:r>
-              <a:rPr sz="1200" b="0">
-                <a:solidFill>
-                  <a:srgbClr val="00D4FF"/>
-                </a:solidFill>
-                <a:latin typeface="Calibri"/>
-              </a:rPr>
-              <a:t>from 0.107  ·  ~8.5×</a:t>
-            </a:r>
-          </a:p>
-        </p:txBody>
-      </p:sp>
-      <p:sp>
-        <p:nvSpPr>
-          <p:cNvPr id="12" name="Rounded Rectangle 11"/>
-          <p:cNvSpPr/>
-          <p:nvPr/>
-        </p:nvSpPr>
-        <p:spPr>
-          <a:xfrm>
-            <a:off x="3383280" y="1417320"/>
-            <a:ext cx="2743200" cy="1554480"/>
-          </a:xfrm>
-          <a:prstGeom prst="roundRect">
-            <a:avLst>
-              <a:gd name="adj" fmla="val 12000"/>
-            </a:avLst>
-          </a:prstGeom>
-          <a:solidFill>
-            <a:srgbClr val="152033"/>
-          </a:solidFill>
-          <a:ln>
-            <a:noFill/>
-          </a:ln>
-        </p:spPr>
-        <p:style>
-          <a:lnRef idx="1">
-            <a:schemeClr val="accent1"/>
-          </a:lnRef>
-          <a:fillRef idx="3">
-            <a:schemeClr val="accent1"/>
-          </a:fillRef>
-          <a:effectRef idx="2">
-            <a:schemeClr val="accent1"/>
-          </a:effectRef>
-          <a:fontRef idx="minor">
-            <a:schemeClr val="lt1"/>
-          </a:fontRef>
-        </p:style>
-        <p:txBody>
-          <a:bodyPr rtlCol="0" anchor="ctr"/>
-          <a:lstStyle/>
-          <a:p>
-            <a:pPr algn="ctr"/>
-          </a:p>
-        </p:txBody>
-      </p:sp>
-      <p:sp>
-        <p:nvSpPr>
-          <p:cNvPr id="13" name="Rectangle 12"/>
-          <p:cNvSpPr/>
-          <p:nvPr/>
-        </p:nvSpPr>
-        <p:spPr>
-          <a:xfrm>
-            <a:off x="3383280" y="1417320"/>
-            <a:ext cx="2743200" cy="54864"/>
-          </a:xfrm>
-          <a:prstGeom prst="rect">
-            <a:avLst/>
-          </a:prstGeom>
-          <a:solidFill>
-            <a:srgbClr val="FF2D8F"/>
-          </a:solidFill>
-          <a:ln>
-            <a:noFill/>
-          </a:ln>
-        </p:spPr>
-        <p:style>
-          <a:lnRef idx="1">
-            <a:schemeClr val="accent1"/>
-          </a:lnRef>
-          <a:fillRef idx="3">
-            <a:schemeClr val="accent1"/>
-          </a:fillRef>
-          <a:effectRef idx="2">
-            <a:schemeClr val="accent1"/>
-          </a:effectRef>
-          <a:fontRef idx="minor">
-            <a:schemeClr val="lt1"/>
-          </a:fontRef>
-        </p:style>
-        <p:txBody>
-          <a:bodyPr rtlCol="0" anchor="ctr"/>
-          <a:lstStyle/>
-          <a:p>
-            <a:pPr algn="ctr"/>
-          </a:p>
-        </p:txBody>
-      </p:sp>
-      <p:sp>
-        <p:nvSpPr>
-          <p:cNvPr id="14" name="TextBox 13"/>
-          <p:cNvSpPr txBox="1"/>
-          <p:nvPr/>
-        </p:nvSpPr>
-        <p:spPr>
-          <a:xfrm>
-            <a:off x="3584448" y="1618488"/>
-            <a:ext cx="2377440" cy="274320"/>
-          </a:xfrm>
-          <a:prstGeom prst="rect">
-            <a:avLst/>
-          </a:prstGeom>
-          <a:noFill/>
-        </p:spPr>
-        <p:txBody>
-          <a:bodyPr wrap="square" anchor="t"/>
-          <a:lstStyle/>
-          <a:p>
-            <a:pPr algn="l">
-              <a:spcBef>
-                <a:spcPts val="0"/>
-              </a:spcBef>
-              <a:spcAft>
-                <a:spcPts val="400"/>
-              </a:spcAft>
-            </a:pPr>
-            <a:r>
-              <a:rPr sz="1200" b="0">
-                <a:solidFill>
-                  <a:srgbClr val="8B9BB4"/>
-                </a:solidFill>
-                <a:latin typeface="Calibri"/>
-              </a:rPr>
-              <a:t>Hit@10</a:t>
-            </a:r>
-          </a:p>
-        </p:txBody>
-      </p:sp>
-      <p:sp>
-        <p:nvSpPr>
-          <p:cNvPr id="15" name="TextBox 14"/>
-          <p:cNvSpPr txBox="1"/>
-          <p:nvPr/>
-        </p:nvSpPr>
-        <p:spPr>
-          <a:xfrm>
-            <a:off x="3584448" y="1920240"/>
-            <a:ext cx="2377440" cy="502920"/>
-          </a:xfrm>
-          <a:prstGeom prst="rect">
-            <a:avLst/>
-          </a:prstGeom>
-          <a:noFill/>
-        </p:spPr>
-        <p:txBody>
-          <a:bodyPr wrap="square" anchor="t"/>
-          <a:lstStyle/>
-          <a:p>
-            <a:pPr algn="l">
-              <a:spcBef>
-                <a:spcPts val="0"/>
-              </a:spcBef>
-              <a:spcAft>
-                <a:spcPts val="400"/>
-              </a:spcAft>
-            </a:pPr>
-            <a:r>
-              <a:rPr sz="2800" b="1">
-                <a:solidFill>
-                  <a:srgbClr val="F8FAFC"/>
-                </a:solidFill>
-                <a:latin typeface="Calibri"/>
-              </a:rPr>
-              <a:t>0.975</a:t>
-            </a:r>
-          </a:p>
-        </p:txBody>
-      </p:sp>
-      <p:sp>
-        <p:nvSpPr>
-          <p:cNvPr id="16" name="TextBox 15"/>
-          <p:cNvSpPr txBox="1"/>
-          <p:nvPr/>
-        </p:nvSpPr>
-        <p:spPr>
-          <a:xfrm>
-            <a:off x="3584448" y="2514600"/>
-            <a:ext cx="2377440" cy="320040"/>
-          </a:xfrm>
-          <a:prstGeom prst="rect">
-            <a:avLst/>
-          </a:prstGeom>
-          <a:noFill/>
-        </p:spPr>
-        <p:txBody>
-          <a:bodyPr wrap="square" anchor="t"/>
-          <a:lstStyle/>
-          <a:p>
-            <a:pPr algn="l">
-              <a:spcBef>
-                <a:spcPts val="0"/>
-              </a:spcBef>
-              <a:spcAft>
-                <a:spcPts val="400"/>
-              </a:spcAft>
-            </a:pPr>
-            <a:r>
-              <a:rPr sz="1200" b="0">
-                <a:solidFill>
-                  <a:srgbClr val="FF2D8F"/>
-                </a:solidFill>
-                <a:latin typeface="Calibri"/>
-              </a:rPr>
-              <a:t>from 0.125</a:t>
-            </a:r>
-          </a:p>
-        </p:txBody>
-      </p:sp>
-      <p:sp>
-        <p:nvSpPr>
-          <p:cNvPr id="17" name="Rounded Rectangle 16"/>
-          <p:cNvSpPr/>
-          <p:nvPr/>
-        </p:nvSpPr>
-        <p:spPr>
-          <a:xfrm>
-            <a:off x="6263640" y="1417320"/>
-            <a:ext cx="2743200" cy="1554480"/>
-          </a:xfrm>
-          <a:prstGeom prst="roundRect">
-            <a:avLst>
-              <a:gd name="adj" fmla="val 12000"/>
-            </a:avLst>
-          </a:prstGeom>
-          <a:solidFill>
-            <a:srgbClr val="152033"/>
-          </a:solidFill>
-          <a:ln>
-            <a:noFill/>
-          </a:ln>
-        </p:spPr>
-        <p:style>
-          <a:lnRef idx="1">
-            <a:schemeClr val="accent1"/>
-          </a:lnRef>
-          <a:fillRef idx="3">
-            <a:schemeClr val="accent1"/>
-          </a:fillRef>
-          <a:effectRef idx="2">
-            <a:schemeClr val="accent1"/>
-          </a:effectRef>
-          <a:fontRef idx="minor">
-            <a:schemeClr val="lt1"/>
-          </a:fontRef>
-        </p:style>
-        <p:txBody>
-          <a:bodyPr rtlCol="0" anchor="ctr"/>
-          <a:lstStyle/>
-          <a:p>
-            <a:pPr algn="ctr"/>
-          </a:p>
-        </p:txBody>
-      </p:sp>
-      <p:sp>
-        <p:nvSpPr>
-          <p:cNvPr id="18" name="Rectangle 17"/>
-          <p:cNvSpPr/>
-          <p:nvPr/>
-        </p:nvSpPr>
-        <p:spPr>
-          <a:xfrm>
-            <a:off x="6263640" y="1417320"/>
-            <a:ext cx="2743200" cy="54864"/>
-          </a:xfrm>
-          <a:prstGeom prst="rect">
-            <a:avLst/>
-          </a:prstGeom>
-          <a:solidFill>
-            <a:srgbClr val="A855F7"/>
-          </a:solidFill>
-          <a:ln>
-            <a:noFill/>
-          </a:ln>
-        </p:spPr>
-        <p:style>
-          <a:lnRef idx="1">
-            <a:schemeClr val="accent1"/>
-          </a:lnRef>
-          <a:fillRef idx="3">
-            <a:schemeClr val="accent1"/>
-          </a:fillRef>
-          <a:effectRef idx="2">
-            <a:schemeClr val="accent1"/>
-          </a:effectRef>
-          <a:fontRef idx="minor">
-            <a:schemeClr val="lt1"/>
-          </a:fontRef>
-        </p:style>
-        <p:txBody>
-          <a:bodyPr rtlCol="0" anchor="ctr"/>
-          <a:lstStyle/>
-          <a:p>
-            <a:pPr algn="ctr"/>
-          </a:p>
-        </p:txBody>
-      </p:sp>
-      <p:sp>
-        <p:nvSpPr>
-          <p:cNvPr id="19" name="TextBox 18"/>
-          <p:cNvSpPr txBox="1"/>
-          <p:nvPr/>
-        </p:nvSpPr>
-        <p:spPr>
-          <a:xfrm>
-            <a:off x="6464808" y="1618488"/>
-            <a:ext cx="2377440" cy="274320"/>
-          </a:xfrm>
-          <a:prstGeom prst="rect">
-            <a:avLst/>
-          </a:prstGeom>
-          <a:noFill/>
-        </p:spPr>
-        <p:txBody>
-          <a:bodyPr wrap="square" anchor="t"/>
-          <a:lstStyle/>
-          <a:p>
-            <a:pPr algn="l">
-              <a:spcBef>
-                <a:spcPts val="0"/>
-              </a:spcBef>
-              <a:spcAft>
-                <a:spcPts val="400"/>
-              </a:spcAft>
-            </a:pPr>
-            <a:r>
-              <a:rPr sz="1200" b="0">
-                <a:solidFill>
-                  <a:srgbClr val="8B9BB4"/>
-                </a:solidFill>
-                <a:latin typeface="Calibri"/>
-              </a:rPr>
-              <a:t>MRR</a:t>
-            </a:r>
-          </a:p>
-        </p:txBody>
-      </p:sp>
-      <p:sp>
-        <p:nvSpPr>
-          <p:cNvPr id="20" name="TextBox 19"/>
-          <p:cNvSpPr txBox="1"/>
-          <p:nvPr/>
-        </p:nvSpPr>
-        <p:spPr>
-          <a:xfrm>
-            <a:off x="6464808" y="1920240"/>
-            <a:ext cx="2377440" cy="502920"/>
-          </a:xfrm>
-          <a:prstGeom prst="rect">
-            <a:avLst/>
-          </a:prstGeom>
-          <a:noFill/>
-        </p:spPr>
-        <p:txBody>
-          <a:bodyPr wrap="square" anchor="t"/>
-          <a:lstStyle/>
-          <a:p>
-            <a:pPr algn="l">
-              <a:spcBef>
-                <a:spcPts val="0"/>
-              </a:spcBef>
-              <a:spcAft>
-                <a:spcPts val="400"/>
-              </a:spcAft>
-            </a:pPr>
-            <a:r>
-              <a:rPr sz="2800" b="1">
-                <a:solidFill>
-                  <a:srgbClr val="F8FAFC"/>
-                </a:solidFill>
-                <a:latin typeface="Calibri"/>
-              </a:rPr>
-              <a:t>0.858</a:t>
-            </a:r>
-          </a:p>
-        </p:txBody>
-      </p:sp>
-      <p:sp>
-        <p:nvSpPr>
-          <p:cNvPr id="21" name="TextBox 20"/>
-          <p:cNvSpPr txBox="1"/>
-          <p:nvPr/>
-        </p:nvSpPr>
-        <p:spPr>
-          <a:xfrm>
-            <a:off x="6464808" y="2514600"/>
-            <a:ext cx="2377440" cy="320040"/>
-          </a:xfrm>
-          <a:prstGeom prst="rect">
-            <a:avLst/>
-          </a:prstGeom>
-          <a:noFill/>
-        </p:spPr>
-        <p:txBody>
-          <a:bodyPr wrap="square" anchor="t"/>
-          <a:lstStyle/>
-          <a:p>
-            <a:pPr algn="l">
-              <a:spcBef>
-                <a:spcPts val="0"/>
-              </a:spcBef>
-              <a:spcAft>
-                <a:spcPts val="400"/>
-              </a:spcAft>
-            </a:pPr>
-            <a:r>
-              <a:rPr sz="1200" b="0">
-                <a:solidFill>
-                  <a:srgbClr val="A855F7"/>
-                </a:solidFill>
-                <a:latin typeface="Calibri"/>
-              </a:rPr>
-              <a:t>from 0.068</a:t>
-            </a:r>
-          </a:p>
-        </p:txBody>
-      </p:sp>
-      <p:sp>
-        <p:nvSpPr>
-          <p:cNvPr id="22" name="Rounded Rectangle 21"/>
-          <p:cNvSpPr/>
-          <p:nvPr/>
-        </p:nvSpPr>
-        <p:spPr>
-          <a:xfrm>
-            <a:off x="9144000" y="1417320"/>
-            <a:ext cx="2743200" cy="1554480"/>
-          </a:xfrm>
-          <a:prstGeom prst="roundRect">
-            <a:avLst>
-              <a:gd name="adj" fmla="val 12000"/>
-            </a:avLst>
-          </a:prstGeom>
-          <a:solidFill>
-            <a:srgbClr val="152033"/>
-          </a:solidFill>
-          <a:ln>
-            <a:noFill/>
-          </a:ln>
-        </p:spPr>
-        <p:style>
-          <a:lnRef idx="1">
-            <a:schemeClr val="accent1"/>
-          </a:lnRef>
-          <a:fillRef idx="3">
-            <a:schemeClr val="accent1"/>
-          </a:fillRef>
-          <a:effectRef idx="2">
-            <a:schemeClr val="accent1"/>
-          </a:effectRef>
-          <a:fontRef idx="minor">
-            <a:schemeClr val="lt1"/>
-          </a:fontRef>
-        </p:style>
-        <p:txBody>
-          <a:bodyPr rtlCol="0" anchor="ctr"/>
-          <a:lstStyle/>
-          <a:p>
-            <a:pPr algn="ctr"/>
-          </a:p>
-        </p:txBody>
-      </p:sp>
-      <p:sp>
-        <p:nvSpPr>
-          <p:cNvPr id="23" name="Rectangle 22"/>
-          <p:cNvSpPr/>
-          <p:nvPr/>
-        </p:nvSpPr>
-        <p:spPr>
-          <a:xfrm>
-            <a:off x="9144000" y="1417320"/>
-            <a:ext cx="2743200" cy="54864"/>
-          </a:xfrm>
-          <a:prstGeom prst="rect">
-            <a:avLst/>
-          </a:prstGeom>
-          <a:solidFill>
-            <a:srgbClr val="FBBF24"/>
-          </a:solidFill>
-          <a:ln>
-            <a:noFill/>
-          </a:ln>
-        </p:spPr>
-        <p:style>
-          <a:lnRef idx="1">
-            <a:schemeClr val="accent1"/>
-          </a:lnRef>
-          <a:fillRef idx="3">
-            <a:schemeClr val="accent1"/>
-          </a:fillRef>
-          <a:effectRef idx="2">
-            <a:schemeClr val="accent1"/>
-          </a:effectRef>
-          <a:fontRef idx="minor">
-            <a:schemeClr val="lt1"/>
-          </a:fontRef>
-        </p:style>
-        <p:txBody>
-          <a:bodyPr rtlCol="0" anchor="ctr"/>
-          <a:lstStyle/>
-          <a:p>
-            <a:pPr algn="ctr"/>
-          </a:p>
-        </p:txBody>
-      </p:sp>
-      <p:sp>
-        <p:nvSpPr>
-          <p:cNvPr id="24" name="TextBox 23"/>
-          <p:cNvSpPr txBox="1"/>
-          <p:nvPr/>
-        </p:nvSpPr>
-        <p:spPr>
-          <a:xfrm>
-            <a:off x="9345168" y="1618488"/>
-            <a:ext cx="2377440" cy="274320"/>
-          </a:xfrm>
-          <a:prstGeom prst="rect">
-            <a:avLst/>
-          </a:prstGeom>
-          <a:noFill/>
-        </p:spPr>
-        <p:txBody>
-          <a:bodyPr wrap="square" anchor="t"/>
-          <a:lstStyle/>
-          <a:p>
-            <a:pPr algn="l">
-              <a:spcBef>
-                <a:spcPts val="0"/>
-              </a:spcBef>
-              <a:spcAft>
-                <a:spcPts val="400"/>
-              </a:spcAft>
-            </a:pPr>
-            <a:r>
-              <a:rPr sz="1200" b="0">
-                <a:solidFill>
-                  <a:srgbClr val="8B9BB4"/>
-                </a:solidFill>
-                <a:latin typeface="Calibri"/>
-              </a:rPr>
-              <a:t>MTTC</a:t>
-            </a:r>
-          </a:p>
-        </p:txBody>
-      </p:sp>
-      <p:sp>
-        <p:nvSpPr>
-          <p:cNvPr id="25" name="TextBox 24"/>
-          <p:cNvSpPr txBox="1"/>
-          <p:nvPr/>
-        </p:nvSpPr>
-        <p:spPr>
-          <a:xfrm>
-            <a:off x="9345168" y="1920240"/>
-            <a:ext cx="2377440" cy="502920"/>
-          </a:xfrm>
-          <a:prstGeom prst="rect">
-            <a:avLst/>
-          </a:prstGeom>
-          <a:noFill/>
-        </p:spPr>
-        <p:txBody>
-          <a:bodyPr wrap="square" anchor="t"/>
-          <a:lstStyle/>
-          <a:p>
-            <a:pPr algn="l">
-              <a:spcBef>
-                <a:spcPts val="0"/>
-              </a:spcBef>
-              <a:spcAft>
-                <a:spcPts val="400"/>
-              </a:spcAft>
-            </a:pPr>
-            <a:r>
-              <a:rPr sz="2800" b="1">
-                <a:solidFill>
-                  <a:srgbClr val="F8FAFC"/>
-                </a:solidFill>
-                <a:latin typeface="Calibri"/>
-              </a:rPr>
-              <a:t>2.88</a:t>
-            </a:r>
-          </a:p>
-        </p:txBody>
-      </p:sp>
-      <p:sp>
-        <p:nvSpPr>
-          <p:cNvPr id="26" name="TextBox 25"/>
-          <p:cNvSpPr txBox="1"/>
-          <p:nvPr/>
-        </p:nvSpPr>
-        <p:spPr>
-          <a:xfrm>
-            <a:off x="9345168" y="2514600"/>
-            <a:ext cx="2377440" cy="320040"/>
-          </a:xfrm>
-          <a:prstGeom prst="rect">
-            <a:avLst/>
-          </a:prstGeom>
-          <a:noFill/>
-        </p:spPr>
-        <p:txBody>
-          <a:bodyPr wrap="square" anchor="t"/>
-          <a:lstStyle/>
-          <a:p>
-            <a:pPr algn="l">
-              <a:spcBef>
-                <a:spcPts val="0"/>
-              </a:spcBef>
-              <a:spcAft>
-                <a:spcPts val="400"/>
-              </a:spcAft>
-            </a:pPr>
-            <a:r>
-              <a:rPr sz="1200" b="0">
-                <a:solidFill>
-                  <a:srgbClr val="FBBF24"/>
-                </a:solidFill>
-                <a:latin typeface="Calibri"/>
-              </a:rPr>
-              <a:t>from 9.81 turns</a:t>
-            </a:r>
-          </a:p>
-        </p:txBody>
-      </p:sp>
-      <p:sp>
-        <p:nvSpPr>
-          <p:cNvPr id="27" name="Rounded Rectangle 26"/>
-          <p:cNvSpPr/>
-          <p:nvPr/>
-        </p:nvSpPr>
-        <p:spPr>
-          <a:xfrm>
-            <a:off x="502920" y="3200400"/>
-            <a:ext cx="6858000" cy="3108960"/>
-          </a:xfrm>
-          <a:prstGeom prst="roundRect">
-            <a:avLst>
-              <a:gd name="adj" fmla="val 8000"/>
-            </a:avLst>
-          </a:prstGeom>
-          <a:solidFill>
-            <a:srgbClr val="152033"/>
-          </a:solidFill>
-          <a:ln>
-            <a:noFill/>
-          </a:ln>
-        </p:spPr>
-        <p:style>
-          <a:lnRef idx="1">
-            <a:schemeClr val="accent1"/>
-          </a:lnRef>
-          <a:fillRef idx="3">
-            <a:schemeClr val="accent1"/>
-          </a:fillRef>
-          <a:effectRef idx="2">
-            <a:schemeClr val="accent1"/>
-          </a:effectRef>
-          <a:fontRef idx="minor">
-            <a:schemeClr val="lt1"/>
-          </a:fontRef>
-        </p:style>
-        <p:txBody>
-          <a:bodyPr rtlCol="0" anchor="ctr"/>
-          <a:lstStyle/>
-          <a:p>
-            <a:pPr algn="ctr"/>
-          </a:p>
-        </p:txBody>
-      </p:sp>
-      <p:sp>
-        <p:nvSpPr>
-          <p:cNvPr id="28" name="TextBox 27"/>
-          <p:cNvSpPr txBox="1"/>
-          <p:nvPr/>
-        </p:nvSpPr>
-        <p:spPr>
-          <a:xfrm>
-            <a:off x="685800" y="3291840"/>
-            <a:ext cx="6400800" cy="274320"/>
-          </a:xfrm>
-          <a:prstGeom prst="rect">
-            <a:avLst/>
-          </a:prstGeom>
-          <a:noFill/>
-        </p:spPr>
-        <p:txBody>
-          <a:bodyPr wrap="square" anchor="t"/>
-          <a:lstStyle/>
-          <a:p>
-            <a:pPr algn="l">
-              <a:spcBef>
-                <a:spcPts val="0"/>
-              </a:spcBef>
-              <a:spcAft>
-                <a:spcPts val="400"/>
-              </a:spcAft>
-            </a:pPr>
-            <a:r>
-              <a:rPr sz="1200" b="1">
-                <a:solidFill>
-                  <a:srgbClr val="8B9BB4"/>
-                </a:solidFill>
-                <a:latin typeface="Calibri"/>
-              </a:rPr>
-              <a:t>Metric comparison (higher better; MTTC inverted scale n/a)</a:t>
-            </a:r>
-          </a:p>
-        </p:txBody>
-      </p:sp>
-      <p:graphicFrame>
-        <p:nvGraphicFramePr>
-          <p:cNvPr id="29" name="Chart 28"/>
-          <p:cNvGraphicFramePr>
-            <a:graphicFrameLocks noGrp="1"/>
-          </p:cNvGraphicFramePr>
-          <p:nvPr/>
-        </p:nvGraphicFramePr>
-        <p:xfrm>
-          <a:off x="640080" y="3566160"/>
-          <a:ext cx="6583680" cy="2606040"/>
-        </p:xfrm>
-        <a:graphic>
-          <a:graphicData uri="http://schemas.openxmlformats.org/drawingml/2006/chart">
-            <c:chart xmlns:c="http://schemas.openxmlformats.org/drawingml/2006/chart" r:id="rId2"/>
-          </a:graphicData>
-        </a:graphic>
-      </p:graphicFrame>
-      <p:sp>
-        <p:nvSpPr>
-          <p:cNvPr id="30" name="Rounded Rectangle 29"/>
-          <p:cNvSpPr/>
-          <p:nvPr/>
-        </p:nvSpPr>
-        <p:spPr>
-          <a:xfrm>
-            <a:off x="7589520" y="3200400"/>
-            <a:ext cx="4069080" cy="3108960"/>
-          </a:xfrm>
-          <a:prstGeom prst="roundRect">
-            <a:avLst>
-              <a:gd name="adj" fmla="val 8000"/>
-            </a:avLst>
-          </a:prstGeom>
-          <a:solidFill>
-            <a:srgbClr val="152033"/>
-          </a:solidFill>
-          <a:ln>
-            <a:noFill/>
-          </a:ln>
-        </p:spPr>
-        <p:style>
-          <a:lnRef idx="1">
-            <a:schemeClr val="accent1"/>
-          </a:lnRef>
-          <a:fillRef idx="3">
-            <a:schemeClr val="accent1"/>
-          </a:fillRef>
-          <a:effectRef idx="2">
-            <a:schemeClr val="accent1"/>
-          </a:effectRef>
-          <a:fontRef idx="minor">
-            <a:schemeClr val="lt1"/>
-          </a:fontRef>
-        </p:style>
-        <p:txBody>
-          <a:bodyPr rtlCol="0" anchor="ctr"/>
-          <a:lstStyle/>
-          <a:p>
-            <a:pPr algn="ctr"/>
-          </a:p>
-        </p:txBody>
-      </p:sp>
-      <p:sp>
-        <p:nvSpPr>
-          <p:cNvPr id="31" name="Rectangle 30"/>
-          <p:cNvSpPr/>
-          <p:nvPr/>
-        </p:nvSpPr>
-        <p:spPr>
-          <a:xfrm>
-            <a:off x="7589520" y="3200400"/>
-            <a:ext cx="73152" cy="3108960"/>
-          </a:xfrm>
-          <a:prstGeom prst="rect">
-            <a:avLst/>
-          </a:prstGeom>
-          <a:solidFill>
-            <a:srgbClr val="FF2D8F"/>
-          </a:solidFill>
-          <a:ln>
-            <a:noFill/>
-          </a:ln>
-        </p:spPr>
-        <p:style>
-          <a:lnRef idx="1">
-            <a:schemeClr val="accent1"/>
-          </a:lnRef>
-          <a:fillRef idx="3">
-            <a:schemeClr val="accent1"/>
-          </a:fillRef>
-          <a:effectRef idx="2">
-            <a:schemeClr val="accent1"/>
-          </a:effectRef>
-          <a:fontRef idx="minor">
-            <a:schemeClr val="lt1"/>
-          </a:fontRef>
-        </p:style>
-        <p:txBody>
-          <a:bodyPr rtlCol="0" anchor="ctr"/>
-          <a:lstStyle/>
-          <a:p>
-            <a:pPr algn="ctr"/>
-          </a:p>
-        </p:txBody>
-      </p:sp>
-      <p:sp>
-        <p:nvSpPr>
-          <p:cNvPr id="32" name="TextBox 31"/>
-          <p:cNvSpPr txBox="1"/>
-          <p:nvPr/>
-        </p:nvSpPr>
-        <p:spPr>
-          <a:xfrm>
-            <a:off x="7818120" y="3383280"/>
-            <a:ext cx="3657600" cy="2743200"/>
-          </a:xfrm>
-          <a:prstGeom prst="rect">
-            <a:avLst/>
-          </a:prstGeom>
-          <a:noFill/>
-        </p:spPr>
-        <p:txBody>
-          <a:bodyPr wrap="square" anchor="t"/>
-          <a:lstStyle/>
-          <a:p>
-            <a:pPr algn="l">
-              <a:spcBef>
-                <a:spcPts val="0"/>
-              </a:spcBef>
-              <a:spcAft>
-                <a:spcPts val="400"/>
-              </a:spcAft>
-            </a:pPr>
-            <a:r>
-              <a:rPr sz="1400" b="1">
-                <a:solidFill>
-                  <a:srgbClr val="FF2D8F"/>
-                </a:solidFill>
-                <a:latin typeface="Calibri"/>
-              </a:rPr>
-              <a:t>What moved the needle</a:t>
-            </a:r>
-          </a:p>
-          <a:p>
-            <a:pPr algn="l">
-              <a:spcBef>
-                <a:spcPts val="0"/>
-              </a:spcBef>
-              <a:spcAft>
-                <a:spcPts val="400"/>
-              </a:spcAft>
-            </a:pPr>
-            <a:r>
-              <a:rPr sz="400" b="0">
-                <a:solidFill>
-                  <a:srgbClr val="8B9BB4"/>
-                </a:solidFill>
-                <a:latin typeface="Calibri"/>
-              </a:rPr>
-              <a:t/>
-            </a:r>
-          </a:p>
-          <a:p>
-            <a:pPr algn="l">
-              <a:spcBef>
-                <a:spcPts val="0"/>
-              </a:spcBef>
-              <a:spcAft>
-                <a:spcPts val="400"/>
-              </a:spcAft>
-            </a:pPr>
-            <a:r>
-              <a:rPr sz="1300" b="0">
-                <a:solidFill>
-                  <a:srgbClr val="F8FAFC"/>
-                </a:solidFill>
-                <a:latin typeface="Calibri"/>
-              </a:rPr>
-              <a:t>Override hygiene (soft-only wipe)</a:t>
-            </a:r>
-          </a:p>
-          <a:p>
-            <a:pPr algn="l">
-              <a:spcBef>
-                <a:spcPts val="0"/>
-              </a:spcBef>
-              <a:spcAft>
-                <a:spcPts val="400"/>
-              </a:spcAft>
-            </a:pPr>
-            <a:r>
-              <a:rPr sz="1300" b="0">
-                <a:solidFill>
-                  <a:srgbClr val="F8FAFC"/>
-                </a:solidFill>
-                <a:latin typeface="Calibri"/>
-              </a:rPr>
-              <a:t>Hybrid dense hash lane</a:t>
-            </a:r>
-          </a:p>
-          <a:p>
-            <a:pPr algn="l">
-              <a:spcBef>
-                <a:spcPts val="0"/>
-              </a:spcBef>
-              <a:spcAft>
-                <a:spcPts val="400"/>
-              </a:spcAft>
-            </a:pPr>
-            <a:r>
-              <a:rPr sz="1300" b="0">
-                <a:solidFill>
-                  <a:srgbClr val="F8FAFC"/>
-                </a:solidFill>
-                <a:latin typeface="Calibri"/>
-              </a:rPr>
-              <a:t>Family + audience routing</a:t>
-            </a:r>
-          </a:p>
-          <a:p>
-            <a:pPr algn="l">
-              <a:spcBef>
-                <a:spcPts val="0"/>
-              </a:spcBef>
-              <a:spcAft>
-                <a:spcPts val="400"/>
-              </a:spcAft>
-            </a:pPr>
-            <a:r>
-              <a:rPr sz="1300" b="0">
-                <a:solidFill>
-                  <a:srgbClr val="F8FAFC"/>
-                </a:solidFill>
-                <a:latin typeface="Calibri"/>
-              </a:rPr>
-              <a:t>other-first clarify policy</a:t>
-            </a:r>
-          </a:p>
-          <a:p>
-            <a:pPr algn="l">
-              <a:spcBef>
-                <a:spcPts val="0"/>
-              </a:spcBef>
-              <a:spcAft>
-                <a:spcPts val="400"/>
-              </a:spcAft>
-            </a:pPr>
-            <a:r>
-              <a:rPr sz="1300" b="0">
-                <a:solidFill>
-                  <a:srgbClr val="F8FAFC"/>
-                </a:solidFill>
-                <a:latin typeface="Calibri"/>
-              </a:rPr>
-              <a:t>Multi-slot freeform atomize</a:t>
-            </a:r>
-          </a:p>
-          <a:p>
-            <a:pPr algn="l">
-              <a:spcBef>
-                <a:spcPts val="0"/>
-              </a:spcBef>
-              <a:spcAft>
-                <a:spcPts val="400"/>
-              </a:spcAft>
-            </a:pPr>
-            <a:r>
-              <a:rPr sz="1300" b="0">
-                <a:solidFill>
-                  <a:srgbClr val="F8FAFC"/>
-                </a:solidFill>
-                <a:latin typeface="Calibri"/>
-              </a:rPr>
-              <a:t>Cold-start profile/rating priors</a:t>
-            </a:r>
-          </a:p>
-          <a:p>
-            <a:pPr algn="l">
-              <a:spcBef>
-                <a:spcPts val="0"/>
-              </a:spcBef>
-              <a:spcAft>
-                <a:spcPts val="400"/>
-              </a:spcAft>
-            </a:pPr>
-            <a:r>
-              <a:rPr sz="600" b="0">
-                <a:solidFill>
-                  <a:srgbClr val="8B9BB4"/>
-                </a:solidFill>
-                <a:latin typeface="Calibri"/>
-              </a:rPr>
-              <a:t/>
-            </a:r>
-          </a:p>
-          <a:p>
-            <a:pPr algn="l">
-              <a:spcBef>
-                <a:spcPts val="0"/>
-              </a:spcBef>
-              <a:spcAft>
-                <a:spcPts val="400"/>
-              </a:spcAft>
-            </a:pPr>
-            <a:r>
-              <a:rPr sz="1200" b="0">
-                <a:solidFill>
-                  <a:srgbClr val="8B9BB4"/>
-                </a:solidFill>
-                <a:latin typeface="Calibri"/>
-              </a:rPr>
-              <a:t>Each kept only if Tech ≥ floor</a:t>
-            </a:r>
-          </a:p>
-          <a:p>
-            <a:pPr algn="l">
-              <a:spcBef>
-                <a:spcPts val="0"/>
-              </a:spcBef>
-              <a:spcAft>
-                <a:spcPts val="400"/>
-              </a:spcAft>
-            </a:pPr>
-            <a:r>
-              <a:rPr sz="1300" b="1">
-                <a:solidFill>
-                  <a:srgbClr val="34D399"/>
-                </a:solidFill>
-                <a:latin typeface="Calibri"/>
-              </a:rPr>
-              <a:t>Tokens default path: 0</a:t>
-            </a:r>
-          </a:p>
-        </p:txBody>
-      </p:sp>
-      <p:sp>
-        <p:nvSpPr>
-          <p:cNvPr id="33" name="Rectangle 32"/>
+              <a:t>End-to-end system diagram</a:t>
+            </a:r>
+          </a:p>
+        </p:txBody>
+      </p:sp>
+      <p:pic>
+        <p:nvPicPr>
+          <p:cNvPr id="6" name="Picture 5" descr="architecture_diagram.png"/>
+          <p:cNvPicPr>
+            <a:picLocks noChangeAspect="1"/>
+          </p:cNvPicPr>
+          <p:nvPr/>
+        </p:nvPicPr>
+        <p:blipFill>
+          <a:blip r:embed="rId2"/>
+          <a:stretch>
+            <a:fillRect/>
+          </a:stretch>
+        </p:blipFill>
+        <p:spPr>
+          <a:xfrm>
+            <a:off x="201168" y="868680"/>
+            <a:ext cx="11795760" cy="5623560"/>
+          </a:xfrm>
+          <a:prstGeom prst="rect">
+            <a:avLst/>
+          </a:prstGeom>
+        </p:spPr>
+      </p:pic>
+      <p:sp>
+        <p:nvSpPr>
+          <p:cNvPr id="7" name="Rectangle 6"/>
           <p:cNvSpPr/>
           <p:nvPr/>
         </p:nvSpPr>
@@ -12261,7 +12220,7 @@
       </p:sp>
       <p:sp>
         <p:nvSpPr>
-          <p:cNvPr id="34" name="TextBox 33"/>
+          <p:cNvPr id="8" name="TextBox 7"/>
           <p:cNvSpPr txBox="1"/>
           <p:nvPr/>
         </p:nvSpPr>
@@ -12301,7 +12260,7 @@
       </p:sp>
       <p:sp>
         <p:nvSpPr>
-          <p:cNvPr id="35" name="TextBox 34"/>
+          <p:cNvPr id="9" name="TextBox 8"/>
           <p:cNvSpPr txBox="1"/>
           <p:nvPr/>
         </p:nvSpPr>
@@ -12334,7 +12293,7 @@
                 </a:solidFill>
                 <a:latin typeface="Calibri"/>
               </a:rPr>
-              <a:t>6 / 10</a:t>
+              <a:t>6 / 11</a:t>
             </a:r>
           </a:p>
         </p:txBody>
@@ -12486,7 +12445,7 @@
                 </a:solidFill>
                 <a:latin typeface="Calibri"/>
               </a:rPr>
-              <a:t>06  ·  BY SCENARIO</a:t>
+              <a:t>06  ·  RESULTS</a:t>
             </a:r>
           </a:p>
         </p:txBody>
@@ -12526,7 +12485,7 @@
                 </a:solidFill>
                 <a:latin typeface="Calibri"/>
               </a:rPr>
-              <a:t>Hit@10 holds across buying, browse, override, boundary</a:t>
+              <a:t>Public 200 — weak BM25 vs ShopPilot</a:t>
             </a:r>
           </a:p>
         </p:txBody>
@@ -12566,7 +12525,7 @@
                 </a:solidFill>
                 <a:latin typeface="Calibri"/>
               </a:rPr>
-              <a:t>Override pays more MTTC (mind-change cost) but still Hit 0.967</a:t>
+              <a:t>Official local_evaluator · SHOPPILOT_DENSE=hash · deterministic seeds</a:t>
             </a:r>
           </a:p>
         </p:txBody>
@@ -12580,11 +12539,11 @@
         <p:spPr>
           <a:xfrm>
             <a:off x="502920" y="1417320"/>
-            <a:ext cx="6949440" cy="4754880"/>
+            <a:ext cx="2743200" cy="1554480"/>
           </a:xfrm>
           <a:prstGeom prst="roundRect">
             <a:avLst>
-              <a:gd name="adj" fmla="val 8000"/>
+              <a:gd name="adj" fmla="val 12000"/>
             </a:avLst>
           </a:prstGeom>
           <a:solidFill>
@@ -12618,13 +12577,845 @@
       </p:sp>
       <p:sp>
         <p:nvSpPr>
-          <p:cNvPr id="8" name="TextBox 7"/>
+          <p:cNvPr id="8" name="Rectangle 7"/>
+          <p:cNvSpPr/>
+          <p:nvPr/>
+        </p:nvSpPr>
+        <p:spPr>
+          <a:xfrm>
+            <a:off x="502920" y="1417320"/>
+            <a:ext cx="2743200" cy="54864"/>
+          </a:xfrm>
+          <a:prstGeom prst="rect">
+            <a:avLst/>
+          </a:prstGeom>
+          <a:solidFill>
+            <a:srgbClr val="00D4FF"/>
+          </a:solidFill>
+          <a:ln>
+            <a:noFill/>
+          </a:ln>
+        </p:spPr>
+        <p:style>
+          <a:lnRef idx="1">
+            <a:schemeClr val="accent1"/>
+          </a:lnRef>
+          <a:fillRef idx="3">
+            <a:schemeClr val="accent1"/>
+          </a:fillRef>
+          <a:effectRef idx="2">
+            <a:schemeClr val="accent1"/>
+          </a:effectRef>
+          <a:fontRef idx="minor">
+            <a:schemeClr val="lt1"/>
+          </a:fontRef>
+        </p:style>
+        <p:txBody>
+          <a:bodyPr rtlCol="0" anchor="ctr"/>
+          <a:lstStyle/>
+          <a:p>
+            <a:pPr algn="ctr"/>
+          </a:p>
+        </p:txBody>
+      </p:sp>
+      <p:sp>
+        <p:nvSpPr>
+          <p:cNvPr id="9" name="TextBox 8"/>
           <p:cNvSpPr txBox="1"/>
           <p:nvPr/>
         </p:nvSpPr>
         <p:spPr>
           <a:xfrm>
-            <a:off x="685800" y="1508760"/>
+            <a:off x="704088" y="1618488"/>
+            <a:ext cx="2377440" cy="274320"/>
+          </a:xfrm>
+          <a:prstGeom prst="rect">
+            <a:avLst/>
+          </a:prstGeom>
+          <a:noFill/>
+        </p:spPr>
+        <p:txBody>
+          <a:bodyPr wrap="square" anchor="t"/>
+          <a:lstStyle/>
+          <a:p>
+            <a:pPr algn="l">
+              <a:spcBef>
+                <a:spcPts val="0"/>
+              </a:spcBef>
+              <a:spcAft>
+                <a:spcPts val="400"/>
+              </a:spcAft>
+            </a:pPr>
+            <a:r>
+              <a:rPr sz="1200" b="0">
+                <a:solidFill>
+                  <a:srgbClr val="8B9BB4"/>
+                </a:solidFill>
+                <a:latin typeface="Calibri"/>
+              </a:rPr>
+              <a:t>TechnicalScore</a:t>
+            </a:r>
+          </a:p>
+        </p:txBody>
+      </p:sp>
+      <p:sp>
+        <p:nvSpPr>
+          <p:cNvPr id="10" name="TextBox 9"/>
+          <p:cNvSpPr txBox="1"/>
+          <p:nvPr/>
+        </p:nvSpPr>
+        <p:spPr>
+          <a:xfrm>
+            <a:off x="704088" y="1920240"/>
+            <a:ext cx="2377440" cy="502920"/>
+          </a:xfrm>
+          <a:prstGeom prst="rect">
+            <a:avLst/>
+          </a:prstGeom>
+          <a:noFill/>
+        </p:spPr>
+        <p:txBody>
+          <a:bodyPr wrap="square" anchor="t"/>
+          <a:lstStyle/>
+          <a:p>
+            <a:pPr algn="l">
+              <a:spcBef>
+                <a:spcPts val="0"/>
+              </a:spcBef>
+              <a:spcAft>
+                <a:spcPts val="400"/>
+              </a:spcAft>
+            </a:pPr>
+            <a:r>
+              <a:rPr sz="2800" b="1">
+                <a:solidFill>
+                  <a:srgbClr val="F8FAFC"/>
+                </a:solidFill>
+                <a:latin typeface="Calibri"/>
+              </a:rPr>
+              <a:t>0.907</a:t>
+            </a:r>
+          </a:p>
+        </p:txBody>
+      </p:sp>
+      <p:sp>
+        <p:nvSpPr>
+          <p:cNvPr id="11" name="TextBox 10"/>
+          <p:cNvSpPr txBox="1"/>
+          <p:nvPr/>
+        </p:nvSpPr>
+        <p:spPr>
+          <a:xfrm>
+            <a:off x="704088" y="2514600"/>
+            <a:ext cx="2377440" cy="320040"/>
+          </a:xfrm>
+          <a:prstGeom prst="rect">
+            <a:avLst/>
+          </a:prstGeom>
+          <a:noFill/>
+        </p:spPr>
+        <p:txBody>
+          <a:bodyPr wrap="square" anchor="t"/>
+          <a:lstStyle/>
+          <a:p>
+            <a:pPr algn="l">
+              <a:spcBef>
+                <a:spcPts val="0"/>
+              </a:spcBef>
+              <a:spcAft>
+                <a:spcPts val="400"/>
+              </a:spcAft>
+            </a:pPr>
+            <a:r>
+              <a:rPr sz="1200" b="0">
+                <a:solidFill>
+                  <a:srgbClr val="00D4FF"/>
+                </a:solidFill>
+                <a:latin typeface="Calibri"/>
+              </a:rPr>
+              <a:t>from 0.107  ·  ~8.5×</a:t>
+            </a:r>
+          </a:p>
+        </p:txBody>
+      </p:sp>
+      <p:sp>
+        <p:nvSpPr>
+          <p:cNvPr id="12" name="Rounded Rectangle 11"/>
+          <p:cNvSpPr/>
+          <p:nvPr/>
+        </p:nvSpPr>
+        <p:spPr>
+          <a:xfrm>
+            <a:off x="3383280" y="1417320"/>
+            <a:ext cx="2743200" cy="1554480"/>
+          </a:xfrm>
+          <a:prstGeom prst="roundRect">
+            <a:avLst>
+              <a:gd name="adj" fmla="val 12000"/>
+            </a:avLst>
+          </a:prstGeom>
+          <a:solidFill>
+            <a:srgbClr val="152033"/>
+          </a:solidFill>
+          <a:ln>
+            <a:noFill/>
+          </a:ln>
+        </p:spPr>
+        <p:style>
+          <a:lnRef idx="1">
+            <a:schemeClr val="accent1"/>
+          </a:lnRef>
+          <a:fillRef idx="3">
+            <a:schemeClr val="accent1"/>
+          </a:fillRef>
+          <a:effectRef idx="2">
+            <a:schemeClr val="accent1"/>
+          </a:effectRef>
+          <a:fontRef idx="minor">
+            <a:schemeClr val="lt1"/>
+          </a:fontRef>
+        </p:style>
+        <p:txBody>
+          <a:bodyPr rtlCol="0" anchor="ctr"/>
+          <a:lstStyle/>
+          <a:p>
+            <a:pPr algn="ctr"/>
+          </a:p>
+        </p:txBody>
+      </p:sp>
+      <p:sp>
+        <p:nvSpPr>
+          <p:cNvPr id="13" name="Rectangle 12"/>
+          <p:cNvSpPr/>
+          <p:nvPr/>
+        </p:nvSpPr>
+        <p:spPr>
+          <a:xfrm>
+            <a:off x="3383280" y="1417320"/>
+            <a:ext cx="2743200" cy="54864"/>
+          </a:xfrm>
+          <a:prstGeom prst="rect">
+            <a:avLst/>
+          </a:prstGeom>
+          <a:solidFill>
+            <a:srgbClr val="FF2D8F"/>
+          </a:solidFill>
+          <a:ln>
+            <a:noFill/>
+          </a:ln>
+        </p:spPr>
+        <p:style>
+          <a:lnRef idx="1">
+            <a:schemeClr val="accent1"/>
+          </a:lnRef>
+          <a:fillRef idx="3">
+            <a:schemeClr val="accent1"/>
+          </a:fillRef>
+          <a:effectRef idx="2">
+            <a:schemeClr val="accent1"/>
+          </a:effectRef>
+          <a:fontRef idx="minor">
+            <a:schemeClr val="lt1"/>
+          </a:fontRef>
+        </p:style>
+        <p:txBody>
+          <a:bodyPr rtlCol="0" anchor="ctr"/>
+          <a:lstStyle/>
+          <a:p>
+            <a:pPr algn="ctr"/>
+          </a:p>
+        </p:txBody>
+      </p:sp>
+      <p:sp>
+        <p:nvSpPr>
+          <p:cNvPr id="14" name="TextBox 13"/>
+          <p:cNvSpPr txBox="1"/>
+          <p:nvPr/>
+        </p:nvSpPr>
+        <p:spPr>
+          <a:xfrm>
+            <a:off x="3584448" y="1618488"/>
+            <a:ext cx="2377440" cy="274320"/>
+          </a:xfrm>
+          <a:prstGeom prst="rect">
+            <a:avLst/>
+          </a:prstGeom>
+          <a:noFill/>
+        </p:spPr>
+        <p:txBody>
+          <a:bodyPr wrap="square" anchor="t"/>
+          <a:lstStyle/>
+          <a:p>
+            <a:pPr algn="l">
+              <a:spcBef>
+                <a:spcPts val="0"/>
+              </a:spcBef>
+              <a:spcAft>
+                <a:spcPts val="400"/>
+              </a:spcAft>
+            </a:pPr>
+            <a:r>
+              <a:rPr sz="1200" b="0">
+                <a:solidFill>
+                  <a:srgbClr val="8B9BB4"/>
+                </a:solidFill>
+                <a:latin typeface="Calibri"/>
+              </a:rPr>
+              <a:t>Hit@10</a:t>
+            </a:r>
+          </a:p>
+        </p:txBody>
+      </p:sp>
+      <p:sp>
+        <p:nvSpPr>
+          <p:cNvPr id="15" name="TextBox 14"/>
+          <p:cNvSpPr txBox="1"/>
+          <p:nvPr/>
+        </p:nvSpPr>
+        <p:spPr>
+          <a:xfrm>
+            <a:off x="3584448" y="1920240"/>
+            <a:ext cx="2377440" cy="502920"/>
+          </a:xfrm>
+          <a:prstGeom prst="rect">
+            <a:avLst/>
+          </a:prstGeom>
+          <a:noFill/>
+        </p:spPr>
+        <p:txBody>
+          <a:bodyPr wrap="square" anchor="t"/>
+          <a:lstStyle/>
+          <a:p>
+            <a:pPr algn="l">
+              <a:spcBef>
+                <a:spcPts val="0"/>
+              </a:spcBef>
+              <a:spcAft>
+                <a:spcPts val="400"/>
+              </a:spcAft>
+            </a:pPr>
+            <a:r>
+              <a:rPr sz="2800" b="1">
+                <a:solidFill>
+                  <a:srgbClr val="F8FAFC"/>
+                </a:solidFill>
+                <a:latin typeface="Calibri"/>
+              </a:rPr>
+              <a:t>0.975</a:t>
+            </a:r>
+          </a:p>
+        </p:txBody>
+      </p:sp>
+      <p:sp>
+        <p:nvSpPr>
+          <p:cNvPr id="16" name="TextBox 15"/>
+          <p:cNvSpPr txBox="1"/>
+          <p:nvPr/>
+        </p:nvSpPr>
+        <p:spPr>
+          <a:xfrm>
+            <a:off x="3584448" y="2514600"/>
+            <a:ext cx="2377440" cy="320040"/>
+          </a:xfrm>
+          <a:prstGeom prst="rect">
+            <a:avLst/>
+          </a:prstGeom>
+          <a:noFill/>
+        </p:spPr>
+        <p:txBody>
+          <a:bodyPr wrap="square" anchor="t"/>
+          <a:lstStyle/>
+          <a:p>
+            <a:pPr algn="l">
+              <a:spcBef>
+                <a:spcPts val="0"/>
+              </a:spcBef>
+              <a:spcAft>
+                <a:spcPts val="400"/>
+              </a:spcAft>
+            </a:pPr>
+            <a:r>
+              <a:rPr sz="1200" b="0">
+                <a:solidFill>
+                  <a:srgbClr val="FF2D8F"/>
+                </a:solidFill>
+                <a:latin typeface="Calibri"/>
+              </a:rPr>
+              <a:t>from 0.125</a:t>
+            </a:r>
+          </a:p>
+        </p:txBody>
+      </p:sp>
+      <p:sp>
+        <p:nvSpPr>
+          <p:cNvPr id="17" name="Rounded Rectangle 16"/>
+          <p:cNvSpPr/>
+          <p:nvPr/>
+        </p:nvSpPr>
+        <p:spPr>
+          <a:xfrm>
+            <a:off x="6263640" y="1417320"/>
+            <a:ext cx="2743200" cy="1554480"/>
+          </a:xfrm>
+          <a:prstGeom prst="roundRect">
+            <a:avLst>
+              <a:gd name="adj" fmla="val 12000"/>
+            </a:avLst>
+          </a:prstGeom>
+          <a:solidFill>
+            <a:srgbClr val="152033"/>
+          </a:solidFill>
+          <a:ln>
+            <a:noFill/>
+          </a:ln>
+        </p:spPr>
+        <p:style>
+          <a:lnRef idx="1">
+            <a:schemeClr val="accent1"/>
+          </a:lnRef>
+          <a:fillRef idx="3">
+            <a:schemeClr val="accent1"/>
+          </a:fillRef>
+          <a:effectRef idx="2">
+            <a:schemeClr val="accent1"/>
+          </a:effectRef>
+          <a:fontRef idx="minor">
+            <a:schemeClr val="lt1"/>
+          </a:fontRef>
+        </p:style>
+        <p:txBody>
+          <a:bodyPr rtlCol="0" anchor="ctr"/>
+          <a:lstStyle/>
+          <a:p>
+            <a:pPr algn="ctr"/>
+          </a:p>
+        </p:txBody>
+      </p:sp>
+      <p:sp>
+        <p:nvSpPr>
+          <p:cNvPr id="18" name="Rectangle 17"/>
+          <p:cNvSpPr/>
+          <p:nvPr/>
+        </p:nvSpPr>
+        <p:spPr>
+          <a:xfrm>
+            <a:off x="6263640" y="1417320"/>
+            <a:ext cx="2743200" cy="54864"/>
+          </a:xfrm>
+          <a:prstGeom prst="rect">
+            <a:avLst/>
+          </a:prstGeom>
+          <a:solidFill>
+            <a:srgbClr val="A855F7"/>
+          </a:solidFill>
+          <a:ln>
+            <a:noFill/>
+          </a:ln>
+        </p:spPr>
+        <p:style>
+          <a:lnRef idx="1">
+            <a:schemeClr val="accent1"/>
+          </a:lnRef>
+          <a:fillRef idx="3">
+            <a:schemeClr val="accent1"/>
+          </a:fillRef>
+          <a:effectRef idx="2">
+            <a:schemeClr val="accent1"/>
+          </a:effectRef>
+          <a:fontRef idx="minor">
+            <a:schemeClr val="lt1"/>
+          </a:fontRef>
+        </p:style>
+        <p:txBody>
+          <a:bodyPr rtlCol="0" anchor="ctr"/>
+          <a:lstStyle/>
+          <a:p>
+            <a:pPr algn="ctr"/>
+          </a:p>
+        </p:txBody>
+      </p:sp>
+      <p:sp>
+        <p:nvSpPr>
+          <p:cNvPr id="19" name="TextBox 18"/>
+          <p:cNvSpPr txBox="1"/>
+          <p:nvPr/>
+        </p:nvSpPr>
+        <p:spPr>
+          <a:xfrm>
+            <a:off x="6464808" y="1618488"/>
+            <a:ext cx="2377440" cy="274320"/>
+          </a:xfrm>
+          <a:prstGeom prst="rect">
+            <a:avLst/>
+          </a:prstGeom>
+          <a:noFill/>
+        </p:spPr>
+        <p:txBody>
+          <a:bodyPr wrap="square" anchor="t"/>
+          <a:lstStyle/>
+          <a:p>
+            <a:pPr algn="l">
+              <a:spcBef>
+                <a:spcPts val="0"/>
+              </a:spcBef>
+              <a:spcAft>
+                <a:spcPts val="400"/>
+              </a:spcAft>
+            </a:pPr>
+            <a:r>
+              <a:rPr sz="1200" b="0">
+                <a:solidFill>
+                  <a:srgbClr val="8B9BB4"/>
+                </a:solidFill>
+                <a:latin typeface="Calibri"/>
+              </a:rPr>
+              <a:t>MRR</a:t>
+            </a:r>
+          </a:p>
+        </p:txBody>
+      </p:sp>
+      <p:sp>
+        <p:nvSpPr>
+          <p:cNvPr id="20" name="TextBox 19"/>
+          <p:cNvSpPr txBox="1"/>
+          <p:nvPr/>
+        </p:nvSpPr>
+        <p:spPr>
+          <a:xfrm>
+            <a:off x="6464808" y="1920240"/>
+            <a:ext cx="2377440" cy="502920"/>
+          </a:xfrm>
+          <a:prstGeom prst="rect">
+            <a:avLst/>
+          </a:prstGeom>
+          <a:noFill/>
+        </p:spPr>
+        <p:txBody>
+          <a:bodyPr wrap="square" anchor="t"/>
+          <a:lstStyle/>
+          <a:p>
+            <a:pPr algn="l">
+              <a:spcBef>
+                <a:spcPts val="0"/>
+              </a:spcBef>
+              <a:spcAft>
+                <a:spcPts val="400"/>
+              </a:spcAft>
+            </a:pPr>
+            <a:r>
+              <a:rPr sz="2800" b="1">
+                <a:solidFill>
+                  <a:srgbClr val="F8FAFC"/>
+                </a:solidFill>
+                <a:latin typeface="Calibri"/>
+              </a:rPr>
+              <a:t>0.858</a:t>
+            </a:r>
+          </a:p>
+        </p:txBody>
+      </p:sp>
+      <p:sp>
+        <p:nvSpPr>
+          <p:cNvPr id="21" name="TextBox 20"/>
+          <p:cNvSpPr txBox="1"/>
+          <p:nvPr/>
+        </p:nvSpPr>
+        <p:spPr>
+          <a:xfrm>
+            <a:off x="6464808" y="2514600"/>
+            <a:ext cx="2377440" cy="320040"/>
+          </a:xfrm>
+          <a:prstGeom prst="rect">
+            <a:avLst/>
+          </a:prstGeom>
+          <a:noFill/>
+        </p:spPr>
+        <p:txBody>
+          <a:bodyPr wrap="square" anchor="t"/>
+          <a:lstStyle/>
+          <a:p>
+            <a:pPr algn="l">
+              <a:spcBef>
+                <a:spcPts val="0"/>
+              </a:spcBef>
+              <a:spcAft>
+                <a:spcPts val="400"/>
+              </a:spcAft>
+            </a:pPr>
+            <a:r>
+              <a:rPr sz="1200" b="0">
+                <a:solidFill>
+                  <a:srgbClr val="A855F7"/>
+                </a:solidFill>
+                <a:latin typeface="Calibri"/>
+              </a:rPr>
+              <a:t>from 0.068</a:t>
+            </a:r>
+          </a:p>
+        </p:txBody>
+      </p:sp>
+      <p:sp>
+        <p:nvSpPr>
+          <p:cNvPr id="22" name="Rounded Rectangle 21"/>
+          <p:cNvSpPr/>
+          <p:nvPr/>
+        </p:nvSpPr>
+        <p:spPr>
+          <a:xfrm>
+            <a:off x="9144000" y="1417320"/>
+            <a:ext cx="2743200" cy="1554480"/>
+          </a:xfrm>
+          <a:prstGeom prst="roundRect">
+            <a:avLst>
+              <a:gd name="adj" fmla="val 12000"/>
+            </a:avLst>
+          </a:prstGeom>
+          <a:solidFill>
+            <a:srgbClr val="152033"/>
+          </a:solidFill>
+          <a:ln>
+            <a:noFill/>
+          </a:ln>
+        </p:spPr>
+        <p:style>
+          <a:lnRef idx="1">
+            <a:schemeClr val="accent1"/>
+          </a:lnRef>
+          <a:fillRef idx="3">
+            <a:schemeClr val="accent1"/>
+          </a:fillRef>
+          <a:effectRef idx="2">
+            <a:schemeClr val="accent1"/>
+          </a:effectRef>
+          <a:fontRef idx="minor">
+            <a:schemeClr val="lt1"/>
+          </a:fontRef>
+        </p:style>
+        <p:txBody>
+          <a:bodyPr rtlCol="0" anchor="ctr"/>
+          <a:lstStyle/>
+          <a:p>
+            <a:pPr algn="ctr"/>
+          </a:p>
+        </p:txBody>
+      </p:sp>
+      <p:sp>
+        <p:nvSpPr>
+          <p:cNvPr id="23" name="Rectangle 22"/>
+          <p:cNvSpPr/>
+          <p:nvPr/>
+        </p:nvSpPr>
+        <p:spPr>
+          <a:xfrm>
+            <a:off x="9144000" y="1417320"/>
+            <a:ext cx="2743200" cy="54864"/>
+          </a:xfrm>
+          <a:prstGeom prst="rect">
+            <a:avLst/>
+          </a:prstGeom>
+          <a:solidFill>
+            <a:srgbClr val="FBBF24"/>
+          </a:solidFill>
+          <a:ln>
+            <a:noFill/>
+          </a:ln>
+        </p:spPr>
+        <p:style>
+          <a:lnRef idx="1">
+            <a:schemeClr val="accent1"/>
+          </a:lnRef>
+          <a:fillRef idx="3">
+            <a:schemeClr val="accent1"/>
+          </a:fillRef>
+          <a:effectRef idx="2">
+            <a:schemeClr val="accent1"/>
+          </a:effectRef>
+          <a:fontRef idx="minor">
+            <a:schemeClr val="lt1"/>
+          </a:fontRef>
+        </p:style>
+        <p:txBody>
+          <a:bodyPr rtlCol="0" anchor="ctr"/>
+          <a:lstStyle/>
+          <a:p>
+            <a:pPr algn="ctr"/>
+          </a:p>
+        </p:txBody>
+      </p:sp>
+      <p:sp>
+        <p:nvSpPr>
+          <p:cNvPr id="24" name="TextBox 23"/>
+          <p:cNvSpPr txBox="1"/>
+          <p:nvPr/>
+        </p:nvSpPr>
+        <p:spPr>
+          <a:xfrm>
+            <a:off x="9345168" y="1618488"/>
+            <a:ext cx="2377440" cy="274320"/>
+          </a:xfrm>
+          <a:prstGeom prst="rect">
+            <a:avLst/>
+          </a:prstGeom>
+          <a:noFill/>
+        </p:spPr>
+        <p:txBody>
+          <a:bodyPr wrap="square" anchor="t"/>
+          <a:lstStyle/>
+          <a:p>
+            <a:pPr algn="l">
+              <a:spcBef>
+                <a:spcPts val="0"/>
+              </a:spcBef>
+              <a:spcAft>
+                <a:spcPts val="400"/>
+              </a:spcAft>
+            </a:pPr>
+            <a:r>
+              <a:rPr sz="1200" b="0">
+                <a:solidFill>
+                  <a:srgbClr val="8B9BB4"/>
+                </a:solidFill>
+                <a:latin typeface="Calibri"/>
+              </a:rPr>
+              <a:t>MTTC</a:t>
+            </a:r>
+          </a:p>
+        </p:txBody>
+      </p:sp>
+      <p:sp>
+        <p:nvSpPr>
+          <p:cNvPr id="25" name="TextBox 24"/>
+          <p:cNvSpPr txBox="1"/>
+          <p:nvPr/>
+        </p:nvSpPr>
+        <p:spPr>
+          <a:xfrm>
+            <a:off x="9345168" y="1920240"/>
+            <a:ext cx="2377440" cy="502920"/>
+          </a:xfrm>
+          <a:prstGeom prst="rect">
+            <a:avLst/>
+          </a:prstGeom>
+          <a:noFill/>
+        </p:spPr>
+        <p:txBody>
+          <a:bodyPr wrap="square" anchor="t"/>
+          <a:lstStyle/>
+          <a:p>
+            <a:pPr algn="l">
+              <a:spcBef>
+                <a:spcPts val="0"/>
+              </a:spcBef>
+              <a:spcAft>
+                <a:spcPts val="400"/>
+              </a:spcAft>
+            </a:pPr>
+            <a:r>
+              <a:rPr sz="2800" b="1">
+                <a:solidFill>
+                  <a:srgbClr val="F8FAFC"/>
+                </a:solidFill>
+                <a:latin typeface="Calibri"/>
+              </a:rPr>
+              <a:t>2.88</a:t>
+            </a:r>
+          </a:p>
+        </p:txBody>
+      </p:sp>
+      <p:sp>
+        <p:nvSpPr>
+          <p:cNvPr id="26" name="TextBox 25"/>
+          <p:cNvSpPr txBox="1"/>
+          <p:nvPr/>
+        </p:nvSpPr>
+        <p:spPr>
+          <a:xfrm>
+            <a:off x="9345168" y="2514600"/>
+            <a:ext cx="2377440" cy="320040"/>
+          </a:xfrm>
+          <a:prstGeom prst="rect">
+            <a:avLst/>
+          </a:prstGeom>
+          <a:noFill/>
+        </p:spPr>
+        <p:txBody>
+          <a:bodyPr wrap="square" anchor="t"/>
+          <a:lstStyle/>
+          <a:p>
+            <a:pPr algn="l">
+              <a:spcBef>
+                <a:spcPts val="0"/>
+              </a:spcBef>
+              <a:spcAft>
+                <a:spcPts val="400"/>
+              </a:spcAft>
+            </a:pPr>
+            <a:r>
+              <a:rPr sz="1200" b="0">
+                <a:solidFill>
+                  <a:srgbClr val="FBBF24"/>
+                </a:solidFill>
+                <a:latin typeface="Calibri"/>
+              </a:rPr>
+              <a:t>from 9.81 turns</a:t>
+            </a:r>
+          </a:p>
+        </p:txBody>
+      </p:sp>
+      <p:sp>
+        <p:nvSpPr>
+          <p:cNvPr id="27" name="Rounded Rectangle 26"/>
+          <p:cNvSpPr/>
+          <p:nvPr/>
+        </p:nvSpPr>
+        <p:spPr>
+          <a:xfrm>
+            <a:off x="502920" y="3200400"/>
+            <a:ext cx="6858000" cy="3108960"/>
+          </a:xfrm>
+          <a:prstGeom prst="roundRect">
+            <a:avLst>
+              <a:gd name="adj" fmla="val 8000"/>
+            </a:avLst>
+          </a:prstGeom>
+          <a:solidFill>
+            <a:srgbClr val="152033"/>
+          </a:solidFill>
+          <a:ln>
+            <a:noFill/>
+          </a:ln>
+        </p:spPr>
+        <p:style>
+          <a:lnRef idx="1">
+            <a:schemeClr val="accent1"/>
+          </a:lnRef>
+          <a:fillRef idx="3">
+            <a:schemeClr val="accent1"/>
+          </a:fillRef>
+          <a:effectRef idx="2">
+            <a:schemeClr val="accent1"/>
+          </a:effectRef>
+          <a:fontRef idx="minor">
+            <a:schemeClr val="lt1"/>
+          </a:fontRef>
+        </p:style>
+        <p:txBody>
+          <a:bodyPr rtlCol="0" anchor="ctr"/>
+          <a:lstStyle/>
+          <a:p>
+            <a:pPr algn="ctr"/>
+          </a:p>
+        </p:txBody>
+      </p:sp>
+      <p:sp>
+        <p:nvSpPr>
+          <p:cNvPr id="28" name="TextBox 27"/>
+          <p:cNvSpPr txBox="1"/>
+          <p:nvPr/>
+        </p:nvSpPr>
+        <p:spPr>
+          <a:xfrm>
+            <a:off x="685800" y="3291840"/>
             <a:ext cx="6400800" cy="274320"/>
           </a:xfrm>
           <a:prstGeom prst="rect">
@@ -12645,28 +13436,28 @@
               </a:spcAft>
             </a:pPr>
             <a:r>
-              <a:rPr sz="1300" b="1">
-                <a:solidFill>
-                  <a:srgbClr val="00D4FF"/>
-                </a:solidFill>
-                <a:latin typeface="Calibri"/>
-              </a:rPr>
-              <a:t>Hit@10 by scenario</a:t>
+              <a:rPr sz="1200" b="1">
+                <a:solidFill>
+                  <a:srgbClr val="8B9BB4"/>
+                </a:solidFill>
+                <a:latin typeface="Calibri"/>
+              </a:rPr>
+              <a:t>Metric comparison (higher better; MTTC inverted scale n/a)</a:t>
             </a:r>
           </a:p>
         </p:txBody>
       </p:sp>
       <p:graphicFrame>
         <p:nvGraphicFramePr>
-          <p:cNvPr id="9" name="Chart 8"/>
+          <p:cNvPr id="29" name="Chart 28"/>
           <p:cNvGraphicFramePr>
             <a:graphicFrameLocks noGrp="1"/>
           </p:cNvGraphicFramePr>
           <p:nvPr/>
         </p:nvGraphicFramePr>
         <p:xfrm>
-          <a:off x="640080" y="1828800"/>
-          <a:ext cx="6675120" cy="4114800"/>
+          <a:off x="640080" y="3566160"/>
+          <a:ext cx="6583680" cy="2606040"/>
         </p:xfrm>
         <a:graphic>
           <a:graphicData uri="http://schemas.openxmlformats.org/drawingml/2006/chart">
@@ -12676,58 +13467,18 @@
       </p:graphicFrame>
       <p:sp>
         <p:nvSpPr>
-          <p:cNvPr id="10" name="TextBox 9"/>
-          <p:cNvSpPr txBox="1"/>
-          <p:nvPr/>
-        </p:nvSpPr>
-        <p:spPr>
-          <a:xfrm>
-            <a:off x="7726679" y="1417320"/>
-            <a:ext cx="3931920" cy="320040"/>
-          </a:xfrm>
-          <a:prstGeom prst="rect">
-            <a:avLst/>
-          </a:prstGeom>
-          <a:noFill/>
-        </p:spPr>
-        <p:txBody>
-          <a:bodyPr wrap="square" anchor="t"/>
-          <a:lstStyle/>
-          <a:p>
-            <a:pPr algn="l">
-              <a:spcBef>
-                <a:spcPts val="0"/>
-              </a:spcBef>
-              <a:spcAft>
-                <a:spcPts val="400"/>
-              </a:spcAft>
-            </a:pPr>
-            <a:r>
-              <a:rPr sz="1300" b="1">
-                <a:solidFill>
-                  <a:srgbClr val="FF2D8F"/>
-                </a:solidFill>
-                <a:latin typeface="Calibri"/>
-              </a:rPr>
-              <a:t>MTTC (turns to first hit)</a:t>
-            </a:r>
-          </a:p>
-        </p:txBody>
-      </p:sp>
-      <p:sp>
-        <p:nvSpPr>
-          <p:cNvPr id="11" name="Rounded Rectangle 10"/>
+          <p:cNvPr id="30" name="Rounded Rectangle 29"/>
           <p:cNvSpPr/>
           <p:nvPr/>
         </p:nvSpPr>
         <p:spPr>
           <a:xfrm>
-            <a:off x="7680960" y="1874519"/>
-            <a:ext cx="3977639" cy="914400"/>
+            <a:off x="7589520" y="3200400"/>
+            <a:ext cx="4069080" cy="3108960"/>
           </a:xfrm>
           <a:prstGeom prst="roundRect">
             <a:avLst>
-              <a:gd name="adj" fmla="val 10000"/>
+              <a:gd name="adj" fmla="val 8000"/>
             </a:avLst>
           </a:prstGeom>
           <a:solidFill>
@@ -12761,272 +13512,14 @@
       </p:sp>
       <p:sp>
         <p:nvSpPr>
-          <p:cNvPr id="12" name="Rectangle 11"/>
+          <p:cNvPr id="31" name="Rectangle 30"/>
           <p:cNvSpPr/>
           <p:nvPr/>
         </p:nvSpPr>
         <p:spPr>
           <a:xfrm>
-            <a:off x="7680960" y="1874519"/>
-            <a:ext cx="73152" cy="914400"/>
-          </a:xfrm>
-          <a:prstGeom prst="rect">
-            <a:avLst/>
-          </a:prstGeom>
-          <a:solidFill>
-            <a:srgbClr val="00D4FF"/>
-          </a:solidFill>
-          <a:ln>
-            <a:noFill/>
-          </a:ln>
-        </p:spPr>
-        <p:style>
-          <a:lnRef idx="1">
-            <a:schemeClr val="accent1"/>
-          </a:lnRef>
-          <a:fillRef idx="3">
-            <a:schemeClr val="accent1"/>
-          </a:fillRef>
-          <a:effectRef idx="2">
-            <a:schemeClr val="accent1"/>
-          </a:effectRef>
-          <a:fontRef idx="minor">
-            <a:schemeClr val="lt1"/>
-          </a:fontRef>
-        </p:style>
-        <p:txBody>
-          <a:bodyPr rtlCol="0" anchor="ctr"/>
-          <a:lstStyle/>
-          <a:p>
-            <a:pPr algn="ctr"/>
-          </a:p>
-        </p:txBody>
-      </p:sp>
-      <p:sp>
-        <p:nvSpPr>
-          <p:cNvPr id="13" name="TextBox 12"/>
-          <p:cNvSpPr txBox="1"/>
-          <p:nvPr/>
-        </p:nvSpPr>
-        <p:spPr>
-          <a:xfrm>
-            <a:off x="7955279" y="2039111"/>
-            <a:ext cx="2194560" cy="320040"/>
-          </a:xfrm>
-          <a:prstGeom prst="rect">
-            <a:avLst/>
-          </a:prstGeom>
-          <a:noFill/>
-        </p:spPr>
-        <p:txBody>
-          <a:bodyPr wrap="square" anchor="t"/>
-          <a:lstStyle/>
-          <a:p>
-            <a:pPr algn="l">
-              <a:spcBef>
-                <a:spcPts val="0"/>
-              </a:spcBef>
-              <a:spcAft>
-                <a:spcPts val="400"/>
-              </a:spcAft>
-            </a:pPr>
-            <a:r>
-              <a:rPr sz="1400" b="1">
-                <a:solidFill>
-                  <a:srgbClr val="F8FAFC"/>
-                </a:solidFill>
-                <a:latin typeface="Calibri"/>
-              </a:rPr>
-              <a:t>Buying</a:t>
-            </a:r>
-          </a:p>
-        </p:txBody>
-      </p:sp>
-      <p:sp>
-        <p:nvSpPr>
-          <p:cNvPr id="14" name="TextBox 13"/>
-          <p:cNvSpPr txBox="1"/>
-          <p:nvPr/>
-        </p:nvSpPr>
-        <p:spPr>
-          <a:xfrm>
-            <a:off x="10058400" y="2011679"/>
-            <a:ext cx="1371600" cy="365760"/>
-          </a:xfrm>
-          <a:prstGeom prst="rect">
-            <a:avLst/>
-          </a:prstGeom>
-          <a:noFill/>
-        </p:spPr>
-        <p:txBody>
-          <a:bodyPr wrap="square" anchor="t"/>
-          <a:lstStyle/>
-          <a:p>
-            <a:pPr algn="r">
-              <a:spcBef>
-                <a:spcPts val="0"/>
-              </a:spcBef>
-              <a:spcAft>
-                <a:spcPts val="400"/>
-              </a:spcAft>
-            </a:pPr>
-            <a:r>
-              <a:rPr sz="2200" b="1">
-                <a:solidFill>
-                  <a:srgbClr val="00D4FF"/>
-                </a:solidFill>
-                <a:latin typeface="Calibri"/>
-              </a:rPr>
-              <a:t>2.45</a:t>
-            </a:r>
-          </a:p>
-        </p:txBody>
-      </p:sp>
-      <p:sp>
-        <p:nvSpPr>
-          <p:cNvPr id="15" name="Rounded Rectangle 14"/>
-          <p:cNvSpPr/>
-          <p:nvPr/>
-        </p:nvSpPr>
-        <p:spPr>
-          <a:xfrm>
-            <a:off x="7955279" y="2468879"/>
-            <a:ext cx="3474720" cy="128016"/>
-          </a:xfrm>
-          <a:prstGeom prst="roundRect">
-            <a:avLst>
-              <a:gd name="adj" fmla="val 50000"/>
-            </a:avLst>
-          </a:prstGeom>
-          <a:solidFill>
-            <a:srgbClr val="1E2A40"/>
-          </a:solidFill>
-          <a:ln>
-            <a:noFill/>
-          </a:ln>
-        </p:spPr>
-        <p:style>
-          <a:lnRef idx="1">
-            <a:schemeClr val="accent1"/>
-          </a:lnRef>
-          <a:fillRef idx="3">
-            <a:schemeClr val="accent1"/>
-          </a:fillRef>
-          <a:effectRef idx="2">
-            <a:schemeClr val="accent1"/>
-          </a:effectRef>
-          <a:fontRef idx="minor">
-            <a:schemeClr val="lt1"/>
-          </a:fontRef>
-        </p:style>
-        <p:txBody>
-          <a:bodyPr rtlCol="0" anchor="ctr"/>
-          <a:lstStyle/>
-          <a:p>
-            <a:pPr algn="ctr"/>
-          </a:p>
-        </p:txBody>
-      </p:sp>
-      <p:sp>
-        <p:nvSpPr>
-          <p:cNvPr id="16" name="Rounded Rectangle 15"/>
-          <p:cNvSpPr/>
-          <p:nvPr/>
-        </p:nvSpPr>
-        <p:spPr>
-          <a:xfrm>
-            <a:off x="7955279" y="2468879"/>
-            <a:ext cx="851306" cy="128016"/>
-          </a:xfrm>
-          <a:prstGeom prst="roundRect">
-            <a:avLst>
-              <a:gd name="adj" fmla="val 50000"/>
-            </a:avLst>
-          </a:prstGeom>
-          <a:solidFill>
-            <a:srgbClr val="00D4FF"/>
-          </a:solidFill>
-          <a:ln>
-            <a:noFill/>
-          </a:ln>
-        </p:spPr>
-        <p:style>
-          <a:lnRef idx="1">
-            <a:schemeClr val="accent1"/>
-          </a:lnRef>
-          <a:fillRef idx="3">
-            <a:schemeClr val="accent1"/>
-          </a:fillRef>
-          <a:effectRef idx="2">
-            <a:schemeClr val="accent1"/>
-          </a:effectRef>
-          <a:fontRef idx="minor">
-            <a:schemeClr val="lt1"/>
-          </a:fontRef>
-        </p:style>
-        <p:txBody>
-          <a:bodyPr rtlCol="0" anchor="ctr"/>
-          <a:lstStyle/>
-          <a:p>
-            <a:pPr algn="ctr"/>
-          </a:p>
-        </p:txBody>
-      </p:sp>
-      <p:sp>
-        <p:nvSpPr>
-          <p:cNvPr id="17" name="Rounded Rectangle 16"/>
-          <p:cNvSpPr/>
-          <p:nvPr/>
-        </p:nvSpPr>
-        <p:spPr>
-          <a:xfrm>
-            <a:off x="7680960" y="2926079"/>
-            <a:ext cx="3977639" cy="914400"/>
-          </a:xfrm>
-          <a:prstGeom prst="roundRect">
-            <a:avLst>
-              <a:gd name="adj" fmla="val 10000"/>
-            </a:avLst>
-          </a:prstGeom>
-          <a:solidFill>
-            <a:srgbClr val="152033"/>
-          </a:solidFill>
-          <a:ln>
-            <a:noFill/>
-          </a:ln>
-        </p:spPr>
-        <p:style>
-          <a:lnRef idx="1">
-            <a:schemeClr val="accent1"/>
-          </a:lnRef>
-          <a:fillRef idx="3">
-            <a:schemeClr val="accent1"/>
-          </a:fillRef>
-          <a:effectRef idx="2">
-            <a:schemeClr val="accent1"/>
-          </a:effectRef>
-          <a:fontRef idx="minor">
-            <a:schemeClr val="lt1"/>
-          </a:fontRef>
-        </p:style>
-        <p:txBody>
-          <a:bodyPr rtlCol="0" anchor="ctr"/>
-          <a:lstStyle/>
-          <a:p>
-            <a:pPr algn="ctr"/>
-          </a:p>
-        </p:txBody>
-      </p:sp>
-      <p:sp>
-        <p:nvSpPr>
-          <p:cNvPr id="18" name="Rectangle 17"/>
-          <p:cNvSpPr/>
-          <p:nvPr/>
-        </p:nvSpPr>
-        <p:spPr>
-          <a:xfrm>
-            <a:off x="7680960" y="2926079"/>
-            <a:ext cx="73152" cy="914400"/>
+            <a:off x="7589520" y="3200400"/>
+            <a:ext cx="73152" cy="3108960"/>
           </a:xfrm>
           <a:prstGeom prst="rect">
             <a:avLst/>
@@ -13062,570 +13555,14 @@
       </p:sp>
       <p:sp>
         <p:nvSpPr>
-          <p:cNvPr id="19" name="TextBox 18"/>
-          <p:cNvSpPr txBox="1"/>
-          <p:nvPr/>
-        </p:nvSpPr>
-        <p:spPr>
-          <a:xfrm>
-            <a:off x="7955279" y="3090671"/>
-            <a:ext cx="2194560" cy="320040"/>
-          </a:xfrm>
-          <a:prstGeom prst="rect">
-            <a:avLst/>
-          </a:prstGeom>
-          <a:noFill/>
-        </p:spPr>
-        <p:txBody>
-          <a:bodyPr wrap="square" anchor="t"/>
-          <a:lstStyle/>
-          <a:p>
-            <a:pPr algn="l">
-              <a:spcBef>
-                <a:spcPts val="0"/>
-              </a:spcBef>
-              <a:spcAft>
-                <a:spcPts val="400"/>
-              </a:spcAft>
-            </a:pPr>
-            <a:r>
-              <a:rPr sz="1400" b="1">
-                <a:solidFill>
-                  <a:srgbClr val="F8FAFC"/>
-                </a:solidFill>
-                <a:latin typeface="Calibri"/>
-              </a:rPr>
-              <a:t>Browsing</a:t>
-            </a:r>
-          </a:p>
-        </p:txBody>
-      </p:sp>
-      <p:sp>
-        <p:nvSpPr>
-          <p:cNvPr id="20" name="TextBox 19"/>
-          <p:cNvSpPr txBox="1"/>
-          <p:nvPr/>
-        </p:nvSpPr>
-        <p:spPr>
-          <a:xfrm>
-            <a:off x="10058400" y="3063239"/>
-            <a:ext cx="1371600" cy="365760"/>
-          </a:xfrm>
-          <a:prstGeom prst="rect">
-            <a:avLst/>
-          </a:prstGeom>
-          <a:noFill/>
-        </p:spPr>
-        <p:txBody>
-          <a:bodyPr wrap="square" anchor="t"/>
-          <a:lstStyle/>
-          <a:p>
-            <a:pPr algn="r">
-              <a:spcBef>
-                <a:spcPts val="0"/>
-              </a:spcBef>
-              <a:spcAft>
-                <a:spcPts val="400"/>
-              </a:spcAft>
-            </a:pPr>
-            <a:r>
-              <a:rPr sz="2200" b="1">
-                <a:solidFill>
-                  <a:srgbClr val="FF2D8F"/>
-                </a:solidFill>
-                <a:latin typeface="Calibri"/>
-              </a:rPr>
-              <a:t>2.79</a:t>
-            </a:r>
-          </a:p>
-        </p:txBody>
-      </p:sp>
-      <p:sp>
-        <p:nvSpPr>
-          <p:cNvPr id="21" name="Rounded Rectangle 20"/>
-          <p:cNvSpPr/>
-          <p:nvPr/>
-        </p:nvSpPr>
-        <p:spPr>
-          <a:xfrm>
-            <a:off x="7955279" y="3520439"/>
-            <a:ext cx="3474720" cy="128016"/>
-          </a:xfrm>
-          <a:prstGeom prst="roundRect">
-            <a:avLst>
-              <a:gd name="adj" fmla="val 50000"/>
-            </a:avLst>
-          </a:prstGeom>
-          <a:solidFill>
-            <a:srgbClr val="1E2A40"/>
-          </a:solidFill>
-          <a:ln>
-            <a:noFill/>
-          </a:ln>
-        </p:spPr>
-        <p:style>
-          <a:lnRef idx="1">
-            <a:schemeClr val="accent1"/>
-          </a:lnRef>
-          <a:fillRef idx="3">
-            <a:schemeClr val="accent1"/>
-          </a:fillRef>
-          <a:effectRef idx="2">
-            <a:schemeClr val="accent1"/>
-          </a:effectRef>
-          <a:fontRef idx="minor">
-            <a:schemeClr val="lt1"/>
-          </a:fontRef>
-        </p:style>
-        <p:txBody>
-          <a:bodyPr rtlCol="0" anchor="ctr"/>
-          <a:lstStyle/>
-          <a:p>
-            <a:pPr algn="ctr"/>
-          </a:p>
-        </p:txBody>
-      </p:sp>
-      <p:sp>
-        <p:nvSpPr>
-          <p:cNvPr id="22" name="Rounded Rectangle 21"/>
-          <p:cNvSpPr/>
-          <p:nvPr/>
-        </p:nvSpPr>
-        <p:spPr>
-          <a:xfrm>
-            <a:off x="7955279" y="3520439"/>
-            <a:ext cx="969446" cy="128016"/>
-          </a:xfrm>
-          <a:prstGeom prst="roundRect">
-            <a:avLst>
-              <a:gd name="adj" fmla="val 50000"/>
-            </a:avLst>
-          </a:prstGeom>
-          <a:solidFill>
-            <a:srgbClr val="FF2D8F"/>
-          </a:solidFill>
-          <a:ln>
-            <a:noFill/>
-          </a:ln>
-        </p:spPr>
-        <p:style>
-          <a:lnRef idx="1">
-            <a:schemeClr val="accent1"/>
-          </a:lnRef>
-          <a:fillRef idx="3">
-            <a:schemeClr val="accent1"/>
-          </a:fillRef>
-          <a:effectRef idx="2">
-            <a:schemeClr val="accent1"/>
-          </a:effectRef>
-          <a:fontRef idx="minor">
-            <a:schemeClr val="lt1"/>
-          </a:fontRef>
-        </p:style>
-        <p:txBody>
-          <a:bodyPr rtlCol="0" anchor="ctr"/>
-          <a:lstStyle/>
-          <a:p>
-            <a:pPr algn="ctr"/>
-          </a:p>
-        </p:txBody>
-      </p:sp>
-      <p:sp>
-        <p:nvSpPr>
-          <p:cNvPr id="23" name="Rounded Rectangle 22"/>
-          <p:cNvSpPr/>
-          <p:nvPr/>
-        </p:nvSpPr>
-        <p:spPr>
-          <a:xfrm>
-            <a:off x="7680960" y="3977639"/>
-            <a:ext cx="3977639" cy="914400"/>
-          </a:xfrm>
-          <a:prstGeom prst="roundRect">
-            <a:avLst>
-              <a:gd name="adj" fmla="val 10000"/>
-            </a:avLst>
-          </a:prstGeom>
-          <a:solidFill>
-            <a:srgbClr val="152033"/>
-          </a:solidFill>
-          <a:ln>
-            <a:noFill/>
-          </a:ln>
-        </p:spPr>
-        <p:style>
-          <a:lnRef idx="1">
-            <a:schemeClr val="accent1"/>
-          </a:lnRef>
-          <a:fillRef idx="3">
-            <a:schemeClr val="accent1"/>
-          </a:fillRef>
-          <a:effectRef idx="2">
-            <a:schemeClr val="accent1"/>
-          </a:effectRef>
-          <a:fontRef idx="minor">
-            <a:schemeClr val="lt1"/>
-          </a:fontRef>
-        </p:style>
-        <p:txBody>
-          <a:bodyPr rtlCol="0" anchor="ctr"/>
-          <a:lstStyle/>
-          <a:p>
-            <a:pPr algn="ctr"/>
-          </a:p>
-        </p:txBody>
-      </p:sp>
-      <p:sp>
-        <p:nvSpPr>
-          <p:cNvPr id="24" name="Rectangle 23"/>
-          <p:cNvSpPr/>
-          <p:nvPr/>
-        </p:nvSpPr>
-        <p:spPr>
-          <a:xfrm>
-            <a:off x="7680960" y="3977639"/>
-            <a:ext cx="73152" cy="914400"/>
-          </a:xfrm>
-          <a:prstGeom prst="rect">
-            <a:avLst/>
-          </a:prstGeom>
-          <a:solidFill>
-            <a:srgbClr val="00D4FF"/>
-          </a:solidFill>
-          <a:ln>
-            <a:noFill/>
-          </a:ln>
-        </p:spPr>
-        <p:style>
-          <a:lnRef idx="1">
-            <a:schemeClr val="accent1"/>
-          </a:lnRef>
-          <a:fillRef idx="3">
-            <a:schemeClr val="accent1"/>
-          </a:fillRef>
-          <a:effectRef idx="2">
-            <a:schemeClr val="accent1"/>
-          </a:effectRef>
-          <a:fontRef idx="minor">
-            <a:schemeClr val="lt1"/>
-          </a:fontRef>
-        </p:style>
-        <p:txBody>
-          <a:bodyPr rtlCol="0" anchor="ctr"/>
-          <a:lstStyle/>
-          <a:p>
-            <a:pPr algn="ctr"/>
-          </a:p>
-        </p:txBody>
-      </p:sp>
-      <p:sp>
-        <p:nvSpPr>
-          <p:cNvPr id="25" name="TextBox 24"/>
-          <p:cNvSpPr txBox="1"/>
-          <p:nvPr/>
-        </p:nvSpPr>
-        <p:spPr>
-          <a:xfrm>
-            <a:off x="7955279" y="4142231"/>
-            <a:ext cx="2194560" cy="320040"/>
-          </a:xfrm>
-          <a:prstGeom prst="rect">
-            <a:avLst/>
-          </a:prstGeom>
-          <a:noFill/>
-        </p:spPr>
-        <p:txBody>
-          <a:bodyPr wrap="square" anchor="t"/>
-          <a:lstStyle/>
-          <a:p>
-            <a:pPr algn="l">
-              <a:spcBef>
-                <a:spcPts val="0"/>
-              </a:spcBef>
-              <a:spcAft>
-                <a:spcPts val="400"/>
-              </a:spcAft>
-            </a:pPr>
-            <a:r>
-              <a:rPr sz="1400" b="1">
-                <a:solidFill>
-                  <a:srgbClr val="F8FAFC"/>
-                </a:solidFill>
-                <a:latin typeface="Calibri"/>
-              </a:rPr>
-              <a:t>Override</a:t>
-            </a:r>
-          </a:p>
-        </p:txBody>
-      </p:sp>
-      <p:sp>
-        <p:nvSpPr>
-          <p:cNvPr id="26" name="TextBox 25"/>
-          <p:cNvSpPr txBox="1"/>
-          <p:nvPr/>
-        </p:nvSpPr>
-        <p:spPr>
-          <a:xfrm>
-            <a:off x="10058400" y="4114799"/>
-            <a:ext cx="1371600" cy="365760"/>
-          </a:xfrm>
-          <a:prstGeom prst="rect">
-            <a:avLst/>
-          </a:prstGeom>
-          <a:noFill/>
-        </p:spPr>
-        <p:txBody>
-          <a:bodyPr wrap="square" anchor="t"/>
-          <a:lstStyle/>
-          <a:p>
-            <a:pPr algn="r">
-              <a:spcBef>
-                <a:spcPts val="0"/>
-              </a:spcBef>
-              <a:spcAft>
-                <a:spcPts val="400"/>
-              </a:spcAft>
-            </a:pPr>
-            <a:r>
-              <a:rPr sz="2200" b="1">
-                <a:solidFill>
-                  <a:srgbClr val="00D4FF"/>
-                </a:solidFill>
-                <a:latin typeface="Calibri"/>
-              </a:rPr>
-              <a:t>4.20</a:t>
-            </a:r>
-          </a:p>
-        </p:txBody>
-      </p:sp>
-      <p:sp>
-        <p:nvSpPr>
-          <p:cNvPr id="27" name="Rounded Rectangle 26"/>
-          <p:cNvSpPr/>
-          <p:nvPr/>
-        </p:nvSpPr>
-        <p:spPr>
-          <a:xfrm>
-            <a:off x="7955279" y="4571999"/>
-            <a:ext cx="3474720" cy="128016"/>
-          </a:xfrm>
-          <a:prstGeom prst="roundRect">
-            <a:avLst>
-              <a:gd name="adj" fmla="val 50000"/>
-            </a:avLst>
-          </a:prstGeom>
-          <a:solidFill>
-            <a:srgbClr val="1E2A40"/>
-          </a:solidFill>
-          <a:ln>
-            <a:noFill/>
-          </a:ln>
-        </p:spPr>
-        <p:style>
-          <a:lnRef idx="1">
-            <a:schemeClr val="accent1"/>
-          </a:lnRef>
-          <a:fillRef idx="3">
-            <a:schemeClr val="accent1"/>
-          </a:fillRef>
-          <a:effectRef idx="2">
-            <a:schemeClr val="accent1"/>
-          </a:effectRef>
-          <a:fontRef idx="minor">
-            <a:schemeClr val="lt1"/>
-          </a:fontRef>
-        </p:style>
-        <p:txBody>
-          <a:bodyPr rtlCol="0" anchor="ctr"/>
-          <a:lstStyle/>
-          <a:p>
-            <a:pPr algn="ctr"/>
-          </a:p>
-        </p:txBody>
-      </p:sp>
-      <p:sp>
-        <p:nvSpPr>
-          <p:cNvPr id="28" name="Rounded Rectangle 27"/>
-          <p:cNvSpPr/>
-          <p:nvPr/>
-        </p:nvSpPr>
-        <p:spPr>
-          <a:xfrm>
-            <a:off x="7955279" y="4571999"/>
-            <a:ext cx="1459382" cy="128016"/>
-          </a:xfrm>
-          <a:prstGeom prst="roundRect">
-            <a:avLst>
-              <a:gd name="adj" fmla="val 50000"/>
-            </a:avLst>
-          </a:prstGeom>
-          <a:solidFill>
-            <a:srgbClr val="00D4FF"/>
-          </a:solidFill>
-          <a:ln>
-            <a:noFill/>
-          </a:ln>
-        </p:spPr>
-        <p:style>
-          <a:lnRef idx="1">
-            <a:schemeClr val="accent1"/>
-          </a:lnRef>
-          <a:fillRef idx="3">
-            <a:schemeClr val="accent1"/>
-          </a:fillRef>
-          <a:effectRef idx="2">
-            <a:schemeClr val="accent1"/>
-          </a:effectRef>
-          <a:fontRef idx="minor">
-            <a:schemeClr val="lt1"/>
-          </a:fontRef>
-        </p:style>
-        <p:txBody>
-          <a:bodyPr rtlCol="0" anchor="ctr"/>
-          <a:lstStyle/>
-          <a:p>
-            <a:pPr algn="ctr"/>
-          </a:p>
-        </p:txBody>
-      </p:sp>
-      <p:sp>
-        <p:nvSpPr>
-          <p:cNvPr id="29" name="Rounded Rectangle 28"/>
-          <p:cNvSpPr/>
-          <p:nvPr/>
-        </p:nvSpPr>
-        <p:spPr>
-          <a:xfrm>
-            <a:off x="7680960" y="5029200"/>
-            <a:ext cx="3977639" cy="914400"/>
-          </a:xfrm>
-          <a:prstGeom prst="roundRect">
-            <a:avLst>
-              <a:gd name="adj" fmla="val 10000"/>
-            </a:avLst>
-          </a:prstGeom>
-          <a:solidFill>
-            <a:srgbClr val="152033"/>
-          </a:solidFill>
-          <a:ln>
-            <a:noFill/>
-          </a:ln>
-        </p:spPr>
-        <p:style>
-          <a:lnRef idx="1">
-            <a:schemeClr val="accent1"/>
-          </a:lnRef>
-          <a:fillRef idx="3">
-            <a:schemeClr val="accent1"/>
-          </a:fillRef>
-          <a:effectRef idx="2">
-            <a:schemeClr val="accent1"/>
-          </a:effectRef>
-          <a:fontRef idx="minor">
-            <a:schemeClr val="lt1"/>
-          </a:fontRef>
-        </p:style>
-        <p:txBody>
-          <a:bodyPr rtlCol="0" anchor="ctr"/>
-          <a:lstStyle/>
-          <a:p>
-            <a:pPr algn="ctr"/>
-          </a:p>
-        </p:txBody>
-      </p:sp>
-      <p:sp>
-        <p:nvSpPr>
-          <p:cNvPr id="30" name="Rectangle 29"/>
-          <p:cNvSpPr/>
-          <p:nvPr/>
-        </p:nvSpPr>
-        <p:spPr>
-          <a:xfrm>
-            <a:off x="7680960" y="5029200"/>
-            <a:ext cx="73152" cy="914400"/>
-          </a:xfrm>
-          <a:prstGeom prst="rect">
-            <a:avLst/>
-          </a:prstGeom>
-          <a:solidFill>
-            <a:srgbClr val="FF2D8F"/>
-          </a:solidFill>
-          <a:ln>
-            <a:noFill/>
-          </a:ln>
-        </p:spPr>
-        <p:style>
-          <a:lnRef idx="1">
-            <a:schemeClr val="accent1"/>
-          </a:lnRef>
-          <a:fillRef idx="3">
-            <a:schemeClr val="accent1"/>
-          </a:fillRef>
-          <a:effectRef idx="2">
-            <a:schemeClr val="accent1"/>
-          </a:effectRef>
-          <a:fontRef idx="minor">
-            <a:schemeClr val="lt1"/>
-          </a:fontRef>
-        </p:style>
-        <p:txBody>
-          <a:bodyPr rtlCol="0" anchor="ctr"/>
-          <a:lstStyle/>
-          <a:p>
-            <a:pPr algn="ctr"/>
-          </a:p>
-        </p:txBody>
-      </p:sp>
-      <p:sp>
-        <p:nvSpPr>
-          <p:cNvPr id="31" name="TextBox 30"/>
-          <p:cNvSpPr txBox="1"/>
-          <p:nvPr/>
-        </p:nvSpPr>
-        <p:spPr>
-          <a:xfrm>
-            <a:off x="7955279" y="5193792"/>
-            <a:ext cx="2194560" cy="320040"/>
-          </a:xfrm>
-          <a:prstGeom prst="rect">
-            <a:avLst/>
-          </a:prstGeom>
-          <a:noFill/>
-        </p:spPr>
-        <p:txBody>
-          <a:bodyPr wrap="square" anchor="t"/>
-          <a:lstStyle/>
-          <a:p>
-            <a:pPr algn="l">
-              <a:spcBef>
-                <a:spcPts val="0"/>
-              </a:spcBef>
-              <a:spcAft>
-                <a:spcPts val="400"/>
-              </a:spcAft>
-            </a:pPr>
-            <a:r>
-              <a:rPr sz="1400" b="1">
-                <a:solidFill>
-                  <a:srgbClr val="F8FAFC"/>
-                </a:solidFill>
-                <a:latin typeface="Calibri"/>
-              </a:rPr>
-              <a:t>Boundary</a:t>
-            </a:r>
-          </a:p>
-        </p:txBody>
-      </p:sp>
-      <p:sp>
-        <p:nvSpPr>
           <p:cNvPr id="32" name="TextBox 31"/>
           <p:cNvSpPr txBox="1"/>
           <p:nvPr/>
         </p:nvSpPr>
         <p:spPr>
           <a:xfrm>
-            <a:off x="10058400" y="5166360"/>
-            <a:ext cx="1371600" cy="365760"/>
+            <a:off x="7818120" y="3383280"/>
+            <a:ext cx="3657600" cy="2743200"/>
           </a:xfrm>
           <a:prstGeom prst="rect">
             <a:avLst/>
@@ -13636,119 +13573,219 @@
           <a:bodyPr wrap="square" anchor="t"/>
           <a:lstStyle/>
           <a:p>
-            <a:pPr algn="r">
-              <a:spcBef>
-                <a:spcPts val="0"/>
-              </a:spcBef>
-              <a:spcAft>
-                <a:spcPts val="400"/>
-              </a:spcAft>
-            </a:pPr>
-            <a:r>
-              <a:rPr sz="2200" b="1">
+            <a:pPr algn="l">
+              <a:spcBef>
+                <a:spcPts val="0"/>
+              </a:spcBef>
+              <a:spcAft>
+                <a:spcPts val="400"/>
+              </a:spcAft>
+            </a:pPr>
+            <a:r>
+              <a:rPr sz="1400" b="1">
                 <a:solidFill>
                   <a:srgbClr val="FF2D8F"/>
                 </a:solidFill>
                 <a:latin typeface="Calibri"/>
               </a:rPr>
-              <a:t>3.00</a:t>
-            </a:r>
-          </a:p>
-        </p:txBody>
-      </p:sp>
-      <p:sp>
-        <p:nvSpPr>
-          <p:cNvPr id="33" name="Rounded Rectangle 32"/>
-          <p:cNvSpPr/>
-          <p:nvPr/>
-        </p:nvSpPr>
-        <p:spPr>
-          <a:xfrm>
-            <a:off x="7955279" y="5623560"/>
-            <a:ext cx="3474720" cy="128016"/>
-          </a:xfrm>
-          <a:prstGeom prst="roundRect">
-            <a:avLst>
-              <a:gd name="adj" fmla="val 50000"/>
-            </a:avLst>
-          </a:prstGeom>
-          <a:solidFill>
-            <a:srgbClr val="1E2A40"/>
-          </a:solidFill>
-          <a:ln>
-            <a:noFill/>
-          </a:ln>
-        </p:spPr>
-        <p:style>
-          <a:lnRef idx="1">
-            <a:schemeClr val="accent1"/>
-          </a:lnRef>
-          <a:fillRef idx="3">
-            <a:schemeClr val="accent1"/>
-          </a:fillRef>
-          <a:effectRef idx="2">
-            <a:schemeClr val="accent1"/>
-          </a:effectRef>
-          <a:fontRef idx="minor">
-            <a:schemeClr val="lt1"/>
-          </a:fontRef>
-        </p:style>
-        <p:txBody>
-          <a:bodyPr rtlCol="0" anchor="ctr"/>
-          <a:lstStyle/>
-          <a:p>
-            <a:pPr algn="ctr"/>
-          </a:p>
-        </p:txBody>
-      </p:sp>
-      <p:sp>
-        <p:nvSpPr>
-          <p:cNvPr id="34" name="Rounded Rectangle 33"/>
-          <p:cNvSpPr/>
-          <p:nvPr/>
-        </p:nvSpPr>
-        <p:spPr>
-          <a:xfrm>
-            <a:off x="7955279" y="5623560"/>
-            <a:ext cx="1042415" cy="128016"/>
-          </a:xfrm>
-          <a:prstGeom prst="roundRect">
-            <a:avLst>
-              <a:gd name="adj" fmla="val 50000"/>
-            </a:avLst>
-          </a:prstGeom>
-          <a:solidFill>
-            <a:srgbClr val="FF2D8F"/>
-          </a:solidFill>
-          <a:ln>
-            <a:noFill/>
-          </a:ln>
-        </p:spPr>
-        <p:style>
-          <a:lnRef idx="1">
-            <a:schemeClr val="accent1"/>
-          </a:lnRef>
-          <a:fillRef idx="3">
-            <a:schemeClr val="accent1"/>
-          </a:fillRef>
-          <a:effectRef idx="2">
-            <a:schemeClr val="accent1"/>
-          </a:effectRef>
-          <a:fontRef idx="minor">
-            <a:schemeClr val="lt1"/>
-          </a:fontRef>
-        </p:style>
-        <p:txBody>
-          <a:bodyPr rtlCol="0" anchor="ctr"/>
-          <a:lstStyle/>
-          <a:p>
-            <a:pPr algn="ctr"/>
-          </a:p>
-        </p:txBody>
-      </p:sp>
-      <p:sp>
-        <p:nvSpPr>
-          <p:cNvPr id="35" name="Rectangle 34"/>
+              <a:t>What moved the needle</a:t>
+            </a:r>
+          </a:p>
+          <a:p>
+            <a:pPr algn="l">
+              <a:spcBef>
+                <a:spcPts val="0"/>
+              </a:spcBef>
+              <a:spcAft>
+                <a:spcPts val="400"/>
+              </a:spcAft>
+            </a:pPr>
+            <a:r>
+              <a:rPr sz="400" b="0">
+                <a:solidFill>
+                  <a:srgbClr val="8B9BB4"/>
+                </a:solidFill>
+                <a:latin typeface="Calibri"/>
+              </a:rPr>
+              <a:t/>
+            </a:r>
+          </a:p>
+          <a:p>
+            <a:pPr algn="l">
+              <a:spcBef>
+                <a:spcPts val="0"/>
+              </a:spcBef>
+              <a:spcAft>
+                <a:spcPts val="400"/>
+              </a:spcAft>
+            </a:pPr>
+            <a:r>
+              <a:rPr sz="1300" b="0">
+                <a:solidFill>
+                  <a:srgbClr val="F8FAFC"/>
+                </a:solidFill>
+                <a:latin typeface="Calibri"/>
+              </a:rPr>
+              <a:t>Override hygiene (soft-only wipe)</a:t>
+            </a:r>
+          </a:p>
+          <a:p>
+            <a:pPr algn="l">
+              <a:spcBef>
+                <a:spcPts val="0"/>
+              </a:spcBef>
+              <a:spcAft>
+                <a:spcPts val="400"/>
+              </a:spcAft>
+            </a:pPr>
+            <a:r>
+              <a:rPr sz="1300" b="0">
+                <a:solidFill>
+                  <a:srgbClr val="F8FAFC"/>
+                </a:solidFill>
+                <a:latin typeface="Calibri"/>
+              </a:rPr>
+              <a:t>Hybrid dense hash lane</a:t>
+            </a:r>
+          </a:p>
+          <a:p>
+            <a:pPr algn="l">
+              <a:spcBef>
+                <a:spcPts val="0"/>
+              </a:spcBef>
+              <a:spcAft>
+                <a:spcPts val="400"/>
+              </a:spcAft>
+            </a:pPr>
+            <a:r>
+              <a:rPr sz="1300" b="0">
+                <a:solidFill>
+                  <a:srgbClr val="F8FAFC"/>
+                </a:solidFill>
+                <a:latin typeface="Calibri"/>
+              </a:rPr>
+              <a:t>Family + audience routing</a:t>
+            </a:r>
+          </a:p>
+          <a:p>
+            <a:pPr algn="l">
+              <a:spcBef>
+                <a:spcPts val="0"/>
+              </a:spcBef>
+              <a:spcAft>
+                <a:spcPts val="400"/>
+              </a:spcAft>
+            </a:pPr>
+            <a:r>
+              <a:rPr sz="1300" b="0">
+                <a:solidFill>
+                  <a:srgbClr val="F8FAFC"/>
+                </a:solidFill>
+                <a:latin typeface="Calibri"/>
+              </a:rPr>
+              <a:t>other-first clarify policy</a:t>
+            </a:r>
+          </a:p>
+          <a:p>
+            <a:pPr algn="l">
+              <a:spcBef>
+                <a:spcPts val="0"/>
+              </a:spcBef>
+              <a:spcAft>
+                <a:spcPts val="400"/>
+              </a:spcAft>
+            </a:pPr>
+            <a:r>
+              <a:rPr sz="1300" b="0">
+                <a:solidFill>
+                  <a:srgbClr val="F8FAFC"/>
+                </a:solidFill>
+                <a:latin typeface="Calibri"/>
+              </a:rPr>
+              <a:t>Multi-slot freeform atomize</a:t>
+            </a:r>
+          </a:p>
+          <a:p>
+            <a:pPr algn="l">
+              <a:spcBef>
+                <a:spcPts val="0"/>
+              </a:spcBef>
+              <a:spcAft>
+                <a:spcPts val="400"/>
+              </a:spcAft>
+            </a:pPr>
+            <a:r>
+              <a:rPr sz="1300" b="0">
+                <a:solidFill>
+                  <a:srgbClr val="F8FAFC"/>
+                </a:solidFill>
+                <a:latin typeface="Calibri"/>
+              </a:rPr>
+              <a:t>Cold-start profile/rating priors</a:t>
+            </a:r>
+          </a:p>
+          <a:p>
+            <a:pPr algn="l">
+              <a:spcBef>
+                <a:spcPts val="0"/>
+              </a:spcBef>
+              <a:spcAft>
+                <a:spcPts val="400"/>
+              </a:spcAft>
+            </a:pPr>
+            <a:r>
+              <a:rPr sz="600" b="0">
+                <a:solidFill>
+                  <a:srgbClr val="8B9BB4"/>
+                </a:solidFill>
+                <a:latin typeface="Calibri"/>
+              </a:rPr>
+              <a:t/>
+            </a:r>
+          </a:p>
+          <a:p>
+            <a:pPr algn="l">
+              <a:spcBef>
+                <a:spcPts val="0"/>
+              </a:spcBef>
+              <a:spcAft>
+                <a:spcPts val="400"/>
+              </a:spcAft>
+            </a:pPr>
+            <a:r>
+              <a:rPr sz="1200" b="0">
+                <a:solidFill>
+                  <a:srgbClr val="8B9BB4"/>
+                </a:solidFill>
+                <a:latin typeface="Calibri"/>
+              </a:rPr>
+              <a:t>Each kept only if Tech ≥ floor</a:t>
+            </a:r>
+          </a:p>
+          <a:p>
+            <a:pPr algn="l">
+              <a:spcBef>
+                <a:spcPts val="0"/>
+              </a:spcBef>
+              <a:spcAft>
+                <a:spcPts val="400"/>
+              </a:spcAft>
+            </a:pPr>
+            <a:r>
+              <a:rPr sz="1300" b="1">
+                <a:solidFill>
+                  <a:srgbClr val="34D399"/>
+                </a:solidFill>
+                <a:latin typeface="Calibri"/>
+              </a:rPr>
+              <a:t>Tokens default path: 0</a:t>
+            </a:r>
+          </a:p>
+        </p:txBody>
+      </p:sp>
+      <p:sp>
+        <p:nvSpPr>
+          <p:cNvPr id="33" name="Rectangle 32"/>
           <p:cNvSpPr/>
           <p:nvPr/>
         </p:nvSpPr>
@@ -13791,7 +13828,7 @@
       </p:sp>
       <p:sp>
         <p:nvSpPr>
-          <p:cNvPr id="36" name="TextBox 35"/>
+          <p:cNvPr id="34" name="TextBox 33"/>
           <p:cNvSpPr txBox="1"/>
           <p:nvPr/>
         </p:nvSpPr>
@@ -13831,7 +13868,7 @@
       </p:sp>
       <p:sp>
         <p:nvSpPr>
-          <p:cNvPr id="37" name="TextBox 36"/>
+          <p:cNvPr id="35" name="TextBox 34"/>
           <p:cNvSpPr txBox="1"/>
           <p:nvPr/>
         </p:nvSpPr>
@@ -13864,7 +13901,7 @@
                 </a:solidFill>
                 <a:latin typeface="Calibri"/>
               </a:rPr>
-              <a:t>7 / 10</a:t>
+              <a:t>7 / 11</a:t>
             </a:r>
           </a:p>
         </p:txBody>
@@ -14016,7 +14053,7 @@
                 </a:solidFill>
                 <a:latin typeface="Calibri"/>
               </a:rPr>
-              <a:t>07  ·  DEMO</a:t>
+              <a:t>07  ·  BY SCENARIO</a:t>
             </a:r>
           </a:p>
         </p:txBody>
@@ -14056,7 +14093,7 @@
                 </a:solidFill>
                 <a:latin typeface="Calibri"/>
               </a:rPr>
-              <a:t>Astrid CLI — live multi-turn</a:t>
+              <a:t>Hit@10 holds across buying, browse, override, boundary</a:t>
             </a:r>
           </a:p>
         </p:txBody>
@@ -14096,7 +14133,7 @@
                 </a:solidFill>
                 <a:latin typeface="Calibri"/>
               </a:rPr>
-              <a:t>python3 cli_chat.py --dense hash   ·   /new  /state  /quit</a:t>
+              <a:t>Override pays more MTTC (mind-change cost) but still Hit 0.967</a:t>
             </a:r>
           </a:p>
         </p:txBody>
@@ -14110,536 +14147,11 @@
         <p:spPr>
           <a:xfrm>
             <a:off x="502920" y="1417320"/>
-            <a:ext cx="7040880" cy="4754880"/>
+            <a:ext cx="6949440" cy="4754880"/>
           </a:xfrm>
           <a:prstGeom prst="roundRect">
             <a:avLst>
               <a:gd name="adj" fmla="val 8000"/>
-            </a:avLst>
-          </a:prstGeom>
-          <a:solidFill>
-            <a:srgbClr val="080E18"/>
-          </a:solidFill>
-          <a:ln>
-            <a:noFill/>
-          </a:ln>
-        </p:spPr>
-        <p:style>
-          <a:lnRef idx="1">
-            <a:schemeClr val="accent1"/>
-          </a:lnRef>
-          <a:fillRef idx="3">
-            <a:schemeClr val="accent1"/>
-          </a:fillRef>
-          <a:effectRef idx="2">
-            <a:schemeClr val="accent1"/>
-          </a:effectRef>
-          <a:fontRef idx="minor">
-            <a:schemeClr val="lt1"/>
-          </a:fontRef>
-        </p:style>
-        <p:txBody>
-          <a:bodyPr rtlCol="0" anchor="ctr"/>
-          <a:lstStyle/>
-          <a:p>
-            <a:pPr algn="ctr"/>
-          </a:p>
-        </p:txBody>
-      </p:sp>
-      <p:sp>
-        <p:nvSpPr>
-          <p:cNvPr id="8" name="Rectangle 7"/>
-          <p:cNvSpPr/>
-          <p:nvPr/>
-        </p:nvSpPr>
-        <p:spPr>
-          <a:xfrm>
-            <a:off x="502920" y="1417320"/>
-            <a:ext cx="7040880" cy="365760"/>
-          </a:xfrm>
-          <a:prstGeom prst="rect">
-            <a:avLst/>
-          </a:prstGeom>
-          <a:solidFill>
-            <a:srgbClr val="121A28"/>
-          </a:solidFill>
-          <a:ln>
-            <a:noFill/>
-          </a:ln>
-        </p:spPr>
-        <p:style>
-          <a:lnRef idx="1">
-            <a:schemeClr val="accent1"/>
-          </a:lnRef>
-          <a:fillRef idx="3">
-            <a:schemeClr val="accent1"/>
-          </a:fillRef>
-          <a:effectRef idx="2">
-            <a:schemeClr val="accent1"/>
-          </a:effectRef>
-          <a:fontRef idx="minor">
-            <a:schemeClr val="lt1"/>
-          </a:fontRef>
-        </p:style>
-        <p:txBody>
-          <a:bodyPr rtlCol="0" anchor="ctr"/>
-          <a:lstStyle/>
-          <a:p>
-            <a:pPr algn="ctr"/>
-          </a:p>
-        </p:txBody>
-      </p:sp>
-      <p:sp>
-        <p:nvSpPr>
-          <p:cNvPr id="9" name="Oval 8"/>
-          <p:cNvSpPr/>
-          <p:nvPr/>
-        </p:nvSpPr>
-        <p:spPr>
-          <a:xfrm>
-            <a:off x="685800" y="1508760"/>
-            <a:ext cx="146304" cy="146304"/>
-          </a:xfrm>
-          <a:prstGeom prst="ellipse">
-            <a:avLst/>
-          </a:prstGeom>
-          <a:solidFill>
-            <a:srgbClr val="FF5F57"/>
-          </a:solidFill>
-          <a:ln>
-            <a:noFill/>
-          </a:ln>
-        </p:spPr>
-        <p:style>
-          <a:lnRef idx="1">
-            <a:schemeClr val="accent1"/>
-          </a:lnRef>
-          <a:fillRef idx="3">
-            <a:schemeClr val="accent1"/>
-          </a:fillRef>
-          <a:effectRef idx="2">
-            <a:schemeClr val="accent1"/>
-          </a:effectRef>
-          <a:fontRef idx="minor">
-            <a:schemeClr val="lt1"/>
-          </a:fontRef>
-        </p:style>
-        <p:txBody>
-          <a:bodyPr rtlCol="0" anchor="ctr"/>
-          <a:lstStyle/>
-          <a:p>
-            <a:pPr algn="ctr"/>
-          </a:p>
-        </p:txBody>
-      </p:sp>
-      <p:sp>
-        <p:nvSpPr>
-          <p:cNvPr id="10" name="Oval 9"/>
-          <p:cNvSpPr/>
-          <p:nvPr/>
-        </p:nvSpPr>
-        <p:spPr>
-          <a:xfrm>
-            <a:off x="941832" y="1508760"/>
-            <a:ext cx="146304" cy="146304"/>
-          </a:xfrm>
-          <a:prstGeom prst="ellipse">
-            <a:avLst/>
-          </a:prstGeom>
-          <a:solidFill>
-            <a:srgbClr val="FEBC2E"/>
-          </a:solidFill>
-          <a:ln>
-            <a:noFill/>
-          </a:ln>
-        </p:spPr>
-        <p:style>
-          <a:lnRef idx="1">
-            <a:schemeClr val="accent1"/>
-          </a:lnRef>
-          <a:fillRef idx="3">
-            <a:schemeClr val="accent1"/>
-          </a:fillRef>
-          <a:effectRef idx="2">
-            <a:schemeClr val="accent1"/>
-          </a:effectRef>
-          <a:fontRef idx="minor">
-            <a:schemeClr val="lt1"/>
-          </a:fontRef>
-        </p:style>
-        <p:txBody>
-          <a:bodyPr rtlCol="0" anchor="ctr"/>
-          <a:lstStyle/>
-          <a:p>
-            <a:pPr algn="ctr"/>
-          </a:p>
-        </p:txBody>
-      </p:sp>
-      <p:sp>
-        <p:nvSpPr>
-          <p:cNvPr id="11" name="Oval 10"/>
-          <p:cNvSpPr/>
-          <p:nvPr/>
-        </p:nvSpPr>
-        <p:spPr>
-          <a:xfrm>
-            <a:off x="1197864" y="1508760"/>
-            <a:ext cx="146304" cy="146304"/>
-          </a:xfrm>
-          <a:prstGeom prst="ellipse">
-            <a:avLst/>
-          </a:prstGeom>
-          <a:solidFill>
-            <a:srgbClr val="28C840"/>
-          </a:solidFill>
-          <a:ln>
-            <a:noFill/>
-          </a:ln>
-        </p:spPr>
-        <p:style>
-          <a:lnRef idx="1">
-            <a:schemeClr val="accent1"/>
-          </a:lnRef>
-          <a:fillRef idx="3">
-            <a:schemeClr val="accent1"/>
-          </a:fillRef>
-          <a:effectRef idx="2">
-            <a:schemeClr val="accent1"/>
-          </a:effectRef>
-          <a:fontRef idx="minor">
-            <a:schemeClr val="lt1"/>
-          </a:fontRef>
-        </p:style>
-        <p:txBody>
-          <a:bodyPr rtlCol="0" anchor="ctr"/>
-          <a:lstStyle/>
-          <a:p>
-            <a:pPr algn="ctr"/>
-          </a:p>
-        </p:txBody>
-      </p:sp>
-      <p:sp>
-        <p:nvSpPr>
-          <p:cNvPr id="12" name="TextBox 11"/>
-          <p:cNvSpPr txBox="1"/>
-          <p:nvPr/>
-        </p:nvSpPr>
-        <p:spPr>
-          <a:xfrm>
-            <a:off x="1828800" y="1463040"/>
-            <a:ext cx="4572000" cy="274320"/>
-          </a:xfrm>
-          <a:prstGeom prst="rect">
-            <a:avLst/>
-          </a:prstGeom>
-          <a:noFill/>
-        </p:spPr>
-        <p:txBody>
-          <a:bodyPr wrap="square" anchor="t"/>
-          <a:lstStyle/>
-          <a:p>
-            <a:pPr algn="l">
-              <a:spcBef>
-                <a:spcPts val="0"/>
-              </a:spcBef>
-              <a:spcAft>
-                <a:spcPts val="400"/>
-              </a:spcAft>
-            </a:pPr>
-            <a:r>
-              <a:rPr sz="1200" b="0">
-                <a:solidFill>
-                  <a:srgbClr val="8B9BB4"/>
-                </a:solidFill>
-                <a:latin typeface="Calibri"/>
-              </a:rPr>
-              <a:t>astrid — dense=hash</a:t>
-            </a:r>
-          </a:p>
-        </p:txBody>
-      </p:sp>
-      <p:sp>
-        <p:nvSpPr>
-          <p:cNvPr id="13" name="TextBox 12"/>
-          <p:cNvSpPr txBox="1"/>
-          <p:nvPr/>
-        </p:nvSpPr>
-        <p:spPr>
-          <a:xfrm>
-            <a:off x="777240" y="1965960"/>
-            <a:ext cx="6583680" cy="4023360"/>
-          </a:xfrm>
-          <a:prstGeom prst="rect">
-            <a:avLst/>
-          </a:prstGeom>
-          <a:noFill/>
-        </p:spPr>
-        <p:txBody>
-          <a:bodyPr wrap="square" anchor="t"/>
-          <a:lstStyle/>
-          <a:p>
-            <a:pPr algn="l">
-              <a:spcBef>
-                <a:spcPts val="0"/>
-              </a:spcBef>
-              <a:spcAft>
-                <a:spcPts val="400"/>
-              </a:spcAft>
-            </a:pPr>
-            <a:r>
-              <a:rPr sz="1300" b="0">
-                <a:solidFill>
-                  <a:srgbClr val="64748B"/>
-                </a:solidFill>
-                <a:latin typeface="Calibri"/>
-              </a:rPr>
-              <a:t>$ python3 cli_chat.py --dense hash</a:t>
-            </a:r>
-          </a:p>
-          <a:p>
-            <a:pPr algn="l">
-              <a:spcBef>
-                <a:spcPts val="0"/>
-              </a:spcBef>
-              <a:spcAft>
-                <a:spcPts val="400"/>
-              </a:spcAft>
-            </a:pPr>
-            <a:r>
-              <a:rPr sz="600" b="0">
-                <a:solidFill>
-                  <a:srgbClr val="8B9BB4"/>
-                </a:solidFill>
-                <a:latin typeface="Calibri"/>
-              </a:rPr>
-              <a:t/>
-            </a:r>
-          </a:p>
-          <a:p>
-            <a:pPr algn="l">
-              <a:spcBef>
-                <a:spcPts val="0"/>
-              </a:spcBef>
-              <a:spcAft>
-                <a:spcPts val="400"/>
-              </a:spcAft>
-            </a:pPr>
-            <a:r>
-              <a:rPr sz="1400" b="1">
-                <a:solidFill>
-                  <a:srgbClr val="FF2D8F"/>
-                </a:solidFill>
-                <a:latin typeface="Calibri"/>
-              </a:rPr>
-              <a:t>  Astrid  ·  quiet clarity for every aisle</a:t>
-            </a:r>
-          </a:p>
-          <a:p>
-            <a:pPr algn="l">
-              <a:spcBef>
-                <a:spcPts val="0"/>
-              </a:spcBef>
-              <a:spcAft>
-                <a:spcPts val="400"/>
-              </a:spcAft>
-            </a:pPr>
-            <a:r>
-              <a:rPr sz="600" b="0">
-                <a:solidFill>
-                  <a:srgbClr val="8B9BB4"/>
-                </a:solidFill>
-                <a:latin typeface="Calibri"/>
-              </a:rPr>
-              <a:t/>
-            </a:r>
-          </a:p>
-          <a:p>
-            <a:pPr algn="l">
-              <a:spcBef>
-                <a:spcPts val="0"/>
-              </a:spcBef>
-              <a:spcAft>
-                <a:spcPts val="400"/>
-              </a:spcAft>
-            </a:pPr>
-            <a:r>
-              <a:rPr sz="1300" b="0">
-                <a:solidFill>
-                  <a:srgbClr val="00D4FF"/>
-                </a:solidFill>
-                <a:latin typeface="Calibri"/>
-              </a:rPr>
-              <a:t>  You · shoes for my son</a:t>
-            </a:r>
-          </a:p>
-          <a:p>
-            <a:pPr algn="l">
-              <a:spcBef>
-                <a:spcPts val="0"/>
-              </a:spcBef>
-              <a:spcAft>
-                <a:spcPts val="400"/>
-              </a:spcAft>
-            </a:pPr>
-            <a:r>
-              <a:rPr sz="1300" b="0">
-                <a:solidFill>
-                  <a:srgbClr val="F8FAFC"/>
-                </a:solidFill>
-                <a:latin typeface="Calibri"/>
-              </a:rPr>
-              <a:t>  Astrid: Got it (footwear; boys). Any color…?</a:t>
-            </a:r>
-          </a:p>
-          <a:p>
-            <a:pPr algn="l">
-              <a:spcBef>
-                <a:spcPts val="0"/>
-              </a:spcBef>
-              <a:spcAft>
-                <a:spcPts val="400"/>
-              </a:spcAft>
-            </a:pPr>
-            <a:r>
-              <a:rPr sz="1200" b="0">
-                <a:solidFill>
-                  <a:srgbClr val="FBBF24"/>
-                </a:solidFill>
-                <a:latin typeface="Calibri"/>
-              </a:rPr>
-              <a:t>  ↳ ask · other     Top-3 footwear titles</a:t>
-            </a:r>
-          </a:p>
-          <a:p>
-            <a:pPr algn="l">
-              <a:spcBef>
-                <a:spcPts val="0"/>
-              </a:spcBef>
-              <a:spcAft>
-                <a:spcPts val="400"/>
-              </a:spcAft>
-            </a:pPr>
-            <a:r>
-              <a:rPr sz="600" b="0">
-                <a:solidFill>
-                  <a:srgbClr val="8B9BB4"/>
-                </a:solidFill>
-                <a:latin typeface="Calibri"/>
-              </a:rPr>
-              <a:t/>
-            </a:r>
-          </a:p>
-          <a:p>
-            <a:pPr algn="l">
-              <a:spcBef>
-                <a:spcPts val="0"/>
-              </a:spcBef>
-              <a:spcAft>
-                <a:spcPts val="400"/>
-              </a:spcAft>
-            </a:pPr>
-            <a:r>
-              <a:rPr sz="1300" b="0">
-                <a:solidFill>
-                  <a:srgbClr val="00D4FF"/>
-                </a:solidFill>
-                <a:latin typeface="Calibri"/>
-              </a:rPr>
-              <a:t>  You · Actually forget sneakers, dress shoes size 9</a:t>
-            </a:r>
-          </a:p>
-          <a:p>
-            <a:pPr algn="l">
-              <a:spcBef>
-                <a:spcPts val="0"/>
-              </a:spcBef>
-              <a:spcAft>
-                <a:spcPts val="400"/>
-              </a:spcAft>
-            </a:pPr>
-            <a:r>
-              <a:rPr sz="1300" b="0">
-                <a:solidFill>
-                  <a:srgbClr val="F8FAFC"/>
-                </a:solidFill>
-                <a:latin typeface="Calibri"/>
-              </a:rPr>
-              <a:t>  Astrid: Updated (footwear; size 9). Color?</a:t>
-            </a:r>
-          </a:p>
-          <a:p>
-            <a:pPr algn="l">
-              <a:spcBef>
-                <a:spcPts val="0"/>
-              </a:spcBef>
-              <a:spcAft>
-                <a:spcPts val="400"/>
-              </a:spcAft>
-            </a:pPr>
-            <a:r>
-              <a:rPr sz="1200" b="0">
-                <a:solidFill>
-                  <a:srgbClr val="FB7185"/>
-                </a:solidFill>
-                <a:latin typeface="Calibri"/>
-              </a:rPr>
-              <a:t>  ↳ override wiped soft prefs · kept size path</a:t>
-            </a:r>
-          </a:p>
-          <a:p>
-            <a:pPr algn="l">
-              <a:spcBef>
-                <a:spcPts val="0"/>
-              </a:spcBef>
-              <a:spcAft>
-                <a:spcPts val="400"/>
-              </a:spcAft>
-            </a:pPr>
-            <a:r>
-              <a:rPr sz="600" b="0">
-                <a:solidFill>
-                  <a:srgbClr val="8B9BB4"/>
-                </a:solidFill>
-                <a:latin typeface="Calibri"/>
-              </a:rPr>
-              <a:t/>
-            </a:r>
-          </a:p>
-          <a:p>
-            <a:pPr algn="l">
-              <a:spcBef>
-                <a:spcPts val="0"/>
-              </a:spcBef>
-              <a:spcAft>
-                <a:spcPts val="400"/>
-              </a:spcAft>
-            </a:pPr>
-            <a:r>
-              <a:rPr sz="1200" b="0">
-                <a:solidFill>
-                  <a:srgbClr val="8B9BB4"/>
-                </a:solidFill>
-                <a:latin typeface="Calibri"/>
-              </a:rPr>
-              <a:t>  /state → family=footwear  size=9  asked={other}</a:t>
-            </a:r>
-          </a:p>
-        </p:txBody>
-      </p:sp>
-      <p:sp>
-        <p:nvSpPr>
-          <p:cNvPr id="14" name="Rounded Rectangle 13"/>
-          <p:cNvSpPr/>
-          <p:nvPr/>
-        </p:nvSpPr>
-        <p:spPr>
-          <a:xfrm>
-            <a:off x="7772400" y="1417320"/>
-            <a:ext cx="3931920" cy="1371600"/>
-          </a:xfrm>
-          <a:prstGeom prst="roundRect">
-            <a:avLst>
-              <a:gd name="adj" fmla="val 10000"/>
             </a:avLst>
           </a:prstGeom>
           <a:solidFill>
@@ -14673,14 +14185,157 @@
       </p:sp>
       <p:sp>
         <p:nvSpPr>
-          <p:cNvPr id="15" name="Rectangle 14"/>
+          <p:cNvPr id="8" name="TextBox 7"/>
+          <p:cNvSpPr txBox="1"/>
+          <p:nvPr/>
+        </p:nvSpPr>
+        <p:spPr>
+          <a:xfrm>
+            <a:off x="685800" y="1508760"/>
+            <a:ext cx="6400800" cy="274320"/>
+          </a:xfrm>
+          <a:prstGeom prst="rect">
+            <a:avLst/>
+          </a:prstGeom>
+          <a:noFill/>
+        </p:spPr>
+        <p:txBody>
+          <a:bodyPr wrap="square" anchor="t"/>
+          <a:lstStyle/>
+          <a:p>
+            <a:pPr algn="l">
+              <a:spcBef>
+                <a:spcPts val="0"/>
+              </a:spcBef>
+              <a:spcAft>
+                <a:spcPts val="400"/>
+              </a:spcAft>
+            </a:pPr>
+            <a:r>
+              <a:rPr sz="1300" b="1">
+                <a:solidFill>
+                  <a:srgbClr val="00D4FF"/>
+                </a:solidFill>
+                <a:latin typeface="Calibri"/>
+              </a:rPr>
+              <a:t>Hit@10 by scenario</a:t>
+            </a:r>
+          </a:p>
+        </p:txBody>
+      </p:sp>
+      <p:graphicFrame>
+        <p:nvGraphicFramePr>
+          <p:cNvPr id="9" name="Chart 8"/>
+          <p:cNvGraphicFramePr>
+            <a:graphicFrameLocks noGrp="1"/>
+          </p:cNvGraphicFramePr>
+          <p:nvPr/>
+        </p:nvGraphicFramePr>
+        <p:xfrm>
+          <a:off x="640080" y="1828800"/>
+          <a:ext cx="6675120" cy="4114800"/>
+        </p:xfrm>
+        <a:graphic>
+          <a:graphicData uri="http://schemas.openxmlformats.org/drawingml/2006/chart">
+            <c:chart xmlns:c="http://schemas.openxmlformats.org/drawingml/2006/chart" r:id="rId2"/>
+          </a:graphicData>
+        </a:graphic>
+      </p:graphicFrame>
+      <p:sp>
+        <p:nvSpPr>
+          <p:cNvPr id="10" name="TextBox 9"/>
+          <p:cNvSpPr txBox="1"/>
+          <p:nvPr/>
+        </p:nvSpPr>
+        <p:spPr>
+          <a:xfrm>
+            <a:off x="7726679" y="1417320"/>
+            <a:ext cx="3931920" cy="320040"/>
+          </a:xfrm>
+          <a:prstGeom prst="rect">
+            <a:avLst/>
+          </a:prstGeom>
+          <a:noFill/>
+        </p:spPr>
+        <p:txBody>
+          <a:bodyPr wrap="square" anchor="t"/>
+          <a:lstStyle/>
+          <a:p>
+            <a:pPr algn="l">
+              <a:spcBef>
+                <a:spcPts val="0"/>
+              </a:spcBef>
+              <a:spcAft>
+                <a:spcPts val="400"/>
+              </a:spcAft>
+            </a:pPr>
+            <a:r>
+              <a:rPr sz="1300" b="1">
+                <a:solidFill>
+                  <a:srgbClr val="FF2D8F"/>
+                </a:solidFill>
+                <a:latin typeface="Calibri"/>
+              </a:rPr>
+              <a:t>MTTC (turns to first hit)</a:t>
+            </a:r>
+          </a:p>
+        </p:txBody>
+      </p:sp>
+      <p:sp>
+        <p:nvSpPr>
+          <p:cNvPr id="11" name="Rounded Rectangle 10"/>
           <p:cNvSpPr/>
           <p:nvPr/>
         </p:nvSpPr>
         <p:spPr>
           <a:xfrm>
-            <a:off x="7772400" y="1417320"/>
-            <a:ext cx="73152" cy="1371600"/>
+            <a:off x="7680960" y="1874519"/>
+            <a:ext cx="3977639" cy="914400"/>
+          </a:xfrm>
+          <a:prstGeom prst="roundRect">
+            <a:avLst>
+              <a:gd name="adj" fmla="val 10000"/>
+            </a:avLst>
+          </a:prstGeom>
+          <a:solidFill>
+            <a:srgbClr val="152033"/>
+          </a:solidFill>
+          <a:ln>
+            <a:noFill/>
+          </a:ln>
+        </p:spPr>
+        <p:style>
+          <a:lnRef idx="1">
+            <a:schemeClr val="accent1"/>
+          </a:lnRef>
+          <a:fillRef idx="3">
+            <a:schemeClr val="accent1"/>
+          </a:fillRef>
+          <a:effectRef idx="2">
+            <a:schemeClr val="accent1"/>
+          </a:effectRef>
+          <a:fontRef idx="minor">
+            <a:schemeClr val="lt1"/>
+          </a:fontRef>
+        </p:style>
+        <p:txBody>
+          <a:bodyPr rtlCol="0" anchor="ctr"/>
+          <a:lstStyle/>
+          <a:p>
+            <a:pPr algn="ctr"/>
+          </a:p>
+        </p:txBody>
+      </p:sp>
+      <p:sp>
+        <p:nvSpPr>
+          <p:cNvPr id="12" name="Rectangle 11"/>
+          <p:cNvSpPr/>
+          <p:nvPr/>
+        </p:nvSpPr>
+        <p:spPr>
+          <a:xfrm>
+            <a:off x="7680960" y="1874519"/>
+            <a:ext cx="73152" cy="914400"/>
           </a:xfrm>
           <a:prstGeom prst="rect">
             <a:avLst/>
@@ -14716,14 +14371,14 @@
       </p:sp>
       <p:sp>
         <p:nvSpPr>
-          <p:cNvPr id="16" name="TextBox 15"/>
+          <p:cNvPr id="13" name="TextBox 12"/>
           <p:cNvSpPr txBox="1"/>
           <p:nvPr/>
         </p:nvSpPr>
         <p:spPr>
           <a:xfrm>
-            <a:off x="8046720" y="1645920"/>
-            <a:ext cx="3474720" cy="320040"/>
+            <a:off x="7955279" y="2039111"/>
+            <a:ext cx="2194560" cy="320040"/>
           </a:xfrm>
           <a:prstGeom prst="rect">
             <a:avLst/>
@@ -14743,67 +14398,157 @@
               </a:spcAft>
             </a:pPr>
             <a:r>
-              <a:rPr sz="1500" b="1">
+              <a:rPr sz="1400" b="1">
+                <a:solidFill>
+                  <a:srgbClr val="F8FAFC"/>
+                </a:solidFill>
+                <a:latin typeface="Calibri"/>
+              </a:rPr>
+              <a:t>Buying</a:t>
+            </a:r>
+          </a:p>
+        </p:txBody>
+      </p:sp>
+      <p:sp>
+        <p:nvSpPr>
+          <p:cNvPr id="14" name="TextBox 13"/>
+          <p:cNvSpPr txBox="1"/>
+          <p:nvPr/>
+        </p:nvSpPr>
+        <p:spPr>
+          <a:xfrm>
+            <a:off x="10058400" y="2011679"/>
+            <a:ext cx="1371600" cy="365760"/>
+          </a:xfrm>
+          <a:prstGeom prst="rect">
+            <a:avLst/>
+          </a:prstGeom>
+          <a:noFill/>
+        </p:spPr>
+        <p:txBody>
+          <a:bodyPr wrap="square" anchor="t"/>
+          <a:lstStyle/>
+          <a:p>
+            <a:pPr algn="r">
+              <a:spcBef>
+                <a:spcPts val="0"/>
+              </a:spcBef>
+              <a:spcAft>
+                <a:spcPts val="400"/>
+              </a:spcAft>
+            </a:pPr>
+            <a:r>
+              <a:rPr sz="2200" b="1">
                 <a:solidFill>
                   <a:srgbClr val="00D4FF"/>
                 </a:solidFill>
                 <a:latin typeface="Calibri"/>
               </a:rPr>
-              <a:t>Vague → clarify</a:t>
-            </a:r>
-          </a:p>
-        </p:txBody>
-      </p:sp>
-      <p:sp>
-        <p:nvSpPr>
-          <p:cNvPr id="17" name="TextBox 16"/>
-          <p:cNvSpPr txBox="1"/>
-          <p:nvPr/>
-        </p:nvSpPr>
-        <p:spPr>
-          <a:xfrm>
-            <a:off x="8046720" y="2057400"/>
-            <a:ext cx="3474720" cy="548640"/>
-          </a:xfrm>
-          <a:prstGeom prst="rect">
-            <a:avLst/>
-          </a:prstGeom>
-          <a:noFill/>
-        </p:spPr>
-        <p:txBody>
-          <a:bodyPr wrap="square" anchor="t"/>
-          <a:lstStyle/>
-          <a:p>
-            <a:pPr algn="l">
-              <a:spcBef>
-                <a:spcPts val="0"/>
-              </a:spcBef>
-              <a:spcAft>
-                <a:spcPts val="400"/>
-              </a:spcAft>
-            </a:pPr>
-            <a:r>
-              <a:rPr sz="1300" b="0">
-                <a:solidFill>
-                  <a:srgbClr val="8B9BB4"/>
-                </a:solidFill>
-                <a:latin typeface="Calibri"/>
-              </a:rPr>
-              <a:t>dress + exploring → other → plus size locks size (no re-ask)</a:t>
-            </a:r>
-          </a:p>
-        </p:txBody>
-      </p:sp>
-      <p:sp>
-        <p:nvSpPr>
-          <p:cNvPr id="18" name="Rounded Rectangle 17"/>
+              <a:t>2.45</a:t>
+            </a:r>
+          </a:p>
+        </p:txBody>
+      </p:sp>
+      <p:sp>
+        <p:nvSpPr>
+          <p:cNvPr id="15" name="Rounded Rectangle 14"/>
           <p:cNvSpPr/>
           <p:nvPr/>
         </p:nvSpPr>
         <p:spPr>
           <a:xfrm>
-            <a:off x="7772400" y="2971800"/>
-            <a:ext cx="3931920" cy="1371600"/>
+            <a:off x="7955279" y="2468879"/>
+            <a:ext cx="3474720" cy="128016"/>
+          </a:xfrm>
+          <a:prstGeom prst="roundRect">
+            <a:avLst>
+              <a:gd name="adj" fmla="val 50000"/>
+            </a:avLst>
+          </a:prstGeom>
+          <a:solidFill>
+            <a:srgbClr val="1E2A40"/>
+          </a:solidFill>
+          <a:ln>
+            <a:noFill/>
+          </a:ln>
+        </p:spPr>
+        <p:style>
+          <a:lnRef idx="1">
+            <a:schemeClr val="accent1"/>
+          </a:lnRef>
+          <a:fillRef idx="3">
+            <a:schemeClr val="accent1"/>
+          </a:fillRef>
+          <a:effectRef idx="2">
+            <a:schemeClr val="accent1"/>
+          </a:effectRef>
+          <a:fontRef idx="minor">
+            <a:schemeClr val="lt1"/>
+          </a:fontRef>
+        </p:style>
+        <p:txBody>
+          <a:bodyPr rtlCol="0" anchor="ctr"/>
+          <a:lstStyle/>
+          <a:p>
+            <a:pPr algn="ctr"/>
+          </a:p>
+        </p:txBody>
+      </p:sp>
+      <p:sp>
+        <p:nvSpPr>
+          <p:cNvPr id="16" name="Rounded Rectangle 15"/>
+          <p:cNvSpPr/>
+          <p:nvPr/>
+        </p:nvSpPr>
+        <p:spPr>
+          <a:xfrm>
+            <a:off x="7955279" y="2468879"/>
+            <a:ext cx="851306" cy="128016"/>
+          </a:xfrm>
+          <a:prstGeom prst="roundRect">
+            <a:avLst>
+              <a:gd name="adj" fmla="val 50000"/>
+            </a:avLst>
+          </a:prstGeom>
+          <a:solidFill>
+            <a:srgbClr val="00D4FF"/>
+          </a:solidFill>
+          <a:ln>
+            <a:noFill/>
+          </a:ln>
+        </p:spPr>
+        <p:style>
+          <a:lnRef idx="1">
+            <a:schemeClr val="accent1"/>
+          </a:lnRef>
+          <a:fillRef idx="3">
+            <a:schemeClr val="accent1"/>
+          </a:fillRef>
+          <a:effectRef idx="2">
+            <a:schemeClr val="accent1"/>
+          </a:effectRef>
+          <a:fontRef idx="minor">
+            <a:schemeClr val="lt1"/>
+          </a:fontRef>
+        </p:style>
+        <p:txBody>
+          <a:bodyPr rtlCol="0" anchor="ctr"/>
+          <a:lstStyle/>
+          <a:p>
+            <a:pPr algn="ctr"/>
+          </a:p>
+        </p:txBody>
+      </p:sp>
+      <p:sp>
+        <p:nvSpPr>
+          <p:cNvPr id="17" name="Rounded Rectangle 16"/>
+          <p:cNvSpPr/>
+          <p:nvPr/>
+        </p:nvSpPr>
+        <p:spPr>
+          <a:xfrm>
+            <a:off x="7680960" y="2926079"/>
+            <a:ext cx="3977639" cy="914400"/>
           </a:xfrm>
           <a:prstGeom prst="roundRect">
             <a:avLst>
@@ -14841,14 +14586,14 @@
       </p:sp>
       <p:sp>
         <p:nvSpPr>
-          <p:cNvPr id="19" name="Rectangle 18"/>
+          <p:cNvPr id="18" name="Rectangle 17"/>
           <p:cNvSpPr/>
           <p:nvPr/>
         </p:nvSpPr>
         <p:spPr>
           <a:xfrm>
-            <a:off x="7772400" y="2971800"/>
-            <a:ext cx="73152" cy="1371600"/>
+            <a:off x="7680960" y="2926079"/>
+            <a:ext cx="73152" cy="914400"/>
           </a:xfrm>
           <a:prstGeom prst="rect">
             <a:avLst/>
@@ -14884,14 +14629,54 @@
       </p:sp>
       <p:sp>
         <p:nvSpPr>
+          <p:cNvPr id="19" name="TextBox 18"/>
+          <p:cNvSpPr txBox="1"/>
+          <p:nvPr/>
+        </p:nvSpPr>
+        <p:spPr>
+          <a:xfrm>
+            <a:off x="7955279" y="3090671"/>
+            <a:ext cx="2194560" cy="320040"/>
+          </a:xfrm>
+          <a:prstGeom prst="rect">
+            <a:avLst/>
+          </a:prstGeom>
+          <a:noFill/>
+        </p:spPr>
+        <p:txBody>
+          <a:bodyPr wrap="square" anchor="t"/>
+          <a:lstStyle/>
+          <a:p>
+            <a:pPr algn="l">
+              <a:spcBef>
+                <a:spcPts val="0"/>
+              </a:spcBef>
+              <a:spcAft>
+                <a:spcPts val="400"/>
+              </a:spcAft>
+            </a:pPr>
+            <a:r>
+              <a:rPr sz="1400" b="1">
+                <a:solidFill>
+                  <a:srgbClr val="F8FAFC"/>
+                </a:solidFill>
+                <a:latin typeface="Calibri"/>
+              </a:rPr>
+              <a:t>Browsing</a:t>
+            </a:r>
+          </a:p>
+        </p:txBody>
+      </p:sp>
+      <p:sp>
+        <p:nvSpPr>
           <p:cNvPr id="20" name="TextBox 19"/>
           <p:cNvSpPr txBox="1"/>
           <p:nvPr/>
         </p:nvSpPr>
         <p:spPr>
           <a:xfrm>
-            <a:off x="8046720" y="3200400"/>
-            <a:ext cx="3474720" cy="320040"/>
+            <a:off x="10058400" y="3063239"/>
+            <a:ext cx="1371600" cy="365760"/>
           </a:xfrm>
           <a:prstGeom prst="rect">
             <a:avLst/>
@@ -14902,63 +14687,68 @@
           <a:bodyPr wrap="square" anchor="t"/>
           <a:lstStyle/>
           <a:p>
-            <a:pPr algn="l">
-              <a:spcBef>
-                <a:spcPts val="0"/>
-              </a:spcBef>
-              <a:spcAft>
-                <a:spcPts val="400"/>
-              </a:spcAft>
-            </a:pPr>
-            <a:r>
-              <a:rPr sz="1500" b="1">
+            <a:pPr algn="r">
+              <a:spcBef>
+                <a:spcPts val="0"/>
+              </a:spcBef>
+              <a:spcAft>
+                <a:spcPts val="400"/>
+              </a:spcAft>
+            </a:pPr>
+            <a:r>
+              <a:rPr sz="2200" b="1">
                 <a:solidFill>
                   <a:srgbClr val="FF2D8F"/>
                 </a:solidFill>
                 <a:latin typeface="Calibri"/>
               </a:rPr>
-              <a:t>Family lock</a:t>
-            </a:r>
-          </a:p>
-        </p:txBody>
-      </p:sp>
-      <p:sp>
-        <p:nvSpPr>
-          <p:cNvPr id="21" name="TextBox 20"/>
-          <p:cNvSpPr txBox="1"/>
-          <p:nvPr/>
-        </p:nvSpPr>
-        <p:spPr>
-          <a:xfrm>
-            <a:off x="8046720" y="3611880"/>
-            <a:ext cx="3474720" cy="548640"/>
-          </a:xfrm>
-          <a:prstGeom prst="rect">
-            <a:avLst/>
-          </a:prstGeom>
-          <a:noFill/>
-        </p:spPr>
-        <p:txBody>
-          <a:bodyPr wrap="square" anchor="t"/>
-          <a:lstStyle/>
-          <a:p>
-            <a:pPr algn="l">
-              <a:spcBef>
-                <a:spcPts val="0"/>
-              </a:spcBef>
-              <a:spcAft>
-                <a:spcPts val="400"/>
-              </a:spcAft>
-            </a:pPr>
-            <a:r>
-              <a:rPr sz="1300" b="0">
-                <a:solidFill>
-                  <a:srgbClr val="8B9BB4"/>
-                </a:solidFill>
-                <a:latin typeface="Calibri"/>
-              </a:rPr>
-              <a:t>"dress sandals" → footwear, not garment dresses</a:t>
-            </a:r>
+              <a:t>2.79</a:t>
+            </a:r>
+          </a:p>
+        </p:txBody>
+      </p:sp>
+      <p:sp>
+        <p:nvSpPr>
+          <p:cNvPr id="21" name="Rounded Rectangle 20"/>
+          <p:cNvSpPr/>
+          <p:nvPr/>
+        </p:nvSpPr>
+        <p:spPr>
+          <a:xfrm>
+            <a:off x="7955279" y="3520439"/>
+            <a:ext cx="3474720" cy="128016"/>
+          </a:xfrm>
+          <a:prstGeom prst="roundRect">
+            <a:avLst>
+              <a:gd name="adj" fmla="val 50000"/>
+            </a:avLst>
+          </a:prstGeom>
+          <a:solidFill>
+            <a:srgbClr val="1E2A40"/>
+          </a:solidFill>
+          <a:ln>
+            <a:noFill/>
+          </a:ln>
+        </p:spPr>
+        <p:style>
+          <a:lnRef idx="1">
+            <a:schemeClr val="accent1"/>
+          </a:lnRef>
+          <a:fillRef idx="3">
+            <a:schemeClr val="accent1"/>
+          </a:fillRef>
+          <a:effectRef idx="2">
+            <a:schemeClr val="accent1"/>
+          </a:effectRef>
+          <a:fontRef idx="minor">
+            <a:schemeClr val="lt1"/>
+          </a:fontRef>
+        </p:style>
+        <p:txBody>
+          <a:bodyPr rtlCol="0" anchor="ctr"/>
+          <a:lstStyle/>
+          <a:p>
+            <a:pPr algn="ctr"/>
           </a:p>
         </p:txBody>
       </p:sp>
@@ -14970,8 +14760,53 @@
         </p:nvSpPr>
         <p:spPr>
           <a:xfrm>
-            <a:off x="7772400" y="4526280"/>
-            <a:ext cx="3931920" cy="1371600"/>
+            <a:off x="7955279" y="3520439"/>
+            <a:ext cx="969446" cy="128016"/>
+          </a:xfrm>
+          <a:prstGeom prst="roundRect">
+            <a:avLst>
+              <a:gd name="adj" fmla="val 50000"/>
+            </a:avLst>
+          </a:prstGeom>
+          <a:solidFill>
+            <a:srgbClr val="FF2D8F"/>
+          </a:solidFill>
+          <a:ln>
+            <a:noFill/>
+          </a:ln>
+        </p:spPr>
+        <p:style>
+          <a:lnRef idx="1">
+            <a:schemeClr val="accent1"/>
+          </a:lnRef>
+          <a:fillRef idx="3">
+            <a:schemeClr val="accent1"/>
+          </a:fillRef>
+          <a:effectRef idx="2">
+            <a:schemeClr val="accent1"/>
+          </a:effectRef>
+          <a:fontRef idx="minor">
+            <a:schemeClr val="lt1"/>
+          </a:fontRef>
+        </p:style>
+        <p:txBody>
+          <a:bodyPr rtlCol="0" anchor="ctr"/>
+          <a:lstStyle/>
+          <a:p>
+            <a:pPr algn="ctr"/>
+          </a:p>
+        </p:txBody>
+      </p:sp>
+      <p:sp>
+        <p:nvSpPr>
+          <p:cNvPr id="23" name="Rounded Rectangle 22"/>
+          <p:cNvSpPr/>
+          <p:nvPr/>
+        </p:nvSpPr>
+        <p:spPr>
+          <a:xfrm>
+            <a:off x="7680960" y="3977639"/>
+            <a:ext cx="3977639" cy="914400"/>
           </a:xfrm>
           <a:prstGeom prst="roundRect">
             <a:avLst>
@@ -15009,20 +14844,20 @@
       </p:sp>
       <p:sp>
         <p:nvSpPr>
-          <p:cNvPr id="23" name="Rectangle 22"/>
+          <p:cNvPr id="24" name="Rectangle 23"/>
           <p:cNvSpPr/>
           <p:nvPr/>
         </p:nvSpPr>
         <p:spPr>
           <a:xfrm>
-            <a:off x="7772400" y="4526280"/>
-            <a:ext cx="73152" cy="1371600"/>
+            <a:off x="7680960" y="3977639"/>
+            <a:ext cx="73152" cy="914400"/>
           </a:xfrm>
           <a:prstGeom prst="rect">
             <a:avLst/>
           </a:prstGeom>
           <a:solidFill>
-            <a:srgbClr val="A855F7"/>
+            <a:srgbClr val="00D4FF"/>
           </a:solidFill>
           <a:ln>
             <a:noFill/>
@@ -15052,54 +14887,14 @@
       </p:sp>
       <p:sp>
         <p:nvSpPr>
-          <p:cNvPr id="24" name="TextBox 23"/>
-          <p:cNvSpPr txBox="1"/>
-          <p:nvPr/>
-        </p:nvSpPr>
-        <p:spPr>
-          <a:xfrm>
-            <a:off x="8046720" y="4754880"/>
-            <a:ext cx="3474720" cy="320040"/>
-          </a:xfrm>
-          <a:prstGeom prst="rect">
-            <a:avLst/>
-          </a:prstGeom>
-          <a:noFill/>
-        </p:spPr>
-        <p:txBody>
-          <a:bodyPr wrap="square" anchor="t"/>
-          <a:lstStyle/>
-          <a:p>
-            <a:pPr algn="l">
-              <a:spcBef>
-                <a:spcPts val="0"/>
-              </a:spcBef>
-              <a:spcAft>
-                <a:spcPts val="400"/>
-              </a:spcAft>
-            </a:pPr>
-            <a:r>
-              <a:rPr sz="1500" b="1">
-                <a:solidFill>
-                  <a:srgbClr val="A855F7"/>
-                </a:solidFill>
-                <a:latin typeface="Calibri"/>
-              </a:rPr>
-              <a:t>Intent override</a:t>
-            </a:r>
-          </a:p>
-        </p:txBody>
-      </p:sp>
-      <p:sp>
-        <p:nvSpPr>
           <p:cNvPr id="25" name="TextBox 24"/>
           <p:cNvSpPr txBox="1"/>
           <p:nvPr/>
         </p:nvSpPr>
         <p:spPr>
           <a:xfrm>
-            <a:off x="8046720" y="5166360"/>
-            <a:ext cx="3474720" cy="548640"/>
+            <a:off x="7955279" y="4142231"/>
+            <a:ext cx="2194560" cy="320040"/>
           </a:xfrm>
           <a:prstGeom prst="rect">
             <a:avLst/>
@@ -15119,20 +14914,408 @@
               </a:spcAft>
             </a:pPr>
             <a:r>
-              <a:rPr sz="1300" b="0">
-                <a:solidFill>
-                  <a:srgbClr val="8B9BB4"/>
-                </a:solidFill>
-                <a:latin typeface="Calibri"/>
-              </a:rPr>
-              <a:t>running shoes → dress shoes; size 9 persists</a:t>
-            </a:r>
-          </a:p>
-        </p:txBody>
-      </p:sp>
-      <p:sp>
-        <p:nvSpPr>
-          <p:cNvPr id="26" name="Rectangle 25"/>
+              <a:rPr sz="1400" b="1">
+                <a:solidFill>
+                  <a:srgbClr val="F8FAFC"/>
+                </a:solidFill>
+                <a:latin typeface="Calibri"/>
+              </a:rPr>
+              <a:t>Override</a:t>
+            </a:r>
+          </a:p>
+        </p:txBody>
+      </p:sp>
+      <p:sp>
+        <p:nvSpPr>
+          <p:cNvPr id="26" name="TextBox 25"/>
+          <p:cNvSpPr txBox="1"/>
+          <p:nvPr/>
+        </p:nvSpPr>
+        <p:spPr>
+          <a:xfrm>
+            <a:off x="10058400" y="4114799"/>
+            <a:ext cx="1371600" cy="365760"/>
+          </a:xfrm>
+          <a:prstGeom prst="rect">
+            <a:avLst/>
+          </a:prstGeom>
+          <a:noFill/>
+        </p:spPr>
+        <p:txBody>
+          <a:bodyPr wrap="square" anchor="t"/>
+          <a:lstStyle/>
+          <a:p>
+            <a:pPr algn="r">
+              <a:spcBef>
+                <a:spcPts val="0"/>
+              </a:spcBef>
+              <a:spcAft>
+                <a:spcPts val="400"/>
+              </a:spcAft>
+            </a:pPr>
+            <a:r>
+              <a:rPr sz="2200" b="1">
+                <a:solidFill>
+                  <a:srgbClr val="00D4FF"/>
+                </a:solidFill>
+                <a:latin typeface="Calibri"/>
+              </a:rPr>
+              <a:t>4.20</a:t>
+            </a:r>
+          </a:p>
+        </p:txBody>
+      </p:sp>
+      <p:sp>
+        <p:nvSpPr>
+          <p:cNvPr id="27" name="Rounded Rectangle 26"/>
+          <p:cNvSpPr/>
+          <p:nvPr/>
+        </p:nvSpPr>
+        <p:spPr>
+          <a:xfrm>
+            <a:off x="7955279" y="4571999"/>
+            <a:ext cx="3474720" cy="128016"/>
+          </a:xfrm>
+          <a:prstGeom prst="roundRect">
+            <a:avLst>
+              <a:gd name="adj" fmla="val 50000"/>
+            </a:avLst>
+          </a:prstGeom>
+          <a:solidFill>
+            <a:srgbClr val="1E2A40"/>
+          </a:solidFill>
+          <a:ln>
+            <a:noFill/>
+          </a:ln>
+        </p:spPr>
+        <p:style>
+          <a:lnRef idx="1">
+            <a:schemeClr val="accent1"/>
+          </a:lnRef>
+          <a:fillRef idx="3">
+            <a:schemeClr val="accent1"/>
+          </a:fillRef>
+          <a:effectRef idx="2">
+            <a:schemeClr val="accent1"/>
+          </a:effectRef>
+          <a:fontRef idx="minor">
+            <a:schemeClr val="lt1"/>
+          </a:fontRef>
+        </p:style>
+        <p:txBody>
+          <a:bodyPr rtlCol="0" anchor="ctr"/>
+          <a:lstStyle/>
+          <a:p>
+            <a:pPr algn="ctr"/>
+          </a:p>
+        </p:txBody>
+      </p:sp>
+      <p:sp>
+        <p:nvSpPr>
+          <p:cNvPr id="28" name="Rounded Rectangle 27"/>
+          <p:cNvSpPr/>
+          <p:nvPr/>
+        </p:nvSpPr>
+        <p:spPr>
+          <a:xfrm>
+            <a:off x="7955279" y="4571999"/>
+            <a:ext cx="1459382" cy="128016"/>
+          </a:xfrm>
+          <a:prstGeom prst="roundRect">
+            <a:avLst>
+              <a:gd name="adj" fmla="val 50000"/>
+            </a:avLst>
+          </a:prstGeom>
+          <a:solidFill>
+            <a:srgbClr val="00D4FF"/>
+          </a:solidFill>
+          <a:ln>
+            <a:noFill/>
+          </a:ln>
+        </p:spPr>
+        <p:style>
+          <a:lnRef idx="1">
+            <a:schemeClr val="accent1"/>
+          </a:lnRef>
+          <a:fillRef idx="3">
+            <a:schemeClr val="accent1"/>
+          </a:fillRef>
+          <a:effectRef idx="2">
+            <a:schemeClr val="accent1"/>
+          </a:effectRef>
+          <a:fontRef idx="minor">
+            <a:schemeClr val="lt1"/>
+          </a:fontRef>
+        </p:style>
+        <p:txBody>
+          <a:bodyPr rtlCol="0" anchor="ctr"/>
+          <a:lstStyle/>
+          <a:p>
+            <a:pPr algn="ctr"/>
+          </a:p>
+        </p:txBody>
+      </p:sp>
+      <p:sp>
+        <p:nvSpPr>
+          <p:cNvPr id="29" name="Rounded Rectangle 28"/>
+          <p:cNvSpPr/>
+          <p:nvPr/>
+        </p:nvSpPr>
+        <p:spPr>
+          <a:xfrm>
+            <a:off x="7680960" y="5029200"/>
+            <a:ext cx="3977639" cy="914400"/>
+          </a:xfrm>
+          <a:prstGeom prst="roundRect">
+            <a:avLst>
+              <a:gd name="adj" fmla="val 10000"/>
+            </a:avLst>
+          </a:prstGeom>
+          <a:solidFill>
+            <a:srgbClr val="152033"/>
+          </a:solidFill>
+          <a:ln>
+            <a:noFill/>
+          </a:ln>
+        </p:spPr>
+        <p:style>
+          <a:lnRef idx="1">
+            <a:schemeClr val="accent1"/>
+          </a:lnRef>
+          <a:fillRef idx="3">
+            <a:schemeClr val="accent1"/>
+          </a:fillRef>
+          <a:effectRef idx="2">
+            <a:schemeClr val="accent1"/>
+          </a:effectRef>
+          <a:fontRef idx="minor">
+            <a:schemeClr val="lt1"/>
+          </a:fontRef>
+        </p:style>
+        <p:txBody>
+          <a:bodyPr rtlCol="0" anchor="ctr"/>
+          <a:lstStyle/>
+          <a:p>
+            <a:pPr algn="ctr"/>
+          </a:p>
+        </p:txBody>
+      </p:sp>
+      <p:sp>
+        <p:nvSpPr>
+          <p:cNvPr id="30" name="Rectangle 29"/>
+          <p:cNvSpPr/>
+          <p:nvPr/>
+        </p:nvSpPr>
+        <p:spPr>
+          <a:xfrm>
+            <a:off x="7680960" y="5029200"/>
+            <a:ext cx="73152" cy="914400"/>
+          </a:xfrm>
+          <a:prstGeom prst="rect">
+            <a:avLst/>
+          </a:prstGeom>
+          <a:solidFill>
+            <a:srgbClr val="FF2D8F"/>
+          </a:solidFill>
+          <a:ln>
+            <a:noFill/>
+          </a:ln>
+        </p:spPr>
+        <p:style>
+          <a:lnRef idx="1">
+            <a:schemeClr val="accent1"/>
+          </a:lnRef>
+          <a:fillRef idx="3">
+            <a:schemeClr val="accent1"/>
+          </a:fillRef>
+          <a:effectRef idx="2">
+            <a:schemeClr val="accent1"/>
+          </a:effectRef>
+          <a:fontRef idx="minor">
+            <a:schemeClr val="lt1"/>
+          </a:fontRef>
+        </p:style>
+        <p:txBody>
+          <a:bodyPr rtlCol="0" anchor="ctr"/>
+          <a:lstStyle/>
+          <a:p>
+            <a:pPr algn="ctr"/>
+          </a:p>
+        </p:txBody>
+      </p:sp>
+      <p:sp>
+        <p:nvSpPr>
+          <p:cNvPr id="31" name="TextBox 30"/>
+          <p:cNvSpPr txBox="1"/>
+          <p:nvPr/>
+        </p:nvSpPr>
+        <p:spPr>
+          <a:xfrm>
+            <a:off x="7955279" y="5193792"/>
+            <a:ext cx="2194560" cy="320040"/>
+          </a:xfrm>
+          <a:prstGeom prst="rect">
+            <a:avLst/>
+          </a:prstGeom>
+          <a:noFill/>
+        </p:spPr>
+        <p:txBody>
+          <a:bodyPr wrap="square" anchor="t"/>
+          <a:lstStyle/>
+          <a:p>
+            <a:pPr algn="l">
+              <a:spcBef>
+                <a:spcPts val="0"/>
+              </a:spcBef>
+              <a:spcAft>
+                <a:spcPts val="400"/>
+              </a:spcAft>
+            </a:pPr>
+            <a:r>
+              <a:rPr sz="1400" b="1">
+                <a:solidFill>
+                  <a:srgbClr val="F8FAFC"/>
+                </a:solidFill>
+                <a:latin typeface="Calibri"/>
+              </a:rPr>
+              <a:t>Boundary</a:t>
+            </a:r>
+          </a:p>
+        </p:txBody>
+      </p:sp>
+      <p:sp>
+        <p:nvSpPr>
+          <p:cNvPr id="32" name="TextBox 31"/>
+          <p:cNvSpPr txBox="1"/>
+          <p:nvPr/>
+        </p:nvSpPr>
+        <p:spPr>
+          <a:xfrm>
+            <a:off x="10058400" y="5166360"/>
+            <a:ext cx="1371600" cy="365760"/>
+          </a:xfrm>
+          <a:prstGeom prst="rect">
+            <a:avLst/>
+          </a:prstGeom>
+          <a:noFill/>
+        </p:spPr>
+        <p:txBody>
+          <a:bodyPr wrap="square" anchor="t"/>
+          <a:lstStyle/>
+          <a:p>
+            <a:pPr algn="r">
+              <a:spcBef>
+                <a:spcPts val="0"/>
+              </a:spcBef>
+              <a:spcAft>
+                <a:spcPts val="400"/>
+              </a:spcAft>
+            </a:pPr>
+            <a:r>
+              <a:rPr sz="2200" b="1">
+                <a:solidFill>
+                  <a:srgbClr val="FF2D8F"/>
+                </a:solidFill>
+                <a:latin typeface="Calibri"/>
+              </a:rPr>
+              <a:t>3.00</a:t>
+            </a:r>
+          </a:p>
+        </p:txBody>
+      </p:sp>
+      <p:sp>
+        <p:nvSpPr>
+          <p:cNvPr id="33" name="Rounded Rectangle 32"/>
+          <p:cNvSpPr/>
+          <p:nvPr/>
+        </p:nvSpPr>
+        <p:spPr>
+          <a:xfrm>
+            <a:off x="7955279" y="5623560"/>
+            <a:ext cx="3474720" cy="128016"/>
+          </a:xfrm>
+          <a:prstGeom prst="roundRect">
+            <a:avLst>
+              <a:gd name="adj" fmla="val 50000"/>
+            </a:avLst>
+          </a:prstGeom>
+          <a:solidFill>
+            <a:srgbClr val="1E2A40"/>
+          </a:solidFill>
+          <a:ln>
+            <a:noFill/>
+          </a:ln>
+        </p:spPr>
+        <p:style>
+          <a:lnRef idx="1">
+            <a:schemeClr val="accent1"/>
+          </a:lnRef>
+          <a:fillRef idx="3">
+            <a:schemeClr val="accent1"/>
+          </a:fillRef>
+          <a:effectRef idx="2">
+            <a:schemeClr val="accent1"/>
+          </a:effectRef>
+          <a:fontRef idx="minor">
+            <a:schemeClr val="lt1"/>
+          </a:fontRef>
+        </p:style>
+        <p:txBody>
+          <a:bodyPr rtlCol="0" anchor="ctr"/>
+          <a:lstStyle/>
+          <a:p>
+            <a:pPr algn="ctr"/>
+          </a:p>
+        </p:txBody>
+      </p:sp>
+      <p:sp>
+        <p:nvSpPr>
+          <p:cNvPr id="34" name="Rounded Rectangle 33"/>
+          <p:cNvSpPr/>
+          <p:nvPr/>
+        </p:nvSpPr>
+        <p:spPr>
+          <a:xfrm>
+            <a:off x="7955279" y="5623560"/>
+            <a:ext cx="1042415" cy="128016"/>
+          </a:xfrm>
+          <a:prstGeom prst="roundRect">
+            <a:avLst>
+              <a:gd name="adj" fmla="val 50000"/>
+            </a:avLst>
+          </a:prstGeom>
+          <a:solidFill>
+            <a:srgbClr val="FF2D8F"/>
+          </a:solidFill>
+          <a:ln>
+            <a:noFill/>
+          </a:ln>
+        </p:spPr>
+        <p:style>
+          <a:lnRef idx="1">
+            <a:schemeClr val="accent1"/>
+          </a:lnRef>
+          <a:fillRef idx="3">
+            <a:schemeClr val="accent1"/>
+          </a:fillRef>
+          <a:effectRef idx="2">
+            <a:schemeClr val="accent1"/>
+          </a:effectRef>
+          <a:fontRef idx="minor">
+            <a:schemeClr val="lt1"/>
+          </a:fontRef>
+        </p:style>
+        <p:txBody>
+          <a:bodyPr rtlCol="0" anchor="ctr"/>
+          <a:lstStyle/>
+          <a:p>
+            <a:pPr algn="ctr"/>
+          </a:p>
+        </p:txBody>
+      </p:sp>
+      <p:sp>
+        <p:nvSpPr>
+          <p:cNvPr id="35" name="Rectangle 34"/>
           <p:cNvSpPr/>
           <p:nvPr/>
         </p:nvSpPr>
@@ -15175,7 +15358,7 @@
       </p:sp>
       <p:sp>
         <p:nvSpPr>
-          <p:cNvPr id="27" name="TextBox 26"/>
+          <p:cNvPr id="36" name="TextBox 35"/>
           <p:cNvSpPr txBox="1"/>
           <p:nvPr/>
         </p:nvSpPr>
@@ -15215,7 +15398,7 @@
       </p:sp>
       <p:sp>
         <p:nvSpPr>
-          <p:cNvPr id="28" name="TextBox 27"/>
+          <p:cNvPr id="37" name="TextBox 36"/>
           <p:cNvSpPr txBox="1"/>
           <p:nvPr/>
         </p:nvSpPr>
@@ -15248,7 +15431,7 @@
                 </a:solidFill>
                 <a:latin typeface="Calibri"/>
               </a:rPr>
-              <a:t>8 / 10</a:t>
+              <a:t>8 / 11</a:t>
             </a:r>
           </a:p>
         </p:txBody>
@@ -15400,7 +15583,7 @@
                 </a:solidFill>
                 <a:latin typeface="Calibri"/>
               </a:rPr>
-              <a:t>08  ·  IMPACT</a:t>
+              <a:t>08  ·  DEMO</a:t>
             </a:r>
           </a:p>
         </p:txBody>
@@ -15440,7 +15623,7 @@
                 </a:solidFill>
                 <a:latin typeface="Calibri"/>
               </a:rPr>
-              <a:t>Kit metrics → merchant outcomes</a:t>
+              <a:t>Astrid CLI — live multi-turn</a:t>
             </a:r>
           </a:p>
         </p:txBody>
@@ -15480,7 +15663,7 @@
                 </a:solidFill>
                 <a:latin typeface="Calibri"/>
               </a:rPr>
-              <a:t>Honest framing: offline simulation ≠ live GMV A/B — same job-to-be-done as conversational commerce.</a:t>
+              <a:t>python3 cli_chat.py --dense hash   ·   /new  /state  /quit</a:t>
             </a:r>
           </a:p>
         </p:txBody>
@@ -15493,8 +15676,533 @@
         </p:nvSpPr>
         <p:spPr>
           <a:xfrm>
-            <a:off x="502920" y="1463040"/>
-            <a:ext cx="11155680" cy="914400"/>
+            <a:off x="502920" y="1417320"/>
+            <a:ext cx="7040880" cy="4754880"/>
+          </a:xfrm>
+          <a:prstGeom prst="roundRect">
+            <a:avLst>
+              <a:gd name="adj" fmla="val 8000"/>
+            </a:avLst>
+          </a:prstGeom>
+          <a:solidFill>
+            <a:srgbClr val="080E18"/>
+          </a:solidFill>
+          <a:ln>
+            <a:noFill/>
+          </a:ln>
+        </p:spPr>
+        <p:style>
+          <a:lnRef idx="1">
+            <a:schemeClr val="accent1"/>
+          </a:lnRef>
+          <a:fillRef idx="3">
+            <a:schemeClr val="accent1"/>
+          </a:fillRef>
+          <a:effectRef idx="2">
+            <a:schemeClr val="accent1"/>
+          </a:effectRef>
+          <a:fontRef idx="minor">
+            <a:schemeClr val="lt1"/>
+          </a:fontRef>
+        </p:style>
+        <p:txBody>
+          <a:bodyPr rtlCol="0" anchor="ctr"/>
+          <a:lstStyle/>
+          <a:p>
+            <a:pPr algn="ctr"/>
+          </a:p>
+        </p:txBody>
+      </p:sp>
+      <p:sp>
+        <p:nvSpPr>
+          <p:cNvPr id="8" name="Rectangle 7"/>
+          <p:cNvSpPr/>
+          <p:nvPr/>
+        </p:nvSpPr>
+        <p:spPr>
+          <a:xfrm>
+            <a:off x="502920" y="1417320"/>
+            <a:ext cx="7040880" cy="365760"/>
+          </a:xfrm>
+          <a:prstGeom prst="rect">
+            <a:avLst/>
+          </a:prstGeom>
+          <a:solidFill>
+            <a:srgbClr val="121A28"/>
+          </a:solidFill>
+          <a:ln>
+            <a:noFill/>
+          </a:ln>
+        </p:spPr>
+        <p:style>
+          <a:lnRef idx="1">
+            <a:schemeClr val="accent1"/>
+          </a:lnRef>
+          <a:fillRef idx="3">
+            <a:schemeClr val="accent1"/>
+          </a:fillRef>
+          <a:effectRef idx="2">
+            <a:schemeClr val="accent1"/>
+          </a:effectRef>
+          <a:fontRef idx="minor">
+            <a:schemeClr val="lt1"/>
+          </a:fontRef>
+        </p:style>
+        <p:txBody>
+          <a:bodyPr rtlCol="0" anchor="ctr"/>
+          <a:lstStyle/>
+          <a:p>
+            <a:pPr algn="ctr"/>
+          </a:p>
+        </p:txBody>
+      </p:sp>
+      <p:sp>
+        <p:nvSpPr>
+          <p:cNvPr id="9" name="Oval 8"/>
+          <p:cNvSpPr/>
+          <p:nvPr/>
+        </p:nvSpPr>
+        <p:spPr>
+          <a:xfrm>
+            <a:off x="685800" y="1508760"/>
+            <a:ext cx="146304" cy="146304"/>
+          </a:xfrm>
+          <a:prstGeom prst="ellipse">
+            <a:avLst/>
+          </a:prstGeom>
+          <a:solidFill>
+            <a:srgbClr val="FF5F57"/>
+          </a:solidFill>
+          <a:ln>
+            <a:noFill/>
+          </a:ln>
+        </p:spPr>
+        <p:style>
+          <a:lnRef idx="1">
+            <a:schemeClr val="accent1"/>
+          </a:lnRef>
+          <a:fillRef idx="3">
+            <a:schemeClr val="accent1"/>
+          </a:fillRef>
+          <a:effectRef idx="2">
+            <a:schemeClr val="accent1"/>
+          </a:effectRef>
+          <a:fontRef idx="minor">
+            <a:schemeClr val="lt1"/>
+          </a:fontRef>
+        </p:style>
+        <p:txBody>
+          <a:bodyPr rtlCol="0" anchor="ctr"/>
+          <a:lstStyle/>
+          <a:p>
+            <a:pPr algn="ctr"/>
+          </a:p>
+        </p:txBody>
+      </p:sp>
+      <p:sp>
+        <p:nvSpPr>
+          <p:cNvPr id="10" name="Oval 9"/>
+          <p:cNvSpPr/>
+          <p:nvPr/>
+        </p:nvSpPr>
+        <p:spPr>
+          <a:xfrm>
+            <a:off x="941832" y="1508760"/>
+            <a:ext cx="146304" cy="146304"/>
+          </a:xfrm>
+          <a:prstGeom prst="ellipse">
+            <a:avLst/>
+          </a:prstGeom>
+          <a:solidFill>
+            <a:srgbClr val="FEBC2E"/>
+          </a:solidFill>
+          <a:ln>
+            <a:noFill/>
+          </a:ln>
+        </p:spPr>
+        <p:style>
+          <a:lnRef idx="1">
+            <a:schemeClr val="accent1"/>
+          </a:lnRef>
+          <a:fillRef idx="3">
+            <a:schemeClr val="accent1"/>
+          </a:fillRef>
+          <a:effectRef idx="2">
+            <a:schemeClr val="accent1"/>
+          </a:effectRef>
+          <a:fontRef idx="minor">
+            <a:schemeClr val="lt1"/>
+          </a:fontRef>
+        </p:style>
+        <p:txBody>
+          <a:bodyPr rtlCol="0" anchor="ctr"/>
+          <a:lstStyle/>
+          <a:p>
+            <a:pPr algn="ctr"/>
+          </a:p>
+        </p:txBody>
+      </p:sp>
+      <p:sp>
+        <p:nvSpPr>
+          <p:cNvPr id="11" name="Oval 10"/>
+          <p:cNvSpPr/>
+          <p:nvPr/>
+        </p:nvSpPr>
+        <p:spPr>
+          <a:xfrm>
+            <a:off x="1197864" y="1508760"/>
+            <a:ext cx="146304" cy="146304"/>
+          </a:xfrm>
+          <a:prstGeom prst="ellipse">
+            <a:avLst/>
+          </a:prstGeom>
+          <a:solidFill>
+            <a:srgbClr val="28C840"/>
+          </a:solidFill>
+          <a:ln>
+            <a:noFill/>
+          </a:ln>
+        </p:spPr>
+        <p:style>
+          <a:lnRef idx="1">
+            <a:schemeClr val="accent1"/>
+          </a:lnRef>
+          <a:fillRef idx="3">
+            <a:schemeClr val="accent1"/>
+          </a:fillRef>
+          <a:effectRef idx="2">
+            <a:schemeClr val="accent1"/>
+          </a:effectRef>
+          <a:fontRef idx="minor">
+            <a:schemeClr val="lt1"/>
+          </a:fontRef>
+        </p:style>
+        <p:txBody>
+          <a:bodyPr rtlCol="0" anchor="ctr"/>
+          <a:lstStyle/>
+          <a:p>
+            <a:pPr algn="ctr"/>
+          </a:p>
+        </p:txBody>
+      </p:sp>
+      <p:sp>
+        <p:nvSpPr>
+          <p:cNvPr id="12" name="TextBox 11"/>
+          <p:cNvSpPr txBox="1"/>
+          <p:nvPr/>
+        </p:nvSpPr>
+        <p:spPr>
+          <a:xfrm>
+            <a:off x="1828800" y="1463040"/>
+            <a:ext cx="4572000" cy="274320"/>
+          </a:xfrm>
+          <a:prstGeom prst="rect">
+            <a:avLst/>
+          </a:prstGeom>
+          <a:noFill/>
+        </p:spPr>
+        <p:txBody>
+          <a:bodyPr wrap="square" anchor="t"/>
+          <a:lstStyle/>
+          <a:p>
+            <a:pPr algn="l">
+              <a:spcBef>
+                <a:spcPts val="0"/>
+              </a:spcBef>
+              <a:spcAft>
+                <a:spcPts val="400"/>
+              </a:spcAft>
+            </a:pPr>
+            <a:r>
+              <a:rPr sz="1200" b="0">
+                <a:solidFill>
+                  <a:srgbClr val="8B9BB4"/>
+                </a:solidFill>
+                <a:latin typeface="Calibri"/>
+              </a:rPr>
+              <a:t>astrid — dense=hash</a:t>
+            </a:r>
+          </a:p>
+        </p:txBody>
+      </p:sp>
+      <p:sp>
+        <p:nvSpPr>
+          <p:cNvPr id="13" name="TextBox 12"/>
+          <p:cNvSpPr txBox="1"/>
+          <p:nvPr/>
+        </p:nvSpPr>
+        <p:spPr>
+          <a:xfrm>
+            <a:off x="777240" y="1965960"/>
+            <a:ext cx="6583680" cy="4023360"/>
+          </a:xfrm>
+          <a:prstGeom prst="rect">
+            <a:avLst/>
+          </a:prstGeom>
+          <a:noFill/>
+        </p:spPr>
+        <p:txBody>
+          <a:bodyPr wrap="square" anchor="t"/>
+          <a:lstStyle/>
+          <a:p>
+            <a:pPr algn="l">
+              <a:spcBef>
+                <a:spcPts val="0"/>
+              </a:spcBef>
+              <a:spcAft>
+                <a:spcPts val="400"/>
+              </a:spcAft>
+            </a:pPr>
+            <a:r>
+              <a:rPr sz="1300" b="0">
+                <a:solidFill>
+                  <a:srgbClr val="64748B"/>
+                </a:solidFill>
+                <a:latin typeface="Calibri"/>
+              </a:rPr>
+              <a:t>$ python3 cli_chat.py --dense hash</a:t>
+            </a:r>
+          </a:p>
+          <a:p>
+            <a:pPr algn="l">
+              <a:spcBef>
+                <a:spcPts val="0"/>
+              </a:spcBef>
+              <a:spcAft>
+                <a:spcPts val="400"/>
+              </a:spcAft>
+            </a:pPr>
+            <a:r>
+              <a:rPr sz="600" b="0">
+                <a:solidFill>
+                  <a:srgbClr val="8B9BB4"/>
+                </a:solidFill>
+                <a:latin typeface="Calibri"/>
+              </a:rPr>
+              <a:t/>
+            </a:r>
+          </a:p>
+          <a:p>
+            <a:pPr algn="l">
+              <a:spcBef>
+                <a:spcPts val="0"/>
+              </a:spcBef>
+              <a:spcAft>
+                <a:spcPts val="400"/>
+              </a:spcAft>
+            </a:pPr>
+            <a:r>
+              <a:rPr sz="1400" b="1">
+                <a:solidFill>
+                  <a:srgbClr val="FF2D8F"/>
+                </a:solidFill>
+                <a:latin typeface="Calibri"/>
+              </a:rPr>
+              <a:t>  Astrid  ·  quiet clarity for every aisle</a:t>
+            </a:r>
+          </a:p>
+          <a:p>
+            <a:pPr algn="l">
+              <a:spcBef>
+                <a:spcPts val="0"/>
+              </a:spcBef>
+              <a:spcAft>
+                <a:spcPts val="400"/>
+              </a:spcAft>
+            </a:pPr>
+            <a:r>
+              <a:rPr sz="600" b="0">
+                <a:solidFill>
+                  <a:srgbClr val="8B9BB4"/>
+                </a:solidFill>
+                <a:latin typeface="Calibri"/>
+              </a:rPr>
+              <a:t/>
+            </a:r>
+          </a:p>
+          <a:p>
+            <a:pPr algn="l">
+              <a:spcBef>
+                <a:spcPts val="0"/>
+              </a:spcBef>
+              <a:spcAft>
+                <a:spcPts val="400"/>
+              </a:spcAft>
+            </a:pPr>
+            <a:r>
+              <a:rPr sz="1300" b="0">
+                <a:solidFill>
+                  <a:srgbClr val="00D4FF"/>
+                </a:solidFill>
+                <a:latin typeface="Calibri"/>
+              </a:rPr>
+              <a:t>  You · shoes for my son</a:t>
+            </a:r>
+          </a:p>
+          <a:p>
+            <a:pPr algn="l">
+              <a:spcBef>
+                <a:spcPts val="0"/>
+              </a:spcBef>
+              <a:spcAft>
+                <a:spcPts val="400"/>
+              </a:spcAft>
+            </a:pPr>
+            <a:r>
+              <a:rPr sz="1300" b="0">
+                <a:solidFill>
+                  <a:srgbClr val="F8FAFC"/>
+                </a:solidFill>
+                <a:latin typeface="Calibri"/>
+              </a:rPr>
+              <a:t>  Astrid: Got it (footwear; boys). Any color…?</a:t>
+            </a:r>
+          </a:p>
+          <a:p>
+            <a:pPr algn="l">
+              <a:spcBef>
+                <a:spcPts val="0"/>
+              </a:spcBef>
+              <a:spcAft>
+                <a:spcPts val="400"/>
+              </a:spcAft>
+            </a:pPr>
+            <a:r>
+              <a:rPr sz="1200" b="0">
+                <a:solidFill>
+                  <a:srgbClr val="FBBF24"/>
+                </a:solidFill>
+                <a:latin typeface="Calibri"/>
+              </a:rPr>
+              <a:t>  ↳ ask · other     Top-3 footwear titles</a:t>
+            </a:r>
+          </a:p>
+          <a:p>
+            <a:pPr algn="l">
+              <a:spcBef>
+                <a:spcPts val="0"/>
+              </a:spcBef>
+              <a:spcAft>
+                <a:spcPts val="400"/>
+              </a:spcAft>
+            </a:pPr>
+            <a:r>
+              <a:rPr sz="600" b="0">
+                <a:solidFill>
+                  <a:srgbClr val="8B9BB4"/>
+                </a:solidFill>
+                <a:latin typeface="Calibri"/>
+              </a:rPr>
+              <a:t/>
+            </a:r>
+          </a:p>
+          <a:p>
+            <a:pPr algn="l">
+              <a:spcBef>
+                <a:spcPts val="0"/>
+              </a:spcBef>
+              <a:spcAft>
+                <a:spcPts val="400"/>
+              </a:spcAft>
+            </a:pPr>
+            <a:r>
+              <a:rPr sz="1300" b="0">
+                <a:solidFill>
+                  <a:srgbClr val="00D4FF"/>
+                </a:solidFill>
+                <a:latin typeface="Calibri"/>
+              </a:rPr>
+              <a:t>  You · Actually forget sneakers, dress shoes size 9</a:t>
+            </a:r>
+          </a:p>
+          <a:p>
+            <a:pPr algn="l">
+              <a:spcBef>
+                <a:spcPts val="0"/>
+              </a:spcBef>
+              <a:spcAft>
+                <a:spcPts val="400"/>
+              </a:spcAft>
+            </a:pPr>
+            <a:r>
+              <a:rPr sz="1300" b="0">
+                <a:solidFill>
+                  <a:srgbClr val="F8FAFC"/>
+                </a:solidFill>
+                <a:latin typeface="Calibri"/>
+              </a:rPr>
+              <a:t>  Astrid: Updated (footwear; size 9). Color?</a:t>
+            </a:r>
+          </a:p>
+          <a:p>
+            <a:pPr algn="l">
+              <a:spcBef>
+                <a:spcPts val="0"/>
+              </a:spcBef>
+              <a:spcAft>
+                <a:spcPts val="400"/>
+              </a:spcAft>
+            </a:pPr>
+            <a:r>
+              <a:rPr sz="1200" b="0">
+                <a:solidFill>
+                  <a:srgbClr val="FB7185"/>
+                </a:solidFill>
+                <a:latin typeface="Calibri"/>
+              </a:rPr>
+              <a:t>  ↳ override wiped soft prefs · kept size path</a:t>
+            </a:r>
+          </a:p>
+          <a:p>
+            <a:pPr algn="l">
+              <a:spcBef>
+                <a:spcPts val="0"/>
+              </a:spcBef>
+              <a:spcAft>
+                <a:spcPts val="400"/>
+              </a:spcAft>
+            </a:pPr>
+            <a:r>
+              <a:rPr sz="600" b="0">
+                <a:solidFill>
+                  <a:srgbClr val="8B9BB4"/>
+                </a:solidFill>
+                <a:latin typeface="Calibri"/>
+              </a:rPr>
+              <a:t/>
+            </a:r>
+          </a:p>
+          <a:p>
+            <a:pPr algn="l">
+              <a:spcBef>
+                <a:spcPts val="0"/>
+              </a:spcBef>
+              <a:spcAft>
+                <a:spcPts val="400"/>
+              </a:spcAft>
+            </a:pPr>
+            <a:r>
+              <a:rPr sz="1200" b="0">
+                <a:solidFill>
+                  <a:srgbClr val="8B9BB4"/>
+                </a:solidFill>
+                <a:latin typeface="Calibri"/>
+              </a:rPr>
+              <a:t>  /state → family=footwear  size=9  asked={other}</a:t>
+            </a:r>
+          </a:p>
+        </p:txBody>
+      </p:sp>
+      <p:sp>
+        <p:nvSpPr>
+          <p:cNvPr id="14" name="Rounded Rectangle 13"/>
+          <p:cNvSpPr/>
+          <p:nvPr/>
+        </p:nvSpPr>
+        <p:spPr>
+          <a:xfrm>
+            <a:off x="7772400" y="1417320"/>
+            <a:ext cx="3931920" cy="1371600"/>
           </a:xfrm>
           <a:prstGeom prst="roundRect">
             <a:avLst>
@@ -15532,14 +16240,14 @@
       </p:sp>
       <p:sp>
         <p:nvSpPr>
-          <p:cNvPr id="8" name="Rectangle 7"/>
+          <p:cNvPr id="15" name="Rectangle 14"/>
           <p:cNvSpPr/>
           <p:nvPr/>
         </p:nvSpPr>
         <p:spPr>
           <a:xfrm>
-            <a:off x="502920" y="1463040"/>
-            <a:ext cx="91440" cy="914400"/>
+            <a:off x="7772400" y="1417320"/>
+            <a:ext cx="73152" cy="1371600"/>
           </a:xfrm>
           <a:prstGeom prst="rect">
             <a:avLst/>
@@ -15575,14 +16283,14 @@
       </p:sp>
       <p:sp>
         <p:nvSpPr>
-          <p:cNvPr id="9" name="TextBox 8"/>
+          <p:cNvPr id="16" name="TextBox 15"/>
           <p:cNvSpPr txBox="1"/>
           <p:nvPr/>
         </p:nvSpPr>
         <p:spPr>
           <a:xfrm>
-            <a:off x="868680" y="1719072"/>
-            <a:ext cx="1828800" cy="365760"/>
+            <a:off x="8046720" y="1645920"/>
+            <a:ext cx="3474720" cy="320040"/>
           </a:xfrm>
           <a:prstGeom prst="rect">
             <a:avLst/>
@@ -15602,107 +16310,67 @@
               </a:spcAft>
             </a:pPr>
             <a:r>
-              <a:rPr sz="1600" b="1">
+              <a:rPr sz="1500" b="1">
+                <a:solidFill>
+                  <a:srgbClr val="00D4FF"/>
+                </a:solidFill>
+                <a:latin typeface="Calibri"/>
+              </a:rPr>
+              <a:t>Vague → clarify</a:t>
+            </a:r>
+          </a:p>
+        </p:txBody>
+      </p:sp>
+      <p:sp>
+        <p:nvSpPr>
+          <p:cNvPr id="17" name="TextBox 16"/>
+          <p:cNvSpPr txBox="1"/>
+          <p:nvPr/>
+        </p:nvSpPr>
+        <p:spPr>
+          <a:xfrm>
+            <a:off x="8046720" y="2057400"/>
+            <a:ext cx="3474720" cy="548640"/>
+          </a:xfrm>
+          <a:prstGeom prst="rect">
+            <a:avLst/>
+          </a:prstGeom>
+          <a:noFill/>
+        </p:spPr>
+        <p:txBody>
+          <a:bodyPr wrap="square" anchor="t"/>
+          <a:lstStyle/>
+          <a:p>
+            <a:pPr algn="l">
+              <a:spcBef>
+                <a:spcPts val="0"/>
+              </a:spcBef>
+              <a:spcAft>
+                <a:spcPts val="400"/>
+              </a:spcAft>
+            </a:pPr>
+            <a:r>
+              <a:rPr sz="1300" b="0">
                 <a:solidFill>
                   <a:srgbClr val="8B9BB4"/>
                 </a:solidFill>
                 <a:latin typeface="Calibri"/>
               </a:rPr>
-              <a:t>Hit@10</a:t>
-            </a:r>
-          </a:p>
-        </p:txBody>
-      </p:sp>
-      <p:sp>
-        <p:nvSpPr>
-          <p:cNvPr id="10" name="TextBox 9"/>
-          <p:cNvSpPr txBox="1"/>
-          <p:nvPr/>
-        </p:nvSpPr>
-        <p:spPr>
-          <a:xfrm>
-            <a:off x="2926080" y="1664208"/>
-            <a:ext cx="2011680" cy="457200"/>
-          </a:xfrm>
-          <a:prstGeom prst="rect">
-            <a:avLst/>
-          </a:prstGeom>
-          <a:noFill/>
-        </p:spPr>
-        <p:txBody>
-          <a:bodyPr wrap="square" anchor="t"/>
-          <a:lstStyle/>
-          <a:p>
-            <a:pPr algn="l">
-              <a:spcBef>
-                <a:spcPts val="0"/>
-              </a:spcBef>
-              <a:spcAft>
-                <a:spcPts val="400"/>
-              </a:spcAft>
-            </a:pPr>
-            <a:r>
-              <a:rPr sz="2600" b="1">
-                <a:solidFill>
-                  <a:srgbClr val="00D4FF"/>
-                </a:solidFill>
-                <a:latin typeface="Calibri"/>
-              </a:rPr>
-              <a:t>0.975</a:t>
-            </a:r>
-          </a:p>
-        </p:txBody>
-      </p:sp>
-      <p:sp>
-        <p:nvSpPr>
-          <p:cNvPr id="11" name="TextBox 10"/>
-          <p:cNvSpPr txBox="1"/>
-          <p:nvPr/>
-        </p:nvSpPr>
-        <p:spPr>
-          <a:xfrm>
-            <a:off x="5120640" y="1737360"/>
-            <a:ext cx="6217920" cy="411480"/>
-          </a:xfrm>
-          <a:prstGeom prst="rect">
-            <a:avLst/>
-          </a:prstGeom>
-          <a:noFill/>
-        </p:spPr>
-        <p:txBody>
-          <a:bodyPr wrap="square" anchor="t"/>
-          <a:lstStyle/>
-          <a:p>
-            <a:pPr algn="l">
-              <a:spcBef>
-                <a:spcPts val="0"/>
-              </a:spcBef>
-              <a:spcAft>
-                <a:spcPts val="400"/>
-              </a:spcAft>
-            </a:pPr>
-            <a:r>
-              <a:rPr sz="1500" b="0">
-                <a:solidFill>
-                  <a:srgbClr val="F8FAFC"/>
-                </a:solidFill>
-                <a:latin typeface="Calibri"/>
-              </a:rPr>
-              <a:t>Findability — target ASIN in top 10</a:t>
-            </a:r>
-          </a:p>
-        </p:txBody>
-      </p:sp>
-      <p:sp>
-        <p:nvSpPr>
-          <p:cNvPr id="12" name="Rounded Rectangle 11"/>
+              <a:t>dress + exploring → other → plus size locks size (no re-ask)</a:t>
+            </a:r>
+          </a:p>
+        </p:txBody>
+      </p:sp>
+      <p:sp>
+        <p:nvSpPr>
+          <p:cNvPr id="18" name="Rounded Rectangle 17"/>
           <p:cNvSpPr/>
           <p:nvPr/>
         </p:nvSpPr>
         <p:spPr>
           <a:xfrm>
-            <a:off x="502920" y="2514600"/>
-            <a:ext cx="11155680" cy="914400"/>
+            <a:off x="7772400" y="2971800"/>
+            <a:ext cx="3931920" cy="1371600"/>
           </a:xfrm>
           <a:prstGeom prst="roundRect">
             <a:avLst>
@@ -15740,14 +16408,14 @@
       </p:sp>
       <p:sp>
         <p:nvSpPr>
-          <p:cNvPr id="13" name="Rectangle 12"/>
+          <p:cNvPr id="19" name="Rectangle 18"/>
           <p:cNvSpPr/>
           <p:nvPr/>
         </p:nvSpPr>
         <p:spPr>
           <a:xfrm>
-            <a:off x="502920" y="2514600"/>
-            <a:ext cx="91440" cy="914400"/>
+            <a:off x="7772400" y="2971800"/>
+            <a:ext cx="73152" cy="1371600"/>
           </a:xfrm>
           <a:prstGeom prst="rect">
             <a:avLst/>
@@ -15783,14 +16451,14 @@
       </p:sp>
       <p:sp>
         <p:nvSpPr>
-          <p:cNvPr id="14" name="TextBox 13"/>
+          <p:cNvPr id="20" name="TextBox 19"/>
           <p:cNvSpPr txBox="1"/>
           <p:nvPr/>
         </p:nvSpPr>
         <p:spPr>
           <a:xfrm>
-            <a:off x="868680" y="2770632"/>
-            <a:ext cx="1828800" cy="365760"/>
+            <a:off x="8046720" y="3200400"/>
+            <a:ext cx="3474720" cy="320040"/>
           </a:xfrm>
           <a:prstGeom prst="rect">
             <a:avLst/>
@@ -15810,107 +16478,67 @@
               </a:spcAft>
             </a:pPr>
             <a:r>
-              <a:rPr sz="1600" b="1">
+              <a:rPr sz="1500" b="1">
+                <a:solidFill>
+                  <a:srgbClr val="FF2D8F"/>
+                </a:solidFill>
+                <a:latin typeface="Calibri"/>
+              </a:rPr>
+              <a:t>Family lock</a:t>
+            </a:r>
+          </a:p>
+        </p:txBody>
+      </p:sp>
+      <p:sp>
+        <p:nvSpPr>
+          <p:cNvPr id="21" name="TextBox 20"/>
+          <p:cNvSpPr txBox="1"/>
+          <p:nvPr/>
+        </p:nvSpPr>
+        <p:spPr>
+          <a:xfrm>
+            <a:off x="8046720" y="3611880"/>
+            <a:ext cx="3474720" cy="548640"/>
+          </a:xfrm>
+          <a:prstGeom prst="rect">
+            <a:avLst/>
+          </a:prstGeom>
+          <a:noFill/>
+        </p:spPr>
+        <p:txBody>
+          <a:bodyPr wrap="square" anchor="t"/>
+          <a:lstStyle/>
+          <a:p>
+            <a:pPr algn="l">
+              <a:spcBef>
+                <a:spcPts val="0"/>
+              </a:spcBef>
+              <a:spcAft>
+                <a:spcPts val="400"/>
+              </a:spcAft>
+            </a:pPr>
+            <a:r>
+              <a:rPr sz="1300" b="0">
                 <a:solidFill>
                   <a:srgbClr val="8B9BB4"/>
                 </a:solidFill>
                 <a:latin typeface="Calibri"/>
               </a:rPr>
-              <a:t>MRR</a:t>
-            </a:r>
-          </a:p>
-        </p:txBody>
-      </p:sp>
-      <p:sp>
-        <p:nvSpPr>
-          <p:cNvPr id="15" name="TextBox 14"/>
-          <p:cNvSpPr txBox="1"/>
-          <p:nvPr/>
-        </p:nvSpPr>
-        <p:spPr>
-          <a:xfrm>
-            <a:off x="2926080" y="2715768"/>
-            <a:ext cx="2011680" cy="457200"/>
-          </a:xfrm>
-          <a:prstGeom prst="rect">
-            <a:avLst/>
-          </a:prstGeom>
-          <a:noFill/>
-        </p:spPr>
-        <p:txBody>
-          <a:bodyPr wrap="square" anchor="t"/>
-          <a:lstStyle/>
-          <a:p>
-            <a:pPr algn="l">
-              <a:spcBef>
-                <a:spcPts val="0"/>
-              </a:spcBef>
-              <a:spcAft>
-                <a:spcPts val="400"/>
-              </a:spcAft>
-            </a:pPr>
-            <a:r>
-              <a:rPr sz="2600" b="1">
-                <a:solidFill>
-                  <a:srgbClr val="FF2D8F"/>
-                </a:solidFill>
-                <a:latin typeface="Calibri"/>
-              </a:rPr>
-              <a:t>0.858</a:t>
-            </a:r>
-          </a:p>
-        </p:txBody>
-      </p:sp>
-      <p:sp>
-        <p:nvSpPr>
-          <p:cNvPr id="16" name="TextBox 15"/>
-          <p:cNvSpPr txBox="1"/>
-          <p:nvPr/>
-        </p:nvSpPr>
-        <p:spPr>
-          <a:xfrm>
-            <a:off x="5120640" y="2788920"/>
-            <a:ext cx="6217920" cy="411480"/>
-          </a:xfrm>
-          <a:prstGeom prst="rect">
-            <a:avLst/>
-          </a:prstGeom>
-          <a:noFill/>
-        </p:spPr>
-        <p:txBody>
-          <a:bodyPr wrap="square" anchor="t"/>
-          <a:lstStyle/>
-          <a:p>
-            <a:pPr algn="l">
-              <a:spcBef>
-                <a:spcPts val="0"/>
-              </a:spcBef>
-              <a:spcAft>
-                <a:spcPts val="400"/>
-              </a:spcAft>
-            </a:pPr>
-            <a:r>
-              <a:rPr sz="1500" b="0">
-                <a:solidFill>
-                  <a:srgbClr val="F8FAFC"/>
-                </a:solidFill>
-                <a:latin typeface="Calibri"/>
-              </a:rPr>
-              <a:t>Rank quality — earlier positions win</a:t>
-            </a:r>
-          </a:p>
-        </p:txBody>
-      </p:sp>
-      <p:sp>
-        <p:nvSpPr>
-          <p:cNvPr id="17" name="Rounded Rectangle 16"/>
+              <a:t>"dress sandals" → footwear, not garment dresses</a:t>
+            </a:r>
+          </a:p>
+        </p:txBody>
+      </p:sp>
+      <p:sp>
+        <p:nvSpPr>
+          <p:cNvPr id="22" name="Rounded Rectangle 21"/>
           <p:cNvSpPr/>
           <p:nvPr/>
         </p:nvSpPr>
         <p:spPr>
           <a:xfrm>
-            <a:off x="502920" y="3566160"/>
-            <a:ext cx="11155680" cy="914400"/>
+            <a:off x="7772400" y="4526280"/>
+            <a:ext cx="3931920" cy="1371600"/>
           </a:xfrm>
           <a:prstGeom prst="roundRect">
             <a:avLst>
@@ -15948,14 +16576,14 @@
       </p:sp>
       <p:sp>
         <p:nvSpPr>
-          <p:cNvPr id="18" name="Rectangle 17"/>
+          <p:cNvPr id="23" name="Rectangle 22"/>
           <p:cNvSpPr/>
           <p:nvPr/>
         </p:nvSpPr>
         <p:spPr>
           <a:xfrm>
-            <a:off x="502920" y="3566160"/>
-            <a:ext cx="91440" cy="914400"/>
+            <a:off x="7772400" y="4526280"/>
+            <a:ext cx="73152" cy="1371600"/>
           </a:xfrm>
           <a:prstGeom prst="rect">
             <a:avLst/>
@@ -15991,222 +16619,14 @@
       </p:sp>
       <p:sp>
         <p:nvSpPr>
-          <p:cNvPr id="19" name="TextBox 18"/>
-          <p:cNvSpPr txBox="1"/>
-          <p:nvPr/>
-        </p:nvSpPr>
-        <p:spPr>
-          <a:xfrm>
-            <a:off x="868680" y="3822192"/>
-            <a:ext cx="1828800" cy="365760"/>
-          </a:xfrm>
-          <a:prstGeom prst="rect">
-            <a:avLst/>
-          </a:prstGeom>
-          <a:noFill/>
-        </p:spPr>
-        <p:txBody>
-          <a:bodyPr wrap="square" anchor="t"/>
-          <a:lstStyle/>
-          <a:p>
-            <a:pPr algn="l">
-              <a:spcBef>
-                <a:spcPts val="0"/>
-              </a:spcBef>
-              <a:spcAft>
-                <a:spcPts val="400"/>
-              </a:spcAft>
-            </a:pPr>
-            <a:r>
-              <a:rPr sz="1600" b="1">
-                <a:solidFill>
-                  <a:srgbClr val="8B9BB4"/>
-                </a:solidFill>
-                <a:latin typeface="Calibri"/>
-              </a:rPr>
-              <a:t>MTTC</a:t>
-            </a:r>
-          </a:p>
-        </p:txBody>
-      </p:sp>
-      <p:sp>
-        <p:nvSpPr>
-          <p:cNvPr id="20" name="TextBox 19"/>
-          <p:cNvSpPr txBox="1"/>
-          <p:nvPr/>
-        </p:nvSpPr>
-        <p:spPr>
-          <a:xfrm>
-            <a:off x="2926080" y="3767328"/>
-            <a:ext cx="2011680" cy="457200"/>
-          </a:xfrm>
-          <a:prstGeom prst="rect">
-            <a:avLst/>
-          </a:prstGeom>
-          <a:noFill/>
-        </p:spPr>
-        <p:txBody>
-          <a:bodyPr wrap="square" anchor="t"/>
-          <a:lstStyle/>
-          <a:p>
-            <a:pPr algn="l">
-              <a:spcBef>
-                <a:spcPts val="0"/>
-              </a:spcBef>
-              <a:spcAft>
-                <a:spcPts val="400"/>
-              </a:spcAft>
-            </a:pPr>
-            <a:r>
-              <a:rPr sz="2600" b="1">
-                <a:solidFill>
-                  <a:srgbClr val="A855F7"/>
-                </a:solidFill>
-                <a:latin typeface="Calibri"/>
-              </a:rPr>
-              <a:t>2.88</a:t>
-            </a:r>
-          </a:p>
-        </p:txBody>
-      </p:sp>
-      <p:sp>
-        <p:nvSpPr>
-          <p:cNvPr id="21" name="TextBox 20"/>
-          <p:cNvSpPr txBox="1"/>
-          <p:nvPr/>
-        </p:nvSpPr>
-        <p:spPr>
-          <a:xfrm>
-            <a:off x="5120640" y="3840480"/>
-            <a:ext cx="6217920" cy="411480"/>
-          </a:xfrm>
-          <a:prstGeom prst="rect">
-            <a:avLst/>
-          </a:prstGeom>
-          <a:noFill/>
-        </p:spPr>
-        <p:txBody>
-          <a:bodyPr wrap="square" anchor="t"/>
-          <a:lstStyle/>
-          <a:p>
-            <a:pPr algn="l">
-              <a:spcBef>
-                <a:spcPts val="0"/>
-              </a:spcBef>
-              <a:spcAft>
-                <a:spcPts val="400"/>
-              </a:spcAft>
-            </a:pPr>
-            <a:r>
-              <a:rPr sz="1500" b="0">
-                <a:solidFill>
-                  <a:srgbClr val="F8FAFC"/>
-                </a:solidFill>
-                <a:latin typeface="Calibri"/>
-              </a:rPr>
-              <a:t>Cost / cognitive load — fewer refine loops</a:t>
-            </a:r>
-          </a:p>
-        </p:txBody>
-      </p:sp>
-      <p:sp>
-        <p:nvSpPr>
-          <p:cNvPr id="22" name="Rounded Rectangle 21"/>
-          <p:cNvSpPr/>
-          <p:nvPr/>
-        </p:nvSpPr>
-        <p:spPr>
-          <a:xfrm>
-            <a:off x="502920" y="4617720"/>
-            <a:ext cx="11155680" cy="914400"/>
-          </a:xfrm>
-          <a:prstGeom prst="roundRect">
-            <a:avLst>
-              <a:gd name="adj" fmla="val 10000"/>
-            </a:avLst>
-          </a:prstGeom>
-          <a:solidFill>
-            <a:srgbClr val="152033"/>
-          </a:solidFill>
-          <a:ln>
-            <a:noFill/>
-          </a:ln>
-        </p:spPr>
-        <p:style>
-          <a:lnRef idx="1">
-            <a:schemeClr val="accent1"/>
-          </a:lnRef>
-          <a:fillRef idx="3">
-            <a:schemeClr val="accent1"/>
-          </a:fillRef>
-          <a:effectRef idx="2">
-            <a:schemeClr val="accent1"/>
-          </a:effectRef>
-          <a:fontRef idx="minor">
-            <a:schemeClr val="lt1"/>
-          </a:fontRef>
-        </p:style>
-        <p:txBody>
-          <a:bodyPr rtlCol="0" anchor="ctr"/>
-          <a:lstStyle/>
-          <a:p>
-            <a:pPr algn="ctr"/>
-          </a:p>
-        </p:txBody>
-      </p:sp>
-      <p:sp>
-        <p:nvSpPr>
-          <p:cNvPr id="23" name="Rectangle 22"/>
-          <p:cNvSpPr/>
-          <p:nvPr/>
-        </p:nvSpPr>
-        <p:spPr>
-          <a:xfrm>
-            <a:off x="502920" y="4617720"/>
-            <a:ext cx="91440" cy="914400"/>
-          </a:xfrm>
-          <a:prstGeom prst="rect">
-            <a:avLst/>
-          </a:prstGeom>
-          <a:solidFill>
-            <a:srgbClr val="FBBF24"/>
-          </a:solidFill>
-          <a:ln>
-            <a:noFill/>
-          </a:ln>
-        </p:spPr>
-        <p:style>
-          <a:lnRef idx="1">
-            <a:schemeClr val="accent1"/>
-          </a:lnRef>
-          <a:fillRef idx="3">
-            <a:schemeClr val="accent1"/>
-          </a:fillRef>
-          <a:effectRef idx="2">
-            <a:schemeClr val="accent1"/>
-          </a:effectRef>
-          <a:fontRef idx="minor">
-            <a:schemeClr val="lt1"/>
-          </a:fontRef>
-        </p:style>
-        <p:txBody>
-          <a:bodyPr rtlCol="0" anchor="ctr"/>
-          <a:lstStyle/>
-          <a:p>
-            <a:pPr algn="ctr"/>
-          </a:p>
-        </p:txBody>
-      </p:sp>
-      <p:sp>
-        <p:nvSpPr>
           <p:cNvPr id="24" name="TextBox 23"/>
           <p:cNvSpPr txBox="1"/>
           <p:nvPr/>
         </p:nvSpPr>
         <p:spPr>
           <a:xfrm>
-            <a:off x="868680" y="4873752"/>
-            <a:ext cx="1828800" cy="365760"/>
+            <a:off x="8046720" y="4754880"/>
+            <a:ext cx="3474720" cy="320040"/>
           </a:xfrm>
           <a:prstGeom prst="rect">
             <a:avLst/>
@@ -16226,13 +16646,13 @@
               </a:spcAft>
             </a:pPr>
             <a:r>
-              <a:rPr sz="1600" b="1">
-                <a:solidFill>
-                  <a:srgbClr val="8B9BB4"/>
-                </a:solidFill>
-                <a:latin typeface="Calibri"/>
-              </a:rPr>
-              <a:t>Tokens</a:t>
+              <a:rPr sz="1500" b="1">
+                <a:solidFill>
+                  <a:srgbClr val="A855F7"/>
+                </a:solidFill>
+                <a:latin typeface="Calibri"/>
+              </a:rPr>
+              <a:t>Intent override</a:t>
             </a:r>
           </a:p>
         </p:txBody>
@@ -16245,8 +16665,8 @@
         </p:nvSpPr>
         <p:spPr>
           <a:xfrm>
-            <a:off x="2926080" y="4818888"/>
-            <a:ext cx="2011680" cy="457200"/>
+            <a:off x="8046720" y="5166360"/>
+            <a:ext cx="3474720" cy="548640"/>
           </a:xfrm>
           <a:prstGeom prst="rect">
             <a:avLst/>
@@ -16266,60 +16686,20 @@
               </a:spcAft>
             </a:pPr>
             <a:r>
-              <a:rPr sz="2600" b="1">
-                <a:solidFill>
-                  <a:srgbClr val="FBBF24"/>
-                </a:solidFill>
-                <a:latin typeface="Calibri"/>
-              </a:rPr>
-              <a:t>0</a:t>
-            </a:r>
-          </a:p>
-        </p:txBody>
-      </p:sp>
-      <p:sp>
-        <p:nvSpPr>
-          <p:cNvPr id="26" name="TextBox 25"/>
-          <p:cNvSpPr txBox="1"/>
-          <p:nvPr/>
-        </p:nvSpPr>
-        <p:spPr>
-          <a:xfrm>
-            <a:off x="5120640" y="4892040"/>
-            <a:ext cx="6217920" cy="411480"/>
-          </a:xfrm>
-          <a:prstGeom prst="rect">
-            <a:avLst/>
-          </a:prstGeom>
-          <a:noFill/>
-        </p:spPr>
-        <p:txBody>
-          <a:bodyPr wrap="square" anchor="t"/>
-          <a:lstStyle/>
-          <a:p>
-            <a:pPr algn="l">
-              <a:spcBef>
-                <a:spcPts val="0"/>
-              </a:spcBef>
-              <a:spcAft>
-                <a:spcPts val="400"/>
-              </a:spcAft>
-            </a:pPr>
-            <a:r>
-              <a:rPr sz="1500" b="0">
-                <a:solidFill>
-                  <a:srgbClr val="F8FAFC"/>
-                </a:solidFill>
-                <a:latin typeface="Calibri"/>
-              </a:rPr>
-              <a:t>Offline default — no paid LLM on score path</a:t>
-            </a:r>
-          </a:p>
-        </p:txBody>
-      </p:sp>
-      <p:sp>
-        <p:nvSpPr>
-          <p:cNvPr id="27" name="Rectangle 26"/>
+              <a:rPr sz="1300" b="0">
+                <a:solidFill>
+                  <a:srgbClr val="8B9BB4"/>
+                </a:solidFill>
+                <a:latin typeface="Calibri"/>
+              </a:rPr>
+              <a:t>running shoes → dress shoes; size 9 persists</a:t>
+            </a:r>
+          </a:p>
+        </p:txBody>
+      </p:sp>
+      <p:sp>
+        <p:nvSpPr>
+          <p:cNvPr id="26" name="Rectangle 25"/>
           <p:cNvSpPr/>
           <p:nvPr/>
         </p:nvSpPr>
@@ -16362,52 +16742,52 @@
       </p:sp>
       <p:sp>
         <p:nvSpPr>
+          <p:cNvPr id="27" name="TextBox 26"/>
+          <p:cNvSpPr txBox="1"/>
+          <p:nvPr/>
+        </p:nvSpPr>
+        <p:spPr>
+          <a:xfrm>
+            <a:off x="502920" y="6656832"/>
+            <a:ext cx="9601200" cy="256032"/>
+          </a:xfrm>
+          <a:prstGeom prst="rect">
+            <a:avLst/>
+          </a:prstGeom>
+          <a:noFill/>
+        </p:spPr>
+        <p:txBody>
+          <a:bodyPr wrap="square" anchor="t"/>
+          <a:lstStyle/>
+          <a:p>
+            <a:pPr algn="l">
+              <a:spcBef>
+                <a:spcPts val="0"/>
+              </a:spcBef>
+              <a:spcAft>
+                <a:spcPts val="400"/>
+              </a:spcAft>
+            </a:pPr>
+            <a:r>
+              <a:rPr sz="1100" b="0">
+                <a:solidFill>
+                  <a:srgbClr val="64748B"/>
+                </a:solidFill>
+                <a:latin typeface="Calibri"/>
+              </a:rPr>
+              <a:t>ShopPilot · TechJam 2026 Track 4</a:t>
+            </a:r>
+          </a:p>
+        </p:txBody>
+      </p:sp>
+      <p:sp>
+        <p:nvSpPr>
           <p:cNvPr id="28" name="TextBox 27"/>
           <p:cNvSpPr txBox="1"/>
           <p:nvPr/>
         </p:nvSpPr>
         <p:spPr>
           <a:xfrm>
-            <a:off x="502920" y="6656832"/>
-            <a:ext cx="9601200" cy="256032"/>
-          </a:xfrm>
-          <a:prstGeom prst="rect">
-            <a:avLst/>
-          </a:prstGeom>
-          <a:noFill/>
-        </p:spPr>
-        <p:txBody>
-          <a:bodyPr wrap="square" anchor="t"/>
-          <a:lstStyle/>
-          <a:p>
-            <a:pPr algn="l">
-              <a:spcBef>
-                <a:spcPts val="0"/>
-              </a:spcBef>
-              <a:spcAft>
-                <a:spcPts val="400"/>
-              </a:spcAft>
-            </a:pPr>
-            <a:r>
-              <a:rPr sz="1100" b="0">
-                <a:solidFill>
-                  <a:srgbClr val="64748B"/>
-                </a:solidFill>
-                <a:latin typeface="Calibri"/>
-              </a:rPr>
-              <a:t>ShopPilot · TechJam 2026 Track 4</a:t>
-            </a:r>
-          </a:p>
-        </p:txBody>
-      </p:sp>
-      <p:sp>
-        <p:nvSpPr>
-          <p:cNvPr id="29" name="TextBox 28"/>
-          <p:cNvSpPr txBox="1"/>
-          <p:nvPr/>
-        </p:nvSpPr>
-        <p:spPr>
-          <a:xfrm>
             <a:off x="10424160" y="6656832"/>
             <a:ext cx="1371600" cy="256032"/>
           </a:xfrm>
@@ -16435,7 +16815,7 @@
                 </a:solidFill>
                 <a:latin typeface="Calibri"/>
               </a:rPr>
-              <a:t>9 / 10</a:t>
+              <a:t>9 / 11</a:t>
             </a:r>
           </a:p>
         </p:txBody>

--- a/docs/ShopPilot_Demo_Slides.pptx
+++ b/docs/ShopPilot_Demo_Slides.pptx
@@ -9498,8 +9498,8 @@
         </p:nvSpPr>
         <p:spPr>
           <a:xfrm>
-            <a:off x="411480" y="1463040"/>
-            <a:ext cx="2148840" cy="1691640"/>
+            <a:off x="411480" y="1417320"/>
+            <a:ext cx="2148840" cy="1554480"/>
           </a:xfrm>
           <a:prstGeom prst="roundRect">
             <a:avLst>
@@ -9543,7 +9543,7 @@
         </p:nvSpPr>
         <p:spPr>
           <a:xfrm>
-            <a:off x="411480" y="1463040"/>
+            <a:off x="411480" y="1417320"/>
             <a:ext cx="2148840" cy="73152"/>
           </a:xfrm>
           <a:prstGeom prst="rect">
@@ -9586,7 +9586,7 @@
         </p:nvSpPr>
         <p:spPr>
           <a:xfrm>
-            <a:off x="548640" y="1691640"/>
+            <a:off x="548640" y="1600200"/>
             <a:ext cx="384048" cy="384048"/>
           </a:xfrm>
           <a:prstGeom prst="ellipse">
@@ -9642,7 +9642,7 @@
         </p:nvSpPr>
         <p:spPr>
           <a:xfrm>
-            <a:off x="1051560" y="1737360"/>
+            <a:off x="1051560" y="1645920"/>
             <a:ext cx="1371600" cy="320040"/>
           </a:xfrm>
           <a:prstGeom prst="rect">
@@ -9682,8 +9682,8 @@
         </p:nvSpPr>
         <p:spPr>
           <a:xfrm>
-            <a:off x="548640" y="2331720"/>
-            <a:ext cx="1874519" cy="640080"/>
+            <a:off x="548640" y="2194560"/>
+            <a:ext cx="1874519" cy="548640"/>
           </a:xfrm>
           <a:prstGeom prst="rect">
             <a:avLst/>
@@ -9722,7 +9722,7 @@
         </p:nvSpPr>
         <p:spPr>
           <a:xfrm>
-            <a:off x="2587752" y="2148840"/>
+            <a:off x="2587752" y="2057400"/>
             <a:ext cx="146304" cy="201168"/>
           </a:xfrm>
           <a:prstGeom prst="rightArrow">
@@ -9765,8 +9765,8 @@
         </p:nvSpPr>
         <p:spPr>
           <a:xfrm>
-            <a:off x="2743200" y="1463040"/>
-            <a:ext cx="2148840" cy="1691640"/>
+            <a:off x="2743200" y="1417320"/>
+            <a:ext cx="2148840" cy="1554480"/>
           </a:xfrm>
           <a:prstGeom prst="roundRect">
             <a:avLst>
@@ -9810,7 +9810,7 @@
         </p:nvSpPr>
         <p:spPr>
           <a:xfrm>
-            <a:off x="2743200" y="1463040"/>
+            <a:off x="2743200" y="1417320"/>
             <a:ext cx="2148840" cy="73152"/>
           </a:xfrm>
           <a:prstGeom prst="rect">
@@ -9853,7 +9853,7 @@
         </p:nvSpPr>
         <p:spPr>
           <a:xfrm>
-            <a:off x="2880360" y="1691640"/>
+            <a:off x="2880360" y="1600200"/>
             <a:ext cx="384048" cy="384048"/>
           </a:xfrm>
           <a:prstGeom prst="ellipse">
@@ -9909,7 +9909,7 @@
         </p:nvSpPr>
         <p:spPr>
           <a:xfrm>
-            <a:off x="3383280" y="1737360"/>
+            <a:off x="3383280" y="1645920"/>
             <a:ext cx="1371600" cy="320040"/>
           </a:xfrm>
           <a:prstGeom prst="rect">
@@ -9949,8 +9949,8 @@
         </p:nvSpPr>
         <p:spPr>
           <a:xfrm>
-            <a:off x="2880360" y="2331720"/>
-            <a:ext cx="1874519" cy="640080"/>
+            <a:off x="2880360" y="2194560"/>
+            <a:ext cx="1874519" cy="548640"/>
           </a:xfrm>
           <a:prstGeom prst="rect">
             <a:avLst/>
@@ -9989,7 +9989,7 @@
         </p:nvSpPr>
         <p:spPr>
           <a:xfrm>
-            <a:off x="4919472" y="2148840"/>
+            <a:off x="4919472" y="2057400"/>
             <a:ext cx="146304" cy="201168"/>
           </a:xfrm>
           <a:prstGeom prst="rightArrow">
@@ -10032,8 +10032,8 @@
         </p:nvSpPr>
         <p:spPr>
           <a:xfrm>
-            <a:off x="5074920" y="1463040"/>
-            <a:ext cx="2148840" cy="1691640"/>
+            <a:off x="5074920" y="1417320"/>
+            <a:ext cx="2148840" cy="1554480"/>
           </a:xfrm>
           <a:prstGeom prst="roundRect">
             <a:avLst>
@@ -10077,7 +10077,7 @@
         </p:nvSpPr>
         <p:spPr>
           <a:xfrm>
-            <a:off x="5074920" y="1463040"/>
+            <a:off x="5074920" y="1417320"/>
             <a:ext cx="2148840" cy="73152"/>
           </a:xfrm>
           <a:prstGeom prst="rect">
@@ -10120,7 +10120,7 @@
         </p:nvSpPr>
         <p:spPr>
           <a:xfrm>
-            <a:off x="5212080" y="1691640"/>
+            <a:off x="5212080" y="1600200"/>
             <a:ext cx="384048" cy="384048"/>
           </a:xfrm>
           <a:prstGeom prst="ellipse">
@@ -10176,7 +10176,7 @@
         </p:nvSpPr>
         <p:spPr>
           <a:xfrm>
-            <a:off x="5715000" y="1737360"/>
+            <a:off x="5715000" y="1645920"/>
             <a:ext cx="1371600" cy="320040"/>
           </a:xfrm>
           <a:prstGeom prst="rect">
@@ -10216,8 +10216,8 @@
         </p:nvSpPr>
         <p:spPr>
           <a:xfrm>
-            <a:off x="5212080" y="2331720"/>
-            <a:ext cx="1874519" cy="640080"/>
+            <a:off x="5212080" y="2194560"/>
+            <a:ext cx="1874519" cy="548640"/>
           </a:xfrm>
           <a:prstGeom prst="rect">
             <a:avLst/>
@@ -10256,7 +10256,7 @@
         </p:nvSpPr>
         <p:spPr>
           <a:xfrm>
-            <a:off x="7251192" y="2148840"/>
+            <a:off x="7251192" y="2057400"/>
             <a:ext cx="146304" cy="201168"/>
           </a:xfrm>
           <a:prstGeom prst="rightArrow">
@@ -10299,8 +10299,8 @@
         </p:nvSpPr>
         <p:spPr>
           <a:xfrm>
-            <a:off x="7406640" y="1463040"/>
-            <a:ext cx="2148840" cy="1691640"/>
+            <a:off x="7406640" y="1417320"/>
+            <a:ext cx="2148840" cy="1554480"/>
           </a:xfrm>
           <a:prstGeom prst="roundRect">
             <a:avLst>
@@ -10344,7 +10344,7 @@
         </p:nvSpPr>
         <p:spPr>
           <a:xfrm>
-            <a:off x="7406640" y="1463040"/>
+            <a:off x="7406640" y="1417320"/>
             <a:ext cx="2148840" cy="73152"/>
           </a:xfrm>
           <a:prstGeom prst="rect">
@@ -10387,7 +10387,7 @@
         </p:nvSpPr>
         <p:spPr>
           <a:xfrm>
-            <a:off x="7543800" y="1691640"/>
+            <a:off x="7543800" y="1600200"/>
             <a:ext cx="384048" cy="384048"/>
           </a:xfrm>
           <a:prstGeom prst="ellipse">
@@ -10443,7 +10443,7 @@
         </p:nvSpPr>
         <p:spPr>
           <a:xfrm>
-            <a:off x="8046719" y="1737360"/>
+            <a:off x="8046719" y="1645920"/>
             <a:ext cx="1371600" cy="320040"/>
           </a:xfrm>
           <a:prstGeom prst="rect">
@@ -10483,8 +10483,8 @@
         </p:nvSpPr>
         <p:spPr>
           <a:xfrm>
-            <a:off x="7543800" y="2331720"/>
-            <a:ext cx="1874519" cy="640080"/>
+            <a:off x="7543800" y="2194560"/>
+            <a:ext cx="1874519" cy="548640"/>
           </a:xfrm>
           <a:prstGeom prst="rect">
             <a:avLst/>
@@ -10523,7 +10523,7 @@
         </p:nvSpPr>
         <p:spPr>
           <a:xfrm>
-            <a:off x="9582912" y="2148840"/>
+            <a:off x="9582912" y="2057400"/>
             <a:ext cx="146304" cy="201168"/>
           </a:xfrm>
           <a:prstGeom prst="rightArrow">
@@ -10566,8 +10566,8 @@
         </p:nvSpPr>
         <p:spPr>
           <a:xfrm>
-            <a:off x="9738359" y="1463040"/>
-            <a:ext cx="2148840" cy="1691640"/>
+            <a:off x="9738359" y="1417320"/>
+            <a:ext cx="2148840" cy="1554480"/>
           </a:xfrm>
           <a:prstGeom prst="roundRect">
             <a:avLst>
@@ -10611,7 +10611,7 @@
         </p:nvSpPr>
         <p:spPr>
           <a:xfrm>
-            <a:off x="9738359" y="1463040"/>
+            <a:off x="9738359" y="1417320"/>
             <a:ext cx="2148840" cy="73152"/>
           </a:xfrm>
           <a:prstGeom prst="rect">
@@ -10654,7 +10654,7 @@
         </p:nvSpPr>
         <p:spPr>
           <a:xfrm>
-            <a:off x="9875519" y="1691640"/>
+            <a:off x="9875519" y="1600200"/>
             <a:ext cx="384048" cy="384048"/>
           </a:xfrm>
           <a:prstGeom prst="ellipse">
@@ -10710,7 +10710,7 @@
         </p:nvSpPr>
         <p:spPr>
           <a:xfrm>
-            <a:off x="10378439" y="1737360"/>
+            <a:off x="10378439" y="1645920"/>
             <a:ext cx="1371600" cy="320040"/>
           </a:xfrm>
           <a:prstGeom prst="rect">
@@ -10750,8 +10750,8 @@
         </p:nvSpPr>
         <p:spPr>
           <a:xfrm>
-            <a:off x="9875519" y="2331720"/>
-            <a:ext cx="1874519" cy="640080"/>
+            <a:off x="9875519" y="2194560"/>
+            <a:ext cx="1874519" cy="548640"/>
           </a:xfrm>
           <a:prstGeom prst="rect">
             <a:avLst/>
@@ -10790,8 +10790,8 @@
         </p:nvSpPr>
         <p:spPr>
           <a:xfrm>
-            <a:off x="411480" y="3383280"/>
-            <a:ext cx="3611880" cy="2788920"/>
+            <a:off x="411480" y="3246120"/>
+            <a:ext cx="3611880" cy="2926080"/>
           </a:xfrm>
           <a:prstGeom prst="roundRect">
             <a:avLst>
@@ -10835,8 +10835,8 @@
         </p:nvSpPr>
         <p:spPr>
           <a:xfrm>
-            <a:off x="411480" y="3383280"/>
-            <a:ext cx="91440" cy="2788920"/>
+            <a:off x="411480" y="3246120"/>
+            <a:ext cx="91440" cy="2926080"/>
           </a:xfrm>
           <a:prstGeom prst="rect">
             <a:avLst/>
@@ -10878,7 +10878,7 @@
         </p:nvSpPr>
         <p:spPr>
           <a:xfrm>
-            <a:off x="640080" y="3566160"/>
+            <a:off x="640080" y="3429000"/>
             <a:ext cx="3200400" cy="365760"/>
           </a:xfrm>
           <a:prstGeom prst="rect">
@@ -10918,8 +10918,8 @@
         </p:nvSpPr>
         <p:spPr>
           <a:xfrm>
-            <a:off x="640080" y="4069080"/>
-            <a:ext cx="3200400" cy="1920240"/>
+            <a:off x="640080" y="3931920"/>
+            <a:ext cx="3200400" cy="2011680"/>
           </a:xfrm>
           <a:prstGeom prst="rect">
             <a:avLst/>
@@ -11015,8 +11015,8 @@
         </p:nvSpPr>
         <p:spPr>
           <a:xfrm>
-            <a:off x="4206240" y="3383280"/>
-            <a:ext cx="3611880" cy="2788920"/>
+            <a:off x="4206240" y="3246120"/>
+            <a:ext cx="3611880" cy="2926080"/>
           </a:xfrm>
           <a:prstGeom prst="roundRect">
             <a:avLst>
@@ -11060,8 +11060,8 @@
         </p:nvSpPr>
         <p:spPr>
           <a:xfrm>
-            <a:off x="4206240" y="3383280"/>
-            <a:ext cx="91440" cy="2788920"/>
+            <a:off x="4206240" y="3246120"/>
+            <a:ext cx="91440" cy="2926080"/>
           </a:xfrm>
           <a:prstGeom prst="rect">
             <a:avLst/>
@@ -11103,7 +11103,7 @@
         </p:nvSpPr>
         <p:spPr>
           <a:xfrm>
-            <a:off x="4434840" y="3566160"/>
+            <a:off x="4434840" y="3429000"/>
             <a:ext cx="3200400" cy="365760"/>
           </a:xfrm>
           <a:prstGeom prst="rect">
@@ -11143,8 +11143,8 @@
         </p:nvSpPr>
         <p:spPr>
           <a:xfrm>
-            <a:off x="4434840" y="4069080"/>
-            <a:ext cx="3200400" cy="1920240"/>
+            <a:off x="4434840" y="3931920"/>
+            <a:ext cx="3200400" cy="2011680"/>
           </a:xfrm>
           <a:prstGeom prst="rect">
             <a:avLst/>
@@ -11240,8 +11240,8 @@
         </p:nvSpPr>
         <p:spPr>
           <a:xfrm>
-            <a:off x="8001000" y="3383280"/>
-            <a:ext cx="3611880" cy="2788920"/>
+            <a:off x="8001000" y="3246120"/>
+            <a:ext cx="3611880" cy="2926080"/>
           </a:xfrm>
           <a:prstGeom prst="roundRect">
             <a:avLst>
@@ -11285,8 +11285,8 @@
         </p:nvSpPr>
         <p:spPr>
           <a:xfrm>
-            <a:off x="8001000" y="3383280"/>
-            <a:ext cx="91440" cy="2788920"/>
+            <a:off x="8001000" y="3246120"/>
+            <a:ext cx="91440" cy="2926080"/>
           </a:xfrm>
           <a:prstGeom prst="rect">
             <a:avLst/>
@@ -11328,7 +11328,7 @@
         </p:nvSpPr>
         <p:spPr>
           <a:xfrm>
-            <a:off x="8229600" y="3566160"/>
+            <a:off x="8229600" y="3429000"/>
             <a:ext cx="3200400" cy="365760"/>
           </a:xfrm>
           <a:prstGeom prst="rect">
@@ -11368,8 +11368,8 @@
         </p:nvSpPr>
         <p:spPr>
           <a:xfrm>
-            <a:off x="8229600" y="4069080"/>
-            <a:ext cx="3200400" cy="1920240"/>
+            <a:off x="8229600" y="3931920"/>
+            <a:ext cx="3200400" cy="2011680"/>
           </a:xfrm>
           <a:prstGeom prst="rect">
             <a:avLst/>
@@ -11741,7 +11741,7 @@
         <p:spPr>
           <a:xfrm>
             <a:off x="502920" y="438912"/>
-            <a:ext cx="10972800" cy="320040"/>
+            <a:ext cx="11155680" cy="502920"/>
           </a:xfrm>
           <a:prstGeom prst="rect">
             <a:avLst/>
@@ -11761,7 +11761,7 @@
               </a:spcAft>
             </a:pPr>
             <a:r>
-              <a:rPr sz="2200" b="1">
+              <a:rPr sz="2400" b="1">
                 <a:solidFill>
                   <a:srgbClr val="F8FAFC"/>
                 </a:solidFill>
@@ -11780,8 +11780,8 @@
         </p:nvSpPr>
         <p:spPr>
           <a:xfrm>
-            <a:off x="502920" y="749808"/>
-            <a:ext cx="10972800" cy="274320"/>
+            <a:off x="502920" y="914400"/>
+            <a:ext cx="11155680" cy="365760"/>
           </a:xfrm>
           <a:prstGeom prst="rect">
             <a:avLst/>
@@ -11801,44 +11801,1782 @@
               </a:spcAft>
             </a:pPr>
             <a:r>
+              <a:rPr sz="1300" b="0">
+                <a:solidFill>
+                  <a:srgbClr val="8B9BB4"/>
+                </a:solidFill>
+                <a:latin typeface="Calibri"/>
+              </a:rPr>
+              <a:t>Editable shapes (not paper screenshots)  ·  Qulac · Bayesian CRS · DST · corpus CQs · hybrid IR</a:t>
+            </a:r>
+          </a:p>
+        </p:txBody>
+      </p:sp>
+      <p:sp>
+        <p:nvSpPr>
+          <p:cNvPr id="7" name="TextBox 6"/>
+          <p:cNvSpPr txBox="1"/>
+          <p:nvPr/>
+        </p:nvSpPr>
+        <p:spPr>
+          <a:xfrm>
+            <a:off x="457200" y="1234440"/>
+            <a:ext cx="5486400" cy="256032"/>
+          </a:xfrm>
+          <a:prstGeom prst="rect">
+            <a:avLst/>
+          </a:prstGeom>
+          <a:noFill/>
+        </p:spPr>
+        <p:txBody>
+          <a:bodyPr wrap="square" anchor="t"/>
+          <a:lstStyle/>
+          <a:p>
+            <a:pPr algn="l">
+              <a:spcBef>
+                <a:spcPts val="0"/>
+              </a:spcBef>
+              <a:spcAft>
+                <a:spcPts val="400"/>
+              </a:spcAft>
+            </a:pPr>
+            <a:r>
+              <a:rPr sz="1100" b="1">
+                <a:solidFill>
+                  <a:srgbClr val="00D4FF"/>
+                </a:solidFill>
+                <a:latin typeface="Calibri"/>
+              </a:rPr>
+              <a:t>A  ·  CLASSICAL CRS PIPELINE</a:t>
+            </a:r>
+          </a:p>
+        </p:txBody>
+      </p:sp>
+      <p:sp>
+        <p:nvSpPr>
+          <p:cNvPr id="8" name="Rounded Rectangle 7"/>
+          <p:cNvSpPr/>
+          <p:nvPr/>
+        </p:nvSpPr>
+        <p:spPr>
+          <a:xfrm>
+            <a:off x="457200" y="1554480"/>
+            <a:ext cx="2011680" cy="868680"/>
+          </a:xfrm>
+          <a:prstGeom prst="roundRect">
+            <a:avLst>
+              <a:gd name="adj" fmla="val 12000"/>
+            </a:avLst>
+          </a:prstGeom>
+          <a:solidFill>
+            <a:srgbClr val="152033"/>
+          </a:solidFill>
+          <a:ln w="15875">
+            <a:solidFill>
+              <a:srgbClr val="00D4FF"/>
+            </a:solidFill>
+          </a:ln>
+        </p:spPr>
+        <p:style>
+          <a:lnRef idx="1">
+            <a:schemeClr val="accent1"/>
+          </a:lnRef>
+          <a:fillRef idx="3">
+            <a:schemeClr val="accent1"/>
+          </a:fillRef>
+          <a:effectRef idx="2">
+            <a:schemeClr val="accent1"/>
+          </a:effectRef>
+          <a:fontRef idx="minor">
+            <a:schemeClr val="lt1"/>
+          </a:fontRef>
+        </p:style>
+        <p:txBody>
+          <a:bodyPr rtlCol="0" anchor="ctr"/>
+          <a:lstStyle/>
+          <a:p>
+            <a:pPr algn="ctr"/>
+          </a:p>
+        </p:txBody>
+      </p:sp>
+      <p:sp>
+        <p:nvSpPr>
+          <p:cNvPr id="9" name="TextBox 8"/>
+          <p:cNvSpPr txBox="1"/>
+          <p:nvPr/>
+        </p:nvSpPr>
+        <p:spPr>
+          <a:xfrm>
+            <a:off x="548640" y="1691640"/>
+            <a:ext cx="1828800" cy="320040"/>
+          </a:xfrm>
+          <a:prstGeom prst="rect">
+            <a:avLst/>
+          </a:prstGeom>
+          <a:noFill/>
+        </p:spPr>
+        <p:txBody>
+          <a:bodyPr wrap="square" anchor="t"/>
+          <a:lstStyle/>
+          <a:p>
+            <a:pPr algn="ctr">
+              <a:spcBef>
+                <a:spcPts val="0"/>
+              </a:spcBef>
+              <a:spcAft>
+                <a:spcPts val="400"/>
+              </a:spcAft>
+            </a:pPr>
+            <a:r>
+              <a:rPr sz="1400" b="1">
+                <a:solidFill>
+                  <a:srgbClr val="F8FAFC"/>
+                </a:solidFill>
+                <a:latin typeface="Calibri"/>
+              </a:rPr>
+              <a:t>User</a:t>
+            </a:r>
+          </a:p>
+        </p:txBody>
+      </p:sp>
+      <p:sp>
+        <p:nvSpPr>
+          <p:cNvPr id="10" name="TextBox 9"/>
+          <p:cNvSpPr txBox="1"/>
+          <p:nvPr/>
+        </p:nvSpPr>
+        <p:spPr>
+          <a:xfrm>
+            <a:off x="548640" y="2057400"/>
+            <a:ext cx="1828800" cy="274320"/>
+          </a:xfrm>
+          <a:prstGeom prst="rect">
+            <a:avLst/>
+          </a:prstGeom>
+          <a:noFill/>
+        </p:spPr>
+        <p:txBody>
+          <a:bodyPr wrap="square" anchor="t"/>
+          <a:lstStyle/>
+          <a:p>
+            <a:pPr algn="ctr">
+              <a:spcBef>
+                <a:spcPts val="0"/>
+              </a:spcBef>
+              <a:spcAft>
+                <a:spcPts val="400"/>
+              </a:spcAft>
+            </a:pPr>
+            <a:r>
+              <a:rPr sz="1100" b="0">
+                <a:solidFill>
+                  <a:srgbClr val="8B9BB4"/>
+                </a:solidFill>
+                <a:latin typeface="Calibri"/>
+              </a:rPr>
+              <a:t>utterance</a:t>
+            </a:r>
+          </a:p>
+        </p:txBody>
+      </p:sp>
+      <p:sp>
+        <p:nvSpPr>
+          <p:cNvPr id="11" name="Right Arrow 10"/>
+          <p:cNvSpPr/>
+          <p:nvPr/>
+        </p:nvSpPr>
+        <p:spPr>
+          <a:xfrm>
+            <a:off x="2487168" y="1874519"/>
+            <a:ext cx="182880" cy="201168"/>
+          </a:xfrm>
+          <a:prstGeom prst="rightArrow">
+            <a:avLst/>
+          </a:prstGeom>
+          <a:solidFill>
+            <a:srgbClr val="64748B"/>
+          </a:solidFill>
+          <a:ln>
+            <a:noFill/>
+          </a:ln>
+        </p:spPr>
+        <p:style>
+          <a:lnRef idx="1">
+            <a:schemeClr val="accent1"/>
+          </a:lnRef>
+          <a:fillRef idx="3">
+            <a:schemeClr val="accent1"/>
+          </a:fillRef>
+          <a:effectRef idx="2">
+            <a:schemeClr val="accent1"/>
+          </a:effectRef>
+          <a:fontRef idx="minor">
+            <a:schemeClr val="lt1"/>
+          </a:fontRef>
+        </p:style>
+        <p:txBody>
+          <a:bodyPr rtlCol="0" anchor="ctr"/>
+          <a:lstStyle/>
+          <a:p>
+            <a:pPr algn="ctr"/>
+          </a:p>
+        </p:txBody>
+      </p:sp>
+      <p:sp>
+        <p:nvSpPr>
+          <p:cNvPr id="12" name="Rounded Rectangle 11"/>
+          <p:cNvSpPr/>
+          <p:nvPr/>
+        </p:nvSpPr>
+        <p:spPr>
+          <a:xfrm>
+            <a:off x="2697480" y="1554480"/>
+            <a:ext cx="2011680" cy="868680"/>
+          </a:xfrm>
+          <a:prstGeom prst="roundRect">
+            <a:avLst>
+              <a:gd name="adj" fmla="val 12000"/>
+            </a:avLst>
+          </a:prstGeom>
+          <a:solidFill>
+            <a:srgbClr val="152033"/>
+          </a:solidFill>
+          <a:ln w="15875">
+            <a:solidFill>
+              <a:srgbClr val="34D399"/>
+            </a:solidFill>
+          </a:ln>
+        </p:spPr>
+        <p:style>
+          <a:lnRef idx="1">
+            <a:schemeClr val="accent1"/>
+          </a:lnRef>
+          <a:fillRef idx="3">
+            <a:schemeClr val="accent1"/>
+          </a:fillRef>
+          <a:effectRef idx="2">
+            <a:schemeClr val="accent1"/>
+          </a:effectRef>
+          <a:fontRef idx="minor">
+            <a:schemeClr val="lt1"/>
+          </a:fontRef>
+        </p:style>
+        <p:txBody>
+          <a:bodyPr rtlCol="0" anchor="ctr"/>
+          <a:lstStyle/>
+          <a:p>
+            <a:pPr algn="ctr"/>
+          </a:p>
+        </p:txBody>
+      </p:sp>
+      <p:sp>
+        <p:nvSpPr>
+          <p:cNvPr id="13" name="TextBox 12"/>
+          <p:cNvSpPr txBox="1"/>
+          <p:nvPr/>
+        </p:nvSpPr>
+        <p:spPr>
+          <a:xfrm>
+            <a:off x="2788920" y="1691640"/>
+            <a:ext cx="1828800" cy="320040"/>
+          </a:xfrm>
+          <a:prstGeom prst="rect">
+            <a:avLst/>
+          </a:prstGeom>
+          <a:noFill/>
+        </p:spPr>
+        <p:txBody>
+          <a:bodyPr wrap="square" anchor="t"/>
+          <a:lstStyle/>
+          <a:p>
+            <a:pPr algn="ctr">
+              <a:spcBef>
+                <a:spcPts val="0"/>
+              </a:spcBef>
+              <a:spcAft>
+                <a:spcPts val="400"/>
+              </a:spcAft>
+            </a:pPr>
+            <a:r>
+              <a:rPr sz="1400" b="1">
+                <a:solidFill>
+                  <a:srgbClr val="F8FAFC"/>
+                </a:solidFill>
+                <a:latin typeface="Calibri"/>
+              </a:rPr>
+              <a:t>NLU</a:t>
+            </a:r>
+          </a:p>
+        </p:txBody>
+      </p:sp>
+      <p:sp>
+        <p:nvSpPr>
+          <p:cNvPr id="14" name="TextBox 13"/>
+          <p:cNvSpPr txBox="1"/>
+          <p:nvPr/>
+        </p:nvSpPr>
+        <p:spPr>
+          <a:xfrm>
+            <a:off x="2788920" y="2057400"/>
+            <a:ext cx="1828800" cy="274320"/>
+          </a:xfrm>
+          <a:prstGeom prst="rect">
+            <a:avLst/>
+          </a:prstGeom>
+          <a:noFill/>
+        </p:spPr>
+        <p:txBody>
+          <a:bodyPr wrap="square" anchor="t"/>
+          <a:lstStyle/>
+          <a:p>
+            <a:pPr algn="ctr">
+              <a:spcBef>
+                <a:spcPts val="0"/>
+              </a:spcBef>
+              <a:spcAft>
+                <a:spcPts val="400"/>
+              </a:spcAft>
+            </a:pPr>
+            <a:r>
+              <a:rPr sz="1100" b="0">
+                <a:solidFill>
+                  <a:srgbClr val="8B9BB4"/>
+                </a:solidFill>
+                <a:latin typeface="Calibri"/>
+              </a:rPr>
+              <a:t>intents+slots</a:t>
+            </a:r>
+          </a:p>
+        </p:txBody>
+      </p:sp>
+      <p:sp>
+        <p:nvSpPr>
+          <p:cNvPr id="15" name="Right Arrow 14"/>
+          <p:cNvSpPr/>
+          <p:nvPr/>
+        </p:nvSpPr>
+        <p:spPr>
+          <a:xfrm>
+            <a:off x="4727448" y="1874519"/>
+            <a:ext cx="182880" cy="201168"/>
+          </a:xfrm>
+          <a:prstGeom prst="rightArrow">
+            <a:avLst/>
+          </a:prstGeom>
+          <a:solidFill>
+            <a:srgbClr val="64748B"/>
+          </a:solidFill>
+          <a:ln>
+            <a:noFill/>
+          </a:ln>
+        </p:spPr>
+        <p:style>
+          <a:lnRef idx="1">
+            <a:schemeClr val="accent1"/>
+          </a:lnRef>
+          <a:fillRef idx="3">
+            <a:schemeClr val="accent1"/>
+          </a:fillRef>
+          <a:effectRef idx="2">
+            <a:schemeClr val="accent1"/>
+          </a:effectRef>
+          <a:fontRef idx="minor">
+            <a:schemeClr val="lt1"/>
+          </a:fontRef>
+        </p:style>
+        <p:txBody>
+          <a:bodyPr rtlCol="0" anchor="ctr"/>
+          <a:lstStyle/>
+          <a:p>
+            <a:pPr algn="ctr"/>
+          </a:p>
+        </p:txBody>
+      </p:sp>
+      <p:sp>
+        <p:nvSpPr>
+          <p:cNvPr id="16" name="Rounded Rectangle 15"/>
+          <p:cNvSpPr/>
+          <p:nvPr/>
+        </p:nvSpPr>
+        <p:spPr>
+          <a:xfrm>
+            <a:off x="4937760" y="1554480"/>
+            <a:ext cx="2011680" cy="868680"/>
+          </a:xfrm>
+          <a:prstGeom prst="roundRect">
+            <a:avLst>
+              <a:gd name="adj" fmla="val 12000"/>
+            </a:avLst>
+          </a:prstGeom>
+          <a:solidFill>
+            <a:srgbClr val="152033"/>
+          </a:solidFill>
+          <a:ln w="15875">
+            <a:solidFill>
+              <a:srgbClr val="A855F7"/>
+            </a:solidFill>
+          </a:ln>
+        </p:spPr>
+        <p:style>
+          <a:lnRef idx="1">
+            <a:schemeClr val="accent1"/>
+          </a:lnRef>
+          <a:fillRef idx="3">
+            <a:schemeClr val="accent1"/>
+          </a:fillRef>
+          <a:effectRef idx="2">
+            <a:schemeClr val="accent1"/>
+          </a:effectRef>
+          <a:fontRef idx="minor">
+            <a:schemeClr val="lt1"/>
+          </a:fontRef>
+        </p:style>
+        <p:txBody>
+          <a:bodyPr rtlCol="0" anchor="ctr"/>
+          <a:lstStyle/>
+          <a:p>
+            <a:pPr algn="ctr"/>
+          </a:p>
+        </p:txBody>
+      </p:sp>
+      <p:sp>
+        <p:nvSpPr>
+          <p:cNvPr id="17" name="TextBox 16"/>
+          <p:cNvSpPr txBox="1"/>
+          <p:nvPr/>
+        </p:nvSpPr>
+        <p:spPr>
+          <a:xfrm>
+            <a:off x="5029200" y="1691640"/>
+            <a:ext cx="1828800" cy="320040"/>
+          </a:xfrm>
+          <a:prstGeom prst="rect">
+            <a:avLst/>
+          </a:prstGeom>
+          <a:noFill/>
+        </p:spPr>
+        <p:txBody>
+          <a:bodyPr wrap="square" anchor="t"/>
+          <a:lstStyle/>
+          <a:p>
+            <a:pPr algn="ctr">
+              <a:spcBef>
+                <a:spcPts val="0"/>
+              </a:spcBef>
+              <a:spcAft>
+                <a:spcPts val="400"/>
+              </a:spcAft>
+            </a:pPr>
+            <a:r>
+              <a:rPr sz="1400" b="1">
+                <a:solidFill>
+                  <a:srgbClr val="F8FAFC"/>
+                </a:solidFill>
+                <a:latin typeface="Calibri"/>
+              </a:rPr>
+              <a:t>DST</a:t>
+            </a:r>
+          </a:p>
+        </p:txBody>
+      </p:sp>
+      <p:sp>
+        <p:nvSpPr>
+          <p:cNvPr id="18" name="TextBox 17"/>
+          <p:cNvSpPr txBox="1"/>
+          <p:nvPr/>
+        </p:nvSpPr>
+        <p:spPr>
+          <a:xfrm>
+            <a:off x="5029200" y="2057400"/>
+            <a:ext cx="1828800" cy="274320"/>
+          </a:xfrm>
+          <a:prstGeom prst="rect">
+            <a:avLst/>
+          </a:prstGeom>
+          <a:noFill/>
+        </p:spPr>
+        <p:txBody>
+          <a:bodyPr wrap="square" anchor="t"/>
+          <a:lstStyle/>
+          <a:p>
+            <a:pPr algn="ctr">
+              <a:spcBef>
+                <a:spcPts val="0"/>
+              </a:spcBef>
+              <a:spcAft>
+                <a:spcPts val="400"/>
+              </a:spcAft>
+            </a:pPr>
+            <a:r>
+              <a:rPr sz="1100" b="0">
+                <a:solidFill>
+                  <a:srgbClr val="8B9BB4"/>
+                </a:solidFill>
+                <a:latin typeface="Calibri"/>
+              </a:rPr>
+              <a:t>belief state</a:t>
+            </a:r>
+          </a:p>
+        </p:txBody>
+      </p:sp>
+      <p:sp>
+        <p:nvSpPr>
+          <p:cNvPr id="19" name="Right Arrow 18"/>
+          <p:cNvSpPr/>
+          <p:nvPr/>
+        </p:nvSpPr>
+        <p:spPr>
+          <a:xfrm>
+            <a:off x="6967728" y="1874519"/>
+            <a:ext cx="182880" cy="201168"/>
+          </a:xfrm>
+          <a:prstGeom prst="rightArrow">
+            <a:avLst/>
+          </a:prstGeom>
+          <a:solidFill>
+            <a:srgbClr val="64748B"/>
+          </a:solidFill>
+          <a:ln>
+            <a:noFill/>
+          </a:ln>
+        </p:spPr>
+        <p:style>
+          <a:lnRef idx="1">
+            <a:schemeClr val="accent1"/>
+          </a:lnRef>
+          <a:fillRef idx="3">
+            <a:schemeClr val="accent1"/>
+          </a:fillRef>
+          <a:effectRef idx="2">
+            <a:schemeClr val="accent1"/>
+          </a:effectRef>
+          <a:fontRef idx="minor">
+            <a:schemeClr val="lt1"/>
+          </a:fontRef>
+        </p:style>
+        <p:txBody>
+          <a:bodyPr rtlCol="0" anchor="ctr"/>
+          <a:lstStyle/>
+          <a:p>
+            <a:pPr algn="ctr"/>
+          </a:p>
+        </p:txBody>
+      </p:sp>
+      <p:sp>
+        <p:nvSpPr>
+          <p:cNvPr id="20" name="Rounded Rectangle 19"/>
+          <p:cNvSpPr/>
+          <p:nvPr/>
+        </p:nvSpPr>
+        <p:spPr>
+          <a:xfrm>
+            <a:off x="7178040" y="1554480"/>
+            <a:ext cx="2011680" cy="868680"/>
+          </a:xfrm>
+          <a:prstGeom prst="roundRect">
+            <a:avLst>
+              <a:gd name="adj" fmla="val 12000"/>
+            </a:avLst>
+          </a:prstGeom>
+          <a:solidFill>
+            <a:srgbClr val="152033"/>
+          </a:solidFill>
+          <a:ln w="15875">
+            <a:solidFill>
+              <a:srgbClr val="FBBF24"/>
+            </a:solidFill>
+          </a:ln>
+        </p:spPr>
+        <p:style>
+          <a:lnRef idx="1">
+            <a:schemeClr val="accent1"/>
+          </a:lnRef>
+          <a:fillRef idx="3">
+            <a:schemeClr val="accent1"/>
+          </a:fillRef>
+          <a:effectRef idx="2">
+            <a:schemeClr val="accent1"/>
+          </a:effectRef>
+          <a:fontRef idx="minor">
+            <a:schemeClr val="lt1"/>
+          </a:fontRef>
+        </p:style>
+        <p:txBody>
+          <a:bodyPr rtlCol="0" anchor="ctr"/>
+          <a:lstStyle/>
+          <a:p>
+            <a:pPr algn="ctr"/>
+          </a:p>
+        </p:txBody>
+      </p:sp>
+      <p:sp>
+        <p:nvSpPr>
+          <p:cNvPr id="21" name="TextBox 20"/>
+          <p:cNvSpPr txBox="1"/>
+          <p:nvPr/>
+        </p:nvSpPr>
+        <p:spPr>
+          <a:xfrm>
+            <a:off x="7269480" y="1691640"/>
+            <a:ext cx="1828800" cy="320040"/>
+          </a:xfrm>
+          <a:prstGeom prst="rect">
+            <a:avLst/>
+          </a:prstGeom>
+          <a:noFill/>
+        </p:spPr>
+        <p:txBody>
+          <a:bodyPr wrap="square" anchor="t"/>
+          <a:lstStyle/>
+          <a:p>
+            <a:pPr algn="ctr">
+              <a:spcBef>
+                <a:spcPts val="0"/>
+              </a:spcBef>
+              <a:spcAft>
+                <a:spcPts val="400"/>
+              </a:spcAft>
+            </a:pPr>
+            <a:r>
+              <a:rPr sz="1400" b="1">
+                <a:solidFill>
+                  <a:srgbClr val="F8FAFC"/>
+                </a:solidFill>
+                <a:latin typeface="Calibri"/>
+              </a:rPr>
+              <a:t>Policy</a:t>
+            </a:r>
+          </a:p>
+        </p:txBody>
+      </p:sp>
+      <p:sp>
+        <p:nvSpPr>
+          <p:cNvPr id="22" name="TextBox 21"/>
+          <p:cNvSpPr txBox="1"/>
+          <p:nvPr/>
+        </p:nvSpPr>
+        <p:spPr>
+          <a:xfrm>
+            <a:off x="7269480" y="2057400"/>
+            <a:ext cx="1828800" cy="274320"/>
+          </a:xfrm>
+          <a:prstGeom prst="rect">
+            <a:avLst/>
+          </a:prstGeom>
+          <a:noFill/>
+        </p:spPr>
+        <p:txBody>
+          <a:bodyPr wrap="square" anchor="t"/>
+          <a:lstStyle/>
+          <a:p>
+            <a:pPr algn="ctr">
+              <a:spcBef>
+                <a:spcPts val="0"/>
+              </a:spcBef>
+              <a:spcAft>
+                <a:spcPts val="400"/>
+              </a:spcAft>
+            </a:pPr>
+            <a:r>
+              <a:rPr sz="1100" b="0">
+                <a:solidFill>
+                  <a:srgbClr val="8B9BB4"/>
+                </a:solidFill>
+                <a:latin typeface="Calibri"/>
+              </a:rPr>
+              <a:t>ask/recommend</a:t>
+            </a:r>
+          </a:p>
+        </p:txBody>
+      </p:sp>
+      <p:sp>
+        <p:nvSpPr>
+          <p:cNvPr id="23" name="Right Arrow 22"/>
+          <p:cNvSpPr/>
+          <p:nvPr/>
+        </p:nvSpPr>
+        <p:spPr>
+          <a:xfrm>
+            <a:off x="9208008" y="1874519"/>
+            <a:ext cx="182880" cy="201168"/>
+          </a:xfrm>
+          <a:prstGeom prst="rightArrow">
+            <a:avLst/>
+          </a:prstGeom>
+          <a:solidFill>
+            <a:srgbClr val="64748B"/>
+          </a:solidFill>
+          <a:ln>
+            <a:noFill/>
+          </a:ln>
+        </p:spPr>
+        <p:style>
+          <a:lnRef idx="1">
+            <a:schemeClr val="accent1"/>
+          </a:lnRef>
+          <a:fillRef idx="3">
+            <a:schemeClr val="accent1"/>
+          </a:fillRef>
+          <a:effectRef idx="2">
+            <a:schemeClr val="accent1"/>
+          </a:effectRef>
+          <a:fontRef idx="minor">
+            <a:schemeClr val="lt1"/>
+          </a:fontRef>
+        </p:style>
+        <p:txBody>
+          <a:bodyPr rtlCol="0" anchor="ctr"/>
+          <a:lstStyle/>
+          <a:p>
+            <a:pPr algn="ctr"/>
+          </a:p>
+        </p:txBody>
+      </p:sp>
+      <p:sp>
+        <p:nvSpPr>
+          <p:cNvPr id="24" name="Rounded Rectangle 23"/>
+          <p:cNvSpPr/>
+          <p:nvPr/>
+        </p:nvSpPr>
+        <p:spPr>
+          <a:xfrm>
+            <a:off x="9418320" y="1554480"/>
+            <a:ext cx="2011680" cy="868680"/>
+          </a:xfrm>
+          <a:prstGeom prst="roundRect">
+            <a:avLst>
+              <a:gd name="adj" fmla="val 12000"/>
+            </a:avLst>
+          </a:prstGeom>
+          <a:solidFill>
+            <a:srgbClr val="152033"/>
+          </a:solidFill>
+          <a:ln w="15875">
+            <a:solidFill>
+              <a:srgbClr val="FF2D8F"/>
+            </a:solidFill>
+          </a:ln>
+        </p:spPr>
+        <p:style>
+          <a:lnRef idx="1">
+            <a:schemeClr val="accent1"/>
+          </a:lnRef>
+          <a:fillRef idx="3">
+            <a:schemeClr val="accent1"/>
+          </a:fillRef>
+          <a:effectRef idx="2">
+            <a:schemeClr val="accent1"/>
+          </a:effectRef>
+          <a:fontRef idx="minor">
+            <a:schemeClr val="lt1"/>
+          </a:fontRef>
+        </p:style>
+        <p:txBody>
+          <a:bodyPr rtlCol="0" anchor="ctr"/>
+          <a:lstStyle/>
+          <a:p>
+            <a:pPr algn="ctr"/>
+          </a:p>
+        </p:txBody>
+      </p:sp>
+      <p:sp>
+        <p:nvSpPr>
+          <p:cNvPr id="25" name="TextBox 24"/>
+          <p:cNvSpPr txBox="1"/>
+          <p:nvPr/>
+        </p:nvSpPr>
+        <p:spPr>
+          <a:xfrm>
+            <a:off x="9509760" y="1691640"/>
+            <a:ext cx="1828800" cy="320040"/>
+          </a:xfrm>
+          <a:prstGeom prst="rect">
+            <a:avLst/>
+          </a:prstGeom>
+          <a:noFill/>
+        </p:spPr>
+        <p:txBody>
+          <a:bodyPr wrap="square" anchor="t"/>
+          <a:lstStyle/>
+          <a:p>
+            <a:pPr algn="ctr">
+              <a:spcBef>
+                <a:spcPts val="0"/>
+              </a:spcBef>
+              <a:spcAft>
+                <a:spcPts val="400"/>
+              </a:spcAft>
+            </a:pPr>
+            <a:r>
+              <a:rPr sz="1400" b="1">
+                <a:solidFill>
+                  <a:srgbClr val="F8FAFC"/>
+                </a:solidFill>
+                <a:latin typeface="Calibri"/>
+              </a:rPr>
+              <a:t>NLG/IR</a:t>
+            </a:r>
+          </a:p>
+        </p:txBody>
+      </p:sp>
+      <p:sp>
+        <p:nvSpPr>
+          <p:cNvPr id="26" name="TextBox 25"/>
+          <p:cNvSpPr txBox="1"/>
+          <p:nvPr/>
+        </p:nvSpPr>
+        <p:spPr>
+          <a:xfrm>
+            <a:off x="9509760" y="2057400"/>
+            <a:ext cx="1828800" cy="274320"/>
+          </a:xfrm>
+          <a:prstGeom prst="rect">
+            <a:avLst/>
+          </a:prstGeom>
+          <a:noFill/>
+        </p:spPr>
+        <p:txBody>
+          <a:bodyPr wrap="square" anchor="t"/>
+          <a:lstStyle/>
+          <a:p>
+            <a:pPr algn="ctr">
+              <a:spcBef>
+                <a:spcPts val="0"/>
+              </a:spcBef>
+              <a:spcAft>
+                <a:spcPts val="400"/>
+              </a:spcAft>
+            </a:pPr>
+            <a:r>
+              <a:rPr sz="1100" b="0">
+                <a:solidFill>
+                  <a:srgbClr val="8B9BB4"/>
+                </a:solidFill>
+                <a:latin typeface="Calibri"/>
+              </a:rPr>
+              <a:t>msg + items</a:t>
+            </a:r>
+          </a:p>
+        </p:txBody>
+      </p:sp>
+      <p:sp>
+        <p:nvSpPr>
+          <p:cNvPr id="27" name="TextBox 26"/>
+          <p:cNvSpPr txBox="1"/>
+          <p:nvPr/>
+        </p:nvSpPr>
+        <p:spPr>
+          <a:xfrm>
+            <a:off x="457200" y="2606040"/>
+            <a:ext cx="10972800" cy="256032"/>
+          </a:xfrm>
+          <a:prstGeom prst="rect">
+            <a:avLst/>
+          </a:prstGeom>
+          <a:noFill/>
+        </p:spPr>
+        <p:txBody>
+          <a:bodyPr wrap="square" anchor="t"/>
+          <a:lstStyle/>
+          <a:p>
+            <a:pPr algn="l">
+              <a:spcBef>
+                <a:spcPts val="0"/>
+              </a:spcBef>
+              <a:spcAft>
+                <a:spcPts val="400"/>
+              </a:spcAft>
+            </a:pPr>
+            <a:r>
+              <a:rPr sz="1100" b="1">
+                <a:solidFill>
+                  <a:srgbClr val="A855F7"/>
+                </a:solidFill>
+                <a:latin typeface="Calibri"/>
+              </a:rPr>
+              <a:t>B  ·  DIALOG STATE TRACKING</a:t>
+            </a:r>
+          </a:p>
+        </p:txBody>
+      </p:sp>
+      <p:sp>
+        <p:nvSpPr>
+          <p:cNvPr id="28" name="Rounded Rectangle 27"/>
+          <p:cNvSpPr/>
+          <p:nvPr/>
+        </p:nvSpPr>
+        <p:spPr>
+          <a:xfrm>
+            <a:off x="457200" y="2926080"/>
+            <a:ext cx="3566160" cy="777240"/>
+          </a:xfrm>
+          <a:prstGeom prst="roundRect">
+            <a:avLst>
+              <a:gd name="adj" fmla="val 10000"/>
+            </a:avLst>
+          </a:prstGeom>
+          <a:solidFill>
+            <a:srgbClr val="152033"/>
+          </a:solidFill>
+          <a:ln w="15875">
+            <a:solidFill>
+              <a:srgbClr val="00D4FF"/>
+            </a:solidFill>
+          </a:ln>
+        </p:spPr>
+        <p:style>
+          <a:lnRef idx="1">
+            <a:schemeClr val="accent1"/>
+          </a:lnRef>
+          <a:fillRef idx="3">
+            <a:schemeClr val="accent1"/>
+          </a:fillRef>
+          <a:effectRef idx="2">
+            <a:schemeClr val="accent1"/>
+          </a:effectRef>
+          <a:fontRef idx="minor">
+            <a:schemeClr val="lt1"/>
+          </a:fontRef>
+        </p:style>
+        <p:txBody>
+          <a:bodyPr rtlCol="0" anchor="ctr"/>
+          <a:lstStyle/>
+          <a:p>
+            <a:pPr algn="ctr"/>
+          </a:p>
+        </p:txBody>
+      </p:sp>
+      <p:sp>
+        <p:nvSpPr>
+          <p:cNvPr id="29" name="TextBox 28"/>
+          <p:cNvSpPr txBox="1"/>
+          <p:nvPr/>
+        </p:nvSpPr>
+        <p:spPr>
+          <a:xfrm>
+            <a:off x="594360" y="3017520"/>
+            <a:ext cx="3291840" cy="274320"/>
+          </a:xfrm>
+          <a:prstGeom prst="rect">
+            <a:avLst/>
+          </a:prstGeom>
+          <a:noFill/>
+        </p:spPr>
+        <p:txBody>
+          <a:bodyPr wrap="square" anchor="t"/>
+          <a:lstStyle/>
+          <a:p>
+            <a:pPr algn="l">
+              <a:spcBef>
+                <a:spcPts val="0"/>
+              </a:spcBef>
+              <a:spcAft>
+                <a:spcPts val="400"/>
+              </a:spcAft>
+            </a:pPr>
+            <a:r>
+              <a:rPr sz="1400" b="1">
+                <a:solidFill>
+                  <a:srgbClr val="F8FAFC"/>
+                </a:solidFill>
+                <a:latin typeface="Calibri"/>
+              </a:rPr>
+              <a:t>Utterance t</a:t>
+            </a:r>
+          </a:p>
+        </p:txBody>
+      </p:sp>
+      <p:sp>
+        <p:nvSpPr>
+          <p:cNvPr id="30" name="TextBox 29"/>
+          <p:cNvSpPr txBox="1"/>
+          <p:nvPr/>
+        </p:nvSpPr>
+        <p:spPr>
+          <a:xfrm>
+            <a:off x="594360" y="3337560"/>
+            <a:ext cx="3291840" cy="274320"/>
+          </a:xfrm>
+          <a:prstGeom prst="rect">
+            <a:avLst/>
+          </a:prstGeom>
+          <a:noFill/>
+        </p:spPr>
+        <p:txBody>
+          <a:bodyPr wrap="square" anchor="t"/>
+          <a:lstStyle/>
+          <a:p>
+            <a:pPr algn="l">
+              <a:spcBef>
+                <a:spcPts val="0"/>
+              </a:spcBef>
+              <a:spcAft>
+                <a:spcPts val="400"/>
+              </a:spcAft>
+            </a:pPr>
+            <a:r>
               <a:rPr sz="1200" b="0">
                 <a:solidFill>
                   <a:srgbClr val="8B9BB4"/>
                 </a:solidFill>
                 <a:latin typeface="Calibri"/>
               </a:rPr>
-              <a:t>Redrawn concepts — not paper screenshots  ·  Qulac · Bayesian CRS · DST · corpus CQs · hybrid IR</a:t>
-            </a:r>
-          </a:p>
-        </p:txBody>
-      </p:sp>
-      <p:pic>
-        <p:nvPicPr>
-          <p:cNvPr id="7" name="Picture 6" descr="architecture_literature.png"/>
-          <p:cNvPicPr>
-            <a:picLocks noChangeAspect="1"/>
-          </p:cNvPicPr>
-          <p:nvPr/>
-        </p:nvPicPr>
-        <p:blipFill>
-          <a:blip r:embed="rId2"/>
-          <a:stretch>
-            <a:fillRect/>
-          </a:stretch>
-        </p:blipFill>
-        <p:spPr>
-          <a:xfrm>
-            <a:off x="201168" y="1051560"/>
-            <a:ext cx="11795760" cy="5349240"/>
-          </a:xfrm>
-          <a:prstGeom prst="rect">
-            <a:avLst/>
-          </a:prstGeom>
-        </p:spPr>
-      </p:pic>
-      <p:sp>
-        <p:nvSpPr>
-          <p:cNvPr id="8" name="Rectangle 7"/>
+              <a:t>text</a:t>
+            </a:r>
+          </a:p>
+        </p:txBody>
+      </p:sp>
+      <p:sp>
+        <p:nvSpPr>
+          <p:cNvPr id="31" name="Right Arrow 30"/>
+          <p:cNvSpPr/>
+          <p:nvPr/>
+        </p:nvSpPr>
+        <p:spPr>
+          <a:xfrm>
+            <a:off x="4069080" y="3200400"/>
+            <a:ext cx="182880" cy="182880"/>
+          </a:xfrm>
+          <a:prstGeom prst="rightArrow">
+            <a:avLst/>
+          </a:prstGeom>
+          <a:solidFill>
+            <a:srgbClr val="64748B"/>
+          </a:solidFill>
+          <a:ln>
+            <a:noFill/>
+          </a:ln>
+        </p:spPr>
+        <p:style>
+          <a:lnRef idx="1">
+            <a:schemeClr val="accent1"/>
+          </a:lnRef>
+          <a:fillRef idx="3">
+            <a:schemeClr val="accent1"/>
+          </a:fillRef>
+          <a:effectRef idx="2">
+            <a:schemeClr val="accent1"/>
+          </a:effectRef>
+          <a:fontRef idx="minor">
+            <a:schemeClr val="lt1"/>
+          </a:fontRef>
+        </p:style>
+        <p:txBody>
+          <a:bodyPr rtlCol="0" anchor="ctr"/>
+          <a:lstStyle/>
+          <a:p>
+            <a:pPr algn="ctr"/>
+          </a:p>
+        </p:txBody>
+      </p:sp>
+      <p:sp>
+        <p:nvSpPr>
+          <p:cNvPr id="32" name="Rounded Rectangle 31"/>
+          <p:cNvSpPr/>
+          <p:nvPr/>
+        </p:nvSpPr>
+        <p:spPr>
+          <a:xfrm>
+            <a:off x="4297680" y="2926080"/>
+            <a:ext cx="3566160" cy="777240"/>
+          </a:xfrm>
+          <a:prstGeom prst="roundRect">
+            <a:avLst>
+              <a:gd name="adj" fmla="val 10000"/>
+            </a:avLst>
+          </a:prstGeom>
+          <a:solidFill>
+            <a:srgbClr val="152033"/>
+          </a:solidFill>
+          <a:ln w="15875">
+            <a:solidFill>
+              <a:srgbClr val="34D399"/>
+            </a:solidFill>
+          </a:ln>
+        </p:spPr>
+        <p:style>
+          <a:lnRef idx="1">
+            <a:schemeClr val="accent1"/>
+          </a:lnRef>
+          <a:fillRef idx="3">
+            <a:schemeClr val="accent1"/>
+          </a:fillRef>
+          <a:effectRef idx="2">
+            <a:schemeClr val="accent1"/>
+          </a:effectRef>
+          <a:fontRef idx="minor">
+            <a:schemeClr val="lt1"/>
+          </a:fontRef>
+        </p:style>
+        <p:txBody>
+          <a:bodyPr rtlCol="0" anchor="ctr"/>
+          <a:lstStyle/>
+          <a:p>
+            <a:pPr algn="ctr"/>
+          </a:p>
+        </p:txBody>
+      </p:sp>
+      <p:sp>
+        <p:nvSpPr>
+          <p:cNvPr id="33" name="TextBox 32"/>
+          <p:cNvSpPr txBox="1"/>
+          <p:nvPr/>
+        </p:nvSpPr>
+        <p:spPr>
+          <a:xfrm>
+            <a:off x="4434840" y="3017520"/>
+            <a:ext cx="3291840" cy="274320"/>
+          </a:xfrm>
+          <a:prstGeom prst="rect">
+            <a:avLst/>
+          </a:prstGeom>
+          <a:noFill/>
+        </p:spPr>
+        <p:txBody>
+          <a:bodyPr wrap="square" anchor="t"/>
+          <a:lstStyle/>
+          <a:p>
+            <a:pPr algn="l">
+              <a:spcBef>
+                <a:spcPts val="0"/>
+              </a:spcBef>
+              <a:spcAft>
+                <a:spcPts val="400"/>
+              </a:spcAft>
+            </a:pPr>
+            <a:r>
+              <a:rPr sz="1400" b="1">
+                <a:solidFill>
+                  <a:srgbClr val="F8FAFC"/>
+                </a:solidFill>
+                <a:latin typeface="Calibri"/>
+              </a:rPr>
+              <a:t>State update</a:t>
+            </a:r>
+          </a:p>
+        </p:txBody>
+      </p:sp>
+      <p:sp>
+        <p:nvSpPr>
+          <p:cNvPr id="34" name="TextBox 33"/>
+          <p:cNvSpPr txBox="1"/>
+          <p:nvPr/>
+        </p:nvSpPr>
+        <p:spPr>
+          <a:xfrm>
+            <a:off x="4434840" y="3337560"/>
+            <a:ext cx="3291840" cy="274320"/>
+          </a:xfrm>
+          <a:prstGeom prst="rect">
+            <a:avLst/>
+          </a:prstGeom>
+          <a:noFill/>
+        </p:spPr>
+        <p:txBody>
+          <a:bodyPr wrap="square" anchor="t"/>
+          <a:lstStyle/>
+          <a:p>
+            <a:pPr algn="l">
+              <a:spcBef>
+                <a:spcPts val="0"/>
+              </a:spcBef>
+              <a:spcAft>
+                <a:spcPts val="400"/>
+              </a:spcAft>
+            </a:pPr>
+            <a:r>
+              <a:rPr sz="1200" b="0">
+                <a:solidFill>
+                  <a:srgbClr val="8B9BB4"/>
+                </a:solidFill>
+                <a:latin typeface="Calibri"/>
+              </a:rPr>
+              <a:t>slots · sources · wipe</a:t>
+            </a:r>
+          </a:p>
+        </p:txBody>
+      </p:sp>
+      <p:sp>
+        <p:nvSpPr>
+          <p:cNvPr id="35" name="Right Arrow 34"/>
+          <p:cNvSpPr/>
+          <p:nvPr/>
+        </p:nvSpPr>
+        <p:spPr>
+          <a:xfrm>
+            <a:off x="7909560" y="3200400"/>
+            <a:ext cx="182880" cy="182880"/>
+          </a:xfrm>
+          <a:prstGeom prst="rightArrow">
+            <a:avLst/>
+          </a:prstGeom>
+          <a:solidFill>
+            <a:srgbClr val="64748B"/>
+          </a:solidFill>
+          <a:ln>
+            <a:noFill/>
+          </a:ln>
+        </p:spPr>
+        <p:style>
+          <a:lnRef idx="1">
+            <a:schemeClr val="accent1"/>
+          </a:lnRef>
+          <a:fillRef idx="3">
+            <a:schemeClr val="accent1"/>
+          </a:fillRef>
+          <a:effectRef idx="2">
+            <a:schemeClr val="accent1"/>
+          </a:effectRef>
+          <a:fontRef idx="minor">
+            <a:schemeClr val="lt1"/>
+          </a:fontRef>
+        </p:style>
+        <p:txBody>
+          <a:bodyPr rtlCol="0" anchor="ctr"/>
+          <a:lstStyle/>
+          <a:p>
+            <a:pPr algn="ctr"/>
+          </a:p>
+        </p:txBody>
+      </p:sp>
+      <p:sp>
+        <p:nvSpPr>
+          <p:cNvPr id="36" name="Rounded Rectangle 35"/>
+          <p:cNvSpPr/>
+          <p:nvPr/>
+        </p:nvSpPr>
+        <p:spPr>
+          <a:xfrm>
+            <a:off x="8138160" y="2926080"/>
+            <a:ext cx="3566160" cy="777240"/>
+          </a:xfrm>
+          <a:prstGeom prst="roundRect">
+            <a:avLst>
+              <a:gd name="adj" fmla="val 10000"/>
+            </a:avLst>
+          </a:prstGeom>
+          <a:solidFill>
+            <a:srgbClr val="152033"/>
+          </a:solidFill>
+          <a:ln w="15875">
+            <a:solidFill>
+              <a:srgbClr val="A855F7"/>
+            </a:solidFill>
+          </a:ln>
+        </p:spPr>
+        <p:style>
+          <a:lnRef idx="1">
+            <a:schemeClr val="accent1"/>
+          </a:lnRef>
+          <a:fillRef idx="3">
+            <a:schemeClr val="accent1"/>
+          </a:fillRef>
+          <a:effectRef idx="2">
+            <a:schemeClr val="accent1"/>
+          </a:effectRef>
+          <a:fontRef idx="minor">
+            <a:schemeClr val="lt1"/>
+          </a:fontRef>
+        </p:style>
+        <p:txBody>
+          <a:bodyPr rtlCol="0" anchor="ctr"/>
+          <a:lstStyle/>
+          <a:p>
+            <a:pPr algn="ctr"/>
+          </a:p>
+        </p:txBody>
+      </p:sp>
+      <p:sp>
+        <p:nvSpPr>
+          <p:cNvPr id="37" name="TextBox 36"/>
+          <p:cNvSpPr txBox="1"/>
+          <p:nvPr/>
+        </p:nvSpPr>
+        <p:spPr>
+          <a:xfrm>
+            <a:off x="8275320" y="3017520"/>
+            <a:ext cx="3291840" cy="274320"/>
+          </a:xfrm>
+          <a:prstGeom prst="rect">
+            <a:avLst/>
+          </a:prstGeom>
+          <a:noFill/>
+        </p:spPr>
+        <p:txBody>
+          <a:bodyPr wrap="square" anchor="t"/>
+          <a:lstStyle/>
+          <a:p>
+            <a:pPr algn="l">
+              <a:spcBef>
+                <a:spcPts val="0"/>
+              </a:spcBef>
+              <a:spcAft>
+                <a:spcPts val="400"/>
+              </a:spcAft>
+            </a:pPr>
+            <a:r>
+              <a:rPr sz="1400" b="1">
+                <a:solidFill>
+                  <a:srgbClr val="F8FAFC"/>
+                </a:solidFill>
+                <a:latin typeface="Calibri"/>
+              </a:rPr>
+              <a:t>SessionState</a:t>
+            </a:r>
+          </a:p>
+        </p:txBody>
+      </p:sp>
+      <p:sp>
+        <p:nvSpPr>
+          <p:cNvPr id="38" name="TextBox 37"/>
+          <p:cNvSpPr txBox="1"/>
+          <p:nvPr/>
+        </p:nvSpPr>
+        <p:spPr>
+          <a:xfrm>
+            <a:off x="8275320" y="3337560"/>
+            <a:ext cx="3291840" cy="274320"/>
+          </a:xfrm>
+          <a:prstGeom prst="rect">
+            <a:avLst/>
+          </a:prstGeom>
+          <a:noFill/>
+        </p:spPr>
+        <p:txBody>
+          <a:bodyPr wrap="square" anchor="t"/>
+          <a:lstStyle/>
+          <a:p>
+            <a:pPr algn="l">
+              <a:spcBef>
+                <a:spcPts val="0"/>
+              </a:spcBef>
+              <a:spcAft>
+                <a:spcPts val="400"/>
+              </a:spcAft>
+            </a:pPr>
+            <a:r>
+              <a:rPr sz="1200" b="0">
+                <a:solidFill>
+                  <a:srgbClr val="8B9BB4"/>
+                </a:solidFill>
+                <a:latin typeface="Calibri"/>
+              </a:rPr>
+              <a:t>soft|disclosed|override</a:t>
+            </a:r>
+          </a:p>
+        </p:txBody>
+      </p:sp>
+      <p:sp>
+        <p:nvSpPr>
+          <p:cNvPr id="39" name="TextBox 38"/>
+          <p:cNvSpPr txBox="1"/>
+          <p:nvPr/>
+        </p:nvSpPr>
+        <p:spPr>
+          <a:xfrm>
+            <a:off x="457200" y="3886200"/>
+            <a:ext cx="10972800" cy="256032"/>
+          </a:xfrm>
+          <a:prstGeom prst="rect">
+            <a:avLst/>
+          </a:prstGeom>
+          <a:noFill/>
+        </p:spPr>
+        <p:txBody>
+          <a:bodyPr wrap="square" anchor="t"/>
+          <a:lstStyle/>
+          <a:p>
+            <a:pPr algn="l">
+              <a:spcBef>
+                <a:spcPts val="0"/>
+              </a:spcBef>
+              <a:spcAft>
+                <a:spcPts val="400"/>
+              </a:spcAft>
+            </a:pPr>
+            <a:r>
+              <a:rPr sz="1100" b="1">
+                <a:solidFill>
+                  <a:srgbClr val="FBBF24"/>
+                </a:solidFill>
+                <a:latin typeface="Calibri"/>
+              </a:rPr>
+              <a:t>C  ·  CLARIFYING QUESTIONS</a:t>
+            </a:r>
+          </a:p>
+        </p:txBody>
+      </p:sp>
+      <p:sp>
+        <p:nvSpPr>
+          <p:cNvPr id="40" name="Rounded Rectangle 39"/>
+          <p:cNvSpPr/>
+          <p:nvPr/>
+        </p:nvSpPr>
+        <p:spPr>
+          <a:xfrm>
+            <a:off x="457200" y="4160520"/>
+            <a:ext cx="5486400" cy="1965960"/>
+          </a:xfrm>
+          <a:prstGeom prst="roundRect">
+            <a:avLst>
+              <a:gd name="adj" fmla="val 10000"/>
+            </a:avLst>
+          </a:prstGeom>
+          <a:solidFill>
+            <a:srgbClr val="152033"/>
+          </a:solidFill>
+          <a:ln w="15875">
+            <a:solidFill>
+              <a:srgbClr val="FF2D8F"/>
+            </a:solidFill>
+          </a:ln>
+        </p:spPr>
+        <p:style>
+          <a:lnRef idx="1">
+            <a:schemeClr val="accent1"/>
+          </a:lnRef>
+          <a:fillRef idx="3">
+            <a:schemeClr val="accent1"/>
+          </a:fillRef>
+          <a:effectRef idx="2">
+            <a:schemeClr val="accent1"/>
+          </a:effectRef>
+          <a:fontRef idx="minor">
+            <a:schemeClr val="lt1"/>
+          </a:fontRef>
+        </p:style>
+        <p:txBody>
+          <a:bodyPr rtlCol="0" anchor="ctr"/>
+          <a:lstStyle/>
+          <a:p>
+            <a:pPr algn="ctr"/>
+          </a:p>
+        </p:txBody>
+      </p:sp>
+      <p:sp>
+        <p:nvSpPr>
+          <p:cNvPr id="41" name="TextBox 40"/>
+          <p:cNvSpPr txBox="1"/>
+          <p:nvPr/>
+        </p:nvSpPr>
+        <p:spPr>
+          <a:xfrm>
+            <a:off x="640080" y="4297680"/>
+            <a:ext cx="5120640" cy="274320"/>
+          </a:xfrm>
+          <a:prstGeom prst="rect">
+            <a:avLst/>
+          </a:prstGeom>
+          <a:noFill/>
+        </p:spPr>
+        <p:txBody>
+          <a:bodyPr wrap="square" anchor="t"/>
+          <a:lstStyle/>
+          <a:p>
+            <a:pPr algn="l">
+              <a:spcBef>
+                <a:spcPts val="0"/>
+              </a:spcBef>
+              <a:spcAft>
+                <a:spcPts val="400"/>
+              </a:spcAft>
+            </a:pPr>
+            <a:r>
+              <a:rPr sz="1400" b="1">
+                <a:solidFill>
+                  <a:srgbClr val="FF2D8F"/>
+                </a:solidFill>
+                <a:latin typeface="Calibri"/>
+              </a:rPr>
+              <a:t>Theory (ablated)</a:t>
+            </a:r>
+          </a:p>
+        </p:txBody>
+      </p:sp>
+      <p:sp>
+        <p:nvSpPr>
+          <p:cNvPr id="42" name="TextBox 41"/>
+          <p:cNvSpPr txBox="1"/>
+          <p:nvPr/>
+        </p:nvSpPr>
+        <p:spPr>
+          <a:xfrm>
+            <a:off x="640080" y="4663440"/>
+            <a:ext cx="5120640" cy="1280160"/>
+          </a:xfrm>
+          <a:prstGeom prst="rect">
+            <a:avLst/>
+          </a:prstGeom>
+          <a:noFill/>
+        </p:spPr>
+        <p:txBody>
+          <a:bodyPr wrap="square" anchor="t"/>
+          <a:lstStyle/>
+          <a:p>
+            <a:pPr algn="l">
+              <a:spcBef>
+                <a:spcPts val="0"/>
+              </a:spcBef>
+              <a:spcAft>
+                <a:spcPts val="400"/>
+              </a:spcAft>
+            </a:pPr>
+            <a:r>
+              <a:rPr sz="1300" b="0">
+                <a:solidFill>
+                  <a:srgbClr val="F8FAFC"/>
+                </a:solidFill>
+                <a:latin typeface="Calibri"/>
+              </a:rPr>
+              <a:t>max E[IG] / min H(posterior)</a:t>
+            </a:r>
+          </a:p>
+          <a:p>
+            <a:pPr algn="l">
+              <a:spcBef>
+                <a:spcPts val="0"/>
+              </a:spcBef>
+              <a:spcAft>
+                <a:spcPts val="400"/>
+              </a:spcAft>
+            </a:pPr>
+            <a:r>
+              <a:rPr sz="1200" b="0">
+                <a:solidFill>
+                  <a:srgbClr val="8B9BB4"/>
+                </a:solidFill>
+                <a:latin typeface="Calibri"/>
+              </a:rPr>
+              <a:t>Bayesian CRS · pool entropy</a:t>
+            </a:r>
+          </a:p>
+          <a:p>
+            <a:pPr algn="l">
+              <a:spcBef>
+                <a:spcPts val="0"/>
+              </a:spcBef>
+              <a:spcAft>
+                <a:spcPts val="400"/>
+              </a:spcAft>
+            </a:pPr>
+            <a:r>
+              <a:rPr sz="1200" b="0">
+                <a:solidFill>
+                  <a:srgbClr val="8B9BB4"/>
+                </a:solidFill>
+                <a:latin typeface="Calibri"/>
+              </a:rPr>
+              <a:t>brand/store splits look high-IG</a:t>
+            </a:r>
+          </a:p>
+          <a:p>
+            <a:pPr algn="l">
+              <a:spcBef>
+                <a:spcPts val="0"/>
+              </a:spcBef>
+              <a:spcAft>
+                <a:spcPts val="400"/>
+              </a:spcAft>
+            </a:pPr>
+            <a:r>
+              <a:rPr sz="1300" b="1">
+                <a:solidFill>
+                  <a:srgbClr val="FF2D8F"/>
+                </a:solidFill>
+                <a:latin typeface="Calibri"/>
+              </a:rPr>
+              <a:t>on THIS kit → Tech ~0.72  REJECT</a:t>
+            </a:r>
+          </a:p>
+        </p:txBody>
+      </p:sp>
+      <p:sp>
+        <p:nvSpPr>
+          <p:cNvPr id="43" name="Rounded Rectangle 42"/>
+          <p:cNvSpPr/>
+          <p:nvPr/>
+        </p:nvSpPr>
+        <p:spPr>
+          <a:xfrm>
+            <a:off x="6217920" y="4160520"/>
+            <a:ext cx="5486400" cy="1965960"/>
+          </a:xfrm>
+          <a:prstGeom prst="roundRect">
+            <a:avLst>
+              <a:gd name="adj" fmla="val 10000"/>
+            </a:avLst>
+          </a:prstGeom>
+          <a:solidFill>
+            <a:srgbClr val="152033"/>
+          </a:solidFill>
+          <a:ln w="15875">
+            <a:solidFill>
+              <a:srgbClr val="34D399"/>
+            </a:solidFill>
+          </a:ln>
+        </p:spPr>
+        <p:style>
+          <a:lnRef idx="1">
+            <a:schemeClr val="accent1"/>
+          </a:lnRef>
+          <a:fillRef idx="3">
+            <a:schemeClr val="accent1"/>
+          </a:fillRef>
+          <a:effectRef idx="2">
+            <a:schemeClr val="accent1"/>
+          </a:effectRef>
+          <a:fontRef idx="minor">
+            <a:schemeClr val="lt1"/>
+          </a:fontRef>
+        </p:style>
+        <p:txBody>
+          <a:bodyPr rtlCol="0" anchor="ctr"/>
+          <a:lstStyle/>
+          <a:p>
+            <a:pPr algn="ctr"/>
+          </a:p>
+        </p:txBody>
+      </p:sp>
+      <p:sp>
+        <p:nvSpPr>
+          <p:cNvPr id="44" name="TextBox 43"/>
+          <p:cNvSpPr txBox="1"/>
+          <p:nvPr/>
+        </p:nvSpPr>
+        <p:spPr>
+          <a:xfrm>
+            <a:off x="6400800" y="4297680"/>
+            <a:ext cx="5120640" cy="274320"/>
+          </a:xfrm>
+          <a:prstGeom prst="rect">
+            <a:avLst/>
+          </a:prstGeom>
+          <a:noFill/>
+        </p:spPr>
+        <p:txBody>
+          <a:bodyPr wrap="square" anchor="t"/>
+          <a:lstStyle/>
+          <a:p>
+            <a:pPr algn="l">
+              <a:spcBef>
+                <a:spcPts val="0"/>
+              </a:spcBef>
+              <a:spcAft>
+                <a:spcPts val="400"/>
+              </a:spcAft>
+            </a:pPr>
+            <a:r>
+              <a:rPr sz="1400" b="1">
+                <a:solidFill>
+                  <a:srgbClr val="34D399"/>
+                </a:solidFill>
+                <a:latin typeface="Calibri"/>
+              </a:rPr>
+              <a:t>ShopPilot ship path</a:t>
+            </a:r>
+          </a:p>
+        </p:txBody>
+      </p:sp>
+      <p:sp>
+        <p:nvSpPr>
+          <p:cNvPr id="45" name="TextBox 44"/>
+          <p:cNvSpPr txBox="1"/>
+          <p:nvPr/>
+        </p:nvSpPr>
+        <p:spPr>
+          <a:xfrm>
+            <a:off x="6400800" y="4663440"/>
+            <a:ext cx="5120640" cy="1280160"/>
+          </a:xfrm>
+          <a:prstGeom prst="rect">
+            <a:avLst/>
+          </a:prstGeom>
+          <a:noFill/>
+        </p:spPr>
+        <p:txBody>
+          <a:bodyPr wrap="square" anchor="t"/>
+          <a:lstStyle/>
+          <a:p>
+            <a:pPr algn="l">
+              <a:spcBef>
+                <a:spcPts val="0"/>
+              </a:spcBef>
+              <a:spcAft>
+                <a:spcPts val="400"/>
+              </a:spcAft>
+            </a:pPr>
+            <a:r>
+              <a:rPr sz="1300" b="0">
+                <a:solidFill>
+                  <a:srgbClr val="F8FAFC"/>
+                </a:solidFill>
+                <a:latin typeface="Calibri"/>
+              </a:rPr>
+              <a:t>other-first + static ladder</a:t>
+            </a:r>
+          </a:p>
+          <a:p>
+            <a:pPr algn="l">
+              <a:spcBef>
+                <a:spcPts val="0"/>
+              </a:spcBef>
+              <a:spcAft>
+                <a:spcPts val="400"/>
+              </a:spcAft>
+            </a:pPr>
+            <a:r>
+              <a:rPr sz="1200" b="0">
+                <a:solidFill>
+                  <a:srgbClr val="8B9BB4"/>
+                </a:solidFill>
+                <a:latin typeface="Calibri"/>
+              </a:rPr>
+              <a:t>skip filled / dont_care</a:t>
+            </a:r>
+          </a:p>
+          <a:p>
+            <a:pPr algn="l">
+              <a:spcBef>
+                <a:spcPts val="0"/>
+              </a:spcBef>
+              <a:spcAft>
+                <a:spcPts val="400"/>
+              </a:spcAft>
+            </a:pPr>
+            <a:r>
+              <a:rPr sz="1200" b="0">
+                <a:solidFill>
+                  <a:srgbClr val="8B9BB4"/>
+                </a:solidFill>
+                <a:latin typeface="Calibri"/>
+              </a:rPr>
+              <a:t>corpus facets in MESSAGE only</a:t>
+            </a:r>
+          </a:p>
+          <a:p>
+            <a:pPr algn="l">
+              <a:spcBef>
+                <a:spcPts val="0"/>
+              </a:spcBef>
+              <a:spcAft>
+                <a:spcPts val="400"/>
+              </a:spcAft>
+            </a:pPr>
+            <a:r>
+              <a:rPr sz="1300" b="1">
+                <a:solidFill>
+                  <a:srgbClr val="34D399"/>
+                </a:solidFill>
+                <a:latin typeface="Calibri"/>
+              </a:rPr>
+              <a:t>protocol-aligned CQ · Tech ~0.91</a:t>
+            </a:r>
+          </a:p>
+        </p:txBody>
+      </p:sp>
+      <p:sp>
+        <p:nvSpPr>
+          <p:cNvPr id="46" name="Rectangle 45"/>
           <p:cNvSpPr/>
           <p:nvPr/>
         </p:nvSpPr>
@@ -11881,7 +13619,7 @@
       </p:sp>
       <p:sp>
         <p:nvSpPr>
-          <p:cNvPr id="9" name="TextBox 8"/>
+          <p:cNvPr id="47" name="TextBox 46"/>
           <p:cNvSpPr txBox="1"/>
           <p:nvPr/>
         </p:nvSpPr>
@@ -11921,7 +13659,7 @@
       </p:sp>
       <p:sp>
         <p:nvSpPr>
-          <p:cNvPr id="10" name="TextBox 9"/>
+          <p:cNvPr id="48" name="TextBox 47"/>
           <p:cNvSpPr txBox="1"/>
           <p:nvPr/>
         </p:nvSpPr>
@@ -12120,7 +13858,7 @@
         <p:spPr>
           <a:xfrm>
             <a:off x="502920" y="438912"/>
-            <a:ext cx="10972800" cy="320040"/>
+            <a:ext cx="11155680" cy="502920"/>
           </a:xfrm>
           <a:prstGeom prst="rect">
             <a:avLst/>
@@ -12140,7 +13878,7 @@
               </a:spcAft>
             </a:pPr>
             <a:r>
-              <a:rPr sz="2200" b="1">
+              <a:rPr sz="2400" b="1">
                 <a:solidFill>
                   <a:srgbClr val="F8FAFC"/>
                 </a:solidFill>
@@ -12151,33 +13889,2721 @@
           </a:p>
         </p:txBody>
       </p:sp>
-      <p:pic>
-        <p:nvPicPr>
-          <p:cNvPr id="6" name="Picture 5" descr="architecture_diagram.png"/>
-          <p:cNvPicPr>
-            <a:picLocks noChangeAspect="1"/>
-          </p:cNvPicPr>
-          <p:nvPr/>
-        </p:nvPicPr>
-        <p:blipFill>
-          <a:blip r:embed="rId2"/>
-          <a:stretch>
-            <a:fillRect/>
-          </a:stretch>
-        </p:blipFill>
-        <p:spPr>
-          <a:xfrm>
-            <a:off x="201168" y="868680"/>
-            <a:ext cx="11795760" cy="5623560"/>
-          </a:xfrm>
-          <a:prstGeom prst="rect">
-            <a:avLst/>
-          </a:prstGeom>
-        </p:spPr>
-      </p:pic>
-      <p:sp>
-        <p:nvSpPr>
-          <p:cNvPr id="7" name="Rectangle 6"/>
+      <p:sp>
+        <p:nvSpPr>
+          <p:cNvPr id="6" name="TextBox 5"/>
+          <p:cNvSpPr txBox="1"/>
+          <p:nvPr/>
+        </p:nvSpPr>
+        <p:spPr>
+          <a:xfrm>
+            <a:off x="502920" y="914400"/>
+            <a:ext cx="11155680" cy="365760"/>
+          </a:xfrm>
+          <a:prstGeom prst="rect">
+            <a:avLst/>
+          </a:prstGeom>
+          <a:noFill/>
+        </p:spPr>
+        <p:txBody>
+          <a:bodyPr wrap="square" anchor="t"/>
+          <a:lstStyle/>
+          <a:p>
+            <a:pPr algn="l">
+              <a:spcBef>
+                <a:spcPts val="0"/>
+              </a:spcBef>
+              <a:spcAft>
+                <a:spcPts val="400"/>
+              </a:spcAft>
+            </a:pPr>
+            <a:r>
+              <a:rPr sz="1200" b="0">
+                <a:solidFill>
+                  <a:srgbClr val="8B9BB4"/>
+                </a:solidFill>
+                <a:latin typeface="Calibri"/>
+              </a:rPr>
+              <a:t>Native PowerPoint shapes — fully editable in Canva / Keynote / PPT  ·  Tech 0.909 · Hit 0.975 · 0 tokens</a:t>
+            </a:r>
+          </a:p>
+        </p:txBody>
+      </p:sp>
+      <p:sp>
+        <p:nvSpPr>
+          <p:cNvPr id="7" name="TextBox 6"/>
+          <p:cNvSpPr txBox="1"/>
+          <p:nvPr/>
+        </p:nvSpPr>
+        <p:spPr>
+          <a:xfrm>
+            <a:off x="320040" y="1234440"/>
+            <a:ext cx="1463040" cy="228600"/>
+          </a:xfrm>
+          <a:prstGeom prst="rect">
+            <a:avLst/>
+          </a:prstGeom>
+          <a:noFill/>
+        </p:spPr>
+        <p:txBody>
+          <a:bodyPr wrap="square" anchor="t"/>
+          <a:lstStyle/>
+          <a:p>
+            <a:pPr algn="l">
+              <a:spcBef>
+                <a:spcPts val="0"/>
+              </a:spcBef>
+              <a:spcAft>
+                <a:spcPts val="400"/>
+              </a:spcAft>
+            </a:pPr>
+            <a:r>
+              <a:rPr sz="1000" b="1">
+                <a:solidFill>
+                  <a:srgbClr val="00D4FF"/>
+                </a:solidFill>
+                <a:latin typeface="Calibri"/>
+              </a:rPr>
+              <a:t>ENTRY</a:t>
+            </a:r>
+          </a:p>
+        </p:txBody>
+      </p:sp>
+      <p:sp>
+        <p:nvSpPr>
+          <p:cNvPr id="8" name="Rounded Rectangle 7"/>
+          <p:cNvSpPr/>
+          <p:nvPr/>
+        </p:nvSpPr>
+        <p:spPr>
+          <a:xfrm>
+            <a:off x="320040" y="1463040"/>
+            <a:ext cx="1554480" cy="1417320"/>
+          </a:xfrm>
+          <a:prstGeom prst="roundRect">
+            <a:avLst>
+              <a:gd name="adj" fmla="val 10000"/>
+            </a:avLst>
+          </a:prstGeom>
+          <a:solidFill>
+            <a:srgbClr val="1A263C"/>
+          </a:solidFill>
+          <a:ln w="15875">
+            <a:solidFill>
+              <a:srgbClr val="00D4FF"/>
+            </a:solidFill>
+          </a:ln>
+        </p:spPr>
+        <p:style>
+          <a:lnRef idx="1">
+            <a:schemeClr val="accent1"/>
+          </a:lnRef>
+          <a:fillRef idx="3">
+            <a:schemeClr val="accent1"/>
+          </a:fillRef>
+          <a:effectRef idx="2">
+            <a:schemeClr val="accent1"/>
+          </a:effectRef>
+          <a:fontRef idx="minor">
+            <a:schemeClr val="lt1"/>
+          </a:fontRef>
+        </p:style>
+        <p:txBody>
+          <a:bodyPr rtlCol="0" anchor="ctr"/>
+          <a:lstStyle/>
+          <a:p>
+            <a:pPr algn="ctr"/>
+          </a:p>
+        </p:txBody>
+      </p:sp>
+      <p:sp>
+        <p:nvSpPr>
+          <p:cNvPr id="9" name="TextBox 8"/>
+          <p:cNvSpPr txBox="1"/>
+          <p:nvPr/>
+        </p:nvSpPr>
+        <p:spPr>
+          <a:xfrm>
+            <a:off x="411480" y="1600200"/>
+            <a:ext cx="1371600" cy="502920"/>
+          </a:xfrm>
+          <a:prstGeom prst="rect">
+            <a:avLst/>
+          </a:prstGeom>
+          <a:noFill/>
+        </p:spPr>
+        <p:txBody>
+          <a:bodyPr wrap="square" anchor="t"/>
+          <a:lstStyle/>
+          <a:p>
+            <a:pPr algn="ctr">
+              <a:spcBef>
+                <a:spcPts val="0"/>
+              </a:spcBef>
+              <a:spcAft>
+                <a:spcPts val="400"/>
+              </a:spcAft>
+            </a:pPr>
+            <a:r>
+              <a:rPr sz="1200" b="1">
+                <a:solidFill>
+                  <a:srgbClr val="F8FAFC"/>
+                </a:solidFill>
+                <a:latin typeface="Calibri"/>
+              </a:rPr>
+              <a:t>CLI / Eval</a:t>
+            </a:r>
+          </a:p>
+          <a:p>
+            <a:pPr algn="ctr">
+              <a:spcBef>
+                <a:spcPts val="0"/>
+              </a:spcBef>
+              <a:spcAft>
+                <a:spcPts val="400"/>
+              </a:spcAft>
+            </a:pPr>
+            <a:r>
+              <a:rPr sz="1000" b="0">
+                <a:solidFill>
+                  <a:srgbClr val="8B9BB4"/>
+                </a:solidFill>
+                <a:latin typeface="Calibri"/>
+              </a:rPr>
+              <a:t>reset · respond</a:t>
+            </a:r>
+          </a:p>
+        </p:txBody>
+      </p:sp>
+      <p:sp>
+        <p:nvSpPr>
+          <p:cNvPr id="10" name="TextBox 9"/>
+          <p:cNvSpPr txBox="1"/>
+          <p:nvPr/>
+        </p:nvSpPr>
+        <p:spPr>
+          <a:xfrm>
+            <a:off x="411480" y="2194560"/>
+            <a:ext cx="1371600" cy="502920"/>
+          </a:xfrm>
+          <a:prstGeom prst="rect">
+            <a:avLst/>
+          </a:prstGeom>
+          <a:noFill/>
+        </p:spPr>
+        <p:txBody>
+          <a:bodyPr wrap="square" anchor="t"/>
+          <a:lstStyle/>
+          <a:p>
+            <a:pPr algn="ctr">
+              <a:spcBef>
+                <a:spcPts val="0"/>
+              </a:spcBef>
+              <a:spcAft>
+                <a:spcPts val="400"/>
+              </a:spcAft>
+            </a:pPr>
+            <a:r>
+              <a:rPr sz="1200" b="1">
+                <a:solidFill>
+                  <a:srgbClr val="F8FAFC"/>
+                </a:solidFill>
+                <a:latin typeface="Calibri"/>
+              </a:rPr>
+              <a:t>User turn t</a:t>
+            </a:r>
+          </a:p>
+          <a:p>
+            <a:pPr algn="ctr">
+              <a:spcBef>
+                <a:spcPts val="0"/>
+              </a:spcBef>
+              <a:spcAft>
+                <a:spcPts val="400"/>
+              </a:spcAft>
+            </a:pPr>
+            <a:r>
+              <a:rPr sz="1000" b="0">
+                <a:solidFill>
+                  <a:srgbClr val="8B9BB4"/>
+                </a:solidFill>
+                <a:latin typeface="Calibri"/>
+              </a:rPr>
+              <a:t>text + session</a:t>
+            </a:r>
+          </a:p>
+        </p:txBody>
+      </p:sp>
+      <p:sp>
+        <p:nvSpPr>
+          <p:cNvPr id="11" name="TextBox 10"/>
+          <p:cNvSpPr txBox="1"/>
+          <p:nvPr/>
+        </p:nvSpPr>
+        <p:spPr>
+          <a:xfrm>
+            <a:off x="2057400" y="1234440"/>
+            <a:ext cx="5486400" cy="228600"/>
+          </a:xfrm>
+          <a:prstGeom prst="rect">
+            <a:avLst/>
+          </a:prstGeom>
+          <a:noFill/>
+        </p:spPr>
+        <p:txBody>
+          <a:bodyPr wrap="square" anchor="t"/>
+          <a:lstStyle/>
+          <a:p>
+            <a:pPr algn="l">
+              <a:spcBef>
+                <a:spcPts val="0"/>
+              </a:spcBef>
+              <a:spcAft>
+                <a:spcPts val="400"/>
+              </a:spcAft>
+            </a:pPr>
+            <a:r>
+              <a:rPr sz="1000" b="1">
+                <a:solidFill>
+                  <a:srgbClr val="34D399"/>
+                </a:solidFill>
+                <a:latin typeface="Calibri"/>
+              </a:rPr>
+              <a:t>HOT PATH  ·  Agent.respond (sync)</a:t>
+            </a:r>
+          </a:p>
+        </p:txBody>
+      </p:sp>
+      <p:sp>
+        <p:nvSpPr>
+          <p:cNvPr id="12" name="Rounded Rectangle 11"/>
+          <p:cNvSpPr/>
+          <p:nvPr/>
+        </p:nvSpPr>
+        <p:spPr>
+          <a:xfrm>
+            <a:off x="2057400" y="1508760"/>
+            <a:ext cx="1691640" cy="1234440"/>
+          </a:xfrm>
+          <a:prstGeom prst="roundRect">
+            <a:avLst>
+              <a:gd name="adj" fmla="val 10000"/>
+            </a:avLst>
+          </a:prstGeom>
+          <a:solidFill>
+            <a:srgbClr val="152033"/>
+          </a:solidFill>
+          <a:ln w="15875">
+            <a:solidFill>
+              <a:srgbClr val="00D4FF"/>
+            </a:solidFill>
+          </a:ln>
+        </p:spPr>
+        <p:style>
+          <a:lnRef idx="1">
+            <a:schemeClr val="accent1"/>
+          </a:lnRef>
+          <a:fillRef idx="3">
+            <a:schemeClr val="accent1"/>
+          </a:fillRef>
+          <a:effectRef idx="2">
+            <a:schemeClr val="accent1"/>
+          </a:effectRef>
+          <a:fontRef idx="minor">
+            <a:schemeClr val="lt1"/>
+          </a:fontRef>
+        </p:style>
+        <p:txBody>
+          <a:bodyPr rtlCol="0" anchor="ctr"/>
+          <a:lstStyle/>
+          <a:p>
+            <a:pPr algn="ctr"/>
+          </a:p>
+        </p:txBody>
+      </p:sp>
+      <p:sp>
+        <p:nvSpPr>
+          <p:cNvPr id="13" name="Oval 12"/>
+          <p:cNvSpPr/>
+          <p:nvPr/>
+        </p:nvSpPr>
+        <p:spPr>
+          <a:xfrm>
+            <a:off x="2167128" y="1691640"/>
+            <a:ext cx="329184" cy="329184"/>
+          </a:xfrm>
+          <a:prstGeom prst="ellipse">
+            <a:avLst/>
+          </a:prstGeom>
+          <a:solidFill>
+            <a:srgbClr val="00D4FF"/>
+          </a:solidFill>
+          <a:ln>
+            <a:noFill/>
+          </a:ln>
+        </p:spPr>
+        <p:style>
+          <a:lnRef idx="1">
+            <a:schemeClr val="accent1"/>
+          </a:lnRef>
+          <a:fillRef idx="3">
+            <a:schemeClr val="accent1"/>
+          </a:fillRef>
+          <a:effectRef idx="2">
+            <a:schemeClr val="accent1"/>
+          </a:effectRef>
+          <a:fontRef idx="minor">
+            <a:schemeClr val="lt1"/>
+          </a:fontRef>
+        </p:style>
+        <p:txBody>
+          <a:bodyPr rtlCol="0" anchor="ctr"/>
+          <a:lstStyle/>
+          <a:p>
+            <a:pPr algn="ctr">
+              <a:spcBef>
+                <a:spcPts val="300"/>
+              </a:spcBef>
+            </a:pPr>
+            <a:r>
+              <a:rPr sz="1200" b="1">
+                <a:solidFill>
+                  <a:srgbClr val="0A121F"/>
+                </a:solidFill>
+                <a:latin typeface="Calibri"/>
+              </a:rPr>
+              <a:t>1</a:t>
+            </a:r>
+          </a:p>
+        </p:txBody>
+      </p:sp>
+      <p:sp>
+        <p:nvSpPr>
+          <p:cNvPr id="14" name="TextBox 13"/>
+          <p:cNvSpPr txBox="1"/>
+          <p:nvPr/>
+        </p:nvSpPr>
+        <p:spPr>
+          <a:xfrm>
+            <a:off x="2560320" y="1719072"/>
+            <a:ext cx="1097280" cy="274320"/>
+          </a:xfrm>
+          <a:prstGeom prst="rect">
+            <a:avLst/>
+          </a:prstGeom>
+          <a:noFill/>
+        </p:spPr>
+        <p:txBody>
+          <a:bodyPr wrap="square" anchor="t"/>
+          <a:lstStyle/>
+          <a:p>
+            <a:pPr algn="l">
+              <a:spcBef>
+                <a:spcPts val="0"/>
+              </a:spcBef>
+              <a:spcAft>
+                <a:spcPts val="400"/>
+              </a:spcAft>
+            </a:pPr>
+            <a:r>
+              <a:rPr sz="1300" b="1">
+                <a:solidFill>
+                  <a:srgbClr val="F8FAFC"/>
+                </a:solidFill>
+                <a:latin typeface="Calibri"/>
+              </a:rPr>
+              <a:t>Ingest</a:t>
+            </a:r>
+          </a:p>
+        </p:txBody>
+      </p:sp>
+      <p:sp>
+        <p:nvSpPr>
+          <p:cNvPr id="15" name="TextBox 14"/>
+          <p:cNvSpPr txBox="1"/>
+          <p:nvPr/>
+        </p:nvSpPr>
+        <p:spPr>
+          <a:xfrm>
+            <a:off x="2167128" y="2194560"/>
+            <a:ext cx="1508760" cy="365760"/>
+          </a:xfrm>
+          <a:prstGeom prst="rect">
+            <a:avLst/>
+          </a:prstGeom>
+          <a:noFill/>
+        </p:spPr>
+        <p:txBody>
+          <a:bodyPr wrap="square" anchor="t"/>
+          <a:lstStyle/>
+          <a:p>
+            <a:pPr algn="l">
+              <a:spcBef>
+                <a:spcPts val="0"/>
+              </a:spcBef>
+              <a:spcAft>
+                <a:spcPts val="400"/>
+              </a:spcAft>
+            </a:pPr>
+            <a:r>
+              <a:rPr sz="1100" b="0">
+                <a:solidFill>
+                  <a:srgbClr val="8B9BB4"/>
+                </a:solidFill>
+                <a:latin typeface="Calibri"/>
+              </a:rPr>
+              <a:t>slots · family</a:t>
+            </a:r>
+          </a:p>
+        </p:txBody>
+      </p:sp>
+      <p:sp>
+        <p:nvSpPr>
+          <p:cNvPr id="16" name="Right Arrow 15"/>
+          <p:cNvSpPr/>
+          <p:nvPr/>
+        </p:nvSpPr>
+        <p:spPr>
+          <a:xfrm>
+            <a:off x="3767327" y="2011680"/>
+            <a:ext cx="164592" cy="182880"/>
+          </a:xfrm>
+          <a:prstGeom prst="rightArrow">
+            <a:avLst/>
+          </a:prstGeom>
+          <a:solidFill>
+            <a:srgbClr val="64748B"/>
+          </a:solidFill>
+          <a:ln>
+            <a:noFill/>
+          </a:ln>
+        </p:spPr>
+        <p:style>
+          <a:lnRef idx="1">
+            <a:schemeClr val="accent1"/>
+          </a:lnRef>
+          <a:fillRef idx="3">
+            <a:schemeClr val="accent1"/>
+          </a:fillRef>
+          <a:effectRef idx="2">
+            <a:schemeClr val="accent1"/>
+          </a:effectRef>
+          <a:fontRef idx="minor">
+            <a:schemeClr val="lt1"/>
+          </a:fontRef>
+        </p:style>
+        <p:txBody>
+          <a:bodyPr rtlCol="0" anchor="ctr"/>
+          <a:lstStyle/>
+          <a:p>
+            <a:pPr algn="ctr"/>
+          </a:p>
+        </p:txBody>
+      </p:sp>
+      <p:sp>
+        <p:nvSpPr>
+          <p:cNvPr id="17" name="Rounded Rectangle 16"/>
+          <p:cNvSpPr/>
+          <p:nvPr/>
+        </p:nvSpPr>
+        <p:spPr>
+          <a:xfrm>
+            <a:off x="3950208" y="1508760"/>
+            <a:ext cx="1691640" cy="1234440"/>
+          </a:xfrm>
+          <a:prstGeom prst="roundRect">
+            <a:avLst>
+              <a:gd name="adj" fmla="val 10000"/>
+            </a:avLst>
+          </a:prstGeom>
+          <a:solidFill>
+            <a:srgbClr val="152033"/>
+          </a:solidFill>
+          <a:ln w="15875">
+            <a:solidFill>
+              <a:srgbClr val="A855F7"/>
+            </a:solidFill>
+          </a:ln>
+        </p:spPr>
+        <p:style>
+          <a:lnRef idx="1">
+            <a:schemeClr val="accent1"/>
+          </a:lnRef>
+          <a:fillRef idx="3">
+            <a:schemeClr val="accent1"/>
+          </a:fillRef>
+          <a:effectRef idx="2">
+            <a:schemeClr val="accent1"/>
+          </a:effectRef>
+          <a:fontRef idx="minor">
+            <a:schemeClr val="lt1"/>
+          </a:fontRef>
+        </p:style>
+        <p:txBody>
+          <a:bodyPr rtlCol="0" anchor="ctr"/>
+          <a:lstStyle/>
+          <a:p>
+            <a:pPr algn="ctr"/>
+          </a:p>
+        </p:txBody>
+      </p:sp>
+      <p:sp>
+        <p:nvSpPr>
+          <p:cNvPr id="18" name="Oval 17"/>
+          <p:cNvSpPr/>
+          <p:nvPr/>
+        </p:nvSpPr>
+        <p:spPr>
+          <a:xfrm>
+            <a:off x="4059936" y="1691640"/>
+            <a:ext cx="329184" cy="329184"/>
+          </a:xfrm>
+          <a:prstGeom prst="ellipse">
+            <a:avLst/>
+          </a:prstGeom>
+          <a:solidFill>
+            <a:srgbClr val="A855F7"/>
+          </a:solidFill>
+          <a:ln>
+            <a:noFill/>
+          </a:ln>
+        </p:spPr>
+        <p:style>
+          <a:lnRef idx="1">
+            <a:schemeClr val="accent1"/>
+          </a:lnRef>
+          <a:fillRef idx="3">
+            <a:schemeClr val="accent1"/>
+          </a:fillRef>
+          <a:effectRef idx="2">
+            <a:schemeClr val="accent1"/>
+          </a:effectRef>
+          <a:fontRef idx="minor">
+            <a:schemeClr val="lt1"/>
+          </a:fontRef>
+        </p:style>
+        <p:txBody>
+          <a:bodyPr rtlCol="0" anchor="ctr"/>
+          <a:lstStyle/>
+          <a:p>
+            <a:pPr algn="ctr">
+              <a:spcBef>
+                <a:spcPts val="300"/>
+              </a:spcBef>
+            </a:pPr>
+            <a:r>
+              <a:rPr sz="1200" b="1">
+                <a:solidFill>
+                  <a:srgbClr val="0A121F"/>
+                </a:solidFill>
+                <a:latin typeface="Calibri"/>
+              </a:rPr>
+              <a:t>2</a:t>
+            </a:r>
+          </a:p>
+        </p:txBody>
+      </p:sp>
+      <p:sp>
+        <p:nvSpPr>
+          <p:cNvPr id="19" name="TextBox 18"/>
+          <p:cNvSpPr txBox="1"/>
+          <p:nvPr/>
+        </p:nvSpPr>
+        <p:spPr>
+          <a:xfrm>
+            <a:off x="4453128" y="1719072"/>
+            <a:ext cx="1097280" cy="274320"/>
+          </a:xfrm>
+          <a:prstGeom prst="rect">
+            <a:avLst/>
+          </a:prstGeom>
+          <a:noFill/>
+        </p:spPr>
+        <p:txBody>
+          <a:bodyPr wrap="square" anchor="t"/>
+          <a:lstStyle/>
+          <a:p>
+            <a:pPr algn="l">
+              <a:spcBef>
+                <a:spcPts val="0"/>
+              </a:spcBef>
+              <a:spcAft>
+                <a:spcPts val="400"/>
+              </a:spcAft>
+            </a:pPr>
+            <a:r>
+              <a:rPr sz="1300" b="1">
+                <a:solidFill>
+                  <a:srgbClr val="F8FAFC"/>
+                </a:solidFill>
+                <a:latin typeface="Calibri"/>
+              </a:rPr>
+              <a:t>Retrieve</a:t>
+            </a:r>
+          </a:p>
+        </p:txBody>
+      </p:sp>
+      <p:sp>
+        <p:nvSpPr>
+          <p:cNvPr id="20" name="TextBox 19"/>
+          <p:cNvSpPr txBox="1"/>
+          <p:nvPr/>
+        </p:nvSpPr>
+        <p:spPr>
+          <a:xfrm>
+            <a:off x="4059936" y="2194560"/>
+            <a:ext cx="1508760" cy="365760"/>
+          </a:xfrm>
+          <a:prstGeom prst="rect">
+            <a:avLst/>
+          </a:prstGeom>
+          <a:noFill/>
+        </p:spPr>
+        <p:txBody>
+          <a:bodyPr wrap="square" anchor="t"/>
+          <a:lstStyle/>
+          <a:p>
+            <a:pPr algn="l">
+              <a:spcBef>
+                <a:spcPts val="0"/>
+              </a:spcBef>
+              <a:spcAft>
+                <a:spcPts val="400"/>
+              </a:spcAft>
+            </a:pPr>
+            <a:r>
+              <a:rPr sz="1100" b="0">
+                <a:solidFill>
+                  <a:srgbClr val="8B9BB4"/>
+                </a:solidFill>
+                <a:latin typeface="Calibri"/>
+              </a:rPr>
+              <a:t>FTS5 + dense</a:t>
+            </a:r>
+          </a:p>
+        </p:txBody>
+      </p:sp>
+      <p:sp>
+        <p:nvSpPr>
+          <p:cNvPr id="21" name="Right Arrow 20"/>
+          <p:cNvSpPr/>
+          <p:nvPr/>
+        </p:nvSpPr>
+        <p:spPr>
+          <a:xfrm>
+            <a:off x="5660136" y="2011680"/>
+            <a:ext cx="164592" cy="182880"/>
+          </a:xfrm>
+          <a:prstGeom prst="rightArrow">
+            <a:avLst/>
+          </a:prstGeom>
+          <a:solidFill>
+            <a:srgbClr val="64748B"/>
+          </a:solidFill>
+          <a:ln>
+            <a:noFill/>
+          </a:ln>
+        </p:spPr>
+        <p:style>
+          <a:lnRef idx="1">
+            <a:schemeClr val="accent1"/>
+          </a:lnRef>
+          <a:fillRef idx="3">
+            <a:schemeClr val="accent1"/>
+          </a:fillRef>
+          <a:effectRef idx="2">
+            <a:schemeClr val="accent1"/>
+          </a:effectRef>
+          <a:fontRef idx="minor">
+            <a:schemeClr val="lt1"/>
+          </a:fontRef>
+        </p:style>
+        <p:txBody>
+          <a:bodyPr rtlCol="0" anchor="ctr"/>
+          <a:lstStyle/>
+          <a:p>
+            <a:pPr algn="ctr"/>
+          </a:p>
+        </p:txBody>
+      </p:sp>
+      <p:sp>
+        <p:nvSpPr>
+          <p:cNvPr id="22" name="Rounded Rectangle 21"/>
+          <p:cNvSpPr/>
+          <p:nvPr/>
+        </p:nvSpPr>
+        <p:spPr>
+          <a:xfrm>
+            <a:off x="5843016" y="1508760"/>
+            <a:ext cx="1691640" cy="1234440"/>
+          </a:xfrm>
+          <a:prstGeom prst="roundRect">
+            <a:avLst>
+              <a:gd name="adj" fmla="val 10000"/>
+            </a:avLst>
+          </a:prstGeom>
+          <a:solidFill>
+            <a:srgbClr val="152033"/>
+          </a:solidFill>
+          <a:ln w="15875">
+            <a:solidFill>
+              <a:srgbClr val="34D399"/>
+            </a:solidFill>
+          </a:ln>
+        </p:spPr>
+        <p:style>
+          <a:lnRef idx="1">
+            <a:schemeClr val="accent1"/>
+          </a:lnRef>
+          <a:fillRef idx="3">
+            <a:schemeClr val="accent1"/>
+          </a:fillRef>
+          <a:effectRef idx="2">
+            <a:schemeClr val="accent1"/>
+          </a:effectRef>
+          <a:fontRef idx="minor">
+            <a:schemeClr val="lt1"/>
+          </a:fontRef>
+        </p:style>
+        <p:txBody>
+          <a:bodyPr rtlCol="0" anchor="ctr"/>
+          <a:lstStyle/>
+          <a:p>
+            <a:pPr algn="ctr"/>
+          </a:p>
+        </p:txBody>
+      </p:sp>
+      <p:sp>
+        <p:nvSpPr>
+          <p:cNvPr id="23" name="Oval 22"/>
+          <p:cNvSpPr/>
+          <p:nvPr/>
+        </p:nvSpPr>
+        <p:spPr>
+          <a:xfrm>
+            <a:off x="5952744" y="1691640"/>
+            <a:ext cx="329184" cy="329184"/>
+          </a:xfrm>
+          <a:prstGeom prst="ellipse">
+            <a:avLst/>
+          </a:prstGeom>
+          <a:solidFill>
+            <a:srgbClr val="34D399"/>
+          </a:solidFill>
+          <a:ln>
+            <a:noFill/>
+          </a:ln>
+        </p:spPr>
+        <p:style>
+          <a:lnRef idx="1">
+            <a:schemeClr val="accent1"/>
+          </a:lnRef>
+          <a:fillRef idx="3">
+            <a:schemeClr val="accent1"/>
+          </a:fillRef>
+          <a:effectRef idx="2">
+            <a:schemeClr val="accent1"/>
+          </a:effectRef>
+          <a:fontRef idx="minor">
+            <a:schemeClr val="lt1"/>
+          </a:fontRef>
+        </p:style>
+        <p:txBody>
+          <a:bodyPr rtlCol="0" anchor="ctr"/>
+          <a:lstStyle/>
+          <a:p>
+            <a:pPr algn="ctr">
+              <a:spcBef>
+                <a:spcPts val="300"/>
+              </a:spcBef>
+            </a:pPr>
+            <a:r>
+              <a:rPr sz="1200" b="1">
+                <a:solidFill>
+                  <a:srgbClr val="0A121F"/>
+                </a:solidFill>
+                <a:latin typeface="Calibri"/>
+              </a:rPr>
+              <a:t>3</a:t>
+            </a:r>
+          </a:p>
+        </p:txBody>
+      </p:sp>
+      <p:sp>
+        <p:nvSpPr>
+          <p:cNvPr id="24" name="TextBox 23"/>
+          <p:cNvSpPr txBox="1"/>
+          <p:nvPr/>
+        </p:nvSpPr>
+        <p:spPr>
+          <a:xfrm>
+            <a:off x="6345936" y="1719072"/>
+            <a:ext cx="1097280" cy="274320"/>
+          </a:xfrm>
+          <a:prstGeom prst="rect">
+            <a:avLst/>
+          </a:prstGeom>
+          <a:noFill/>
+        </p:spPr>
+        <p:txBody>
+          <a:bodyPr wrap="square" anchor="t"/>
+          <a:lstStyle/>
+          <a:p>
+            <a:pPr algn="l">
+              <a:spcBef>
+                <a:spcPts val="0"/>
+              </a:spcBef>
+              <a:spcAft>
+                <a:spcPts val="400"/>
+              </a:spcAft>
+            </a:pPr>
+            <a:r>
+              <a:rPr sz="1300" b="1">
+                <a:solidFill>
+                  <a:srgbClr val="F8FAFC"/>
+                </a:solidFill>
+                <a:latin typeface="Calibri"/>
+              </a:rPr>
+              <a:t>Rank</a:t>
+            </a:r>
+          </a:p>
+        </p:txBody>
+      </p:sp>
+      <p:sp>
+        <p:nvSpPr>
+          <p:cNvPr id="25" name="TextBox 24"/>
+          <p:cNvSpPr txBox="1"/>
+          <p:nvPr/>
+        </p:nvSpPr>
+        <p:spPr>
+          <a:xfrm>
+            <a:off x="5952744" y="2194560"/>
+            <a:ext cx="1508760" cy="365760"/>
+          </a:xfrm>
+          <a:prstGeom prst="rect">
+            <a:avLst/>
+          </a:prstGeom>
+          <a:noFill/>
+        </p:spPr>
+        <p:txBody>
+          <a:bodyPr wrap="square" anchor="t"/>
+          <a:lstStyle/>
+          <a:p>
+            <a:pPr algn="l">
+              <a:spcBef>
+                <a:spcPts val="0"/>
+              </a:spcBef>
+              <a:spcAft>
+                <a:spcPts val="400"/>
+              </a:spcAft>
+            </a:pPr>
+            <a:r>
+              <a:rPr sz="1100" b="0">
+                <a:solidFill>
+                  <a:srgbClr val="8B9BB4"/>
+                </a:solidFill>
+                <a:latin typeface="Calibri"/>
+              </a:rPr>
+              <a:t>coverage</a:t>
+            </a:r>
+          </a:p>
+        </p:txBody>
+      </p:sp>
+      <p:sp>
+        <p:nvSpPr>
+          <p:cNvPr id="26" name="Right Arrow 25"/>
+          <p:cNvSpPr/>
+          <p:nvPr/>
+        </p:nvSpPr>
+        <p:spPr>
+          <a:xfrm>
+            <a:off x="7552944" y="2011680"/>
+            <a:ext cx="164592" cy="182880"/>
+          </a:xfrm>
+          <a:prstGeom prst="rightArrow">
+            <a:avLst/>
+          </a:prstGeom>
+          <a:solidFill>
+            <a:srgbClr val="64748B"/>
+          </a:solidFill>
+          <a:ln>
+            <a:noFill/>
+          </a:ln>
+        </p:spPr>
+        <p:style>
+          <a:lnRef idx="1">
+            <a:schemeClr val="accent1"/>
+          </a:lnRef>
+          <a:fillRef idx="3">
+            <a:schemeClr val="accent1"/>
+          </a:fillRef>
+          <a:effectRef idx="2">
+            <a:schemeClr val="accent1"/>
+          </a:effectRef>
+          <a:fontRef idx="minor">
+            <a:schemeClr val="lt1"/>
+          </a:fontRef>
+        </p:style>
+        <p:txBody>
+          <a:bodyPr rtlCol="0" anchor="ctr"/>
+          <a:lstStyle/>
+          <a:p>
+            <a:pPr algn="ctr"/>
+          </a:p>
+        </p:txBody>
+      </p:sp>
+      <p:sp>
+        <p:nvSpPr>
+          <p:cNvPr id="27" name="Rounded Rectangle 26"/>
+          <p:cNvSpPr/>
+          <p:nvPr/>
+        </p:nvSpPr>
+        <p:spPr>
+          <a:xfrm>
+            <a:off x="7735824" y="1508760"/>
+            <a:ext cx="1691640" cy="1234440"/>
+          </a:xfrm>
+          <a:prstGeom prst="roundRect">
+            <a:avLst>
+              <a:gd name="adj" fmla="val 10000"/>
+            </a:avLst>
+          </a:prstGeom>
+          <a:solidFill>
+            <a:srgbClr val="152033"/>
+          </a:solidFill>
+          <a:ln w="15875">
+            <a:solidFill>
+              <a:srgbClr val="FBBF24"/>
+            </a:solidFill>
+          </a:ln>
+        </p:spPr>
+        <p:style>
+          <a:lnRef idx="1">
+            <a:schemeClr val="accent1"/>
+          </a:lnRef>
+          <a:fillRef idx="3">
+            <a:schemeClr val="accent1"/>
+          </a:fillRef>
+          <a:effectRef idx="2">
+            <a:schemeClr val="accent1"/>
+          </a:effectRef>
+          <a:fontRef idx="minor">
+            <a:schemeClr val="lt1"/>
+          </a:fontRef>
+        </p:style>
+        <p:txBody>
+          <a:bodyPr rtlCol="0" anchor="ctr"/>
+          <a:lstStyle/>
+          <a:p>
+            <a:pPr algn="ctr"/>
+          </a:p>
+        </p:txBody>
+      </p:sp>
+      <p:sp>
+        <p:nvSpPr>
+          <p:cNvPr id="28" name="Oval 27"/>
+          <p:cNvSpPr/>
+          <p:nvPr/>
+        </p:nvSpPr>
+        <p:spPr>
+          <a:xfrm>
+            <a:off x="7845552" y="1691640"/>
+            <a:ext cx="329184" cy="329184"/>
+          </a:xfrm>
+          <a:prstGeom prst="ellipse">
+            <a:avLst/>
+          </a:prstGeom>
+          <a:solidFill>
+            <a:srgbClr val="FBBF24"/>
+          </a:solidFill>
+          <a:ln>
+            <a:noFill/>
+          </a:ln>
+        </p:spPr>
+        <p:style>
+          <a:lnRef idx="1">
+            <a:schemeClr val="accent1"/>
+          </a:lnRef>
+          <a:fillRef idx="3">
+            <a:schemeClr val="accent1"/>
+          </a:fillRef>
+          <a:effectRef idx="2">
+            <a:schemeClr val="accent1"/>
+          </a:effectRef>
+          <a:fontRef idx="minor">
+            <a:schemeClr val="lt1"/>
+          </a:fontRef>
+        </p:style>
+        <p:txBody>
+          <a:bodyPr rtlCol="0" anchor="ctr"/>
+          <a:lstStyle/>
+          <a:p>
+            <a:pPr algn="ctr">
+              <a:spcBef>
+                <a:spcPts val="300"/>
+              </a:spcBef>
+            </a:pPr>
+            <a:r>
+              <a:rPr sz="1200" b="1">
+                <a:solidFill>
+                  <a:srgbClr val="0A121F"/>
+                </a:solidFill>
+                <a:latin typeface="Calibri"/>
+              </a:rPr>
+              <a:t>4</a:t>
+            </a:r>
+          </a:p>
+        </p:txBody>
+      </p:sp>
+      <p:sp>
+        <p:nvSpPr>
+          <p:cNvPr id="29" name="TextBox 28"/>
+          <p:cNvSpPr txBox="1"/>
+          <p:nvPr/>
+        </p:nvSpPr>
+        <p:spPr>
+          <a:xfrm>
+            <a:off x="8238744" y="1719072"/>
+            <a:ext cx="1097280" cy="274320"/>
+          </a:xfrm>
+          <a:prstGeom prst="rect">
+            <a:avLst/>
+          </a:prstGeom>
+          <a:noFill/>
+        </p:spPr>
+        <p:txBody>
+          <a:bodyPr wrap="square" anchor="t"/>
+          <a:lstStyle/>
+          <a:p>
+            <a:pPr algn="l">
+              <a:spcBef>
+                <a:spcPts val="0"/>
+              </a:spcBef>
+              <a:spcAft>
+                <a:spcPts val="400"/>
+              </a:spcAft>
+            </a:pPr>
+            <a:r>
+              <a:rPr sz="1300" b="1">
+                <a:solidFill>
+                  <a:srgbClr val="F8FAFC"/>
+                </a:solidFill>
+                <a:latin typeface="Calibri"/>
+              </a:rPr>
+              <a:t>Ask</a:t>
+            </a:r>
+          </a:p>
+        </p:txBody>
+      </p:sp>
+      <p:sp>
+        <p:nvSpPr>
+          <p:cNvPr id="30" name="TextBox 29"/>
+          <p:cNvSpPr txBox="1"/>
+          <p:nvPr/>
+        </p:nvSpPr>
+        <p:spPr>
+          <a:xfrm>
+            <a:off x="7845552" y="2194560"/>
+            <a:ext cx="1508760" cy="365760"/>
+          </a:xfrm>
+          <a:prstGeom prst="rect">
+            <a:avLst/>
+          </a:prstGeom>
+          <a:noFill/>
+        </p:spPr>
+        <p:txBody>
+          <a:bodyPr wrap="square" anchor="t"/>
+          <a:lstStyle/>
+          <a:p>
+            <a:pPr algn="l">
+              <a:spcBef>
+                <a:spcPts val="0"/>
+              </a:spcBef>
+              <a:spcAft>
+                <a:spcPts val="400"/>
+              </a:spcAft>
+            </a:pPr>
+            <a:r>
+              <a:rPr sz="1100" b="0">
+                <a:solidFill>
+                  <a:srgbClr val="8B9BB4"/>
+                </a:solidFill>
+                <a:latin typeface="Calibri"/>
+              </a:rPr>
+              <a:t>other-first</a:t>
+            </a:r>
+          </a:p>
+        </p:txBody>
+      </p:sp>
+      <p:sp>
+        <p:nvSpPr>
+          <p:cNvPr id="31" name="Right Arrow 30"/>
+          <p:cNvSpPr/>
+          <p:nvPr/>
+        </p:nvSpPr>
+        <p:spPr>
+          <a:xfrm>
+            <a:off x="9445752" y="2011680"/>
+            <a:ext cx="164592" cy="182880"/>
+          </a:xfrm>
+          <a:prstGeom prst="rightArrow">
+            <a:avLst/>
+          </a:prstGeom>
+          <a:solidFill>
+            <a:srgbClr val="64748B"/>
+          </a:solidFill>
+          <a:ln>
+            <a:noFill/>
+          </a:ln>
+        </p:spPr>
+        <p:style>
+          <a:lnRef idx="1">
+            <a:schemeClr val="accent1"/>
+          </a:lnRef>
+          <a:fillRef idx="3">
+            <a:schemeClr val="accent1"/>
+          </a:fillRef>
+          <a:effectRef idx="2">
+            <a:schemeClr val="accent1"/>
+          </a:effectRef>
+          <a:fontRef idx="minor">
+            <a:schemeClr val="lt1"/>
+          </a:fontRef>
+        </p:style>
+        <p:txBody>
+          <a:bodyPr rtlCol="0" anchor="ctr"/>
+          <a:lstStyle/>
+          <a:p>
+            <a:pPr algn="ctr"/>
+          </a:p>
+        </p:txBody>
+      </p:sp>
+      <p:sp>
+        <p:nvSpPr>
+          <p:cNvPr id="32" name="Rounded Rectangle 31"/>
+          <p:cNvSpPr/>
+          <p:nvPr/>
+        </p:nvSpPr>
+        <p:spPr>
+          <a:xfrm>
+            <a:off x="9628632" y="1508760"/>
+            <a:ext cx="1691640" cy="1234440"/>
+          </a:xfrm>
+          <a:prstGeom prst="roundRect">
+            <a:avLst>
+              <a:gd name="adj" fmla="val 10000"/>
+            </a:avLst>
+          </a:prstGeom>
+          <a:solidFill>
+            <a:srgbClr val="152033"/>
+          </a:solidFill>
+          <a:ln w="15875">
+            <a:solidFill>
+              <a:srgbClr val="FF2D8F"/>
+            </a:solidFill>
+          </a:ln>
+        </p:spPr>
+        <p:style>
+          <a:lnRef idx="1">
+            <a:schemeClr val="accent1"/>
+          </a:lnRef>
+          <a:fillRef idx="3">
+            <a:schemeClr val="accent1"/>
+          </a:fillRef>
+          <a:effectRef idx="2">
+            <a:schemeClr val="accent1"/>
+          </a:effectRef>
+          <a:fontRef idx="minor">
+            <a:schemeClr val="lt1"/>
+          </a:fontRef>
+        </p:style>
+        <p:txBody>
+          <a:bodyPr rtlCol="0" anchor="ctr"/>
+          <a:lstStyle/>
+          <a:p>
+            <a:pPr algn="ctr"/>
+          </a:p>
+        </p:txBody>
+      </p:sp>
+      <p:sp>
+        <p:nvSpPr>
+          <p:cNvPr id="33" name="Oval 32"/>
+          <p:cNvSpPr/>
+          <p:nvPr/>
+        </p:nvSpPr>
+        <p:spPr>
+          <a:xfrm>
+            <a:off x="9738360" y="1691640"/>
+            <a:ext cx="329184" cy="329184"/>
+          </a:xfrm>
+          <a:prstGeom prst="ellipse">
+            <a:avLst/>
+          </a:prstGeom>
+          <a:solidFill>
+            <a:srgbClr val="FF2D8F"/>
+          </a:solidFill>
+          <a:ln>
+            <a:noFill/>
+          </a:ln>
+        </p:spPr>
+        <p:style>
+          <a:lnRef idx="1">
+            <a:schemeClr val="accent1"/>
+          </a:lnRef>
+          <a:fillRef idx="3">
+            <a:schemeClr val="accent1"/>
+          </a:fillRef>
+          <a:effectRef idx="2">
+            <a:schemeClr val="accent1"/>
+          </a:effectRef>
+          <a:fontRef idx="minor">
+            <a:schemeClr val="lt1"/>
+          </a:fontRef>
+        </p:style>
+        <p:txBody>
+          <a:bodyPr rtlCol="0" anchor="ctr"/>
+          <a:lstStyle/>
+          <a:p>
+            <a:pPr algn="ctr">
+              <a:spcBef>
+                <a:spcPts val="300"/>
+              </a:spcBef>
+            </a:pPr>
+            <a:r>
+              <a:rPr sz="1200" b="1">
+                <a:solidFill>
+                  <a:srgbClr val="0A121F"/>
+                </a:solidFill>
+                <a:latin typeface="Calibri"/>
+              </a:rPr>
+              <a:t>5</a:t>
+            </a:r>
+          </a:p>
+        </p:txBody>
+      </p:sp>
+      <p:sp>
+        <p:nvSpPr>
+          <p:cNvPr id="34" name="TextBox 33"/>
+          <p:cNvSpPr txBox="1"/>
+          <p:nvPr/>
+        </p:nvSpPr>
+        <p:spPr>
+          <a:xfrm>
+            <a:off x="10131552" y="1719072"/>
+            <a:ext cx="1097280" cy="274320"/>
+          </a:xfrm>
+          <a:prstGeom prst="rect">
+            <a:avLst/>
+          </a:prstGeom>
+          <a:noFill/>
+        </p:spPr>
+        <p:txBody>
+          <a:bodyPr wrap="square" anchor="t"/>
+          <a:lstStyle/>
+          <a:p>
+            <a:pPr algn="l">
+              <a:spcBef>
+                <a:spcPts val="0"/>
+              </a:spcBef>
+              <a:spcAft>
+                <a:spcPts val="400"/>
+              </a:spcAft>
+            </a:pPr>
+            <a:r>
+              <a:rPr sz="1300" b="1">
+                <a:solidFill>
+                  <a:srgbClr val="F8FAFC"/>
+                </a:solidFill>
+                <a:latin typeface="Calibri"/>
+              </a:rPr>
+              <a:t>Respond</a:t>
+            </a:r>
+          </a:p>
+        </p:txBody>
+      </p:sp>
+      <p:sp>
+        <p:nvSpPr>
+          <p:cNvPr id="35" name="TextBox 34"/>
+          <p:cNvSpPr txBox="1"/>
+          <p:nvPr/>
+        </p:nvSpPr>
+        <p:spPr>
+          <a:xfrm>
+            <a:off x="9738360" y="2194560"/>
+            <a:ext cx="1508760" cy="365760"/>
+          </a:xfrm>
+          <a:prstGeom prst="rect">
+            <a:avLst/>
+          </a:prstGeom>
+          <a:noFill/>
+        </p:spPr>
+        <p:txBody>
+          <a:bodyPr wrap="square" anchor="t"/>
+          <a:lstStyle/>
+          <a:p>
+            <a:pPr algn="l">
+              <a:spcBef>
+                <a:spcPts val="0"/>
+              </a:spcBef>
+              <a:spcAft>
+                <a:spcPts val="400"/>
+              </a:spcAft>
+            </a:pPr>
+            <a:r>
+              <a:rPr sz="1100" b="0">
+                <a:solidFill>
+                  <a:srgbClr val="8B9BB4"/>
+                </a:solidFill>
+                <a:latin typeface="Calibri"/>
+              </a:rPr>
+              <a:t>Top-10 + ask</a:t>
+            </a:r>
+          </a:p>
+        </p:txBody>
+      </p:sp>
+      <p:sp>
+        <p:nvSpPr>
+          <p:cNvPr id="36" name="Right Arrow 35"/>
+          <p:cNvSpPr/>
+          <p:nvPr/>
+        </p:nvSpPr>
+        <p:spPr>
+          <a:xfrm>
+            <a:off x="1874519" y="2011680"/>
+            <a:ext cx="164592" cy="182880"/>
+          </a:xfrm>
+          <a:prstGeom prst="rightArrow">
+            <a:avLst/>
+          </a:prstGeom>
+          <a:solidFill>
+            <a:srgbClr val="00D4FF"/>
+          </a:solidFill>
+          <a:ln>
+            <a:noFill/>
+          </a:ln>
+        </p:spPr>
+        <p:style>
+          <a:lnRef idx="1">
+            <a:schemeClr val="accent1"/>
+          </a:lnRef>
+          <a:fillRef idx="3">
+            <a:schemeClr val="accent1"/>
+          </a:fillRef>
+          <a:effectRef idx="2">
+            <a:schemeClr val="accent1"/>
+          </a:effectRef>
+          <a:fontRef idx="minor">
+            <a:schemeClr val="lt1"/>
+          </a:fontRef>
+        </p:style>
+        <p:txBody>
+          <a:bodyPr rtlCol="0" anchor="ctr"/>
+          <a:lstStyle/>
+          <a:p>
+            <a:pPr algn="ctr"/>
+          </a:p>
+        </p:txBody>
+      </p:sp>
+      <p:sp>
+        <p:nvSpPr>
+          <p:cNvPr id="37" name="Rounded Rectangle 36"/>
+          <p:cNvSpPr/>
+          <p:nvPr/>
+        </p:nvSpPr>
+        <p:spPr>
+          <a:xfrm>
+            <a:off x="10972800" y="1783080"/>
+            <a:ext cx="960120" cy="640080"/>
+          </a:xfrm>
+          <a:prstGeom prst="roundRect">
+            <a:avLst>
+              <a:gd name="adj" fmla="val 15000"/>
+            </a:avLst>
+          </a:prstGeom>
+          <a:solidFill>
+            <a:srgbClr val="1A263C"/>
+          </a:solidFill>
+          <a:ln w="15875">
+            <a:solidFill>
+              <a:srgbClr val="FF2D8F"/>
+            </a:solidFill>
+          </a:ln>
+        </p:spPr>
+        <p:style>
+          <a:lnRef idx="1">
+            <a:schemeClr val="accent1"/>
+          </a:lnRef>
+          <a:fillRef idx="3">
+            <a:schemeClr val="accent1"/>
+          </a:fillRef>
+          <a:effectRef idx="2">
+            <a:schemeClr val="accent1"/>
+          </a:effectRef>
+          <a:fontRef idx="minor">
+            <a:schemeClr val="lt1"/>
+          </a:fontRef>
+        </p:style>
+        <p:txBody>
+          <a:bodyPr rtlCol="0" anchor="ctr"/>
+          <a:lstStyle/>
+          <a:p>
+            <a:pPr algn="ctr"/>
+          </a:p>
+        </p:txBody>
+      </p:sp>
+      <p:sp>
+        <p:nvSpPr>
+          <p:cNvPr id="38" name="TextBox 37"/>
+          <p:cNvSpPr txBox="1"/>
+          <p:nvPr/>
+        </p:nvSpPr>
+        <p:spPr>
+          <a:xfrm>
+            <a:off x="10972800" y="1920240"/>
+            <a:ext cx="960120" cy="411480"/>
+          </a:xfrm>
+          <a:prstGeom prst="rect">
+            <a:avLst/>
+          </a:prstGeom>
+          <a:noFill/>
+        </p:spPr>
+        <p:txBody>
+          <a:bodyPr wrap="square" anchor="t"/>
+          <a:lstStyle/>
+          <a:p>
+            <a:pPr algn="ctr">
+              <a:spcBef>
+                <a:spcPts val="0"/>
+              </a:spcBef>
+              <a:spcAft>
+                <a:spcPts val="400"/>
+              </a:spcAft>
+            </a:pPr>
+            <a:r>
+              <a:rPr sz="1100" b="1">
+                <a:solidFill>
+                  <a:srgbClr val="F8FAFC"/>
+                </a:solidFill>
+                <a:latin typeface="Calibri"/>
+              </a:rPr>
+              <a:t>→ client</a:t>
+            </a:r>
+          </a:p>
+        </p:txBody>
+      </p:sp>
+      <p:sp>
+        <p:nvSpPr>
+          <p:cNvPr id="39" name="Right Arrow 38"/>
+          <p:cNvSpPr/>
+          <p:nvPr/>
+        </p:nvSpPr>
+        <p:spPr>
+          <a:xfrm>
+            <a:off x="10744200" y="2011680"/>
+            <a:ext cx="182880" cy="182880"/>
+          </a:xfrm>
+          <a:prstGeom prst="rightArrow">
+            <a:avLst/>
+          </a:prstGeom>
+          <a:solidFill>
+            <a:srgbClr val="FF2D8F"/>
+          </a:solidFill>
+          <a:ln>
+            <a:noFill/>
+          </a:ln>
+        </p:spPr>
+        <p:style>
+          <a:lnRef idx="1">
+            <a:schemeClr val="accent1"/>
+          </a:lnRef>
+          <a:fillRef idx="3">
+            <a:schemeClr val="accent1"/>
+          </a:fillRef>
+          <a:effectRef idx="2">
+            <a:schemeClr val="accent1"/>
+          </a:effectRef>
+          <a:fontRef idx="minor">
+            <a:schemeClr val="lt1"/>
+          </a:fontRef>
+        </p:style>
+        <p:txBody>
+          <a:bodyPr rtlCol="0" anchor="ctr"/>
+          <a:lstStyle/>
+          <a:p>
+            <a:pPr algn="ctr"/>
+          </a:p>
+        </p:txBody>
+      </p:sp>
+      <p:sp>
+        <p:nvSpPr>
+          <p:cNvPr id="40" name="Down Arrow 39"/>
+          <p:cNvSpPr/>
+          <p:nvPr/>
+        </p:nvSpPr>
+        <p:spPr>
+          <a:xfrm>
+            <a:off x="2697480" y="2788920"/>
+            <a:ext cx="182880" cy="320040"/>
+          </a:xfrm>
+          <a:prstGeom prst="downArrow">
+            <a:avLst/>
+          </a:prstGeom>
+          <a:solidFill>
+            <a:srgbClr val="34D399"/>
+          </a:solidFill>
+          <a:ln>
+            <a:noFill/>
+          </a:ln>
+        </p:spPr>
+        <p:style>
+          <a:lnRef idx="1">
+            <a:schemeClr val="accent1"/>
+          </a:lnRef>
+          <a:fillRef idx="3">
+            <a:schemeClr val="accent1"/>
+          </a:fillRef>
+          <a:effectRef idx="2">
+            <a:schemeClr val="accent1"/>
+          </a:effectRef>
+          <a:fontRef idx="minor">
+            <a:schemeClr val="lt1"/>
+          </a:fontRef>
+        </p:style>
+        <p:txBody>
+          <a:bodyPr rtlCol="0" anchor="ctr"/>
+          <a:lstStyle/>
+          <a:p>
+            <a:pPr algn="ctr"/>
+          </a:p>
+        </p:txBody>
+      </p:sp>
+      <p:sp>
+        <p:nvSpPr>
+          <p:cNvPr id="41" name="TextBox 40"/>
+          <p:cNvSpPr txBox="1"/>
+          <p:nvPr/>
+        </p:nvSpPr>
+        <p:spPr>
+          <a:xfrm>
+            <a:off x="2926080" y="2834640"/>
+            <a:ext cx="548640" cy="228600"/>
+          </a:xfrm>
+          <a:prstGeom prst="rect">
+            <a:avLst/>
+          </a:prstGeom>
+          <a:noFill/>
+        </p:spPr>
+        <p:txBody>
+          <a:bodyPr wrap="square" anchor="t"/>
+          <a:lstStyle/>
+          <a:p>
+            <a:pPr algn="l">
+              <a:spcBef>
+                <a:spcPts val="0"/>
+              </a:spcBef>
+              <a:spcAft>
+                <a:spcPts val="400"/>
+              </a:spcAft>
+            </a:pPr>
+            <a:r>
+              <a:rPr sz="1000" b="1">
+                <a:solidFill>
+                  <a:srgbClr val="34D399"/>
+                </a:solidFill>
+                <a:latin typeface="Calibri"/>
+              </a:rPr>
+              <a:t>write</a:t>
+            </a:r>
+          </a:p>
+        </p:txBody>
+      </p:sp>
+      <p:sp>
+        <p:nvSpPr>
+          <p:cNvPr id="42" name="Up Arrow 41"/>
+          <p:cNvSpPr/>
+          <p:nvPr/>
+        </p:nvSpPr>
+        <p:spPr>
+          <a:xfrm>
+            <a:off x="4480560" y="2788920"/>
+            <a:ext cx="182880" cy="320040"/>
+          </a:xfrm>
+          <a:prstGeom prst="upArrow">
+            <a:avLst/>
+          </a:prstGeom>
+          <a:solidFill>
+            <a:srgbClr val="34D399"/>
+          </a:solidFill>
+          <a:ln>
+            <a:noFill/>
+          </a:ln>
+        </p:spPr>
+        <p:style>
+          <a:lnRef idx="1">
+            <a:schemeClr val="accent1"/>
+          </a:lnRef>
+          <a:fillRef idx="3">
+            <a:schemeClr val="accent1"/>
+          </a:fillRef>
+          <a:effectRef idx="2">
+            <a:schemeClr val="accent1"/>
+          </a:effectRef>
+          <a:fontRef idx="minor">
+            <a:schemeClr val="lt1"/>
+          </a:fontRef>
+        </p:style>
+        <p:txBody>
+          <a:bodyPr rtlCol="0" anchor="ctr"/>
+          <a:lstStyle/>
+          <a:p>
+            <a:pPr algn="ctr"/>
+          </a:p>
+        </p:txBody>
+      </p:sp>
+      <p:sp>
+        <p:nvSpPr>
+          <p:cNvPr id="43" name="TextBox 42"/>
+          <p:cNvSpPr txBox="1"/>
+          <p:nvPr/>
+        </p:nvSpPr>
+        <p:spPr>
+          <a:xfrm>
+            <a:off x="4709160" y="2834640"/>
+            <a:ext cx="502920" cy="228600"/>
+          </a:xfrm>
+          <a:prstGeom prst="rect">
+            <a:avLst/>
+          </a:prstGeom>
+          <a:noFill/>
+        </p:spPr>
+        <p:txBody>
+          <a:bodyPr wrap="square" anchor="t"/>
+          <a:lstStyle/>
+          <a:p>
+            <a:pPr algn="l">
+              <a:spcBef>
+                <a:spcPts val="0"/>
+              </a:spcBef>
+              <a:spcAft>
+                <a:spcPts val="400"/>
+              </a:spcAft>
+            </a:pPr>
+            <a:r>
+              <a:rPr sz="1000" b="1">
+                <a:solidFill>
+                  <a:srgbClr val="34D399"/>
+                </a:solidFill>
+                <a:latin typeface="Calibri"/>
+              </a:rPr>
+              <a:t>read</a:t>
+            </a:r>
+          </a:p>
+        </p:txBody>
+      </p:sp>
+      <p:sp>
+        <p:nvSpPr>
+          <p:cNvPr id="44" name="Rounded Rectangle 43"/>
+          <p:cNvSpPr/>
+          <p:nvPr/>
+        </p:nvSpPr>
+        <p:spPr>
+          <a:xfrm>
+            <a:off x="320040" y="3200400"/>
+            <a:ext cx="5394960" cy="2926080"/>
+          </a:xfrm>
+          <a:prstGeom prst="roundRect">
+            <a:avLst>
+              <a:gd name="adj" fmla="val 10000"/>
+            </a:avLst>
+          </a:prstGeom>
+          <a:solidFill>
+            <a:srgbClr val="152033"/>
+          </a:solidFill>
+          <a:ln w="15875">
+            <a:solidFill>
+              <a:srgbClr val="34D399"/>
+            </a:solidFill>
+          </a:ln>
+        </p:spPr>
+        <p:style>
+          <a:lnRef idx="1">
+            <a:schemeClr val="accent1"/>
+          </a:lnRef>
+          <a:fillRef idx="3">
+            <a:schemeClr val="accent1"/>
+          </a:fillRef>
+          <a:effectRef idx="2">
+            <a:schemeClr val="accent1"/>
+          </a:effectRef>
+          <a:fontRef idx="minor">
+            <a:schemeClr val="lt1"/>
+          </a:fontRef>
+        </p:style>
+        <p:txBody>
+          <a:bodyPr rtlCol="0" anchor="ctr"/>
+          <a:lstStyle/>
+          <a:p>
+            <a:pPr algn="ctr"/>
+          </a:p>
+        </p:txBody>
+      </p:sp>
+      <p:sp>
+        <p:nvSpPr>
+          <p:cNvPr id="45" name="Rectangle 44"/>
+          <p:cNvSpPr/>
+          <p:nvPr/>
+        </p:nvSpPr>
+        <p:spPr>
+          <a:xfrm>
+            <a:off x="320040" y="3200400"/>
+            <a:ext cx="91440" cy="2926080"/>
+          </a:xfrm>
+          <a:prstGeom prst="rect">
+            <a:avLst/>
+          </a:prstGeom>
+          <a:solidFill>
+            <a:srgbClr val="34D399"/>
+          </a:solidFill>
+          <a:ln>
+            <a:noFill/>
+          </a:ln>
+        </p:spPr>
+        <p:style>
+          <a:lnRef idx="1">
+            <a:schemeClr val="accent1"/>
+          </a:lnRef>
+          <a:fillRef idx="3">
+            <a:schemeClr val="accent1"/>
+          </a:fillRef>
+          <a:effectRef idx="2">
+            <a:schemeClr val="accent1"/>
+          </a:effectRef>
+          <a:fontRef idx="minor">
+            <a:schemeClr val="lt1"/>
+          </a:fontRef>
+        </p:style>
+        <p:txBody>
+          <a:bodyPr rtlCol="0" anchor="ctr"/>
+          <a:lstStyle/>
+          <a:p>
+            <a:pPr algn="ctr"/>
+          </a:p>
+        </p:txBody>
+      </p:sp>
+      <p:sp>
+        <p:nvSpPr>
+          <p:cNvPr id="46" name="TextBox 45"/>
+          <p:cNvSpPr txBox="1"/>
+          <p:nvPr/>
+        </p:nvSpPr>
+        <p:spPr>
+          <a:xfrm>
+            <a:off x="548640" y="3337560"/>
+            <a:ext cx="4937760" cy="320040"/>
+          </a:xfrm>
+          <a:prstGeom prst="rect">
+            <a:avLst/>
+          </a:prstGeom>
+          <a:noFill/>
+        </p:spPr>
+        <p:txBody>
+          <a:bodyPr wrap="square" anchor="t"/>
+          <a:lstStyle/>
+          <a:p>
+            <a:pPr algn="l">
+              <a:spcBef>
+                <a:spcPts val="0"/>
+              </a:spcBef>
+              <a:spcAft>
+                <a:spcPts val="400"/>
+              </a:spcAft>
+            </a:pPr>
+            <a:r>
+              <a:rPr sz="1600" b="1">
+                <a:solidFill>
+                  <a:srgbClr val="34D399"/>
+                </a:solidFill>
+                <a:latin typeface="Calibri"/>
+              </a:rPr>
+              <a:t>SessionState  ·  mutable RAM</a:t>
+            </a:r>
+          </a:p>
+        </p:txBody>
+      </p:sp>
+      <p:sp>
+        <p:nvSpPr>
+          <p:cNvPr id="47" name="TextBox 46"/>
+          <p:cNvSpPr txBox="1"/>
+          <p:nvPr/>
+        </p:nvSpPr>
+        <p:spPr>
+          <a:xfrm>
+            <a:off x="548640" y="3749039"/>
+            <a:ext cx="4937760" cy="1645920"/>
+          </a:xfrm>
+          <a:prstGeom prst="rect">
+            <a:avLst/>
+          </a:prstGeom>
+          <a:noFill/>
+        </p:spPr>
+        <p:txBody>
+          <a:bodyPr wrap="square" anchor="t"/>
+          <a:lstStyle/>
+          <a:p>
+            <a:pPr algn="l">
+              <a:spcBef>
+                <a:spcPts val="0"/>
+              </a:spcBef>
+              <a:spcAft>
+                <a:spcPts val="400"/>
+              </a:spcAft>
+            </a:pPr>
+            <a:r>
+              <a:rPr sz="1300" b="0">
+                <a:solidFill>
+                  <a:srgbClr val="F8FAFC"/>
+                </a:solidFill>
+                <a:latin typeface="Calibri"/>
+              </a:rPr>
+              <a:t>Slots   soft | disclosed | override · filled / asked</a:t>
+            </a:r>
+          </a:p>
+          <a:p>
+            <a:pPr algn="l">
+              <a:spcBef>
+                <a:spcPts val="0"/>
+              </a:spcBef>
+              <a:spcAft>
+                <a:spcPts val="400"/>
+              </a:spcAft>
+            </a:pPr>
+            <a:r>
+              <a:rPr sz="1300" b="0">
+                <a:solidFill>
+                  <a:srgbClr val="F8FAFC"/>
+                </a:solidFill>
+                <a:latin typeface="Calibri"/>
+              </a:rPr>
+              <a:t>Route   product_family · gift audience · buy/browse</a:t>
+            </a:r>
+          </a:p>
+          <a:p>
+            <a:pPr algn="l">
+              <a:spcBef>
+                <a:spcPts val="0"/>
+              </a:spcBef>
+              <a:spcAft>
+                <a:spcPts val="400"/>
+              </a:spcAft>
+            </a:pPr>
+            <a:r>
+              <a:rPr sz="1300" b="0">
+                <a:solidFill>
+                  <a:srgbClr val="F8FAFC"/>
+                </a:solidFill>
+                <a:latin typeface="Calibri"/>
+              </a:rPr>
+              <a:t>Clean   soft-only wipe · never re-ask filled</a:t>
+            </a:r>
+          </a:p>
+          <a:p>
+            <a:pPr algn="l">
+              <a:spcBef>
+                <a:spcPts val="0"/>
+              </a:spcBef>
+              <a:spcAft>
+                <a:spcPts val="400"/>
+              </a:spcAft>
+            </a:pPr>
+            <a:r>
+              <a:rPr sz="1300" b="0">
+                <a:solidFill>
+                  <a:srgbClr val="F8FAFC"/>
+                </a:solidFill>
+                <a:latin typeface="Calibri"/>
+              </a:rPr>
+              <a:t>Loop    next turn = past state + current text</a:t>
+            </a:r>
+          </a:p>
+        </p:txBody>
+      </p:sp>
+      <p:sp>
+        <p:nvSpPr>
+          <p:cNvPr id="48" name="Rounded Rectangle 47"/>
+          <p:cNvSpPr/>
+          <p:nvPr/>
+        </p:nvSpPr>
+        <p:spPr>
+          <a:xfrm>
+            <a:off x="548640" y="5440680"/>
+            <a:ext cx="4937760" cy="502920"/>
+          </a:xfrm>
+          <a:prstGeom prst="roundRect">
+            <a:avLst>
+              <a:gd name="adj" fmla="val 10000"/>
+            </a:avLst>
+          </a:prstGeom>
+          <a:solidFill>
+            <a:srgbClr val="1A263C"/>
+          </a:solidFill>
+          <a:ln w="15875">
+            <a:solidFill>
+              <a:srgbClr val="00D4FF"/>
+            </a:solidFill>
+          </a:ln>
+        </p:spPr>
+        <p:style>
+          <a:lnRef idx="1">
+            <a:schemeClr val="accent1"/>
+          </a:lnRef>
+          <a:fillRef idx="3">
+            <a:schemeClr val="accent1"/>
+          </a:fillRef>
+          <a:effectRef idx="2">
+            <a:schemeClr val="accent1"/>
+          </a:effectRef>
+          <a:fontRef idx="minor">
+            <a:schemeClr val="lt1"/>
+          </a:fontRef>
+        </p:style>
+        <p:txBody>
+          <a:bodyPr rtlCol="0" anchor="ctr"/>
+          <a:lstStyle/>
+          <a:p>
+            <a:pPr algn="ctr"/>
+          </a:p>
+        </p:txBody>
+      </p:sp>
+      <p:sp>
+        <p:nvSpPr>
+          <p:cNvPr id="49" name="TextBox 48"/>
+          <p:cNvSpPr txBox="1"/>
+          <p:nvPr/>
+        </p:nvSpPr>
+        <p:spPr>
+          <a:xfrm>
+            <a:off x="640080" y="5532120"/>
+            <a:ext cx="4754880" cy="365760"/>
+          </a:xfrm>
+          <a:prstGeom prst="rect">
+            <a:avLst/>
+          </a:prstGeom>
+          <a:noFill/>
+        </p:spPr>
+        <p:txBody>
+          <a:bodyPr wrap="square" anchor="t"/>
+          <a:lstStyle/>
+          <a:p>
+            <a:pPr algn="ctr">
+              <a:spcBef>
+                <a:spcPts val="0"/>
+              </a:spcBef>
+              <a:spcAft>
+                <a:spcPts val="400"/>
+              </a:spcAft>
+            </a:pPr>
+            <a:r>
+              <a:rPr sz="1100" b="1">
+                <a:solidFill>
+                  <a:srgbClr val="F8FAFC"/>
+                </a:solidFill>
+                <a:latin typeface="Calibri"/>
+              </a:rPr>
+              <a:t>INVARIANT  t3 "black" ranks with dress+plus+black</a:t>
+            </a:r>
+          </a:p>
+        </p:txBody>
+      </p:sp>
+      <p:sp>
+        <p:nvSpPr>
+          <p:cNvPr id="50" name="Rounded Rectangle 49"/>
+          <p:cNvSpPr/>
+          <p:nvPr/>
+        </p:nvSpPr>
+        <p:spPr>
+          <a:xfrm>
+            <a:off x="5897880" y="3200400"/>
+            <a:ext cx="3017520" cy="2926080"/>
+          </a:xfrm>
+          <a:prstGeom prst="roundRect">
+            <a:avLst>
+              <a:gd name="adj" fmla="val 10000"/>
+            </a:avLst>
+          </a:prstGeom>
+          <a:solidFill>
+            <a:srgbClr val="152033"/>
+          </a:solidFill>
+          <a:ln w="15875">
+            <a:solidFill>
+              <a:srgbClr val="A855F7"/>
+            </a:solidFill>
+          </a:ln>
+        </p:spPr>
+        <p:style>
+          <a:lnRef idx="1">
+            <a:schemeClr val="accent1"/>
+          </a:lnRef>
+          <a:fillRef idx="3">
+            <a:schemeClr val="accent1"/>
+          </a:fillRef>
+          <a:effectRef idx="2">
+            <a:schemeClr val="accent1"/>
+          </a:effectRef>
+          <a:fontRef idx="minor">
+            <a:schemeClr val="lt1"/>
+          </a:fontRef>
+        </p:style>
+        <p:txBody>
+          <a:bodyPr rtlCol="0" anchor="ctr"/>
+          <a:lstStyle/>
+          <a:p>
+            <a:pPr algn="ctr"/>
+          </a:p>
+        </p:txBody>
+      </p:sp>
+      <p:sp>
+        <p:nvSpPr>
+          <p:cNvPr id="51" name="Rectangle 50"/>
+          <p:cNvSpPr/>
+          <p:nvPr/>
+        </p:nvSpPr>
+        <p:spPr>
+          <a:xfrm>
+            <a:off x="5897880" y="3200400"/>
+            <a:ext cx="91440" cy="2926080"/>
+          </a:xfrm>
+          <a:prstGeom prst="rect">
+            <a:avLst/>
+          </a:prstGeom>
+          <a:solidFill>
+            <a:srgbClr val="A855F7"/>
+          </a:solidFill>
+          <a:ln>
+            <a:noFill/>
+          </a:ln>
+        </p:spPr>
+        <p:style>
+          <a:lnRef idx="1">
+            <a:schemeClr val="accent1"/>
+          </a:lnRef>
+          <a:fillRef idx="3">
+            <a:schemeClr val="accent1"/>
+          </a:fillRef>
+          <a:effectRef idx="2">
+            <a:schemeClr val="accent1"/>
+          </a:effectRef>
+          <a:fontRef idx="minor">
+            <a:schemeClr val="lt1"/>
+          </a:fontRef>
+        </p:style>
+        <p:txBody>
+          <a:bodyPr rtlCol="0" anchor="ctr"/>
+          <a:lstStyle/>
+          <a:p>
+            <a:pPr algn="ctr"/>
+          </a:p>
+        </p:txBody>
+      </p:sp>
+      <p:sp>
+        <p:nvSpPr>
+          <p:cNvPr id="52" name="TextBox 51"/>
+          <p:cNvSpPr txBox="1"/>
+          <p:nvPr/>
+        </p:nvSpPr>
+        <p:spPr>
+          <a:xfrm>
+            <a:off x="6126480" y="3337560"/>
+            <a:ext cx="2651760" cy="320040"/>
+          </a:xfrm>
+          <a:prstGeom prst="rect">
+            <a:avLst/>
+          </a:prstGeom>
+          <a:noFill/>
+        </p:spPr>
+        <p:txBody>
+          <a:bodyPr wrap="square" anchor="t"/>
+          <a:lstStyle/>
+          <a:p>
+            <a:pPr algn="l">
+              <a:spcBef>
+                <a:spcPts val="0"/>
+              </a:spcBef>
+              <a:spcAft>
+                <a:spcPts val="400"/>
+              </a:spcAft>
+            </a:pPr>
+            <a:r>
+              <a:rPr sz="1500" b="1">
+                <a:solidFill>
+                  <a:srgbClr val="A855F7"/>
+                </a:solidFill>
+                <a:latin typeface="Calibri"/>
+              </a:rPr>
+              <a:t>Catalog  ·  immutable</a:t>
+            </a:r>
+          </a:p>
+        </p:txBody>
+      </p:sp>
+      <p:sp>
+        <p:nvSpPr>
+          <p:cNvPr id="53" name="TextBox 52"/>
+          <p:cNvSpPr txBox="1"/>
+          <p:nvPr/>
+        </p:nvSpPr>
+        <p:spPr>
+          <a:xfrm>
+            <a:off x="6126480" y="3794760"/>
+            <a:ext cx="2651760" cy="2103120"/>
+          </a:xfrm>
+          <a:prstGeom prst="rect">
+            <a:avLst/>
+          </a:prstGeom>
+          <a:noFill/>
+        </p:spPr>
+        <p:txBody>
+          <a:bodyPr wrap="square" anchor="t"/>
+          <a:lstStyle/>
+          <a:p>
+            <a:pPr algn="l">
+              <a:spcBef>
+                <a:spcPts val="0"/>
+              </a:spcBef>
+              <a:spcAft>
+                <a:spcPts val="400"/>
+              </a:spcAft>
+            </a:pPr>
+            <a:r>
+              <a:rPr sz="1300" b="0">
+                <a:solidFill>
+                  <a:srgbClr val="F8FAFC"/>
+                </a:solidFill>
+                <a:latin typeface="Calibri"/>
+              </a:rPr>
+              <a:t>FTS5 BM25 in-memory</a:t>
+            </a:r>
+          </a:p>
+          <a:p>
+            <a:pPr algn="l">
+              <a:spcBef>
+                <a:spcPts val="0"/>
+              </a:spcBef>
+              <a:spcAft>
+                <a:spcPts val="400"/>
+              </a:spcAft>
+            </a:pPr>
+            <a:r>
+              <a:rPr sz="1300" b="0">
+                <a:solidFill>
+                  <a:srgbClr val="F8FAFC"/>
+                </a:solidFill>
+                <a:latin typeface="Calibri"/>
+              </a:rPr>
+              <a:t>Dense hash 512-d default</a:t>
+            </a:r>
+          </a:p>
+          <a:p>
+            <a:pPr algn="l">
+              <a:spcBef>
+                <a:spcPts val="0"/>
+              </a:spcBef>
+              <a:spcAft>
+                <a:spcPts val="400"/>
+              </a:spcAft>
+            </a:pPr>
+            <a:r>
+              <a:rPr sz="1300" b="0">
+                <a:solidFill>
+                  <a:srgbClr val="F8FAFC"/>
+                </a:solidFill>
+                <a:latin typeface="Calibri"/>
+              </a:rPr>
+              <a:t>MiniLM opt-in only</a:t>
+            </a:r>
+          </a:p>
+          <a:p>
+            <a:pPr algn="l">
+              <a:spcBef>
+                <a:spcPts val="0"/>
+              </a:spcBef>
+              <a:spcAft>
+                <a:spcPts val="400"/>
+              </a:spcAft>
+            </a:pPr>
+            <a:r>
+              <a:rPr sz="1300" b="0">
+                <a:solidFill>
+                  <a:srgbClr val="F8FAFC"/>
+                </a:solidFill>
+                <a:latin typeface="Calibri"/>
+              </a:rPr>
+              <a:t>_products · 50k CSJ</a:t>
+            </a:r>
+          </a:p>
+          <a:p>
+            <a:pPr algn="l">
+              <a:spcBef>
+                <a:spcPts val="0"/>
+              </a:spcBef>
+              <a:spcAft>
+                <a:spcPts val="400"/>
+              </a:spcAft>
+            </a:pPr>
+            <a:r>
+              <a:rPr sz="1300" b="0">
+                <a:solidFill>
+                  <a:srgbClr val="8B9BB4"/>
+                </a:solidFill>
+                <a:latin typeface="Calibri"/>
+              </a:rPr>
+              <a:t>no writes at turn time</a:t>
+            </a:r>
+          </a:p>
+        </p:txBody>
+      </p:sp>
+      <p:sp>
+        <p:nvSpPr>
+          <p:cNvPr id="54" name="Rounded Rectangle 53"/>
+          <p:cNvSpPr/>
+          <p:nvPr/>
+        </p:nvSpPr>
+        <p:spPr>
+          <a:xfrm>
+            <a:off x="9098280" y="3200400"/>
+            <a:ext cx="2788920" cy="1554480"/>
+          </a:xfrm>
+          <a:prstGeom prst="roundRect">
+            <a:avLst>
+              <a:gd name="adj" fmla="val 10000"/>
+            </a:avLst>
+          </a:prstGeom>
+          <a:solidFill>
+            <a:srgbClr val="152033"/>
+          </a:solidFill>
+          <a:ln w="15875">
+            <a:solidFill>
+              <a:srgbClr val="FF2D8F"/>
+            </a:solidFill>
+          </a:ln>
+        </p:spPr>
+        <p:style>
+          <a:lnRef idx="1">
+            <a:schemeClr val="accent1"/>
+          </a:lnRef>
+          <a:fillRef idx="3">
+            <a:schemeClr val="accent1"/>
+          </a:fillRef>
+          <a:effectRef idx="2">
+            <a:schemeClr val="accent1"/>
+          </a:effectRef>
+          <a:fontRef idx="minor">
+            <a:schemeClr val="lt1"/>
+          </a:fontRef>
+        </p:style>
+        <p:txBody>
+          <a:bodyPr rtlCol="0" anchor="ctr"/>
+          <a:lstStyle/>
+          <a:p>
+            <a:pPr algn="ctr"/>
+          </a:p>
+        </p:txBody>
+      </p:sp>
+      <p:sp>
+        <p:nvSpPr>
+          <p:cNvPr id="55" name="Rectangle 54"/>
+          <p:cNvSpPr/>
+          <p:nvPr/>
+        </p:nvSpPr>
+        <p:spPr>
+          <a:xfrm>
+            <a:off x="9098280" y="3200400"/>
+            <a:ext cx="91440" cy="1554480"/>
+          </a:xfrm>
+          <a:prstGeom prst="rect">
+            <a:avLst/>
+          </a:prstGeom>
+          <a:solidFill>
+            <a:srgbClr val="FF2D8F"/>
+          </a:solidFill>
+          <a:ln>
+            <a:noFill/>
+          </a:ln>
+        </p:spPr>
+        <p:style>
+          <a:lnRef idx="1">
+            <a:schemeClr val="accent1"/>
+          </a:lnRef>
+          <a:fillRef idx="3">
+            <a:schemeClr val="accent1"/>
+          </a:fillRef>
+          <a:effectRef idx="2">
+            <a:schemeClr val="accent1"/>
+          </a:effectRef>
+          <a:fontRef idx="minor">
+            <a:schemeClr val="lt1"/>
+          </a:fontRef>
+        </p:style>
+        <p:txBody>
+          <a:bodyPr rtlCol="0" anchor="ctr"/>
+          <a:lstStyle/>
+          <a:p>
+            <a:pPr algn="ctr"/>
+          </a:p>
+        </p:txBody>
+      </p:sp>
+      <p:sp>
+        <p:nvSpPr>
+          <p:cNvPr id="56" name="TextBox 55"/>
+          <p:cNvSpPr txBox="1"/>
+          <p:nvPr/>
+        </p:nvSpPr>
+        <p:spPr>
+          <a:xfrm>
+            <a:off x="9326880" y="3291840"/>
+            <a:ext cx="2423160" cy="274320"/>
+          </a:xfrm>
+          <a:prstGeom prst="rect">
+            <a:avLst/>
+          </a:prstGeom>
+          <a:noFill/>
+        </p:spPr>
+        <p:txBody>
+          <a:bodyPr wrap="square" anchor="t"/>
+          <a:lstStyle/>
+          <a:p>
+            <a:pPr algn="l">
+              <a:spcBef>
+                <a:spcPts val="0"/>
+              </a:spcBef>
+              <a:spcAft>
+                <a:spcPts val="400"/>
+              </a:spcAft>
+            </a:pPr>
+            <a:r>
+              <a:rPr sz="1400" b="1">
+                <a:solidFill>
+                  <a:srgbClr val="FF2D8F"/>
+                </a:solidFill>
+                <a:latin typeface="Calibri"/>
+              </a:rPr>
+              <a:t>Optional LLM</a:t>
+            </a:r>
+          </a:p>
+        </p:txBody>
+      </p:sp>
+      <p:sp>
+        <p:nvSpPr>
+          <p:cNvPr id="57" name="TextBox 56"/>
+          <p:cNvSpPr txBox="1"/>
+          <p:nvPr/>
+        </p:nvSpPr>
+        <p:spPr>
+          <a:xfrm>
+            <a:off x="9326880" y="3611880"/>
+            <a:ext cx="2423160" cy="1005840"/>
+          </a:xfrm>
+          <a:prstGeom prst="rect">
+            <a:avLst/>
+          </a:prstGeom>
+          <a:noFill/>
+        </p:spPr>
+        <p:txBody>
+          <a:bodyPr wrap="square" anchor="t"/>
+          <a:lstStyle/>
+          <a:p>
+            <a:pPr algn="l">
+              <a:spcBef>
+                <a:spcPts val="0"/>
+              </a:spcBef>
+              <a:spcAft>
+                <a:spcPts val="400"/>
+              </a:spcAft>
+            </a:pPr>
+            <a:r>
+              <a:rPr sz="1200" b="0">
+                <a:solidFill>
+                  <a:srgbClr val="8B9BB4"/>
+                </a:solidFill>
+                <a:latin typeface="Calibri"/>
+              </a:rPr>
+              <a:t>OFF · not on score path</a:t>
+            </a:r>
+          </a:p>
+          <a:p>
+            <a:pPr algn="l">
+              <a:spcBef>
+                <a:spcPts val="0"/>
+              </a:spcBef>
+              <a:spcAft>
+                <a:spcPts val="400"/>
+              </a:spcAft>
+            </a:pPr>
+            <a:r>
+              <a:rPr sz="1200" b="0">
+                <a:solidFill>
+                  <a:srgbClr val="F8FAFC"/>
+                </a:solidFill>
+                <a:latin typeface="Calibri"/>
+              </a:rPr>
+              <a:t>slots NLU · rerank top-20</a:t>
+            </a:r>
+          </a:p>
+          <a:p>
+            <a:pPr algn="l">
+              <a:spcBef>
+                <a:spcPts val="0"/>
+              </a:spcBef>
+              <a:spcAft>
+                <a:spcPts val="400"/>
+              </a:spcAft>
+            </a:pPr>
+            <a:r>
+              <a:rPr sz="1200" b="0">
+                <a:solidFill>
+                  <a:srgbClr val="F8FAFC"/>
+                </a:solidFill>
+                <a:latin typeface="Calibri"/>
+              </a:rPr>
+              <a:t>timeout → rules</a:t>
+            </a:r>
+          </a:p>
+        </p:txBody>
+      </p:sp>
+      <p:sp>
+        <p:nvSpPr>
+          <p:cNvPr id="58" name="Rounded Rectangle 57"/>
+          <p:cNvSpPr/>
+          <p:nvPr/>
+        </p:nvSpPr>
+        <p:spPr>
+          <a:xfrm>
+            <a:off x="9098280" y="4937760"/>
+            <a:ext cx="2788920" cy="1188720"/>
+          </a:xfrm>
+          <a:prstGeom prst="roundRect">
+            <a:avLst>
+              <a:gd name="adj" fmla="val 10000"/>
+            </a:avLst>
+          </a:prstGeom>
+          <a:solidFill>
+            <a:srgbClr val="1A263C"/>
+          </a:solidFill>
+          <a:ln w="15875">
+            <a:solidFill>
+              <a:srgbClr val="64748B"/>
+            </a:solidFill>
+          </a:ln>
+        </p:spPr>
+        <p:style>
+          <a:lnRef idx="1">
+            <a:schemeClr val="accent1"/>
+          </a:lnRef>
+          <a:fillRef idx="3">
+            <a:schemeClr val="accent1"/>
+          </a:fillRef>
+          <a:effectRef idx="2">
+            <a:schemeClr val="accent1"/>
+          </a:effectRef>
+          <a:fontRef idx="minor">
+            <a:schemeClr val="lt1"/>
+          </a:fontRef>
+        </p:style>
+        <p:txBody>
+          <a:bodyPr rtlCol="0" anchor="ctr"/>
+          <a:lstStyle/>
+          <a:p>
+            <a:pPr algn="ctr"/>
+          </a:p>
+        </p:txBody>
+      </p:sp>
+      <p:sp>
+        <p:nvSpPr>
+          <p:cNvPr id="59" name="TextBox 58"/>
+          <p:cNvSpPr txBox="1"/>
+          <p:nvPr/>
+        </p:nvSpPr>
+        <p:spPr>
+          <a:xfrm>
+            <a:off x="9326880" y="5074920"/>
+            <a:ext cx="2423160" cy="274320"/>
+          </a:xfrm>
+          <a:prstGeom prst="rect">
+            <a:avLst/>
+          </a:prstGeom>
+          <a:noFill/>
+        </p:spPr>
+        <p:txBody>
+          <a:bodyPr wrap="square" anchor="t"/>
+          <a:lstStyle/>
+          <a:p>
+            <a:pPr algn="l">
+              <a:spcBef>
+                <a:spcPts val="0"/>
+              </a:spcBef>
+              <a:spcAft>
+                <a:spcPts val="400"/>
+              </a:spcAft>
+            </a:pPr>
+            <a:r>
+              <a:rPr sz="1400" b="1">
+                <a:solidFill>
+                  <a:srgbClr val="F8FAFC"/>
+                </a:solidFill>
+                <a:latin typeface="Calibri"/>
+              </a:rPr>
+              <a:t>Measure</a:t>
+            </a:r>
+          </a:p>
+        </p:txBody>
+      </p:sp>
+      <p:sp>
+        <p:nvSpPr>
+          <p:cNvPr id="60" name="TextBox 59"/>
+          <p:cNvSpPr txBox="1"/>
+          <p:nvPr/>
+        </p:nvSpPr>
+        <p:spPr>
+          <a:xfrm>
+            <a:off x="9326880" y="5394960"/>
+            <a:ext cx="2423160" cy="640080"/>
+          </a:xfrm>
+          <a:prstGeom prst="rect">
+            <a:avLst/>
+          </a:prstGeom>
+          <a:noFill/>
+        </p:spPr>
+        <p:txBody>
+          <a:bodyPr wrap="square" anchor="t"/>
+          <a:lstStyle/>
+          <a:p>
+            <a:pPr algn="l">
+              <a:spcBef>
+                <a:spcPts val="0"/>
+              </a:spcBef>
+              <a:spcAft>
+                <a:spcPts val="400"/>
+              </a:spcAft>
+            </a:pPr>
+            <a:r>
+              <a:rPr sz="1200" b="0">
+                <a:solidFill>
+                  <a:srgbClr val="8B9BB4"/>
+                </a:solidFill>
+                <a:latin typeface="Calibri"/>
+              </a:rPr>
+              <a:t>Hit · MRR · MTTC → Tech</a:t>
+            </a:r>
+          </a:p>
+          <a:p>
+            <a:pPr algn="l">
+              <a:spcBef>
+                <a:spcPts val="0"/>
+              </a:spcBef>
+              <a:spcAft>
+                <a:spcPts val="400"/>
+              </a:spcAft>
+            </a:pPr>
+            <a:r>
+              <a:rPr sz="1200" b="0">
+                <a:solidFill>
+                  <a:srgbClr val="FBBF24"/>
+                </a:solidFill>
+                <a:latin typeface="Calibri"/>
+              </a:rPr>
+              <a:t>public 200 · guardrail</a:t>
+            </a:r>
+          </a:p>
+        </p:txBody>
+      </p:sp>
+      <p:sp>
+        <p:nvSpPr>
+          <p:cNvPr id="61" name="Rounded Rectangle 60"/>
+          <p:cNvSpPr/>
+          <p:nvPr/>
+        </p:nvSpPr>
+        <p:spPr>
+          <a:xfrm>
+            <a:off x="320040" y="6217920"/>
+            <a:ext cx="11567160" cy="292608"/>
+          </a:xfrm>
+          <a:prstGeom prst="roundRect">
+            <a:avLst>
+              <a:gd name="adj" fmla="val 15000"/>
+            </a:avLst>
+          </a:prstGeom>
+          <a:solidFill>
+            <a:srgbClr val="1A263C"/>
+          </a:solidFill>
+          <a:ln w="15875">
+            <a:solidFill>
+              <a:srgbClr val="00D4FF"/>
+            </a:solidFill>
+          </a:ln>
+        </p:spPr>
+        <p:style>
+          <a:lnRef idx="1">
+            <a:schemeClr val="accent1"/>
+          </a:lnRef>
+          <a:fillRef idx="3">
+            <a:schemeClr val="accent1"/>
+          </a:fillRef>
+          <a:effectRef idx="2">
+            <a:schemeClr val="accent1"/>
+          </a:effectRef>
+          <a:fontRef idx="minor">
+            <a:schemeClr val="lt1"/>
+          </a:fontRef>
+        </p:style>
+        <p:txBody>
+          <a:bodyPr rtlCol="0" anchor="ctr"/>
+          <a:lstStyle/>
+          <a:p>
+            <a:pPr algn="ctr"/>
+          </a:p>
+        </p:txBody>
+      </p:sp>
+      <p:sp>
+        <p:nvSpPr>
+          <p:cNvPr id="62" name="TextBox 61"/>
+          <p:cNvSpPr txBox="1"/>
+          <p:nvPr/>
+        </p:nvSpPr>
+        <p:spPr>
+          <a:xfrm>
+            <a:off x="320040" y="6236208"/>
+            <a:ext cx="11567160" cy="256032"/>
+          </a:xfrm>
+          <a:prstGeom prst="rect">
+            <a:avLst/>
+          </a:prstGeom>
+          <a:noFill/>
+        </p:spPr>
+        <p:txBody>
+          <a:bodyPr wrap="square" anchor="t"/>
+          <a:lstStyle/>
+          <a:p>
+            <a:pPr algn="ctr">
+              <a:spcBef>
+                <a:spcPts val="0"/>
+              </a:spcBef>
+              <a:spcAft>
+                <a:spcPts val="400"/>
+              </a:spcAft>
+            </a:pPr>
+            <a:r>
+              <a:rPr sz="1100" b="1">
+                <a:solidFill>
+                  <a:srgbClr val="00D4FF"/>
+                </a:solidFill>
+                <a:latin typeface="Calibri"/>
+              </a:rPr>
+              <a:t>next turn ↺  same session_id   ·   state write/read   ·   catalog index read-only   ·   LLM off score path</a:t>
+            </a:r>
+          </a:p>
+        </p:txBody>
+      </p:sp>
+      <p:sp>
+        <p:nvSpPr>
+          <p:cNvPr id="63" name="Rectangle 62"/>
           <p:cNvSpPr/>
           <p:nvPr/>
         </p:nvSpPr>
@@ -12220,7 +16646,7 @@
       </p:sp>
       <p:sp>
         <p:nvSpPr>
-          <p:cNvPr id="8" name="TextBox 7"/>
+          <p:cNvPr id="64" name="TextBox 63"/>
           <p:cNvSpPr txBox="1"/>
           <p:nvPr/>
         </p:nvSpPr>
@@ -12260,7 +16686,7 @@
       </p:sp>
       <p:sp>
         <p:nvSpPr>
-          <p:cNvPr id="9" name="TextBox 8"/>
+          <p:cNvPr id="65" name="TextBox 64"/>
           <p:cNvSpPr txBox="1"/>
           <p:nvPr/>
         </p:nvSpPr>
